--- a/protected-downloads/praesentation/M05.pptx
+++ b/protected-downloads/praesentation/M05.pptx
@@ -8,12 +8,13 @@
     <p:sldId id="256" r:id="rId7"/>
     <p:sldId id="257" r:id="rId8"/>
     <p:sldId id="258" r:id="rId9"/>
-    <p:sldId id="259" r:id="rId10"/>
-    <p:sldId id="260" r:id="rId11"/>
-    <p:sldId id="261" r:id="rId12"/>
-    <p:sldId id="262" r:id="rId13"/>
-    <p:sldId id="263" r:id="rId14"/>
-    <p:sldId id="264" r:id="rId15"/>
+    <p:sldId id="259" r:id="rId11"/>
+    <p:sldId id="260" r:id="rId12"/>
+    <p:sldId id="261" r:id="rId13"/>
+    <p:sldId id="262" r:id="rId14"/>
+    <p:sldId id="263" r:id="rId15"/>
+    <p:sldId id="264" r:id="rId16"/>
+    <p:sldId id="265" r:id="rId17"/>
   </p:sldIdLst>
   <p:sldSz cx="12188952" cy="6858000" type="screen4x3"/>
   <p:notesSz cx="6858000" cy="9144000"/>
@@ -113,6 +114,776 @@
     </a:lvl9pPr>
   </p:defaultTextStyle>
 </p:presentation>
+</file>
+
+<file path=ppt/notesMasters/notesMaster1.xml><?xml version="1.0" encoding="utf-8"?>
+<p:notesMaster xmlns:a="http://schemas.openxmlformats.org/drawingml/2006/main" xmlns:p="http://schemas.openxmlformats.org/presentationml/2006/main" xmlns:r="http://schemas.openxmlformats.org/officeDocument/2006/relationships">
+  <p:cSld>
+    <p:bg>
+      <p:bgRef idx="1001">
+        <a:schemeClr val="bg1"/>
+      </p:bgRef>
+    </p:bg>
+    <p:spTree>
+      <p:nvGrpSpPr>
+        <p:cNvPr id="1" name=""/>
+        <p:cNvGrpSpPr/>
+        <p:nvPr/>
+      </p:nvGrpSpPr>
+      <p:grpSpPr>
+        <a:xfrm>
+          <a:off x="0" y="0"/>
+          <a:ext cx="0" cy="0"/>
+          <a:chOff x="0" y="0"/>
+          <a:chExt cx="0" cy="0"/>
+        </a:xfrm>
+      </p:grpSpPr>
+      <p:sp>
+        <p:nvSpPr>
+          <p:cNvPr id="2" name="Header Placeholder 1"/>
+          <p:cNvSpPr>
+            <a:spLocks noGrp="1"/>
+          </p:cNvSpPr>
+          <p:nvPr>
+            <p:ph type="hdr" sz="quarter"/>
+          </p:nvPr>
+        </p:nvSpPr>
+        <p:spPr>
+          <a:xfrm>
+            <a:off x="0" y="0"/>
+            <a:ext cx="2971800" cy="457200"/>
+          </a:xfrm>
+          <a:prstGeom prst="rect">
+            <a:avLst/>
+          </a:prstGeom>
+        </p:spPr>
+        <p:txBody>
+          <a:bodyPr vert="horz" lIns="91440" tIns="45720" rIns="91440" bIns="45720" rtlCol="0"/>
+          <a:lstStyle>
+            <a:lvl1pPr algn="l">
+              <a:defRPr sz="1200"/>
+            </a:lvl1pPr>
+          </a:lstStyle>
+          <a:p>
+            <a:endParaRPr lang="en-US"/>
+          </a:p>
+        </p:txBody>
+      </p:sp>
+      <p:sp>
+        <p:nvSpPr>
+          <p:cNvPr id="3" name="Date Placeholder 2"/>
+          <p:cNvSpPr>
+            <a:spLocks noGrp="1"/>
+          </p:cNvSpPr>
+          <p:nvPr>
+            <p:ph type="dt" idx="1"/>
+          </p:nvPr>
+        </p:nvSpPr>
+        <p:spPr>
+          <a:xfrm>
+            <a:off x="3884613" y="0"/>
+            <a:ext cx="2971800" cy="457200"/>
+          </a:xfrm>
+          <a:prstGeom prst="rect">
+            <a:avLst/>
+          </a:prstGeom>
+        </p:spPr>
+        <p:txBody>
+          <a:bodyPr vert="horz" lIns="91440" tIns="45720" rIns="91440" bIns="45720" rtlCol="0"/>
+          <a:lstStyle>
+            <a:lvl1pPr algn="r">
+              <a:defRPr sz="1200"/>
+            </a:lvl1pPr>
+          </a:lstStyle>
+          <a:p>
+            <a:fld id="{0F89C1C7-3DCD-1040-A9CF-14679D8B5DDD}" type="datetimeFigureOut">
+              <a:rPr lang="en-US" smtClean="0"/>
+              <a:t>10/17/16</a:t>
+            </a:fld>
+            <a:endParaRPr lang="en-US"/>
+          </a:p>
+        </p:txBody>
+      </p:sp>
+      <p:sp>
+        <p:nvSpPr>
+          <p:cNvPr id="4" name="Slide Image Placeholder 3"/>
+          <p:cNvSpPr>
+            <a:spLocks noGrp="1" noRot="1" noChangeAspect="1"/>
+          </p:cNvSpPr>
+          <p:nvPr>
+            <p:ph type="sldImg" idx="2"/>
+          </p:nvPr>
+        </p:nvSpPr>
+        <p:spPr>
+          <a:xfrm>
+            <a:off x="1143000" y="685800"/>
+            <a:ext cx="4572000" cy="3429000"/>
+          </a:xfrm>
+          <a:prstGeom prst="rect">
+            <a:avLst/>
+          </a:prstGeom>
+          <a:noFill/>
+          <a:ln w="12700">
+            <a:solidFill>
+              <a:prstClr val="black"/>
+            </a:solidFill>
+          </a:ln>
+        </p:spPr>
+        <p:txBody>
+          <a:bodyPr vert="horz" lIns="91440" tIns="45720" rIns="91440" bIns="45720" rtlCol="0" anchor="ctr"/>
+          <a:lstStyle/>
+          <a:p>
+            <a:endParaRPr lang="en-US"/>
+          </a:p>
+        </p:txBody>
+      </p:sp>
+      <p:sp>
+        <p:nvSpPr>
+          <p:cNvPr id="5" name="Notes Placeholder 4"/>
+          <p:cNvSpPr>
+            <a:spLocks noGrp="1"/>
+          </p:cNvSpPr>
+          <p:nvPr>
+            <p:ph type="body" sz="quarter" idx="3"/>
+          </p:nvPr>
+        </p:nvSpPr>
+        <p:spPr>
+          <a:xfrm>
+            <a:off x="685800" y="4343400"/>
+            <a:ext cx="5486400" cy="4114800"/>
+          </a:xfrm>
+          <a:prstGeom prst="rect">
+            <a:avLst/>
+          </a:prstGeom>
+        </p:spPr>
+        <p:txBody>
+          <a:bodyPr vert="horz" lIns="91440" tIns="45720" rIns="91440" bIns="45720" rtlCol="0"/>
+          <a:lstStyle/>
+          <a:p>
+            <a:pPr lvl="0"/>
+            <a:r>
+              <a:rPr lang="en-US" smtClean="0"/>
+              <a:t>Click to edit Master text styles</a:t>
+            </a:r>
+          </a:p>
+          <a:p>
+            <a:pPr lvl="1"/>
+            <a:r>
+              <a:rPr lang="en-US" smtClean="0"/>
+              <a:t>Second level</a:t>
+            </a:r>
+          </a:p>
+          <a:p>
+            <a:pPr lvl="2"/>
+            <a:r>
+              <a:rPr lang="en-US" smtClean="0"/>
+              <a:t>Third level</a:t>
+            </a:r>
+          </a:p>
+          <a:p>
+            <a:pPr lvl="3"/>
+            <a:r>
+              <a:rPr lang="en-US" smtClean="0"/>
+              <a:t>Fourth level</a:t>
+            </a:r>
+          </a:p>
+          <a:p>
+            <a:pPr lvl="4"/>
+            <a:r>
+              <a:rPr lang="en-US" smtClean="0"/>
+              <a:t>Fifth level</a:t>
+            </a:r>
+            <a:endParaRPr lang="en-US"/>
+          </a:p>
+        </p:txBody>
+      </p:sp>
+      <p:sp>
+        <p:nvSpPr>
+          <p:cNvPr id="6" name="Footer Placeholder 5"/>
+          <p:cNvSpPr>
+            <a:spLocks noGrp="1"/>
+          </p:cNvSpPr>
+          <p:nvPr>
+            <p:ph type="ftr" sz="quarter" idx="4"/>
+          </p:nvPr>
+        </p:nvSpPr>
+        <p:spPr>
+          <a:xfrm>
+            <a:off x="0" y="8685213"/>
+            <a:ext cx="2971800" cy="457200"/>
+          </a:xfrm>
+          <a:prstGeom prst="rect">
+            <a:avLst/>
+          </a:prstGeom>
+        </p:spPr>
+        <p:txBody>
+          <a:bodyPr vert="horz" lIns="91440" tIns="45720" rIns="91440" bIns="45720" rtlCol="0" anchor="b"/>
+          <a:lstStyle>
+            <a:lvl1pPr algn="l">
+              <a:defRPr sz="1200"/>
+            </a:lvl1pPr>
+          </a:lstStyle>
+          <a:p>
+            <a:endParaRPr lang="en-US"/>
+          </a:p>
+        </p:txBody>
+      </p:sp>
+      <p:sp>
+        <p:nvSpPr>
+          <p:cNvPr id="7" name="Slide Number Placeholder 6"/>
+          <p:cNvSpPr>
+            <a:spLocks noGrp="1"/>
+          </p:cNvSpPr>
+          <p:nvPr>
+            <p:ph type="sldNum" sz="quarter" idx="5"/>
+          </p:nvPr>
+        </p:nvSpPr>
+        <p:spPr>
+          <a:xfrm>
+            <a:off x="3884613" y="8685213"/>
+            <a:ext cx="2971800" cy="457200"/>
+          </a:xfrm>
+          <a:prstGeom prst="rect">
+            <a:avLst/>
+          </a:prstGeom>
+        </p:spPr>
+        <p:txBody>
+          <a:bodyPr vert="horz" lIns="91440" tIns="45720" rIns="91440" bIns="45720" rtlCol="0" anchor="b"/>
+          <a:lstStyle>
+            <a:lvl1pPr algn="r">
+              <a:defRPr sz="1200"/>
+            </a:lvl1pPr>
+          </a:lstStyle>
+          <a:p>
+            <a:fld id="{BB5E49A5-4136-284D-997B-48E1D791AD67}" type="slidenum">
+              <a:rPr lang="en-US" smtClean="0"/>
+              <a:t>‹#›</a:t>
+            </a:fld>
+            <a:endParaRPr lang="en-US"/>
+          </a:p>
+        </p:txBody>
+      </p:sp>
+    </p:spTree>
+    <p:extLst>
+      <p:ext uri="{BB962C8B-B14F-4D97-AF65-F5344CB8AC3E}">
+        <p14:creationId xmlns:p14="http://schemas.microsoft.com/office/powerpoint/2010/main" val="2623252185"/>
+      </p:ext>
+    </p:extLst>
+  </p:cSld>
+  <p:clrMap bg1="lt1" tx1="dk1" bg2="lt2" tx2="dk2" accent1="accent1" accent2="accent2" accent3="accent3" accent4="accent4" accent5="accent5" accent6="accent6" hlink="hlink" folHlink="folHlink"/>
+  <p:notesStyle>
+    <a:lvl1pPr marL="0" algn="l" defTabSz="457200" rtl="0" eaLnBrk="1" latinLnBrk="0" hangingPunct="1">
+      <a:defRPr sz="1200" kern="1200">
+        <a:solidFill>
+          <a:schemeClr val="tx1"/>
+        </a:solidFill>
+        <a:latin typeface="+mn-lt"/>
+        <a:ea typeface="+mn-ea"/>
+        <a:cs typeface="+mn-cs"/>
+      </a:defRPr>
+    </a:lvl1pPr>
+    <a:lvl2pPr marL="457200" algn="l" defTabSz="457200" rtl="0" eaLnBrk="1" latinLnBrk="0" hangingPunct="1">
+      <a:defRPr sz="1200" kern="1200">
+        <a:solidFill>
+          <a:schemeClr val="tx1"/>
+        </a:solidFill>
+        <a:latin typeface="+mn-lt"/>
+        <a:ea typeface="+mn-ea"/>
+        <a:cs typeface="+mn-cs"/>
+      </a:defRPr>
+    </a:lvl2pPr>
+    <a:lvl3pPr marL="914400" algn="l" defTabSz="457200" rtl="0" eaLnBrk="1" latinLnBrk="0" hangingPunct="1">
+      <a:defRPr sz="1200" kern="1200">
+        <a:solidFill>
+          <a:schemeClr val="tx1"/>
+        </a:solidFill>
+        <a:latin typeface="+mn-lt"/>
+        <a:ea typeface="+mn-ea"/>
+        <a:cs typeface="+mn-cs"/>
+      </a:defRPr>
+    </a:lvl3pPr>
+    <a:lvl4pPr marL="1371600" algn="l" defTabSz="457200" rtl="0" eaLnBrk="1" latinLnBrk="0" hangingPunct="1">
+      <a:defRPr sz="1200" kern="1200">
+        <a:solidFill>
+          <a:schemeClr val="tx1"/>
+        </a:solidFill>
+        <a:latin typeface="+mn-lt"/>
+        <a:ea typeface="+mn-ea"/>
+        <a:cs typeface="+mn-cs"/>
+      </a:defRPr>
+    </a:lvl4pPr>
+    <a:lvl5pPr marL="1828800" algn="l" defTabSz="457200" rtl="0" eaLnBrk="1" latinLnBrk="0" hangingPunct="1">
+      <a:defRPr sz="1200" kern="1200">
+        <a:solidFill>
+          <a:schemeClr val="tx1"/>
+        </a:solidFill>
+        <a:latin typeface="+mn-lt"/>
+        <a:ea typeface="+mn-ea"/>
+        <a:cs typeface="+mn-cs"/>
+      </a:defRPr>
+    </a:lvl5pPr>
+    <a:lvl6pPr marL="2286000" algn="l" defTabSz="457200" rtl="0" eaLnBrk="1" latinLnBrk="0" hangingPunct="1">
+      <a:defRPr sz="1200" kern="1200">
+        <a:solidFill>
+          <a:schemeClr val="tx1"/>
+        </a:solidFill>
+        <a:latin typeface="+mn-lt"/>
+        <a:ea typeface="+mn-ea"/>
+        <a:cs typeface="+mn-cs"/>
+      </a:defRPr>
+    </a:lvl6pPr>
+    <a:lvl7pPr marL="2743200" algn="l" defTabSz="457200" rtl="0" eaLnBrk="1" latinLnBrk="0" hangingPunct="1">
+      <a:defRPr sz="1200" kern="1200">
+        <a:solidFill>
+          <a:schemeClr val="tx1"/>
+        </a:solidFill>
+        <a:latin typeface="+mn-lt"/>
+        <a:ea typeface="+mn-ea"/>
+        <a:cs typeface="+mn-cs"/>
+      </a:defRPr>
+    </a:lvl7pPr>
+    <a:lvl8pPr marL="3200400" algn="l" defTabSz="457200" rtl="0" eaLnBrk="1" latinLnBrk="0" hangingPunct="1">
+      <a:defRPr sz="1200" kern="1200">
+        <a:solidFill>
+          <a:schemeClr val="tx1"/>
+        </a:solidFill>
+        <a:latin typeface="+mn-lt"/>
+        <a:ea typeface="+mn-ea"/>
+        <a:cs typeface="+mn-cs"/>
+      </a:defRPr>
+    </a:lvl8pPr>
+    <a:lvl9pPr marL="3657600" algn="l" defTabSz="457200" rtl="0" eaLnBrk="1" latinLnBrk="0" hangingPunct="1">
+      <a:defRPr sz="1200" kern="1200">
+        <a:solidFill>
+          <a:schemeClr val="tx1"/>
+        </a:solidFill>
+        <a:latin typeface="+mn-lt"/>
+        <a:ea typeface="+mn-ea"/>
+        <a:cs typeface="+mn-cs"/>
+      </a:defRPr>
+    </a:lvl9pPr>
+  </p:notesStyle>
+</p:notesMaster>
+</file>
+
+<file path=ppt/notesSlides/notesSlide1.xml><?xml version="1.0" encoding="utf-8"?>
+<p:notes xmlns:a="http://schemas.openxmlformats.org/drawingml/2006/main" xmlns:p="http://schemas.openxmlformats.org/presentationml/2006/main" xmlns:r="http://schemas.openxmlformats.org/officeDocument/2006/relationships">
+  <p:cSld>
+    <p:spTree>
+      <p:nvGrpSpPr>
+        <p:cNvPr id="1" name=""/>
+        <p:cNvGrpSpPr/>
+        <p:nvPr/>
+      </p:nvGrpSpPr>
+      <p:grpSpPr>
+        <a:xfrm>
+          <a:off x="0" y="0"/>
+          <a:ext cx="0" cy="0"/>
+          <a:chOff x="0" y="0"/>
+          <a:chExt cx="0" cy="0"/>
+        </a:xfrm>
+      </p:grpSpPr>
+      <p:sp>
+        <p:nvSpPr>
+          <p:cNvPr id="2" name="Slide Image Placeholder 1"/>
+          <p:cNvSpPr>
+            <a:spLocks noGrp="1"/>
+          </p:cNvSpPr>
+          <p:nvPr>
+            <p:ph type="sldImg" idx="2"/>
+          </p:nvPr>
+        </p:nvSpPr>
+        <p:spPr/>
+      </p:sp>
+      <p:sp>
+        <p:nvSpPr>
+          <p:cNvPr id="3" name="Notes Placeholder 2"/>
+          <p:cNvSpPr>
+            <a:spLocks noGrp="1"/>
+          </p:cNvSpPr>
+          <p:nvPr>
+            <p:ph type="body" idx="3" sz="quarter"/>
+          </p:nvPr>
+        </p:nvSpPr>
+        <p:spPr/>
+        <p:txBody>
+          <a:bodyPr/>
+          <a:lstStyle/>
+          <a:p>
+            <a:r>
+              <a:t>Agenda-Überblick. Timing und Pausen siehe Ablaufplan im Trainerhandbuch (Sektion 3).</a:t>
+            </a:r>
+          </a:p>
+        </p:txBody>
+      </p:sp>
+      <p:sp>
+        <p:nvSpPr>
+          <p:cNvPr id="4" name="Slide Number Placeholder 3"/>
+          <p:cNvSpPr>
+            <a:spLocks noGrp="1"/>
+          </p:cNvSpPr>
+          <p:nvPr>
+            <p:ph type="sldNum" idx="5" sz="quarter"/>
+          </p:nvPr>
+        </p:nvSpPr>
+        <p:spPr/>
+      </p:sp>
+    </p:spTree>
+  </p:cSld>
+  <p:clrMapOvr>
+    <a:masterClrMapping/>
+  </p:clrMapOvr>
+</p:notes>
+</file>
+
+<file path=ppt/notesSlides/notesSlide2.xml><?xml version="1.0" encoding="utf-8"?>
+<p:notes xmlns:a="http://schemas.openxmlformats.org/drawingml/2006/main" xmlns:p="http://schemas.openxmlformats.org/presentationml/2006/main" xmlns:r="http://schemas.openxmlformats.org/officeDocument/2006/relationships">
+  <p:cSld>
+    <p:spTree>
+      <p:nvGrpSpPr>
+        <p:cNvPr id="1" name=""/>
+        <p:cNvGrpSpPr/>
+        <p:nvPr/>
+      </p:nvGrpSpPr>
+      <p:grpSpPr>
+        <a:xfrm>
+          <a:off x="0" y="0"/>
+          <a:ext cx="0" cy="0"/>
+          <a:chOff x="0" y="0"/>
+          <a:chExt cx="0" cy="0"/>
+        </a:xfrm>
+      </p:grpSpPr>
+      <p:sp>
+        <p:nvSpPr>
+          <p:cNvPr id="2" name="Slide Image Placeholder 1"/>
+          <p:cNvSpPr>
+            <a:spLocks noGrp="1"/>
+          </p:cNvSpPr>
+          <p:nvPr>
+            <p:ph type="sldImg" idx="2"/>
+          </p:nvPr>
+        </p:nvSpPr>
+        <p:spPr/>
+      </p:sp>
+      <p:sp>
+        <p:nvSpPr>
+          <p:cNvPr id="3" name="Notes Placeholder 2"/>
+          <p:cNvSpPr>
+            <a:spLocks noGrp="1"/>
+          </p:cNvSpPr>
+          <p:nvPr>
+            <p:ph type="body" idx="3" sz="quarter"/>
+          </p:nvPr>
+        </p:nvSpPr>
+        <p:spPr/>
+        <p:txBody>
+          <a:bodyPr/>
+          <a:lstStyle/>
+          <a:p>
+            <a:r>
+              <a:t>Siehe Trainerhandbuch (Sektion 3) für Moderationshinweise, Timing und erwartete Teilnehmerreaktionen.</a:t>
+            </a:r>
+          </a:p>
+        </p:txBody>
+      </p:sp>
+      <p:sp>
+        <p:nvSpPr>
+          <p:cNvPr id="4" name="Slide Number Placeholder 3"/>
+          <p:cNvSpPr>
+            <a:spLocks noGrp="1"/>
+          </p:cNvSpPr>
+          <p:nvPr>
+            <p:ph type="sldNum" idx="5" sz="quarter"/>
+          </p:nvPr>
+        </p:nvSpPr>
+        <p:spPr/>
+      </p:sp>
+    </p:spTree>
+  </p:cSld>
+  <p:clrMapOvr>
+    <a:masterClrMapping/>
+  </p:clrMapOvr>
+</p:notes>
+</file>
+
+<file path=ppt/notesSlides/notesSlide3.xml><?xml version="1.0" encoding="utf-8"?>
+<p:notes xmlns:a="http://schemas.openxmlformats.org/drawingml/2006/main" xmlns:p="http://schemas.openxmlformats.org/presentationml/2006/main" xmlns:r="http://schemas.openxmlformats.org/officeDocument/2006/relationships">
+  <p:cSld>
+    <p:spTree>
+      <p:nvGrpSpPr>
+        <p:cNvPr id="1" name=""/>
+        <p:cNvGrpSpPr/>
+        <p:nvPr/>
+      </p:nvGrpSpPr>
+      <p:grpSpPr>
+        <a:xfrm>
+          <a:off x="0" y="0"/>
+          <a:ext cx="0" cy="0"/>
+          <a:chOff x="0" y="0"/>
+          <a:chExt cx="0" cy="0"/>
+        </a:xfrm>
+      </p:grpSpPr>
+      <p:sp>
+        <p:nvSpPr>
+          <p:cNvPr id="2" name="Slide Image Placeholder 1"/>
+          <p:cNvSpPr>
+            <a:spLocks noGrp="1"/>
+          </p:cNvSpPr>
+          <p:nvPr>
+            <p:ph type="sldImg" idx="2"/>
+          </p:nvPr>
+        </p:nvSpPr>
+        <p:spPr/>
+      </p:sp>
+      <p:sp>
+        <p:nvSpPr>
+          <p:cNvPr id="3" name="Notes Placeholder 2"/>
+          <p:cNvSpPr>
+            <a:spLocks noGrp="1"/>
+          </p:cNvSpPr>
+          <p:nvPr>
+            <p:ph type="body" idx="3" sz="quarter"/>
+          </p:nvPr>
+        </p:nvSpPr>
+        <p:spPr/>
+        <p:txBody>
+          <a:bodyPr/>
+          <a:lstStyle/>
+          <a:p>
+            <a:r>
+              <a:t>Siehe Trainerhandbuch (Sektion 3) für Moderationshinweise, Timing und erwartete Teilnehmerreaktionen.</a:t>
+            </a:r>
+          </a:p>
+        </p:txBody>
+      </p:sp>
+      <p:sp>
+        <p:nvSpPr>
+          <p:cNvPr id="4" name="Slide Number Placeholder 3"/>
+          <p:cNvSpPr>
+            <a:spLocks noGrp="1"/>
+          </p:cNvSpPr>
+          <p:nvPr>
+            <p:ph type="sldNum" idx="5" sz="quarter"/>
+          </p:nvPr>
+        </p:nvSpPr>
+        <p:spPr/>
+      </p:sp>
+    </p:spTree>
+  </p:cSld>
+  <p:clrMapOvr>
+    <a:masterClrMapping/>
+  </p:clrMapOvr>
+</p:notes>
+</file>
+
+<file path=ppt/notesSlides/notesSlide4.xml><?xml version="1.0" encoding="utf-8"?>
+<p:notes xmlns:a="http://schemas.openxmlformats.org/drawingml/2006/main" xmlns:p="http://schemas.openxmlformats.org/presentationml/2006/main" xmlns:r="http://schemas.openxmlformats.org/officeDocument/2006/relationships">
+  <p:cSld>
+    <p:spTree>
+      <p:nvGrpSpPr>
+        <p:cNvPr id="1" name=""/>
+        <p:cNvGrpSpPr/>
+        <p:nvPr/>
+      </p:nvGrpSpPr>
+      <p:grpSpPr>
+        <a:xfrm>
+          <a:off x="0" y="0"/>
+          <a:ext cx="0" cy="0"/>
+          <a:chOff x="0" y="0"/>
+          <a:chExt cx="0" cy="0"/>
+        </a:xfrm>
+      </p:grpSpPr>
+      <p:sp>
+        <p:nvSpPr>
+          <p:cNvPr id="2" name="Slide Image Placeholder 1"/>
+          <p:cNvSpPr>
+            <a:spLocks noGrp="1"/>
+          </p:cNvSpPr>
+          <p:nvPr>
+            <p:ph type="sldImg" idx="2"/>
+          </p:nvPr>
+        </p:nvSpPr>
+        <p:spPr/>
+      </p:sp>
+      <p:sp>
+        <p:nvSpPr>
+          <p:cNvPr id="3" name="Notes Placeholder 2"/>
+          <p:cNvSpPr>
+            <a:spLocks noGrp="1"/>
+          </p:cNvSpPr>
+          <p:nvPr>
+            <p:ph type="body" idx="3" sz="quarter"/>
+          </p:nvPr>
+        </p:nvSpPr>
+        <p:spPr/>
+        <p:txBody>
+          <a:bodyPr/>
+          <a:lstStyle/>
+          <a:p>
+            <a:r>
+              <a:t>Siehe Trainerhandbuch (Sektion 3) für Moderationshinweise, Timing und erwartete Teilnehmerreaktionen.</a:t>
+            </a:r>
+          </a:p>
+        </p:txBody>
+      </p:sp>
+      <p:sp>
+        <p:nvSpPr>
+          <p:cNvPr id="4" name="Slide Number Placeholder 3"/>
+          <p:cNvSpPr>
+            <a:spLocks noGrp="1"/>
+          </p:cNvSpPr>
+          <p:nvPr>
+            <p:ph type="sldNum" idx="5" sz="quarter"/>
+          </p:nvPr>
+        </p:nvSpPr>
+        <p:spPr/>
+      </p:sp>
+    </p:spTree>
+  </p:cSld>
+  <p:clrMapOvr>
+    <a:masterClrMapping/>
+  </p:clrMapOvr>
+</p:notes>
+</file>
+
+<file path=ppt/notesSlides/notesSlide5.xml><?xml version="1.0" encoding="utf-8"?>
+<p:notes xmlns:a="http://schemas.openxmlformats.org/drawingml/2006/main" xmlns:p="http://schemas.openxmlformats.org/presentationml/2006/main" xmlns:r="http://schemas.openxmlformats.org/officeDocument/2006/relationships">
+  <p:cSld>
+    <p:spTree>
+      <p:nvGrpSpPr>
+        <p:cNvPr id="1" name=""/>
+        <p:cNvGrpSpPr/>
+        <p:nvPr/>
+      </p:nvGrpSpPr>
+      <p:grpSpPr>
+        <a:xfrm>
+          <a:off x="0" y="0"/>
+          <a:ext cx="0" cy="0"/>
+          <a:chOff x="0" y="0"/>
+          <a:chExt cx="0" cy="0"/>
+        </a:xfrm>
+      </p:grpSpPr>
+      <p:sp>
+        <p:nvSpPr>
+          <p:cNvPr id="2" name="Slide Image Placeholder 1"/>
+          <p:cNvSpPr>
+            <a:spLocks noGrp="1"/>
+          </p:cNvSpPr>
+          <p:nvPr>
+            <p:ph type="sldImg" idx="2"/>
+          </p:nvPr>
+        </p:nvSpPr>
+        <p:spPr/>
+      </p:sp>
+      <p:sp>
+        <p:nvSpPr>
+          <p:cNvPr id="3" name="Notes Placeholder 2"/>
+          <p:cNvSpPr>
+            <a:spLocks noGrp="1"/>
+          </p:cNvSpPr>
+          <p:nvPr>
+            <p:ph type="body" idx="3" sz="quarter"/>
+          </p:nvPr>
+        </p:nvSpPr>
+        <p:spPr/>
+        <p:txBody>
+          <a:bodyPr/>
+          <a:lstStyle/>
+          <a:p>
+            <a:r>
+              <a:t>Siehe Trainerhandbuch (Sektion 3) für Moderationshinweise, Timing und erwartete Teilnehmerreaktionen.</a:t>
+            </a:r>
+          </a:p>
+        </p:txBody>
+      </p:sp>
+      <p:sp>
+        <p:nvSpPr>
+          <p:cNvPr id="4" name="Slide Number Placeholder 3"/>
+          <p:cNvSpPr>
+            <a:spLocks noGrp="1"/>
+          </p:cNvSpPr>
+          <p:nvPr>
+            <p:ph type="sldNum" idx="5" sz="quarter"/>
+          </p:nvPr>
+        </p:nvSpPr>
+        <p:spPr/>
+      </p:sp>
+    </p:spTree>
+  </p:cSld>
+  <p:clrMapOvr>
+    <a:masterClrMapping/>
+  </p:clrMapOvr>
+</p:notes>
+</file>
+
+<file path=ppt/notesSlides/notesSlide6.xml><?xml version="1.0" encoding="utf-8"?>
+<p:notes xmlns:a="http://schemas.openxmlformats.org/drawingml/2006/main" xmlns:p="http://schemas.openxmlformats.org/presentationml/2006/main" xmlns:r="http://schemas.openxmlformats.org/officeDocument/2006/relationships">
+  <p:cSld>
+    <p:spTree>
+      <p:nvGrpSpPr>
+        <p:cNvPr id="1" name=""/>
+        <p:cNvGrpSpPr/>
+        <p:nvPr/>
+      </p:nvGrpSpPr>
+      <p:grpSpPr>
+        <a:xfrm>
+          <a:off x="0" y="0"/>
+          <a:ext cx="0" cy="0"/>
+          <a:chOff x="0" y="0"/>
+          <a:chExt cx="0" cy="0"/>
+        </a:xfrm>
+      </p:grpSpPr>
+      <p:sp>
+        <p:nvSpPr>
+          <p:cNvPr id="2" name="Slide Image Placeholder 1"/>
+          <p:cNvSpPr>
+            <a:spLocks noGrp="1"/>
+          </p:cNvSpPr>
+          <p:nvPr>
+            <p:ph type="sldImg" idx="2"/>
+          </p:nvPr>
+        </p:nvSpPr>
+        <p:spPr/>
+      </p:sp>
+      <p:sp>
+        <p:nvSpPr>
+          <p:cNvPr id="3" name="Notes Placeholder 2"/>
+          <p:cNvSpPr>
+            <a:spLocks noGrp="1"/>
+          </p:cNvSpPr>
+          <p:nvPr>
+            <p:ph type="body" idx="3" sz="quarter"/>
+          </p:nvPr>
+        </p:nvSpPr>
+        <p:spPr/>
+        <p:txBody>
+          <a:bodyPr/>
+          <a:lstStyle/>
+          <a:p>
+            <a:r>
+              <a:t>Siehe Trainerhandbuch (Sektion 3) für Moderationshinweise, Timing und erwartete Teilnehmerreaktionen.</a:t>
+            </a:r>
+          </a:p>
+        </p:txBody>
+      </p:sp>
+      <p:sp>
+        <p:nvSpPr>
+          <p:cNvPr id="4" name="Slide Number Placeholder 3"/>
+          <p:cNvSpPr>
+            <a:spLocks noGrp="1"/>
+          </p:cNvSpPr>
+          <p:nvPr>
+            <p:ph type="sldNum" idx="5" sz="quarter"/>
+          </p:nvPr>
+        </p:nvSpPr>
+        <p:spPr/>
+      </p:sp>
+    </p:spTree>
+  </p:cSld>
+  <p:clrMapOvr>
+    <a:masterClrMapping/>
+  </p:clrMapOvr>
+</p:notes>
 </file>
 
 <file path=ppt/slideLayouts/slideLayout1.xml><?xml version="1.0" encoding="utf-8"?>
@@ -3486,6 +4257,595 @@
 </p:sld>
 </file>
 
+<file path=ppt/slides/slide10.xml><?xml version="1.0" encoding="utf-8"?>
+<p:sld xmlns:a="http://schemas.openxmlformats.org/drawingml/2006/main" xmlns:p="http://schemas.openxmlformats.org/presentationml/2006/main" xmlns:r="http://schemas.openxmlformats.org/officeDocument/2006/relationships">
+  <p:cSld>
+    <p:spTree>
+      <p:nvGrpSpPr>
+        <p:cNvPr id="1" name=""/>
+        <p:cNvGrpSpPr/>
+        <p:nvPr/>
+      </p:nvGrpSpPr>
+      <p:grpSpPr/>
+      <p:sp>
+        <p:nvSpPr>
+          <p:cNvPr id="2" name="Rectangle 1"/>
+          <p:cNvSpPr/>
+          <p:nvPr/>
+        </p:nvSpPr>
+        <p:spPr>
+          <a:xfrm>
+            <a:off x="0" y="0"/>
+            <a:ext cx="12188952" cy="6858000"/>
+          </a:xfrm>
+          <a:prstGeom prst="rect">
+            <a:avLst/>
+          </a:prstGeom>
+          <a:solidFill>
+            <a:srgbClr val="EDEDF3"/>
+          </a:solidFill>
+          <a:ln>
+            <a:noFill/>
+          </a:ln>
+        </p:spPr>
+        <p:style>
+          <a:lnRef idx="1">
+            <a:schemeClr val="accent1"/>
+          </a:lnRef>
+          <a:fillRef idx="3">
+            <a:schemeClr val="accent1"/>
+          </a:fillRef>
+          <a:effectRef idx="2">
+            <a:schemeClr val="accent1"/>
+          </a:effectRef>
+          <a:fontRef idx="minor">
+            <a:schemeClr val="lt1"/>
+          </a:fontRef>
+        </p:style>
+        <p:txBody>
+          <a:bodyPr rtlCol="0" anchor="ctr"/>
+          <a:lstStyle/>
+          <a:p>
+            <a:pPr algn="ctr"/>
+          </a:p>
+        </p:txBody>
+      </p:sp>
+      <p:sp>
+        <p:nvSpPr>
+          <p:cNvPr id="3" name="Rectangle 2"/>
+          <p:cNvSpPr/>
+          <p:nvPr/>
+        </p:nvSpPr>
+        <p:spPr>
+          <a:xfrm>
+            <a:off x="0" y="0"/>
+            <a:ext cx="12188952" cy="50292"/>
+          </a:xfrm>
+          <a:prstGeom prst="rect">
+            <a:avLst/>
+          </a:prstGeom>
+          <a:solidFill>
+            <a:srgbClr val="1F2C56"/>
+          </a:solidFill>
+          <a:ln>
+            <a:noFill/>
+          </a:ln>
+        </p:spPr>
+        <p:style>
+          <a:lnRef idx="1">
+            <a:schemeClr val="accent1"/>
+          </a:lnRef>
+          <a:fillRef idx="3">
+            <a:schemeClr val="accent1"/>
+          </a:fillRef>
+          <a:effectRef idx="2">
+            <a:schemeClr val="accent1"/>
+          </a:effectRef>
+          <a:fontRef idx="minor">
+            <a:schemeClr val="lt1"/>
+          </a:fontRef>
+        </p:style>
+        <p:txBody>
+          <a:bodyPr rtlCol="0" anchor="ctr"/>
+          <a:lstStyle/>
+          <a:p>
+            <a:pPr algn="ctr"/>
+          </a:p>
+        </p:txBody>
+      </p:sp>
+      <p:sp>
+        <p:nvSpPr>
+          <p:cNvPr id="4" name="TextBox 3"/>
+          <p:cNvSpPr txBox="1"/>
+          <p:nvPr/>
+        </p:nvSpPr>
+        <p:spPr>
+          <a:xfrm>
+            <a:off x="685800" y="109728"/>
+            <a:ext cx="10817352" cy="228600"/>
+          </a:xfrm>
+          <a:prstGeom prst="rect">
+            <a:avLst/>
+          </a:prstGeom>
+          <a:noFill/>
+        </p:spPr>
+        <p:txBody>
+          <a:bodyPr wrap="none">
+            <a:spAutoFit/>
+          </a:bodyPr>
+          <a:lstStyle/>
+          <a:p>
+            <a:pPr algn="l"/>
+            <a:r>
+              <a:rPr sz="750">
+                <a:solidFill>
+                  <a:srgbClr val="78808C"/>
+                </a:solidFill>
+                <a:latin typeface="JetBrains Mono"/>
+              </a:rPr>
+              <a:t>M05  ·  INHALT</a:t>
+            </a:r>
+          </a:p>
+        </p:txBody>
+      </p:sp>
+      <p:sp>
+        <p:nvSpPr>
+          <p:cNvPr id="5" name="Rectangle 4"/>
+          <p:cNvSpPr/>
+          <p:nvPr/>
+        </p:nvSpPr>
+        <p:spPr>
+          <a:xfrm>
+            <a:off x="0" y="1234440"/>
+            <a:ext cx="12188952" cy="12700"/>
+          </a:xfrm>
+          <a:prstGeom prst="rect">
+            <a:avLst/>
+          </a:prstGeom>
+          <a:solidFill>
+            <a:srgbClr val="D8DFE4"/>
+          </a:solidFill>
+          <a:ln>
+            <a:noFill/>
+          </a:ln>
+        </p:spPr>
+        <p:style>
+          <a:lnRef idx="1">
+            <a:schemeClr val="accent1"/>
+          </a:lnRef>
+          <a:fillRef idx="3">
+            <a:schemeClr val="accent1"/>
+          </a:fillRef>
+          <a:effectRef idx="2">
+            <a:schemeClr val="accent1"/>
+          </a:effectRef>
+          <a:fontRef idx="minor">
+            <a:schemeClr val="lt1"/>
+          </a:fontRef>
+        </p:style>
+        <p:txBody>
+          <a:bodyPr rtlCol="0" anchor="ctr"/>
+          <a:lstStyle/>
+          <a:p>
+            <a:pPr algn="ctr"/>
+          </a:p>
+        </p:txBody>
+      </p:sp>
+      <p:sp>
+        <p:nvSpPr>
+          <p:cNvPr id="6" name="Rectangle 5"/>
+          <p:cNvSpPr/>
+          <p:nvPr/>
+        </p:nvSpPr>
+        <p:spPr>
+          <a:xfrm>
+            <a:off x="685800" y="502920"/>
+            <a:ext cx="36576" cy="658368"/>
+          </a:xfrm>
+          <a:prstGeom prst="rect">
+            <a:avLst/>
+          </a:prstGeom>
+          <a:solidFill>
+            <a:srgbClr val="D9C089"/>
+          </a:solidFill>
+          <a:ln>
+            <a:noFill/>
+          </a:ln>
+        </p:spPr>
+        <p:style>
+          <a:lnRef idx="1">
+            <a:schemeClr val="accent1"/>
+          </a:lnRef>
+          <a:fillRef idx="3">
+            <a:schemeClr val="accent1"/>
+          </a:fillRef>
+          <a:effectRef idx="2">
+            <a:schemeClr val="accent1"/>
+          </a:effectRef>
+          <a:fontRef idx="minor">
+            <a:schemeClr val="lt1"/>
+          </a:fontRef>
+        </p:style>
+        <p:txBody>
+          <a:bodyPr rtlCol="0" anchor="ctr"/>
+          <a:lstStyle/>
+          <a:p>
+            <a:pPr algn="ctr"/>
+          </a:p>
+        </p:txBody>
+      </p:sp>
+      <p:sp>
+        <p:nvSpPr>
+          <p:cNvPr id="7" name="TextBox 6"/>
+          <p:cNvSpPr txBox="1"/>
+          <p:nvPr/>
+        </p:nvSpPr>
+        <p:spPr>
+          <a:xfrm>
+            <a:off x="813816" y="502920"/>
+            <a:ext cx="10634472" cy="685800"/>
+          </a:xfrm>
+          <a:prstGeom prst="rect">
+            <a:avLst/>
+          </a:prstGeom>
+          <a:noFill/>
+        </p:spPr>
+        <p:txBody>
+          <a:bodyPr wrap="square">
+            <a:spAutoFit/>
+          </a:bodyPr>
+          <a:lstStyle/>
+          <a:p>
+            <a:pPr algn="l"/>
+            <a:r>
+              <a:rPr sz="2400" b="1" i="0">
+                <a:solidFill>
+                  <a:srgbClr val="1F2C56"/>
+                </a:solidFill>
+                <a:latin typeface="Source Serif 4"/>
+              </a:rPr>
+              <a:t>Arbeitsblatt: Branchenrisiko-Analyse-Template</a:t>
+            </a:r>
+          </a:p>
+        </p:txBody>
+      </p:sp>
+      <p:sp>
+        <p:nvSpPr>
+          <p:cNvPr id="8" name="TextBox 7"/>
+          <p:cNvSpPr txBox="1"/>
+          <p:nvPr/>
+        </p:nvSpPr>
+        <p:spPr>
+          <a:xfrm>
+            <a:off x="685800" y="1417320"/>
+            <a:ext cx="10817352" cy="5029200"/>
+          </a:xfrm>
+          <a:prstGeom prst="rect">
+            <a:avLst/>
+          </a:prstGeom>
+          <a:noFill/>
+        </p:spPr>
+        <p:txBody>
+          <a:bodyPr wrap="square">
+            <a:spAutoFit/>
+          </a:bodyPr>
+          <a:lstStyle/>
+          <a:p>
+            <a:pPr>
+              <a:spcBef>
+                <a:spcPts val="400"/>
+              </a:spcBef>
+              <a:spcAft>
+                <a:spcPts val="200"/>
+              </a:spcAft>
+            </a:pPr>
+            <a:r>
+              <a:rPr sz="1200">
+                <a:solidFill>
+                  <a:srgbClr val="3D5466"/>
+                </a:solidFill>
+                <a:latin typeface="Arial"/>
+              </a:rPr>
+              <a:t>ARBEITSBLATT: BRANCHENRISIKO-ANALYSE</a:t>
+            </a:r>
+          </a:p>
+          <a:p>
+            <a:pPr>
+              <a:spcBef>
+                <a:spcPts val="400"/>
+              </a:spcBef>
+              <a:spcAft>
+                <a:spcPts val="200"/>
+              </a:spcAft>
+            </a:pPr>
+            <a:r>
+              <a:rPr sz="1200">
+                <a:solidFill>
+                  <a:srgbClr val="3D5466"/>
+                </a:solidFill>
+                <a:latin typeface="Arial"/>
+              </a:rPr>
+              <a:t>TEIL A – BRANCHENIDENTIFIKATION</a:t>
+            </a:r>
+          </a:p>
+          <a:p>
+            <a:pPr>
+              <a:spcBef>
+                <a:spcPts val="400"/>
+              </a:spcBef>
+              <a:spcAft>
+                <a:spcPts val="200"/>
+              </a:spcAft>
+            </a:pPr>
+            <a:r>
+              <a:rPr sz="1200">
+                <a:solidFill>
+                  <a:srgbClr val="3D5466"/>
+                </a:solidFill>
+                <a:latin typeface="Arial"/>
+              </a:rPr>
+              <a:t>TEIL B – PORTER'S FIVE FORCES (1 = sehr gering, 5 = sehr hoch)</a:t>
+            </a:r>
+          </a:p>
+          <a:p>
+            <a:pPr>
+              <a:spcBef>
+                <a:spcPts val="400"/>
+              </a:spcBef>
+              <a:spcAft>
+                <a:spcPts val="200"/>
+              </a:spcAft>
+            </a:pPr>
+            <a:r>
+              <a:rPr sz="1200">
+                <a:solidFill>
+                  <a:srgbClr val="3D5466"/>
+                </a:solidFill>
+                <a:latin typeface="Arial"/>
+              </a:rPr>
+              <a:t>TEIL C – KENNZAHLEN IM BRANCHENVERGLEICH</a:t>
+            </a:r>
+          </a:p>
+          <a:p>
+            <a:pPr>
+              <a:spcBef>
+                <a:spcPts val="400"/>
+              </a:spcBef>
+              <a:spcAft>
+                <a:spcPts val="200"/>
+              </a:spcAft>
+            </a:pPr>
+            <a:r>
+              <a:rPr sz="1200">
+                <a:solidFill>
+                  <a:srgbClr val="3D5466"/>
+                </a:solidFill>
+                <a:latin typeface="Arial"/>
+              </a:rPr>
+              <a:t>Gesamteinschätzung: ☐ Deutlich besser als Branche ☐ Vergleichbar ☐ Schwächer als Branche</a:t>
+            </a:r>
+          </a:p>
+          <a:p>
+            <a:pPr>
+              <a:spcBef>
+                <a:spcPts val="400"/>
+              </a:spcBef>
+              <a:spcAft>
+                <a:spcPts val="200"/>
+              </a:spcAft>
+            </a:pPr>
+            <a:r>
+              <a:rPr sz="1200">
+                <a:solidFill>
+                  <a:srgbClr val="3D5466"/>
+                </a:solidFill>
+                <a:latin typeface="Arial"/>
+              </a:rPr>
+              <a:t>TEIL D – FRÜHWARNINDIKATOREN (☐ nicht relevant | ⚠ Warnung | ✗ kritisch)</a:t>
+            </a:r>
+          </a:p>
+          <a:p>
+            <a:pPr>
+              <a:spcBef>
+                <a:spcPts val="400"/>
+              </a:spcBef>
+              <a:spcAft>
+                <a:spcPts val="200"/>
+              </a:spcAft>
+            </a:pPr>
+            <a:r>
+              <a:rPr sz="1200">
+                <a:solidFill>
+                  <a:srgbClr val="3D5466"/>
+                </a:solidFill>
+                <a:latin typeface="Arial"/>
+              </a:rPr>
+              <a:t>Branchenumfeld:</a:t>
+            </a:r>
+          </a:p>
+          <a:p>
+            <a:pPr>
+              <a:spcBef>
+                <a:spcPts val="400"/>
+              </a:spcBef>
+              <a:spcAft>
+                <a:spcPts val="200"/>
+              </a:spcAft>
+            </a:pPr>
+            <a:r>
+              <a:rPr sz="1300">
+                <a:solidFill>
+                  <a:srgbClr val="3D5466"/>
+                </a:solidFill>
+                <a:latin typeface="Arial"/>
+              </a:rPr>
+              <a:t>▸  ☐ ⚠ ✗ Brancheninsolvenzquote gestiegen &gt;5 % ggü. Vorjahr</a:t>
+            </a:r>
+          </a:p>
+          <a:p>
+            <a:pPr>
+              <a:spcBef>
+                <a:spcPts val="400"/>
+              </a:spcBef>
+              <a:spcAft>
+                <a:spcPts val="200"/>
+              </a:spcAft>
+            </a:pPr>
+            <a:r>
+              <a:rPr sz="1300">
+                <a:solidFill>
+                  <a:srgbClr val="3D5466"/>
+                </a:solidFill>
+                <a:latin typeface="Arial"/>
+              </a:rPr>
+              <a:t>▸  ☐ ⚠ ✗ Branchenumsatz rückläufig &gt;3 % ggü. Vorjahr</a:t>
+            </a:r>
+          </a:p>
+          <a:p>
+            <a:pPr>
+              <a:spcBef>
+                <a:spcPts val="400"/>
+              </a:spcBef>
+              <a:spcAft>
+                <a:spcPts val="200"/>
+              </a:spcAft>
+            </a:pPr>
+            <a:r>
+              <a:rPr sz="1300">
+                <a:solidFill>
+                  <a:srgbClr val="3D5466"/>
+                </a:solidFill>
+                <a:latin typeface="Arial"/>
+              </a:rPr>
+              <a:t>▸  ☐ ⚠ ✗ ifo Geschäftsklimaindex Branche &lt;90 Punkte</a:t>
+            </a:r>
+          </a:p>
+          <a:p>
+            <a:pPr>
+              <a:spcBef>
+                <a:spcPts val="400"/>
+              </a:spcBef>
+              <a:spcAft>
+                <a:spcPts val="200"/>
+              </a:spcAft>
+            </a:pPr>
+            <a:r>
+              <a:rPr sz="1300">
+                <a:solidFill>
+                  <a:srgbClr val="3D5466"/>
+                </a:solidFill>
+                <a:latin typeface="Arial"/>
+              </a:rPr>
+              <a:t>▸  ☐ ⚠ ✗ Regulatorische Änderungen angekündigt</a:t>
+            </a:r>
+          </a:p>
+          <a:p>
+            <a:pPr>
+              <a:spcBef>
+                <a:spcPts val="400"/>
+              </a:spcBef>
+              <a:spcAft>
+                <a:spcPts val="200"/>
+              </a:spcAft>
+            </a:pPr>
+            <a:r>
+              <a:rPr sz="1200">
+                <a:solidFill>
+                  <a:srgbClr val="3D5466"/>
+                </a:solidFill>
+                <a:latin typeface="Arial"/>
+              </a:rPr>
+              <a:t>Rohstoffe &amp; Lieferkette:</a:t>
+            </a:r>
+          </a:p>
+        </p:txBody>
+      </p:sp>
+      <p:sp>
+        <p:nvSpPr>
+          <p:cNvPr id="9" name="Rectangle 8"/>
+          <p:cNvSpPr/>
+          <p:nvPr/>
+        </p:nvSpPr>
+        <p:spPr>
+          <a:xfrm>
+            <a:off x="0" y="6510528"/>
+            <a:ext cx="12188952" cy="347472"/>
+          </a:xfrm>
+          <a:prstGeom prst="rect">
+            <a:avLst/>
+          </a:prstGeom>
+          <a:solidFill>
+            <a:srgbClr val="0A1937"/>
+          </a:solidFill>
+          <a:ln>
+            <a:noFill/>
+          </a:ln>
+        </p:spPr>
+        <p:style>
+          <a:lnRef idx="1">
+            <a:schemeClr val="accent1"/>
+          </a:lnRef>
+          <a:fillRef idx="3">
+            <a:schemeClr val="accent1"/>
+          </a:fillRef>
+          <a:effectRef idx="2">
+            <a:schemeClr val="accent1"/>
+          </a:effectRef>
+          <a:fontRef idx="minor">
+            <a:schemeClr val="lt1"/>
+          </a:fontRef>
+        </p:style>
+        <p:txBody>
+          <a:bodyPr rtlCol="0" anchor="ctr"/>
+          <a:lstStyle/>
+          <a:p>
+            <a:pPr algn="ctr"/>
+          </a:p>
+        </p:txBody>
+      </p:sp>
+      <p:sp>
+        <p:nvSpPr>
+          <p:cNvPr id="10" name="TextBox 9"/>
+          <p:cNvSpPr txBox="1"/>
+          <p:nvPr/>
+        </p:nvSpPr>
+        <p:spPr>
+          <a:xfrm>
+            <a:off x="685800" y="6583680"/>
+            <a:ext cx="6490411" cy="256032"/>
+          </a:xfrm>
+          <a:prstGeom prst="rect">
+            <a:avLst/>
+          </a:prstGeom>
+          <a:noFill/>
+        </p:spPr>
+        <p:txBody>
+          <a:bodyPr wrap="none">
+            <a:spAutoFit/>
+          </a:bodyPr>
+          <a:lstStyle/>
+          <a:p>
+            <a:pPr algn="l"/>
+            <a:r>
+              <a:rPr sz="700">
+                <a:solidFill>
+                  <a:srgbClr val="A0B4D2"/>
+                </a:solidFill>
+                <a:latin typeface="JetBrains Mono"/>
+              </a:rPr>
+              <a:t>Benedikt Zoller Coaching  ·  FKB Campus  ·  M05</a:t>
+            </a:r>
+          </a:p>
+        </p:txBody>
+      </p:sp>
+    </p:spTree>
+  </p:cSld>
+  <p:clrMapOvr>
+    <a:masterClrMapping/>
+  </p:clrMapOvr>
+</p:sld>
+</file>
+
 <file path=ppt/slides/slide2.xml><?xml version="1.0" encoding="utf-8"?>
 <p:sld xmlns:a="http://schemas.openxmlformats.org/drawingml/2006/main" xmlns:p="http://schemas.openxmlformats.org/presentationml/2006/main" xmlns:r="http://schemas.openxmlformats.org/officeDocument/2006/relationships">
   <p:cSld>
@@ -4006,7 +5366,7 @@
                 </a:solidFill>
                 <a:latin typeface="JetBrains Mono"/>
               </a:rPr>
-              <a:t>M05  ·  INHALT</a:t>
+              <a:t>AGENDA  ·  M05</a:t>
             </a:r>
           </a:p>
         </p:txBody>
@@ -4056,44 +5416,36 @@
       </p:sp>
       <p:sp>
         <p:nvSpPr>
-          <p:cNvPr id="6" name="Rectangle 5"/>
-          <p:cNvSpPr/>
+          <p:cNvPr id="6" name="TextBox 5"/>
+          <p:cNvSpPr txBox="1"/>
           <p:nvPr/>
         </p:nvSpPr>
         <p:spPr>
           <a:xfrm>
             <a:off x="685800" y="502920"/>
-            <a:ext cx="36576" cy="658368"/>
-          </a:xfrm>
-          <a:prstGeom prst="rect">
-            <a:avLst/>
-          </a:prstGeom>
-          <a:solidFill>
-            <a:srgbClr val="D9C089"/>
-          </a:solidFill>
-          <a:ln>
-            <a:noFill/>
-          </a:ln>
-        </p:spPr>
-        <p:style>
-          <a:lnRef idx="1">
-            <a:schemeClr val="accent1"/>
-          </a:lnRef>
-          <a:fillRef idx="3">
-            <a:schemeClr val="accent1"/>
-          </a:fillRef>
-          <a:effectRef idx="2">
-            <a:schemeClr val="accent1"/>
-          </a:effectRef>
-          <a:fontRef idx="minor">
-            <a:schemeClr val="lt1"/>
-          </a:fontRef>
-        </p:style>
-        <p:txBody>
-          <a:bodyPr rtlCol="0" anchor="ctr"/>
-          <a:lstStyle/>
-          <a:p>
-            <a:pPr algn="ctr"/>
+            <a:ext cx="10817352" cy="658368"/>
+          </a:xfrm>
+          <a:prstGeom prst="rect">
+            <a:avLst/>
+          </a:prstGeom>
+          <a:noFill/>
+        </p:spPr>
+        <p:txBody>
+          <a:bodyPr wrap="square">
+            <a:spAutoFit/>
+          </a:bodyPr>
+          <a:lstStyle/>
+          <a:p>
+            <a:pPr algn="l"/>
+            <a:r>
+              <a:rPr sz="2600" b="1" i="0">
+                <a:solidFill>
+                  <a:srgbClr val="1F2C56"/>
+                </a:solidFill>
+                <a:latin typeface="Source Serif 4"/>
+              </a:rPr>
+              <a:t>Agenda</a:t>
+            </a:r>
           </a:p>
         </p:txBody>
       </p:sp>
@@ -4105,8 +5457,8 @@
         </p:nvSpPr>
         <p:spPr>
           <a:xfrm>
-            <a:off x="813816" y="502920"/>
-            <a:ext cx="10634472" cy="685800"/>
+            <a:off x="685800" y="1463040"/>
+            <a:ext cx="10817352" cy="4937760"/>
           </a:xfrm>
           <a:prstGeom prst="rect">
             <a:avLst/>
@@ -4119,273 +5471,105 @@
           </a:bodyPr>
           <a:lstStyle/>
           <a:p>
-            <a:pPr algn="l"/>
-            <a:r>
-              <a:rPr sz="2400" b="1" i="0">
-                <a:solidFill>
-                  <a:srgbClr val="1F2C56"/>
-                </a:solidFill>
-                <a:latin typeface="Source Serif 4"/>
-              </a:rPr>
-              <a:t>Theorie-Input: Branchenstruktur und Risikoklassifikation</a:t>
-            </a:r>
-          </a:p>
-        </p:txBody>
-      </p:sp>
-      <p:sp>
-        <p:nvSpPr>
-          <p:cNvPr id="8" name="TextBox 7"/>
-          <p:cNvSpPr txBox="1"/>
-          <p:nvPr/>
-        </p:nvSpPr>
-        <p:spPr>
-          <a:xfrm>
-            <a:off x="685800" y="1417320"/>
-            <a:ext cx="10817352" cy="5029200"/>
-          </a:xfrm>
-          <a:prstGeom prst="rect">
-            <a:avLst/>
-          </a:prstGeom>
-          <a:noFill/>
-        </p:spPr>
-        <p:txBody>
-          <a:bodyPr wrap="square">
-            <a:spAutoFit/>
-          </a:bodyPr>
-          <a:lstStyle/>
-          <a:p>
             <a:pPr>
               <a:spcBef>
-                <a:spcPts val="1000"/>
+                <a:spcPts val="800"/>
               </a:spcBef>
               <a:spcAft>
                 <a:spcPts val="200"/>
               </a:spcAft>
             </a:pPr>
             <a:r>
-              <a:rPr sz="800" b="1">
-                <a:solidFill>
-                  <a:srgbClr val="78808C"/>
-                </a:solidFill>
-                <a:latin typeface="JetBrains Mono"/>
-              </a:rPr>
-              <a:t>4.1.1 PORTER'S FIVE FORCES ALS ANALYSEGERÜST</a:t>
+              <a:rPr sz="1500">
+                <a:solidFill>
+                  <a:srgbClr val="3D5466"/>
+                </a:solidFill>
+                <a:latin typeface="Arial"/>
+              </a:rPr>
+              <a:t>01   Theorie-Input: Branchenstruktur und Risikoklassifikation</a:t>
             </a:r>
           </a:p>
           <a:p>
             <a:pPr>
               <a:spcBef>
-                <a:spcPts val="400"/>
+                <a:spcPts val="800"/>
               </a:spcBef>
               <a:spcAft>
                 <a:spcPts val="200"/>
               </a:spcAft>
             </a:pPr>
             <a:r>
-              <a:rPr sz="1200">
+              <a:rPr sz="1500">
                 <a:solidFill>
                   <a:srgbClr val="3D5466"/>
                 </a:solidFill>
                 <a:latin typeface="Arial"/>
               </a:rPr>
-              <a:t>Die fünf Kräfte im Überblick:</a:t>
+              <a:t>02   Theorie-Input: Branchenspezifische Risikoklassen im KMU-Segment</a:t>
             </a:r>
           </a:p>
           <a:p>
             <a:pPr>
               <a:spcBef>
-                <a:spcPts val="400"/>
+                <a:spcPts val="800"/>
               </a:spcBef>
               <a:spcAft>
                 <a:spcPts val="200"/>
               </a:spcAft>
             </a:pPr>
             <a:r>
-              <a:rPr sz="1200">
+              <a:rPr sz="1500">
                 <a:solidFill>
                   <a:srgbClr val="3D5466"/>
                 </a:solidFill>
                 <a:latin typeface="Arial"/>
               </a:rPr>
-              <a:t>1. Bedrohung durch neue Konkurrenten</a:t>
+              <a:t>03   Theorie-Input: VR-Rating und branchenspezifische Ratingfaktoren</a:t>
             </a:r>
           </a:p>
           <a:p>
             <a:pPr>
               <a:spcBef>
-                <a:spcPts val="400"/>
+                <a:spcPts val="800"/>
               </a:spcBef>
               <a:spcAft>
                 <a:spcPts val="200"/>
               </a:spcAft>
             </a:pPr>
             <a:r>
-              <a:rPr sz="1200">
+              <a:rPr sz="1500">
                 <a:solidFill>
                   <a:srgbClr val="3D5466"/>
                 </a:solidFill>
                 <a:latin typeface="Arial"/>
               </a:rPr>
-              <a:t>Wie hoch sind Markteintrittsbarrieren? (Kapitalintensität, Skalenerfordernisse, Markenzugang)</a:t>
+              <a:t>04   Praxiscase: Bäckerei &amp; Konditorei Hofmann GmbH (Stuttgart, fiktiv)</a:t>
             </a:r>
           </a:p>
           <a:p>
             <a:pPr>
               <a:spcBef>
-                <a:spcPts val="400"/>
+                <a:spcPts val="800"/>
               </a:spcBef>
               <a:spcAft>
                 <a:spcPts val="200"/>
               </a:spcAft>
             </a:pPr>
             <a:r>
-              <a:rPr sz="1300">
+              <a:rPr sz="1500">
                 <a:solidFill>
                   <a:srgbClr val="3D5466"/>
                 </a:solidFill>
                 <a:latin typeface="Arial"/>
               </a:rPr>
-              <a:t>▸  Kreditrelevanz: Hohe Markteintrittsbarrieren → geringeres Überangebot → stabilere Margen</a:t>
-            </a:r>
-          </a:p>
-          <a:p>
-            <a:pPr>
-              <a:spcBef>
-                <a:spcPts val="400"/>
-              </a:spcBef>
-              <a:spcAft>
-                <a:spcPts val="200"/>
-              </a:spcAft>
-            </a:pPr>
-            <a:r>
-              <a:rPr sz="1200">
-                <a:solidFill>
-                  <a:srgbClr val="3D5466"/>
-                </a:solidFill>
-                <a:latin typeface="Arial"/>
-              </a:rPr>
-              <a:t>2. Verhandlungsmacht der Lieferanten</a:t>
-            </a:r>
-          </a:p>
-          <a:p>
-            <a:pPr>
-              <a:spcBef>
-                <a:spcPts val="400"/>
-              </a:spcBef>
-              <a:spcAft>
-                <a:spcPts val="200"/>
-              </a:spcAft>
-            </a:pPr>
-            <a:r>
-              <a:rPr sz="1200">
-                <a:solidFill>
-                  <a:srgbClr val="3D5466"/>
-                </a:solidFill>
-                <a:latin typeface="Arial"/>
-              </a:rPr>
-              <a:t>Wie konzentriert ist der Liefermarkt?</a:t>
-            </a:r>
-          </a:p>
-          <a:p>
-            <a:pPr>
-              <a:spcBef>
-                <a:spcPts val="400"/>
-              </a:spcBef>
-              <a:spcAft>
-                <a:spcPts val="200"/>
-              </a:spcAft>
-            </a:pPr>
-            <a:r>
-              <a:rPr sz="1300">
-                <a:solidFill>
-                  <a:srgbClr val="3D5466"/>
-                </a:solidFill>
-                <a:latin typeface="Arial"/>
-              </a:rPr>
-              <a:t>▸  Kreditrelevanz: Konzentrierte Lieferanten → Rohstoffpreisrisiko → Margenvolatilität</a:t>
-            </a:r>
-          </a:p>
-          <a:p>
-            <a:pPr>
-              <a:spcBef>
-                <a:spcPts val="400"/>
-              </a:spcBef>
-              <a:spcAft>
-                <a:spcPts val="200"/>
-              </a:spcAft>
-            </a:pPr>
-            <a:r>
-              <a:rPr sz="1200">
-                <a:solidFill>
-                  <a:srgbClr val="3D5466"/>
-                </a:solidFill>
-                <a:latin typeface="Arial"/>
-              </a:rPr>
-              <a:t>3. Verhandlungsmacht der Abnehmer</a:t>
-            </a:r>
-          </a:p>
-          <a:p>
-            <a:pPr>
-              <a:spcBef>
-                <a:spcPts val="400"/>
-              </a:spcBef>
-              <a:spcAft>
-                <a:spcPts val="200"/>
-              </a:spcAft>
-            </a:pPr>
-            <a:r>
-              <a:rPr sz="1200">
-                <a:solidFill>
-                  <a:srgbClr val="3D5466"/>
-                </a:solidFill>
-                <a:latin typeface="Arial"/>
-              </a:rPr>
-              <a:t>Wie konzentriert ist der Kundenmarkt?</a:t>
-            </a:r>
-          </a:p>
-          <a:p>
-            <a:pPr>
-              <a:spcBef>
-                <a:spcPts val="400"/>
-              </a:spcBef>
-              <a:spcAft>
-                <a:spcPts val="200"/>
-              </a:spcAft>
-            </a:pPr>
-            <a:r>
-              <a:rPr sz="1300">
-                <a:solidFill>
-                  <a:srgbClr val="3D5466"/>
-                </a:solidFill>
-                <a:latin typeface="Arial"/>
-              </a:rPr>
-              <a:t>▸  Kreditrelevanz: Wenige Großkunden → Konzentrationsrisiko → erhöhte Insolvenzwahrscheinlichkeit bei Kundenverlust</a:t>
-            </a:r>
-          </a:p>
-          <a:p>
-            <a:pPr>
-              <a:spcBef>
-                <a:spcPts val="400"/>
-              </a:spcBef>
-              <a:spcAft>
-                <a:spcPts val="200"/>
-              </a:spcAft>
-            </a:pPr>
-            <a:r>
-              <a:rPr sz="1200">
-                <a:solidFill>
-                  <a:srgbClr val="3D5466"/>
-                </a:solidFill>
-                <a:latin typeface="Arial"/>
-              </a:rPr>
-              <a:t>4. Bedrohung durch Substitute</a:t>
-            </a:r>
-          </a:p>
-        </p:txBody>
-      </p:sp>
-      <p:sp>
-        <p:nvSpPr>
-          <p:cNvPr id="9" name="Rectangle 8"/>
+              <a:t>05   Arbeitsblatt: Branchenrisiko-Analyse-Template</a:t>
+            </a:r>
+          </a:p>
+        </p:txBody>
+      </p:sp>
+      <p:sp>
+        <p:nvSpPr>
+          <p:cNvPr id="8" name="Rectangle 7"/>
           <p:cNvSpPr/>
           <p:nvPr/>
         </p:nvSpPr>
@@ -4428,7 +5612,7 @@
       </p:sp>
       <p:sp>
         <p:nvSpPr>
-          <p:cNvPr id="10" name="TextBox 9"/>
+          <p:cNvPr id="9" name="TextBox 8"/>
           <p:cNvSpPr txBox="1"/>
           <p:nvPr/>
         </p:nvSpPr>
@@ -4494,7 +5678,7 @@
             <a:avLst/>
           </a:prstGeom>
           <a:solidFill>
-            <a:srgbClr val="FFFFFF"/>
+            <a:srgbClr val="EDEDF3"/>
           </a:solidFill>
           <a:ln>
             <a:noFill/>
@@ -4595,43 +5779,51 @@
                 </a:solidFill>
                 <a:latin typeface="JetBrains Mono"/>
               </a:rPr>
-              <a:t>M05  ·  SCHAUBILD</a:t>
-            </a:r>
-          </a:p>
-        </p:txBody>
-      </p:sp>
-      <p:sp>
-        <p:nvSpPr>
-          <p:cNvPr id="5" name="TextBox 4"/>
-          <p:cNvSpPr txBox="1"/>
+              <a:t>M05  ·  INHALT</a:t>
+            </a:r>
+          </a:p>
+        </p:txBody>
+      </p:sp>
+      <p:sp>
+        <p:nvSpPr>
+          <p:cNvPr id="5" name="Rectangle 4"/>
+          <p:cNvSpPr/>
           <p:nvPr/>
         </p:nvSpPr>
         <p:spPr>
           <a:xfrm>
-            <a:off x="685800" y="502920"/>
-            <a:ext cx="10817352" cy="594360"/>
-          </a:xfrm>
-          <a:prstGeom prst="rect">
-            <a:avLst/>
-          </a:prstGeom>
-          <a:noFill/>
-        </p:spPr>
-        <p:txBody>
-          <a:bodyPr wrap="square">
-            <a:spAutoFit/>
-          </a:bodyPr>
-          <a:lstStyle/>
-          <a:p>
-            <a:pPr algn="l"/>
-            <a:r>
-              <a:rPr sz="2000" b="1" i="0">
-                <a:solidFill>
-                  <a:srgbClr val="1F2C56"/>
-                </a:solidFill>
-                <a:latin typeface="Source Serif 4"/>
-              </a:rPr>
-              <a:t>Five-Forces-Modell nach Porter</a:t>
-            </a:r>
+            <a:off x="0" y="1234440"/>
+            <a:ext cx="12188952" cy="12700"/>
+          </a:xfrm>
+          <a:prstGeom prst="rect">
+            <a:avLst/>
+          </a:prstGeom>
+          <a:solidFill>
+            <a:srgbClr val="D8DFE4"/>
+          </a:solidFill>
+          <a:ln>
+            <a:noFill/>
+          </a:ln>
+        </p:spPr>
+        <p:style>
+          <a:lnRef idx="1">
+            <a:schemeClr val="accent1"/>
+          </a:lnRef>
+          <a:fillRef idx="3">
+            <a:schemeClr val="accent1"/>
+          </a:fillRef>
+          <a:effectRef idx="2">
+            <a:schemeClr val="accent1"/>
+          </a:effectRef>
+          <a:fontRef idx="minor">
+            <a:schemeClr val="lt1"/>
+          </a:fontRef>
+        </p:style>
+        <p:txBody>
+          <a:bodyPr rtlCol="0" anchor="ctr"/>
+          <a:lstStyle/>
+          <a:p>
+            <a:pPr algn="ctr"/>
           </a:p>
         </p:txBody>
       </p:sp>
@@ -4643,8 +5835,8 @@
         </p:nvSpPr>
         <p:spPr>
           <a:xfrm>
-            <a:off x="685800" y="1143000"/>
-            <a:ext cx="10817352" cy="25400"/>
+            <a:off x="685800" y="502920"/>
+            <a:ext cx="36576" cy="658368"/>
           </a:xfrm>
           <a:prstGeom prst="rect">
             <a:avLst/>
@@ -4678,33 +5870,295 @@
           </a:p>
         </p:txBody>
       </p:sp>
-      <p:pic>
-        <p:nvPicPr>
-          <p:cNvPr id="7" name="Picture 6" descr="image.png"/>
-          <p:cNvPicPr>
-            <a:picLocks noChangeAspect="1"/>
-          </p:cNvPicPr>
+      <p:sp>
+        <p:nvSpPr>
+          <p:cNvPr id="7" name="TextBox 6"/>
+          <p:cNvSpPr txBox="1"/>
           <p:nvPr/>
-        </p:nvPicPr>
-        <p:blipFill>
-          <a:blip r:embed="rId2"/>
-          <a:stretch>
-            <a:fillRect/>
-          </a:stretch>
-        </p:blipFill>
-        <p:spPr>
-          <a:xfrm>
-            <a:off x="2554863" y="1325880"/>
-            <a:ext cx="7079225" cy="4937760"/>
-          </a:xfrm>
-          <a:prstGeom prst="rect">
-            <a:avLst/>
-          </a:prstGeom>
-        </p:spPr>
-      </p:pic>
-      <p:sp>
-        <p:nvSpPr>
-          <p:cNvPr id="8" name="Rectangle 7"/>
+        </p:nvSpPr>
+        <p:spPr>
+          <a:xfrm>
+            <a:off x="813816" y="502920"/>
+            <a:ext cx="10634472" cy="685800"/>
+          </a:xfrm>
+          <a:prstGeom prst="rect">
+            <a:avLst/>
+          </a:prstGeom>
+          <a:noFill/>
+        </p:spPr>
+        <p:txBody>
+          <a:bodyPr wrap="square">
+            <a:spAutoFit/>
+          </a:bodyPr>
+          <a:lstStyle/>
+          <a:p>
+            <a:pPr algn="l"/>
+            <a:r>
+              <a:rPr sz="2400" b="1" i="0">
+                <a:solidFill>
+                  <a:srgbClr val="1F2C56"/>
+                </a:solidFill>
+                <a:latin typeface="Source Serif 4"/>
+              </a:rPr>
+              <a:t>Theorie-Input: Branchenstruktur und Risikoklassifikation</a:t>
+            </a:r>
+          </a:p>
+        </p:txBody>
+      </p:sp>
+      <p:sp>
+        <p:nvSpPr>
+          <p:cNvPr id="8" name="TextBox 7"/>
+          <p:cNvSpPr txBox="1"/>
+          <p:nvPr/>
+        </p:nvSpPr>
+        <p:spPr>
+          <a:xfrm>
+            <a:off x="685800" y="1417320"/>
+            <a:ext cx="10817352" cy="5029200"/>
+          </a:xfrm>
+          <a:prstGeom prst="rect">
+            <a:avLst/>
+          </a:prstGeom>
+          <a:noFill/>
+        </p:spPr>
+        <p:txBody>
+          <a:bodyPr wrap="square">
+            <a:spAutoFit/>
+          </a:bodyPr>
+          <a:lstStyle/>
+          <a:p>
+            <a:pPr>
+              <a:spcBef>
+                <a:spcPts val="1000"/>
+              </a:spcBef>
+              <a:spcAft>
+                <a:spcPts val="200"/>
+              </a:spcAft>
+            </a:pPr>
+            <a:r>
+              <a:rPr sz="800" b="1">
+                <a:solidFill>
+                  <a:srgbClr val="78808C"/>
+                </a:solidFill>
+                <a:latin typeface="JetBrains Mono"/>
+              </a:rPr>
+              <a:t>4.1.1 PORTER'S FIVE FORCES ALS ANALYSEGERÜST</a:t>
+            </a:r>
+          </a:p>
+          <a:p>
+            <a:pPr>
+              <a:spcBef>
+                <a:spcPts val="400"/>
+              </a:spcBef>
+              <a:spcAft>
+                <a:spcPts val="200"/>
+              </a:spcAft>
+            </a:pPr>
+            <a:r>
+              <a:rPr sz="1200">
+                <a:solidFill>
+                  <a:srgbClr val="3D5466"/>
+                </a:solidFill>
+                <a:latin typeface="Arial"/>
+              </a:rPr>
+              <a:t>Die fünf Kräfte im Überblick:</a:t>
+            </a:r>
+          </a:p>
+          <a:p>
+            <a:pPr>
+              <a:spcBef>
+                <a:spcPts val="400"/>
+              </a:spcBef>
+              <a:spcAft>
+                <a:spcPts val="200"/>
+              </a:spcAft>
+            </a:pPr>
+            <a:r>
+              <a:rPr sz="1200">
+                <a:solidFill>
+                  <a:srgbClr val="3D5466"/>
+                </a:solidFill>
+                <a:latin typeface="Arial"/>
+              </a:rPr>
+              <a:t>1. Bedrohung durch neue Konkurrenten</a:t>
+            </a:r>
+          </a:p>
+          <a:p>
+            <a:pPr>
+              <a:spcBef>
+                <a:spcPts val="400"/>
+              </a:spcBef>
+              <a:spcAft>
+                <a:spcPts val="200"/>
+              </a:spcAft>
+            </a:pPr>
+            <a:r>
+              <a:rPr sz="1200">
+                <a:solidFill>
+                  <a:srgbClr val="3D5466"/>
+                </a:solidFill>
+                <a:latin typeface="Arial"/>
+              </a:rPr>
+              <a:t>Wie hoch sind Markteintrittsbarrieren? (Kapitalintensität, Skalenerfordernisse, Markenzugang)</a:t>
+            </a:r>
+          </a:p>
+          <a:p>
+            <a:pPr>
+              <a:spcBef>
+                <a:spcPts val="400"/>
+              </a:spcBef>
+              <a:spcAft>
+                <a:spcPts val="200"/>
+              </a:spcAft>
+            </a:pPr>
+            <a:r>
+              <a:rPr sz="1300">
+                <a:solidFill>
+                  <a:srgbClr val="3D5466"/>
+                </a:solidFill>
+                <a:latin typeface="Arial"/>
+              </a:rPr>
+              <a:t>▸  Kreditrelevanz: Hohe Markteintrittsbarrieren → geringeres Überangebot → stabilere Margen</a:t>
+            </a:r>
+          </a:p>
+          <a:p>
+            <a:pPr>
+              <a:spcBef>
+                <a:spcPts val="400"/>
+              </a:spcBef>
+              <a:spcAft>
+                <a:spcPts val="200"/>
+              </a:spcAft>
+            </a:pPr>
+            <a:r>
+              <a:rPr sz="1200">
+                <a:solidFill>
+                  <a:srgbClr val="3D5466"/>
+                </a:solidFill>
+                <a:latin typeface="Arial"/>
+              </a:rPr>
+              <a:t>2. Verhandlungsmacht der Lieferanten</a:t>
+            </a:r>
+          </a:p>
+          <a:p>
+            <a:pPr>
+              <a:spcBef>
+                <a:spcPts val="400"/>
+              </a:spcBef>
+              <a:spcAft>
+                <a:spcPts val="200"/>
+              </a:spcAft>
+            </a:pPr>
+            <a:r>
+              <a:rPr sz="1200">
+                <a:solidFill>
+                  <a:srgbClr val="3D5466"/>
+                </a:solidFill>
+                <a:latin typeface="Arial"/>
+              </a:rPr>
+              <a:t>Wie konzentriert ist der Liefermarkt?</a:t>
+            </a:r>
+          </a:p>
+          <a:p>
+            <a:pPr>
+              <a:spcBef>
+                <a:spcPts val="400"/>
+              </a:spcBef>
+              <a:spcAft>
+                <a:spcPts val="200"/>
+              </a:spcAft>
+            </a:pPr>
+            <a:r>
+              <a:rPr sz="1300">
+                <a:solidFill>
+                  <a:srgbClr val="3D5466"/>
+                </a:solidFill>
+                <a:latin typeface="Arial"/>
+              </a:rPr>
+              <a:t>▸  Kreditrelevanz: Konzentrierte Lieferanten → Rohstoffpreisrisiko → Margenvolatilität</a:t>
+            </a:r>
+          </a:p>
+          <a:p>
+            <a:pPr>
+              <a:spcBef>
+                <a:spcPts val="400"/>
+              </a:spcBef>
+              <a:spcAft>
+                <a:spcPts val="200"/>
+              </a:spcAft>
+            </a:pPr>
+            <a:r>
+              <a:rPr sz="1200">
+                <a:solidFill>
+                  <a:srgbClr val="3D5466"/>
+                </a:solidFill>
+                <a:latin typeface="Arial"/>
+              </a:rPr>
+              <a:t>3. Verhandlungsmacht der Abnehmer</a:t>
+            </a:r>
+          </a:p>
+          <a:p>
+            <a:pPr>
+              <a:spcBef>
+                <a:spcPts val="400"/>
+              </a:spcBef>
+              <a:spcAft>
+                <a:spcPts val="200"/>
+              </a:spcAft>
+            </a:pPr>
+            <a:r>
+              <a:rPr sz="1200">
+                <a:solidFill>
+                  <a:srgbClr val="3D5466"/>
+                </a:solidFill>
+                <a:latin typeface="Arial"/>
+              </a:rPr>
+              <a:t>Wie konzentriert ist der Kundenmarkt?</a:t>
+            </a:r>
+          </a:p>
+          <a:p>
+            <a:pPr>
+              <a:spcBef>
+                <a:spcPts val="400"/>
+              </a:spcBef>
+              <a:spcAft>
+                <a:spcPts val="200"/>
+              </a:spcAft>
+            </a:pPr>
+            <a:r>
+              <a:rPr sz="1300">
+                <a:solidFill>
+                  <a:srgbClr val="3D5466"/>
+                </a:solidFill>
+                <a:latin typeface="Arial"/>
+              </a:rPr>
+              <a:t>▸  Kreditrelevanz: Wenige Großkunden → Konzentrationsrisiko → erhöhte Insolvenzwahrscheinlichkeit bei Kundenverlust</a:t>
+            </a:r>
+          </a:p>
+          <a:p>
+            <a:pPr>
+              <a:spcBef>
+                <a:spcPts val="400"/>
+              </a:spcBef>
+              <a:spcAft>
+                <a:spcPts val="200"/>
+              </a:spcAft>
+            </a:pPr>
+            <a:r>
+              <a:rPr sz="1200">
+                <a:solidFill>
+                  <a:srgbClr val="3D5466"/>
+                </a:solidFill>
+                <a:latin typeface="Arial"/>
+              </a:rPr>
+              <a:t>4. Bedrohung durch Substitute</a:t>
+            </a:r>
+          </a:p>
+        </p:txBody>
+      </p:sp>
+      <p:sp>
+        <p:nvSpPr>
+          <p:cNvPr id="9" name="Rectangle 8"/>
           <p:cNvSpPr/>
           <p:nvPr/>
         </p:nvSpPr>
@@ -4747,7 +6201,7 @@
       </p:sp>
       <p:sp>
         <p:nvSpPr>
-          <p:cNvPr id="9" name="TextBox 8"/>
+          <p:cNvPr id="10" name="TextBox 9"/>
           <p:cNvSpPr txBox="1"/>
           <p:nvPr/>
         </p:nvSpPr>
@@ -4776,41 +6230,6 @@
                 <a:latin typeface="JetBrains Mono"/>
               </a:rPr>
               <a:t>Benedikt Zoller Coaching  ·  FKB Campus  ·  M05</a:t>
-            </a:r>
-          </a:p>
-        </p:txBody>
-      </p:sp>
-      <p:sp>
-        <p:nvSpPr>
-          <p:cNvPr id="10" name="TextBox 9"/>
-          <p:cNvSpPr txBox="1"/>
-          <p:nvPr/>
-        </p:nvSpPr>
-        <p:spPr>
-          <a:xfrm>
-            <a:off x="7176211" y="6583680"/>
-            <a:ext cx="4326940" cy="256032"/>
-          </a:xfrm>
-          <a:prstGeom prst="rect">
-            <a:avLst/>
-          </a:prstGeom>
-          <a:noFill/>
-        </p:spPr>
-        <p:txBody>
-          <a:bodyPr wrap="none">
-            <a:spAutoFit/>
-          </a:bodyPr>
-          <a:lstStyle/>
-          <a:p>
-            <a:pPr algn="r"/>
-            <a:r>
-              <a:rPr sz="700">
-                <a:solidFill>
-                  <a:srgbClr val="A0B4D2"/>
-                </a:solidFill>
-                <a:latin typeface="JetBrains Mono"/>
-              </a:rPr>
-              <a:t>Schaubild</a:t>
             </a:r>
           </a:p>
         </p:txBody>
@@ -4984,7 +6403,7 @@
                 </a:solidFill>
                 <a:latin typeface="Source Serif 4"/>
               </a:rPr>
-              <a:t>Branchenlebenszyklus</a:t>
+              <a:t>Five-Forces-Modell nach Porter</a:t>
             </a:r>
           </a:p>
         </p:txBody>
@@ -5048,8 +6467,8 @@
         </p:blipFill>
         <p:spPr>
           <a:xfrm>
-            <a:off x="2303489" y="1325880"/>
-            <a:ext cx="7581973" cy="4937760"/>
+            <a:off x="2554863" y="1325880"/>
+            <a:ext cx="7079225" cy="4937760"/>
           </a:xfrm>
           <a:prstGeom prst="rect">
             <a:avLst/>
@@ -5202,7 +6621,7 @@
             <a:avLst/>
           </a:prstGeom>
           <a:solidFill>
-            <a:srgbClr val="EDEDF3"/>
+            <a:srgbClr val="FFFFFF"/>
           </a:solidFill>
           <a:ln>
             <a:noFill/>
@@ -5303,51 +6722,43 @@
                 </a:solidFill>
                 <a:latin typeface="JetBrains Mono"/>
               </a:rPr>
-              <a:t>M05  ·  INHALT</a:t>
-            </a:r>
-          </a:p>
-        </p:txBody>
-      </p:sp>
-      <p:sp>
-        <p:nvSpPr>
-          <p:cNvPr id="5" name="Rectangle 4"/>
-          <p:cNvSpPr/>
+              <a:t>M05  ·  SCHAUBILD</a:t>
+            </a:r>
+          </a:p>
+        </p:txBody>
+      </p:sp>
+      <p:sp>
+        <p:nvSpPr>
+          <p:cNvPr id="5" name="TextBox 4"/>
+          <p:cNvSpPr txBox="1"/>
           <p:nvPr/>
         </p:nvSpPr>
         <p:spPr>
           <a:xfrm>
-            <a:off x="0" y="1234440"/>
-            <a:ext cx="12188952" cy="12700"/>
-          </a:xfrm>
-          <a:prstGeom prst="rect">
-            <a:avLst/>
-          </a:prstGeom>
-          <a:solidFill>
-            <a:srgbClr val="D8DFE4"/>
-          </a:solidFill>
-          <a:ln>
-            <a:noFill/>
-          </a:ln>
-        </p:spPr>
-        <p:style>
-          <a:lnRef idx="1">
-            <a:schemeClr val="accent1"/>
-          </a:lnRef>
-          <a:fillRef idx="3">
-            <a:schemeClr val="accent1"/>
-          </a:fillRef>
-          <a:effectRef idx="2">
-            <a:schemeClr val="accent1"/>
-          </a:effectRef>
-          <a:fontRef idx="minor">
-            <a:schemeClr val="lt1"/>
-          </a:fontRef>
-        </p:style>
-        <p:txBody>
-          <a:bodyPr rtlCol="0" anchor="ctr"/>
-          <a:lstStyle/>
-          <a:p>
-            <a:pPr algn="ctr"/>
+            <a:off x="685800" y="502920"/>
+            <a:ext cx="10817352" cy="594360"/>
+          </a:xfrm>
+          <a:prstGeom prst="rect">
+            <a:avLst/>
+          </a:prstGeom>
+          <a:noFill/>
+        </p:spPr>
+        <p:txBody>
+          <a:bodyPr wrap="square">
+            <a:spAutoFit/>
+          </a:bodyPr>
+          <a:lstStyle/>
+          <a:p>
+            <a:pPr algn="l"/>
+            <a:r>
+              <a:rPr sz="2000" b="1" i="0">
+                <a:solidFill>
+                  <a:srgbClr val="1F2C56"/>
+                </a:solidFill>
+                <a:latin typeface="Source Serif 4"/>
+              </a:rPr>
+              <a:t>Branchenlebenszyklus</a:t>
+            </a:r>
           </a:p>
         </p:txBody>
       </p:sp>
@@ -5359,8 +6770,8 @@
         </p:nvSpPr>
         <p:spPr>
           <a:xfrm>
-            <a:off x="685800" y="502920"/>
-            <a:ext cx="36576" cy="658368"/>
+            <a:off x="685800" y="1143000"/>
+            <a:ext cx="10817352" cy="25400"/>
           </a:xfrm>
           <a:prstGeom prst="rect">
             <a:avLst/>
@@ -5394,295 +6805,33 @@
           </a:p>
         </p:txBody>
       </p:sp>
-      <p:sp>
-        <p:nvSpPr>
-          <p:cNvPr id="7" name="TextBox 6"/>
-          <p:cNvSpPr txBox="1"/>
+      <p:pic>
+        <p:nvPicPr>
+          <p:cNvPr id="7" name="Picture 6" descr="image.png"/>
+          <p:cNvPicPr>
+            <a:picLocks noChangeAspect="1"/>
+          </p:cNvPicPr>
           <p:nvPr/>
-        </p:nvSpPr>
-        <p:spPr>
-          <a:xfrm>
-            <a:off x="813816" y="502920"/>
-            <a:ext cx="10634472" cy="685800"/>
-          </a:xfrm>
-          <a:prstGeom prst="rect">
-            <a:avLst/>
-          </a:prstGeom>
-          <a:noFill/>
-        </p:spPr>
-        <p:txBody>
-          <a:bodyPr wrap="square">
-            <a:spAutoFit/>
-          </a:bodyPr>
-          <a:lstStyle/>
-          <a:p>
-            <a:pPr algn="l"/>
-            <a:r>
-              <a:rPr sz="2400" b="1" i="0">
-                <a:solidFill>
-                  <a:srgbClr val="1F2C56"/>
-                </a:solidFill>
-                <a:latin typeface="Source Serif 4"/>
-              </a:rPr>
-              <a:t>Theorie-Input: Branchenspezifische Risikoklassen im KMU-Segment</a:t>
-            </a:r>
-          </a:p>
-        </p:txBody>
-      </p:sp>
-      <p:sp>
-        <p:nvSpPr>
-          <p:cNvPr id="8" name="TextBox 7"/>
-          <p:cNvSpPr txBox="1"/>
-          <p:nvPr/>
-        </p:nvSpPr>
-        <p:spPr>
-          <a:xfrm>
-            <a:off x="685800" y="1417320"/>
-            <a:ext cx="10817352" cy="5029200"/>
-          </a:xfrm>
-          <a:prstGeom prst="rect">
-            <a:avLst/>
-          </a:prstGeom>
-          <a:noFill/>
-        </p:spPr>
-        <p:txBody>
-          <a:bodyPr wrap="square">
-            <a:spAutoFit/>
-          </a:bodyPr>
-          <a:lstStyle/>
-          <a:p>
-            <a:pPr>
-              <a:spcBef>
-                <a:spcPts val="1000"/>
-              </a:spcBef>
-              <a:spcAft>
-                <a:spcPts val="200"/>
-              </a:spcAft>
-            </a:pPr>
-            <a:r>
-              <a:rPr sz="800" b="1">
-                <a:solidFill>
-                  <a:srgbClr val="78808C"/>
-                </a:solidFill>
-                <a:latin typeface="JetBrains Mono"/>
-              </a:rPr>
-              <a:t>4.2.1 BAUGEWERBE UND BAUTRÄGER</a:t>
-            </a:r>
-          </a:p>
-          <a:p>
-            <a:pPr>
-              <a:spcBef>
-                <a:spcPts val="400"/>
-              </a:spcBef>
-              <a:spcAft>
-                <a:spcPts val="200"/>
-              </a:spcAft>
-            </a:pPr>
-            <a:r>
-              <a:rPr sz="1200">
-                <a:solidFill>
-                  <a:srgbClr val="3D5466"/>
-                </a:solidFill>
-                <a:latin typeface="Arial"/>
-              </a:rPr>
-              <a:t>Charakteristika:</a:t>
-            </a:r>
-          </a:p>
-          <a:p>
-            <a:pPr>
-              <a:spcBef>
-                <a:spcPts val="400"/>
-              </a:spcBef>
-              <a:spcAft>
-                <a:spcPts val="200"/>
-              </a:spcAft>
-            </a:pPr>
-            <a:r>
-              <a:rPr sz="1300">
-                <a:solidFill>
-                  <a:srgbClr val="3D5466"/>
-                </a:solidFill>
-                <a:latin typeface="Arial"/>
-              </a:rPr>
-              <a:t>▸  Projektgebundenheit: Jedes Objekt ist ein Einzelprojekt mit eigenen Fertigstellungs- und Kostenrisiken</a:t>
-            </a:r>
-          </a:p>
-          <a:p>
-            <a:pPr>
-              <a:spcBef>
-                <a:spcPts val="400"/>
-              </a:spcBef>
-              <a:spcAft>
-                <a:spcPts val="200"/>
-              </a:spcAft>
-            </a:pPr>
-            <a:r>
-              <a:rPr sz="1300">
-                <a:solidFill>
-                  <a:srgbClr val="3D5466"/>
-                </a:solidFill>
-                <a:latin typeface="Arial"/>
-              </a:rPr>
-              <a:t>▸  Bauhandwerk: Umsätze 300.000–3 Mio. €, Eigenkapitalquote 10–20 %; Bauträger: Umsätze 1–20 Mio. €, EK-Quote oft 15–30 % (aber volumenabhängig)</a:t>
-            </a:r>
-          </a:p>
-          <a:p>
-            <a:pPr>
-              <a:spcBef>
-                <a:spcPts val="400"/>
-              </a:spcBef>
-              <a:spcAft>
-                <a:spcPts val="200"/>
-              </a:spcAft>
-            </a:pPr>
-            <a:r>
-              <a:rPr sz="1300">
-                <a:solidFill>
-                  <a:srgbClr val="3D5466"/>
-                </a:solidFill>
-                <a:latin typeface="Arial"/>
-              </a:rPr>
-              <a:t>▸  Saisonalität: Wintermonate schwächer, Frühjahr/Sommer stärker</a:t>
-            </a:r>
-          </a:p>
-          <a:p>
-            <a:pPr>
-              <a:spcBef>
-                <a:spcPts val="400"/>
-              </a:spcBef>
-              <a:spcAft>
-                <a:spcPts val="200"/>
-              </a:spcAft>
-            </a:pPr>
-            <a:r>
-              <a:rPr sz="1200">
-                <a:solidFill>
-                  <a:srgbClr val="3D5466"/>
-                </a:solidFill>
-                <a:latin typeface="Arial"/>
-              </a:rPr>
-              <a:t>Typische Kennzahlen (Benchmark Baugewerbe):</a:t>
-            </a:r>
-          </a:p>
-          <a:p>
-            <a:pPr>
-              <a:spcBef>
-                <a:spcPts val="400"/>
-              </a:spcBef>
-              <a:spcAft>
-                <a:spcPts val="200"/>
-              </a:spcAft>
-            </a:pPr>
-            <a:r>
-              <a:rPr sz="1300">
-                <a:solidFill>
-                  <a:srgbClr val="3D5466"/>
-                </a:solidFill>
-                <a:latin typeface="Arial"/>
-              </a:rPr>
-              <a:t>▸  EBIT-Marge: 3–6 % (branchentypisch niedrig wg. Wettbewerbsintensität)</a:t>
-            </a:r>
-          </a:p>
-          <a:p>
-            <a:pPr>
-              <a:spcBef>
-                <a:spcPts val="400"/>
-              </a:spcBef>
-              <a:spcAft>
-                <a:spcPts val="200"/>
-              </a:spcAft>
-            </a:pPr>
-            <a:r>
-              <a:rPr sz="1300">
-                <a:solidFill>
-                  <a:srgbClr val="3D5466"/>
-                </a:solidFill>
-                <a:latin typeface="Arial"/>
-              </a:rPr>
-              <a:t>▸  Eigenkapitalquote: 12–18 %</a:t>
-            </a:r>
-          </a:p>
-          <a:p>
-            <a:pPr>
-              <a:spcBef>
-                <a:spcPts val="400"/>
-              </a:spcBef>
-              <a:spcAft>
-                <a:spcPts val="200"/>
-              </a:spcAft>
-            </a:pPr>
-            <a:r>
-              <a:rPr sz="1300">
-                <a:solidFill>
-                  <a:srgbClr val="3D5466"/>
-                </a:solidFill>
-                <a:latin typeface="Arial"/>
-              </a:rPr>
-              <a:t>▸  Kapitalumschlag: 0,8–1,2x</a:t>
-            </a:r>
-          </a:p>
-          <a:p>
-            <a:pPr>
-              <a:spcBef>
-                <a:spcPts val="400"/>
-              </a:spcBef>
-              <a:spcAft>
-                <a:spcPts val="200"/>
-              </a:spcAft>
-            </a:pPr>
-            <a:r>
-              <a:rPr sz="1300">
-                <a:solidFill>
-                  <a:srgbClr val="3D5466"/>
-                </a:solidFill>
-                <a:latin typeface="Arial"/>
-              </a:rPr>
-              <a:t>▸  Forderungslaufzeit: 45–60 Tage (Rechnungsstellung an Bauherr verzögert)</a:t>
-            </a:r>
-          </a:p>
-          <a:p>
-            <a:pPr>
-              <a:spcBef>
-                <a:spcPts val="400"/>
-              </a:spcBef>
-              <a:spcAft>
-                <a:spcPts val="200"/>
-              </a:spcAft>
-            </a:pPr>
-            <a:r>
-              <a:rPr sz="1200">
-                <a:solidFill>
-                  <a:srgbClr val="3D5466"/>
-                </a:solidFill>
-                <a:latin typeface="Arial"/>
-              </a:rPr>
-              <a:t>Quellen: Creditreform Branchenberichte ; BVR-Branchenblätter ; Deutsche Bundesbank Unternehmensabschlussstatistik</a:t>
-            </a:r>
-          </a:p>
-          <a:p>
-            <a:pPr>
-              <a:spcBef>
-                <a:spcPts val="400"/>
-              </a:spcBef>
-              <a:spcAft>
-                <a:spcPts val="200"/>
-              </a:spcAft>
-            </a:pPr>
-            <a:r>
-              <a:rPr sz="1200">
-                <a:solidFill>
-                  <a:srgbClr val="3D5466"/>
-                </a:solidFill>
-                <a:latin typeface="Arial"/>
-              </a:rPr>
-              <a:t>Kritische Frühwarnindikatoren:</a:t>
-            </a:r>
-          </a:p>
-        </p:txBody>
-      </p:sp>
-      <p:sp>
-        <p:nvSpPr>
-          <p:cNvPr id="9" name="Rectangle 8"/>
+        </p:nvPicPr>
+        <p:blipFill>
+          <a:blip r:embed="rId2"/>
+          <a:stretch>
+            <a:fillRect/>
+          </a:stretch>
+        </p:blipFill>
+        <p:spPr>
+          <a:xfrm>
+            <a:off x="2303489" y="1325880"/>
+            <a:ext cx="7581973" cy="4937760"/>
+          </a:xfrm>
+          <a:prstGeom prst="rect">
+            <a:avLst/>
+          </a:prstGeom>
+        </p:spPr>
+      </p:pic>
+      <p:sp>
+        <p:nvSpPr>
+          <p:cNvPr id="8" name="Rectangle 7"/>
           <p:cNvSpPr/>
           <p:nvPr/>
         </p:nvSpPr>
@@ -5725,14 +6874,49 @@
       </p:sp>
       <p:sp>
         <p:nvSpPr>
+          <p:cNvPr id="9" name="TextBox 8"/>
+          <p:cNvSpPr txBox="1"/>
+          <p:nvPr/>
+        </p:nvSpPr>
+        <p:spPr>
+          <a:xfrm>
+            <a:off x="685800" y="6583680"/>
+            <a:ext cx="6490411" cy="256032"/>
+          </a:xfrm>
+          <a:prstGeom prst="rect">
+            <a:avLst/>
+          </a:prstGeom>
+          <a:noFill/>
+        </p:spPr>
+        <p:txBody>
+          <a:bodyPr wrap="none">
+            <a:spAutoFit/>
+          </a:bodyPr>
+          <a:lstStyle/>
+          <a:p>
+            <a:pPr algn="l"/>
+            <a:r>
+              <a:rPr sz="700">
+                <a:solidFill>
+                  <a:srgbClr val="A0B4D2"/>
+                </a:solidFill>
+                <a:latin typeface="JetBrains Mono"/>
+              </a:rPr>
+              <a:t>Benedikt Zoller Coaching  ·  FKB Campus  ·  M05</a:t>
+            </a:r>
+          </a:p>
+        </p:txBody>
+      </p:sp>
+      <p:sp>
+        <p:nvSpPr>
           <p:cNvPr id="10" name="TextBox 9"/>
           <p:cNvSpPr txBox="1"/>
           <p:nvPr/>
         </p:nvSpPr>
         <p:spPr>
           <a:xfrm>
-            <a:off x="685800" y="6583680"/>
-            <a:ext cx="6490411" cy="256032"/>
+            <a:off x="7176211" y="6583680"/>
+            <a:ext cx="4326940" cy="256032"/>
           </a:xfrm>
           <a:prstGeom prst="rect">
             <a:avLst/>
@@ -5745,7 +6929,7 @@
           </a:bodyPr>
           <a:lstStyle/>
           <a:p>
-            <a:pPr algn="l"/>
+            <a:pPr algn="r"/>
             <a:r>
               <a:rPr sz="700">
                 <a:solidFill>
@@ -5753,7 +6937,7 @@
                 </a:solidFill>
                 <a:latin typeface="JetBrains Mono"/>
               </a:rPr>
-              <a:t>Benedikt Zoller Coaching  ·  FKB Campus  ·  M05</a:t>
+              <a:t>Schaubild</a:t>
             </a:r>
           </a:p>
         </p:txBody>
@@ -6013,7 +7197,7 @@
                 </a:solidFill>
                 <a:latin typeface="Source Serif 4"/>
               </a:rPr>
-              <a:t>Theorie-Input: VR-Rating und branchenspezifische Ratingfaktoren</a:t>
+              <a:t>Theorie-Input: Branchenspezifische Risikoklassen im KMU-Segment</a:t>
             </a:r>
           </a:p>
         </p:txBody>
@@ -6055,7 +7239,7 @@
                 </a:solidFill>
                 <a:latin typeface="JetBrains Mono"/>
               </a:rPr>
-              <a:t>4.3.1 AUFBAU DES VR-RATINGS</a:t>
+              <a:t>4.2.1 BAUGEWERBE UND BAUTRÄGER</a:t>
             </a:r>
           </a:p>
           <a:p>
@@ -6074,7 +7258,7 @@
                 </a:solidFill>
                 <a:latin typeface="Arial"/>
               </a:rPr>
-              <a:t>Das VR-Rating kombiniert quantitative und qualitative Komponenten:</a:t>
+              <a:t>Charakteristika:</a:t>
             </a:r>
           </a:p>
           <a:p>
@@ -6087,13 +7271,13 @@
               </a:spcAft>
             </a:pPr>
             <a:r>
-              <a:rPr sz="1200">
+              <a:rPr sz="1300">
                 <a:solidFill>
                   <a:srgbClr val="3D5466"/>
                 </a:solidFill>
                 <a:latin typeface="Arial"/>
               </a:rPr>
-              <a:t>Quantitativ (ca. 60–70 % Gewicht):</a:t>
+              <a:t>▸  Projektgebundenheit: Jedes Objekt ist ein Einzelprojekt mit eigenen Fertigstellungs- und Kostenrisiken</a:t>
             </a:r>
           </a:p>
           <a:p>
@@ -6112,7 +7296,7 @@
                 </a:solidFill>
                 <a:latin typeface="Arial"/>
               </a:rPr>
-              <a:t>▸  Rentabilitätskennzahlen (EBIT-Marge, Eigenkapitalrentabilität)</a:t>
+              <a:t>▸  Bauhandwerk: Umsätze 300.000–3 Mio. €, Eigenkapitalquote 10–20 %; Bauträger: Umsätze 1–20 Mio. €, EK-Quote oft 15–30 % (aber volumenabhängig)</a:t>
             </a:r>
           </a:p>
           <a:p>
@@ -6131,7 +7315,7 @@
                 </a:solidFill>
                 <a:latin typeface="Arial"/>
               </a:rPr>
-              <a:t>▸  Liquiditätskennzahlen (Liquiditätsgrade, Cash-Flow-Relationen)</a:t>
+              <a:t>▸  Saisonalität: Wintermonate schwächer, Frühjahr/Sommer stärker</a:t>
             </a:r>
           </a:p>
           <a:p>
@@ -6144,13 +7328,13 @@
               </a:spcAft>
             </a:pPr>
             <a:r>
-              <a:rPr sz="1300">
+              <a:rPr sz="1200">
                 <a:solidFill>
                   <a:srgbClr val="3D5466"/>
                 </a:solidFill>
                 <a:latin typeface="Arial"/>
               </a:rPr>
-              <a:t>▸  Verschuldungskennzahlen (Eigenkapitalquote, Verschuldungsgrad, Zinsdeckungsquote)</a:t>
+              <a:t>Typische Kennzahlen (Benchmark Baugewerbe):</a:t>
             </a:r>
           </a:p>
           <a:p>
@@ -6169,7 +7353,7 @@
                 </a:solidFill>
                 <a:latin typeface="Arial"/>
               </a:rPr>
-              <a:t>▸  Trendindikatoren (Entwicklung über 3 Jahre)</a:t>
+              <a:t>▸  EBIT-Marge: 3–6 % (branchentypisch niedrig wg. Wettbewerbsintensität)</a:t>
             </a:r>
           </a:p>
           <a:p>
@@ -6182,13 +7366,13 @@
               </a:spcAft>
             </a:pPr>
             <a:r>
-              <a:rPr sz="1200">
+              <a:rPr sz="1300">
                 <a:solidFill>
                   <a:srgbClr val="3D5466"/>
                 </a:solidFill>
                 <a:latin typeface="Arial"/>
               </a:rPr>
-              <a:t>Qualitativ (ca. 30–40 % Gewicht):</a:t>
+              <a:t>▸  Eigenkapitalquote: 12–18 %</a:t>
             </a:r>
           </a:p>
           <a:p>
@@ -6207,7 +7391,7 @@
                 </a:solidFill>
                 <a:latin typeface="Arial"/>
               </a:rPr>
-              <a:t>▸  Unternehmerqualität und Management-Kompetenz</a:t>
+              <a:t>▸  Kapitalumschlag: 0,8–1,2x</a:t>
             </a:r>
           </a:p>
           <a:p>
@@ -6226,7 +7410,7 @@
                 </a:solidFill>
                 <a:latin typeface="Arial"/>
               </a:rPr>
-              <a:t>▸  Branchenrisiko (Kerngegenstand dieses Moduls)</a:t>
+              <a:t>▸  Forderungslaufzeit: 45–60 Tage (Rechnungsstellung an Bauherr verzögert)</a:t>
             </a:r>
           </a:p>
           <a:p>
@@ -6239,13 +7423,13 @@
               </a:spcAft>
             </a:pPr>
             <a:r>
-              <a:rPr sz="1300">
+              <a:rPr sz="1200">
                 <a:solidFill>
                   <a:srgbClr val="3D5466"/>
                 </a:solidFill>
                 <a:latin typeface="Arial"/>
               </a:rPr>
-              <a:t>▸  Marktposition und Wettbewerbsfähigkeit</a:t>
+              <a:t>Quellen: Creditreform Branchenberichte ; BVR-Branchenblätter ; Deutsche Bundesbank Unternehmensabschlussstatistik</a:t>
             </a:r>
           </a:p>
           <a:p>
@@ -6258,13 +7442,13 @@
               </a:spcAft>
             </a:pPr>
             <a:r>
-              <a:rPr sz="1300">
+              <a:rPr sz="1200">
                 <a:solidFill>
                   <a:srgbClr val="3D5466"/>
                 </a:solidFill>
                 <a:latin typeface="Arial"/>
               </a:rPr>
-              <a:t>▸  Nachfolgeplanung (bei KMU kritisch)</a:t>
+              <a:t>Kritische Frühwarnindikatoren:</a:t>
             </a:r>
           </a:p>
         </p:txBody>
@@ -6602,7 +7786,7 @@
                 </a:solidFill>
                 <a:latin typeface="Source Serif 4"/>
               </a:rPr>
-              <a:t>Praxiscase: Bäckerei &amp; Konditorei Hofmann GmbH (Stuttgart, fiktiv)</a:t>
+              <a:t>Theorie-Input: VR-Rating und branchenspezifische Ratingfaktoren</a:t>
             </a:r>
           </a:p>
         </p:txBody>
@@ -6644,26 +7828,7 @@
                 </a:solidFill>
                 <a:latin typeface="JetBrains Mono"/>
               </a:rPr>
-              <a:t>4.4.1 UNTERNEHMENSPROFIL</a:t>
-            </a:r>
-          </a:p>
-          <a:p>
-            <a:pPr>
-              <a:spcBef>
-                <a:spcPts val="1000"/>
-              </a:spcBef>
-              <a:spcAft>
-                <a:spcPts val="200"/>
-              </a:spcAft>
-            </a:pPr>
-            <a:r>
-              <a:rPr sz="800" b="1">
-                <a:solidFill>
-                  <a:srgbClr val="78808C"/>
-                </a:solidFill>
-                <a:latin typeface="JetBrains Mono"/>
-              </a:rPr>
-              <a:t>4.4.2 FINANZIELLE SITUATION (JAHRESABSCHLUSS 2024, AUSZÜGE)</a:t>
+              <a:t>4.3.1 AUFBAU DES VR-RATINGS</a:t>
             </a:r>
           </a:p>
           <a:p>
@@ -6682,7 +7847,7 @@
                 </a:solidFill>
                 <a:latin typeface="Arial"/>
               </a:rPr>
-              <a:t>Bilanzauszug:</a:t>
+              <a:t>Das VR-Rating kombiniert quantitative und qualitative Komponenten:</a:t>
             </a:r>
           </a:p>
           <a:p>
@@ -6701,7 +7866,7 @@
                 </a:solidFill>
                 <a:latin typeface="Arial"/>
               </a:rPr>
-              <a:t>Gewinn- und Verlustrechnung 2024:</a:t>
+              <a:t>Quantitativ (ca. 60–70 % Gewicht):</a:t>
             </a:r>
           </a:p>
           <a:p>
@@ -6714,32 +7879,13 @@
               </a:spcAft>
             </a:pPr>
             <a:r>
-              <a:rPr sz="1200">
+              <a:rPr sz="1300">
                 <a:solidFill>
                   <a:srgbClr val="3D5466"/>
                 </a:solidFill>
                 <a:latin typeface="Arial"/>
               </a:rPr>
-              <a:t>Kapitalflussrechnung 2024 (vereinfacht):</a:t>
-            </a:r>
-          </a:p>
-          <a:p>
-            <a:pPr>
-              <a:spcBef>
-                <a:spcPts val="1000"/>
-              </a:spcBef>
-              <a:spcAft>
-                <a:spcPts val="200"/>
-              </a:spcAft>
-            </a:pPr>
-            <a:r>
-              <a:rPr sz="800" b="1">
-                <a:solidFill>
-                  <a:srgbClr val="78808C"/>
-                </a:solidFill>
-                <a:latin typeface="JetBrains Mono"/>
-              </a:rPr>
-              <a:t>4.4.3 KREDITANFRAGE</a:t>
+              <a:t>▸  Rentabilitätskennzahlen (EBIT-Marge, Eigenkapitalrentabilität)</a:t>
             </a:r>
           </a:p>
           <a:p>
@@ -6752,13 +7898,13 @@
               </a:spcAft>
             </a:pPr>
             <a:r>
-              <a:rPr sz="1200">
+              <a:rPr sz="1300">
                 <a:solidFill>
                   <a:srgbClr val="3D5466"/>
                 </a:solidFill>
                 <a:latin typeface="Arial"/>
               </a:rPr>
-              <a:t>Anlass: Investition in neue Backstube Kempten-Süd (170.000 €) + Filialmodernisierung Sonthofen (80.000 €)</a:t>
+              <a:t>▸  Liquiditätskennzahlen (Liquiditätsgrade, Cash-Flow-Relationen)</a:t>
             </a:r>
           </a:p>
           <a:p>
@@ -6771,32 +7917,13 @@
               </a:spcAft>
             </a:pPr>
             <a:r>
-              <a:rPr sz="1200">
+              <a:rPr sz="1300">
                 <a:solidFill>
                   <a:srgbClr val="3D5466"/>
                 </a:solidFill>
                 <a:latin typeface="Arial"/>
               </a:rPr>
-              <a:t>Gesamtkreditbedarf: 250.000 € | Eigenanteil: 30.000 € | Kreditwunsch: 250.000 €</a:t>
-            </a:r>
-          </a:p>
-          <a:p>
-            <a:pPr>
-              <a:spcBef>
-                <a:spcPts val="1000"/>
-              </a:spcBef>
-              <a:spcAft>
-                <a:spcPts val="200"/>
-              </a:spcAft>
-            </a:pPr>
-            <a:r>
-              <a:rPr sz="800" b="1">
-                <a:solidFill>
-                  <a:srgbClr val="78808C"/>
-                </a:solidFill>
-                <a:latin typeface="JetBrains Mono"/>
-              </a:rPr>
-              <a:t>4.4.4 GESPRÄCHSVERLAUF: BRANCHENRISIKOANALYSE (BER = BERATER, GF = GESCHÄFTSFÜHRERIN)</a:t>
+              <a:t>▸  Verschuldungskennzahlen (Eigenkapitalquote, Verschuldungsgrad, Zinsdeckungsquote)</a:t>
             </a:r>
           </a:p>
           <a:p>
@@ -6809,13 +7936,13 @@
               </a:spcAft>
             </a:pPr>
             <a:r>
-              <a:rPr sz="1200">
+              <a:rPr sz="1300">
                 <a:solidFill>
                   <a:srgbClr val="3D5466"/>
                 </a:solidFill>
                 <a:latin typeface="Arial"/>
               </a:rPr>
-              <a:t>Session 1 – Erstgespräch Branchenrisiko</a:t>
+              <a:t>▸  Trendindikatoren (Entwicklung über 3 Jahre)</a:t>
             </a:r>
           </a:p>
           <a:p>
@@ -6834,7 +7961,7 @@
                 </a:solidFill>
                 <a:latin typeface="Arial"/>
               </a:rPr>
-              <a:t>GF: „Wir konnten die Preise nur um etwa 8–10 % erhöhen, ohne Kunden zu verlieren. Das hat die Marge deutlich gedrückt."</a:t>
+              <a:t>Qualitativ (ca. 30–40 % Gewicht):</a:t>
             </a:r>
           </a:p>
           <a:p>
@@ -6847,13 +7974,70 @@
               </a:spcAft>
             </a:pPr>
             <a:r>
-              <a:rPr sz="1200">
+              <a:rPr sz="1300">
                 <a:solidFill>
                   <a:srgbClr val="3D5466"/>
                 </a:solidFill>
                 <a:latin typeface="Arial"/>
               </a:rPr>
-              <a:t>GF: „Nein, wir kaufen zu aktuellen Marktpreisen. Die Lieferanten bieten keine Festpreise an."</a:t>
+              <a:t>▸  Unternehmerqualität und Management-Kompetenz</a:t>
+            </a:r>
+          </a:p>
+          <a:p>
+            <a:pPr>
+              <a:spcBef>
+                <a:spcPts val="400"/>
+              </a:spcBef>
+              <a:spcAft>
+                <a:spcPts val="200"/>
+              </a:spcAft>
+            </a:pPr>
+            <a:r>
+              <a:rPr sz="1300">
+                <a:solidFill>
+                  <a:srgbClr val="3D5466"/>
+                </a:solidFill>
+                <a:latin typeface="Arial"/>
+              </a:rPr>
+              <a:t>▸  Branchenrisiko (Kerngegenstand dieses Moduls)</a:t>
+            </a:r>
+          </a:p>
+          <a:p>
+            <a:pPr>
+              <a:spcBef>
+                <a:spcPts val="400"/>
+              </a:spcBef>
+              <a:spcAft>
+                <a:spcPts val="200"/>
+              </a:spcAft>
+            </a:pPr>
+            <a:r>
+              <a:rPr sz="1300">
+                <a:solidFill>
+                  <a:srgbClr val="3D5466"/>
+                </a:solidFill>
+                <a:latin typeface="Arial"/>
+              </a:rPr>
+              <a:t>▸  Marktposition und Wettbewerbsfähigkeit</a:t>
+            </a:r>
+          </a:p>
+          <a:p>
+            <a:pPr>
+              <a:spcBef>
+                <a:spcPts val="400"/>
+              </a:spcBef>
+              <a:spcAft>
+                <a:spcPts val="200"/>
+              </a:spcAft>
+            </a:pPr>
+            <a:r>
+              <a:rPr sz="1300">
+                <a:solidFill>
+                  <a:srgbClr val="3D5466"/>
+                </a:solidFill>
+                <a:latin typeface="Arial"/>
+              </a:rPr>
+              <a:t>▸  Nachfolgeplanung (bei KMU kritisch)</a:t>
             </a:r>
           </a:p>
         </p:txBody>
@@ -7191,7 +8375,7 @@
                 </a:solidFill>
                 <a:latin typeface="Source Serif 4"/>
               </a:rPr>
-              <a:t>Arbeitsblatt: Branchenrisiko-Analyse-Template</a:t>
+              <a:t>Praxiscase: Bäckerei &amp; Konditorei Hofmann GmbH (Stuttgart, fiktiv)</a:t>
             </a:r>
           </a:p>
         </p:txBody>
@@ -7217,6 +8401,44 @@
             <a:spAutoFit/>
           </a:bodyPr>
           <a:lstStyle/>
+          <a:p>
+            <a:pPr>
+              <a:spcBef>
+                <a:spcPts val="1000"/>
+              </a:spcBef>
+              <a:spcAft>
+                <a:spcPts val="200"/>
+              </a:spcAft>
+            </a:pPr>
+            <a:r>
+              <a:rPr sz="800" b="1">
+                <a:solidFill>
+                  <a:srgbClr val="78808C"/>
+                </a:solidFill>
+                <a:latin typeface="JetBrains Mono"/>
+              </a:rPr>
+              <a:t>4.4.1 UNTERNEHMENSPROFIL</a:t>
+            </a:r>
+          </a:p>
+          <a:p>
+            <a:pPr>
+              <a:spcBef>
+                <a:spcPts val="1000"/>
+              </a:spcBef>
+              <a:spcAft>
+                <a:spcPts val="200"/>
+              </a:spcAft>
+            </a:pPr>
+            <a:r>
+              <a:rPr sz="800" b="1">
+                <a:solidFill>
+                  <a:srgbClr val="78808C"/>
+                </a:solidFill>
+                <a:latin typeface="JetBrains Mono"/>
+              </a:rPr>
+              <a:t>4.4.2 FINANZIELLE SITUATION (JAHRESABSCHLUSS 2024, AUSZÜGE)</a:t>
+            </a:r>
+          </a:p>
           <a:p>
             <a:pPr>
               <a:spcBef>
@@ -7233,7 +8455,7 @@
                 </a:solidFill>
                 <a:latin typeface="Arial"/>
               </a:rPr>
-              <a:t>ARBEITSBLATT: BRANCHENRISIKO-ANALYSE</a:t>
+              <a:t>Bilanzauszug:</a:t>
             </a:r>
           </a:p>
           <a:p>
@@ -7252,7 +8474,7 @@
                 </a:solidFill>
                 <a:latin typeface="Arial"/>
               </a:rPr>
-              <a:t>Kreditgeber: _______________ | Kundenberater: _______________ | Datum: ___.____.______</a:t>
+              <a:t>Gewinn- und Verlustrechnung 2024:</a:t>
             </a:r>
           </a:p>
           <a:p>
@@ -7271,7 +8493,26 @@
                 </a:solidFill>
                 <a:latin typeface="Arial"/>
               </a:rPr>
-              <a:t>Kreditnehmer: _______________ | Kundennummer: _______________</a:t>
+              <a:t>Kapitalflussrechnung 2024 (vereinfacht):</a:t>
+            </a:r>
+          </a:p>
+          <a:p>
+            <a:pPr>
+              <a:spcBef>
+                <a:spcPts val="1000"/>
+              </a:spcBef>
+              <a:spcAft>
+                <a:spcPts val="200"/>
+              </a:spcAft>
+            </a:pPr>
+            <a:r>
+              <a:rPr sz="800" b="1">
+                <a:solidFill>
+                  <a:srgbClr val="78808C"/>
+                </a:solidFill>
+                <a:latin typeface="JetBrains Mono"/>
+              </a:rPr>
+              <a:t>4.4.3 KREDITANFRAGE</a:t>
             </a:r>
           </a:p>
           <a:p>
@@ -7290,7 +8531,7 @@
                 </a:solidFill>
                 <a:latin typeface="Arial"/>
               </a:rPr>
-              <a:t>TEIL A – BRANCHENIDENTIFIKATION</a:t>
+              <a:t>Anlass: Investition in neue Backstube Kempten-Süd (170.000 €) + Filialmodernisierung Sonthofen (80.000 €)</a:t>
             </a:r>
           </a:p>
           <a:p>
@@ -7309,7 +8550,26 @@
                 </a:solidFill>
                 <a:latin typeface="Arial"/>
               </a:rPr>
-              <a:t>TEIL B – PORTER'S FIVE FORCES (1 = sehr gering, 5 = sehr hoch)</a:t>
+              <a:t>Gesamtkreditbedarf: 250.000 € | Eigenanteil: 30.000 € | Kreditwunsch: 250.000 €</a:t>
+            </a:r>
+          </a:p>
+          <a:p>
+            <a:pPr>
+              <a:spcBef>
+                <a:spcPts val="1000"/>
+              </a:spcBef>
+              <a:spcAft>
+                <a:spcPts val="200"/>
+              </a:spcAft>
+            </a:pPr>
+            <a:r>
+              <a:rPr sz="800" b="1">
+                <a:solidFill>
+                  <a:srgbClr val="78808C"/>
+                </a:solidFill>
+                <a:latin typeface="JetBrains Mono"/>
+              </a:rPr>
+              <a:t>4.4.4 GESPRÄCHSVERLAUF: BRANCHENRISIKOANALYSE (BER = BERATER, GF = GESCHÄFTSFÜHRERIN)</a:t>
             </a:r>
           </a:p>
           <a:p>
@@ -7328,7 +8588,7 @@
                 </a:solidFill>
                 <a:latin typeface="Arial"/>
               </a:rPr>
-              <a:t>TEIL C – KENNZAHLEN IM BRANCHENVERGLEICH</a:t>
+              <a:t>Session 1 – Erstgespräch Branchenrisiko</a:t>
             </a:r>
           </a:p>
           <a:p>
@@ -7347,7 +8607,7 @@
                 </a:solidFill>
                 <a:latin typeface="Arial"/>
               </a:rPr>
-              <a:t>Gesamteinschätzung: ☐ Deutlich besser als Branche ☐ Vergleichbar ☐ Schwächer als Branche</a:t>
+              <a:t>GF: „Wir konnten die Preise nur um etwa 8–10 % erhöhen, ohne Kunden zu verlieren. Das hat die Marge deutlich gedrückt."</a:t>
             </a:r>
           </a:p>
           <a:p>
@@ -7366,83 +8626,7 @@
                 </a:solidFill>
                 <a:latin typeface="Arial"/>
               </a:rPr>
-              <a:t>TEIL D – FRÜHWARNINDIKATOREN (☐ nicht relevant | ⚠ Warnung | ✗ kritisch)</a:t>
-            </a:r>
-          </a:p>
-          <a:p>
-            <a:pPr>
-              <a:spcBef>
-                <a:spcPts val="400"/>
-              </a:spcBef>
-              <a:spcAft>
-                <a:spcPts val="200"/>
-              </a:spcAft>
-            </a:pPr>
-            <a:r>
-              <a:rPr sz="1200">
-                <a:solidFill>
-                  <a:srgbClr val="3D5466"/>
-                </a:solidFill>
-                <a:latin typeface="Arial"/>
-              </a:rPr>
-              <a:t>Branchenumfeld:</a:t>
-            </a:r>
-          </a:p>
-          <a:p>
-            <a:pPr>
-              <a:spcBef>
-                <a:spcPts val="400"/>
-              </a:spcBef>
-              <a:spcAft>
-                <a:spcPts val="200"/>
-              </a:spcAft>
-            </a:pPr>
-            <a:r>
-              <a:rPr sz="1300">
-                <a:solidFill>
-                  <a:srgbClr val="3D5466"/>
-                </a:solidFill>
-                <a:latin typeface="Arial"/>
-              </a:rPr>
-              <a:t>▸  ☐ ⚠ ✗ Brancheninsolvenzquote gestiegen &gt;5 % ggü. Vorjahr</a:t>
-            </a:r>
-          </a:p>
-          <a:p>
-            <a:pPr>
-              <a:spcBef>
-                <a:spcPts val="400"/>
-              </a:spcBef>
-              <a:spcAft>
-                <a:spcPts val="200"/>
-              </a:spcAft>
-            </a:pPr>
-            <a:r>
-              <a:rPr sz="1300">
-                <a:solidFill>
-                  <a:srgbClr val="3D5466"/>
-                </a:solidFill>
-                <a:latin typeface="Arial"/>
-              </a:rPr>
-              <a:t>▸  ☐ ⚠ ✗ Branchenumsatz rückläufig &gt;3 % ggü. Vorjahr</a:t>
-            </a:r>
-          </a:p>
-          <a:p>
-            <a:pPr>
-              <a:spcBef>
-                <a:spcPts val="400"/>
-              </a:spcBef>
-              <a:spcAft>
-                <a:spcPts val="200"/>
-              </a:spcAft>
-            </a:pPr>
-            <a:r>
-              <a:rPr sz="1300">
-                <a:solidFill>
-                  <a:srgbClr val="3D5466"/>
-                </a:solidFill>
-                <a:latin typeface="Arial"/>
-              </a:rPr>
-              <a:t>▸  ☐ ⚠ ✗ ifo Geschäftsklimaindex Branche &lt;90 Punkte</a:t>
+              <a:t>GF: „Nein, wir kaufen zu aktuellen Marktpreisen. Die Lieferanten bieten keine Festpreise an."</a:t>
             </a:r>
           </a:p>
         </p:txBody>
@@ -7851,4 +9035,324 @@
   </a:objectDefaults>
   <a:extraClrSchemeLst/>
 </a:theme>
+</file>
+
+<file path=ppt/theme/theme2.xml><?xml version="1.0" encoding="utf-8"?>
+<a:theme xmlns:a="http://schemas.openxmlformats.org/drawingml/2006/main" name="Office Theme">
+  <a:themeElements>
+    <a:clrScheme name="Office">
+      <a:dk1>
+        <a:sysClr val="windowText" lastClr="000000"/>
+      </a:dk1>
+      <a:lt1>
+        <a:sysClr val="window" lastClr="FFFFFF"/>
+      </a:lt1>
+      <a:dk2>
+        <a:srgbClr val="1F497D"/>
+      </a:dk2>
+      <a:lt2>
+        <a:srgbClr val="EEECE1"/>
+      </a:lt2>
+      <a:accent1>
+        <a:srgbClr val="4F81BD"/>
+      </a:accent1>
+      <a:accent2>
+        <a:srgbClr val="C0504D"/>
+      </a:accent2>
+      <a:accent3>
+        <a:srgbClr val="9BBB59"/>
+      </a:accent3>
+      <a:accent4>
+        <a:srgbClr val="8064A2"/>
+      </a:accent4>
+      <a:accent5>
+        <a:srgbClr val="4BACC6"/>
+      </a:accent5>
+      <a:accent6>
+        <a:srgbClr val="F79646"/>
+      </a:accent6>
+      <a:hlink>
+        <a:srgbClr val="0000FF"/>
+      </a:hlink>
+      <a:folHlink>
+        <a:srgbClr val="800080"/>
+      </a:folHlink>
+    </a:clrScheme>
+    <a:fontScheme name="Office">
+      <a:majorFont>
+        <a:latin typeface="Calibri"/>
+        <a:ea typeface=""/>
+        <a:cs typeface=""/>
+        <a:font script="Jpan" typeface="ＭＳ Ｐゴシック"/>
+        <a:font script="Hang" typeface="맑은 고딕"/>
+        <a:font script="Hans" typeface="宋体"/>
+        <a:font script="Hant" typeface="新細明體"/>
+        <a:font script="Arab" typeface="Times New Roman"/>
+        <a:font script="Hebr" typeface="Times New Roman"/>
+        <a:font script="Thai" typeface="Angsana New"/>
+        <a:font script="Ethi" typeface="Nyala"/>
+        <a:font script="Beng" typeface="Vrinda"/>
+        <a:font script="Gujr" typeface="Shruti"/>
+        <a:font script="Khmr" typeface="MoolBoran"/>
+        <a:font script="Knda" typeface="Tunga"/>
+        <a:font script="Guru" typeface="Raavi"/>
+        <a:font script="Cans" typeface="Euphemia"/>
+        <a:font script="Cher" typeface="Plantagenet Cherokee"/>
+        <a:font script="Yiii" typeface="Microsoft Yi Baiti"/>
+        <a:font script="Tibt" typeface="Microsoft Himalaya"/>
+        <a:font script="Thaa" typeface="MV Boli"/>
+        <a:font script="Deva" typeface="Mangal"/>
+        <a:font script="Telu" typeface="Gautami"/>
+        <a:font script="Taml" typeface="Latha"/>
+        <a:font script="Syrc" typeface="Estrangelo Edessa"/>
+        <a:font script="Orya" typeface="Kalinga"/>
+        <a:font script="Mlym" typeface="Kartika"/>
+        <a:font script="Laoo" typeface="DokChampa"/>
+        <a:font script="Sinh" typeface="Iskoola Pota"/>
+        <a:font script="Mong" typeface="Mongolian Baiti"/>
+        <a:font script="Viet" typeface="Times New Roman"/>
+        <a:font script="Uigh" typeface="Microsoft Uighur"/>
+        <a:font script="Geor" typeface="Sylfaen"/>
+      </a:majorFont>
+      <a:minorFont>
+        <a:latin typeface="Calibri"/>
+        <a:ea typeface=""/>
+        <a:cs typeface=""/>
+        <a:font script="Jpan" typeface="ＭＳ Ｐゴシック"/>
+        <a:font script="Hang" typeface="맑은 고딕"/>
+        <a:font script="Hans" typeface="宋体"/>
+        <a:font script="Hant" typeface="新細明體"/>
+        <a:font script="Arab" typeface="Arial"/>
+        <a:font script="Hebr" typeface="Arial"/>
+        <a:font script="Thai" typeface="Cordia New"/>
+        <a:font script="Ethi" typeface="Nyala"/>
+        <a:font script="Beng" typeface="Vrinda"/>
+        <a:font script="Gujr" typeface="Shruti"/>
+        <a:font script="Khmr" typeface="DaunPenh"/>
+        <a:font script="Knda" typeface="Tunga"/>
+        <a:font script="Guru" typeface="Raavi"/>
+        <a:font script="Cans" typeface="Euphemia"/>
+        <a:font script="Cher" typeface="Plantagenet Cherokee"/>
+        <a:font script="Yiii" typeface="Microsoft Yi Baiti"/>
+        <a:font script="Tibt" typeface="Microsoft Himalaya"/>
+        <a:font script="Thaa" typeface="MV Boli"/>
+        <a:font script="Deva" typeface="Mangal"/>
+        <a:font script="Telu" typeface="Gautami"/>
+        <a:font script="Taml" typeface="Latha"/>
+        <a:font script="Syrc" typeface="Estrangelo Edessa"/>
+        <a:font script="Orya" typeface="Kalinga"/>
+        <a:font script="Mlym" typeface="Kartika"/>
+        <a:font script="Laoo" typeface="DokChampa"/>
+        <a:font script="Sinh" typeface="Iskoola Pota"/>
+        <a:font script="Mong" typeface="Mongolian Baiti"/>
+        <a:font script="Viet" typeface="Arial"/>
+        <a:font script="Uigh" typeface="Microsoft Uighur"/>
+        <a:font script="Geor" typeface="Sylfaen"/>
+      </a:minorFont>
+    </a:fontScheme>
+    <a:fmtScheme name="Office">
+      <a:fillStyleLst>
+        <a:solidFill>
+          <a:schemeClr val="phClr"/>
+        </a:solidFill>
+        <a:gradFill rotWithShape="1">
+          <a:gsLst>
+            <a:gs pos="0">
+              <a:schemeClr val="phClr">
+                <a:tint val="50000"/>
+                <a:satMod val="300000"/>
+              </a:schemeClr>
+            </a:gs>
+            <a:gs pos="35000">
+              <a:schemeClr val="phClr">
+                <a:tint val="37000"/>
+                <a:satMod val="300000"/>
+              </a:schemeClr>
+            </a:gs>
+            <a:gs pos="100000">
+              <a:schemeClr val="phClr">
+                <a:tint val="15000"/>
+                <a:satMod val="350000"/>
+              </a:schemeClr>
+            </a:gs>
+          </a:gsLst>
+          <a:lin ang="16200000" scaled="1"/>
+        </a:gradFill>
+        <a:gradFill rotWithShape="1">
+          <a:gsLst>
+            <a:gs pos="0">
+              <a:schemeClr val="phClr">
+                <a:tint val="100000"/>
+                <a:shade val="100000"/>
+                <a:satMod val="130000"/>
+              </a:schemeClr>
+            </a:gs>
+            <a:gs pos="100000">
+              <a:schemeClr val="phClr">
+                <a:tint val="50000"/>
+                <a:shade val="100000"/>
+                <a:satMod val="350000"/>
+              </a:schemeClr>
+            </a:gs>
+          </a:gsLst>
+          <a:lin ang="16200000" scaled="0"/>
+        </a:gradFill>
+      </a:fillStyleLst>
+      <a:lnStyleLst>
+        <a:ln w="9525" cap="flat" cmpd="sng" algn="ctr">
+          <a:solidFill>
+            <a:schemeClr val="phClr">
+              <a:shade val="95000"/>
+              <a:satMod val="105000"/>
+            </a:schemeClr>
+          </a:solidFill>
+          <a:prstDash val="solid"/>
+        </a:ln>
+        <a:ln w="25400" cap="flat" cmpd="sng" algn="ctr">
+          <a:solidFill>
+            <a:schemeClr val="phClr"/>
+          </a:solidFill>
+          <a:prstDash val="solid"/>
+        </a:ln>
+        <a:ln w="38100" cap="flat" cmpd="sng" algn="ctr">
+          <a:solidFill>
+            <a:schemeClr val="phClr"/>
+          </a:solidFill>
+          <a:prstDash val="solid"/>
+        </a:ln>
+      </a:lnStyleLst>
+      <a:effectStyleLst>
+        <a:effectStyle>
+          <a:effectLst>
+            <a:outerShdw blurRad="40000" dist="20000" dir="5400000" rotWithShape="0">
+              <a:srgbClr val="000000">
+                <a:alpha val="38000"/>
+              </a:srgbClr>
+            </a:outerShdw>
+          </a:effectLst>
+        </a:effectStyle>
+        <a:effectStyle>
+          <a:effectLst>
+            <a:outerShdw blurRad="40000" dist="23000" dir="5400000" rotWithShape="0">
+              <a:srgbClr val="000000">
+                <a:alpha val="35000"/>
+              </a:srgbClr>
+            </a:outerShdw>
+          </a:effectLst>
+        </a:effectStyle>
+        <a:effectStyle>
+          <a:effectLst>
+            <a:outerShdw blurRad="40000" dist="23000" dir="5400000" rotWithShape="0">
+              <a:srgbClr val="000000">
+                <a:alpha val="35000"/>
+              </a:srgbClr>
+            </a:outerShdw>
+          </a:effectLst>
+          <a:scene3d>
+            <a:camera prst="orthographicFront">
+              <a:rot lat="0" lon="0" rev="0"/>
+            </a:camera>
+            <a:lightRig rig="threePt" dir="t">
+              <a:rot lat="0" lon="0" rev="1200000"/>
+            </a:lightRig>
+          </a:scene3d>
+          <a:sp3d>
+            <a:bevelT w="63500" h="25400"/>
+          </a:sp3d>
+        </a:effectStyle>
+      </a:effectStyleLst>
+      <a:bgFillStyleLst>
+        <a:solidFill>
+          <a:schemeClr val="phClr"/>
+        </a:solidFill>
+        <a:gradFill rotWithShape="1">
+          <a:gsLst>
+            <a:gs pos="0">
+              <a:schemeClr val="phClr">
+                <a:tint val="40000"/>
+                <a:satMod val="350000"/>
+              </a:schemeClr>
+            </a:gs>
+            <a:gs pos="40000">
+              <a:schemeClr val="phClr">
+                <a:tint val="45000"/>
+                <a:shade val="99000"/>
+                <a:satMod val="350000"/>
+              </a:schemeClr>
+            </a:gs>
+            <a:gs pos="100000">
+              <a:schemeClr val="phClr">
+                <a:shade val="20000"/>
+                <a:satMod val="255000"/>
+              </a:schemeClr>
+            </a:gs>
+          </a:gsLst>
+          <a:path path="circle">
+            <a:fillToRect l="50000" t="-80000" r="50000" b="180000"/>
+          </a:path>
+        </a:gradFill>
+        <a:gradFill rotWithShape="1">
+          <a:gsLst>
+            <a:gs pos="0">
+              <a:schemeClr val="phClr">
+                <a:tint val="80000"/>
+                <a:satMod val="300000"/>
+              </a:schemeClr>
+            </a:gs>
+            <a:gs pos="100000">
+              <a:schemeClr val="phClr">
+                <a:shade val="30000"/>
+                <a:satMod val="200000"/>
+              </a:schemeClr>
+            </a:gs>
+          </a:gsLst>
+          <a:path path="circle">
+            <a:fillToRect l="50000" t="50000" r="50000" b="50000"/>
+          </a:path>
+        </a:gradFill>
+      </a:bgFillStyleLst>
+    </a:fmtScheme>
+  </a:themeElements>
+  <a:objectDefaults>
+    <a:spDef>
+      <a:spPr/>
+      <a:bodyPr/>
+      <a:lstStyle/>
+      <a:style>
+        <a:lnRef idx="1">
+          <a:schemeClr val="accent1"/>
+        </a:lnRef>
+        <a:fillRef idx="3">
+          <a:schemeClr val="accent1"/>
+        </a:fillRef>
+        <a:effectRef idx="2">
+          <a:schemeClr val="accent1"/>
+        </a:effectRef>
+        <a:fontRef idx="minor">
+          <a:schemeClr val="lt1"/>
+        </a:fontRef>
+      </a:style>
+    </a:spDef>
+    <a:lnDef>
+      <a:spPr/>
+      <a:bodyPr/>
+      <a:lstStyle/>
+      <a:style>
+        <a:lnRef idx="2">
+          <a:schemeClr val="accent1"/>
+        </a:lnRef>
+        <a:fillRef idx="0">
+          <a:schemeClr val="accent1"/>
+        </a:fillRef>
+        <a:effectRef idx="1">
+          <a:schemeClr val="accent1"/>
+        </a:effectRef>
+        <a:fontRef idx="minor">
+          <a:schemeClr val="tx1"/>
+        </a:fontRef>
+      </a:style>
+    </a:lnDef>
+  </a:objectDefaults>
+  <a:extraClrSchemeLst/>
+</a:theme>
 </file>
--- a/protected-downloads/praesentation/M05.pptx
+++ b/protected-downloads/praesentation/M05.pptx
@@ -4025,7 +4025,42 @@
       </p:sp>
       <p:sp>
         <p:nvSpPr>
-          <p:cNvPr id="6" name="Rectangle 5"/>
+          <p:cNvPr id="6" name="TextBox 5"/>
+          <p:cNvSpPr txBox="1"/>
+          <p:nvPr/>
+        </p:nvSpPr>
+        <p:spPr>
+          <a:xfrm>
+            <a:off x="685800" y="3977639"/>
+            <a:ext cx="10817352" cy="731520"/>
+          </a:xfrm>
+          <a:prstGeom prst="rect">
+            <a:avLst/>
+          </a:prstGeom>
+          <a:noFill/>
+        </p:spPr>
+        <p:txBody>
+          <a:bodyPr wrap="square">
+            <a:spAutoFit/>
+          </a:bodyPr>
+          <a:lstStyle/>
+          <a:p>
+            <a:pPr algn="l"/>
+            <a:r>
+              <a:rPr sz="1900" b="0" i="1">
+                <a:solidFill>
+                  <a:srgbClr val="BECDE6"/>
+                </a:solidFill>
+                <a:latin typeface="Source Serif 4"/>
+              </a:rPr>
+              <a:t>Systematische Branchenrisikoanalyse als Basis für differenzierte Kreditentscheidungen</a:t>
+            </a:r>
+          </a:p>
+        </p:txBody>
+      </p:sp>
+      <p:sp>
+        <p:nvSpPr>
+          <p:cNvPr id="7" name="Rectangle 6"/>
           <p:cNvSpPr/>
           <p:nvPr/>
         </p:nvSpPr>
@@ -4068,14 +4103,14 @@
       </p:sp>
       <p:sp>
         <p:nvSpPr>
-          <p:cNvPr id="7" name="TextBox 6"/>
+          <p:cNvPr id="8" name="TextBox 7"/>
           <p:cNvSpPr txBox="1"/>
           <p:nvPr/>
         </p:nvSpPr>
         <p:spPr>
           <a:xfrm>
             <a:off x="685800" y="5193792"/>
-            <a:ext cx="10817352" cy="201168"/>
+            <a:ext cx="3605784" cy="201168"/>
           </a:xfrm>
           <a:prstGeom prst="rect">
             <a:avLst/>
@@ -4096,21 +4131,21 @@
                 </a:solidFill>
                 <a:latin typeface="JetBrains Mono"/>
               </a:rPr>
-              <a:t>VERSION</a:t>
-            </a:r>
-          </a:p>
-        </p:txBody>
-      </p:sp>
-      <p:sp>
-        <p:nvSpPr>
-          <p:cNvPr id="8" name="TextBox 7"/>
+              <a:t>KOMPETENZFELD</a:t>
+            </a:r>
+          </a:p>
+        </p:txBody>
+      </p:sp>
+      <p:sp>
+        <p:nvSpPr>
+          <p:cNvPr id="9" name="TextBox 8"/>
           <p:cNvSpPr txBox="1"/>
           <p:nvPr/>
         </p:nvSpPr>
         <p:spPr>
           <a:xfrm>
             <a:off x="685800" y="5394960"/>
-            <a:ext cx="10817352" cy="320040"/>
+            <a:ext cx="3605784" cy="320040"/>
           </a:xfrm>
           <a:prstGeom prst="rect">
             <a:avLst/>
@@ -4131,14 +4166,154 @@
                 </a:solidFill>
                 <a:latin typeface="Arial"/>
               </a:rPr>
-              <a:t>v0.3_KERN</a:t>
-            </a:r>
-          </a:p>
-        </p:txBody>
-      </p:sp>
-      <p:sp>
-        <p:nvSpPr>
-          <p:cNvPr id="9" name="Rectangle 8"/>
+              <a:t>K-01 Finanzanalyse &amp; Kreditexpertise</a:t>
+            </a:r>
+          </a:p>
+        </p:txBody>
+      </p:sp>
+      <p:sp>
+        <p:nvSpPr>
+          <p:cNvPr id="10" name="TextBox 9"/>
+          <p:cNvSpPr txBox="1"/>
+          <p:nvPr/>
+        </p:nvSpPr>
+        <p:spPr>
+          <a:xfrm>
+            <a:off x="4291584" y="5193792"/>
+            <a:ext cx="3605784" cy="201168"/>
+          </a:xfrm>
+          <a:prstGeom prst="rect">
+            <a:avLst/>
+          </a:prstGeom>
+          <a:noFill/>
+        </p:spPr>
+        <p:txBody>
+          <a:bodyPr wrap="none">
+            <a:spAutoFit/>
+          </a:bodyPr>
+          <a:lstStyle/>
+          <a:p>
+            <a:pPr algn="l"/>
+            <a:r>
+              <a:rPr sz="700">
+                <a:solidFill>
+                  <a:srgbClr val="A0B4D2"/>
+                </a:solidFill>
+                <a:latin typeface="JetBrains Mono"/>
+              </a:rPr>
+              <a:t>KOMPETENZSTUFE</a:t>
+            </a:r>
+          </a:p>
+        </p:txBody>
+      </p:sp>
+      <p:sp>
+        <p:nvSpPr>
+          <p:cNvPr id="11" name="TextBox 10"/>
+          <p:cNvSpPr txBox="1"/>
+          <p:nvPr/>
+        </p:nvSpPr>
+        <p:spPr>
+          <a:xfrm>
+            <a:off x="4291584" y="5394960"/>
+            <a:ext cx="3605784" cy="320040"/>
+          </a:xfrm>
+          <a:prstGeom prst="rect">
+            <a:avLst/>
+          </a:prstGeom>
+          <a:noFill/>
+        </p:spPr>
+        <p:txBody>
+          <a:bodyPr wrap="square">
+            <a:spAutoFit/>
+          </a:bodyPr>
+          <a:lstStyle/>
+          <a:p>
+            <a:pPr algn="l"/>
+            <a:r>
+              <a:rPr sz="1100" b="0" i="0">
+                <a:solidFill>
+                  <a:srgbClr val="FFFFFF"/>
+                </a:solidFill>
+                <a:latin typeface="Arial"/>
+              </a:rPr>
+              <a:t>Strategischer Partner</a:t>
+            </a:r>
+          </a:p>
+        </p:txBody>
+      </p:sp>
+      <p:sp>
+        <p:nvSpPr>
+          <p:cNvPr id="12" name="TextBox 11"/>
+          <p:cNvSpPr txBox="1"/>
+          <p:nvPr/>
+        </p:nvSpPr>
+        <p:spPr>
+          <a:xfrm>
+            <a:off x="7897368" y="5193792"/>
+            <a:ext cx="3605784" cy="201168"/>
+          </a:xfrm>
+          <a:prstGeom prst="rect">
+            <a:avLst/>
+          </a:prstGeom>
+          <a:noFill/>
+        </p:spPr>
+        <p:txBody>
+          <a:bodyPr wrap="none">
+            <a:spAutoFit/>
+          </a:bodyPr>
+          <a:lstStyle/>
+          <a:p>
+            <a:pPr algn="l"/>
+            <a:r>
+              <a:rPr sz="700">
+                <a:solidFill>
+                  <a:srgbClr val="A0B4D2"/>
+                </a:solidFill>
+                <a:latin typeface="JetBrains Mono"/>
+              </a:rPr>
+              <a:t>VERSION</a:t>
+            </a:r>
+          </a:p>
+        </p:txBody>
+      </p:sp>
+      <p:sp>
+        <p:nvSpPr>
+          <p:cNvPr id="13" name="TextBox 12"/>
+          <p:cNvSpPr txBox="1"/>
+          <p:nvPr/>
+        </p:nvSpPr>
+        <p:spPr>
+          <a:xfrm>
+            <a:off x="7897368" y="5394960"/>
+            <a:ext cx="3605784" cy="320040"/>
+          </a:xfrm>
+          <a:prstGeom prst="rect">
+            <a:avLst/>
+          </a:prstGeom>
+          <a:noFill/>
+        </p:spPr>
+        <p:txBody>
+          <a:bodyPr wrap="square">
+            <a:spAutoFit/>
+          </a:bodyPr>
+          <a:lstStyle/>
+          <a:p>
+            <a:pPr algn="l"/>
+            <a:r>
+              <a:rPr sz="1100" b="0" i="0">
+                <a:solidFill>
+                  <a:srgbClr val="FFFFFF"/>
+                </a:solidFill>
+                <a:latin typeface="Arial"/>
+              </a:rPr>
+              <a:t>v0.3</a:t>
+            </a:r>
+          </a:p>
+        </p:txBody>
+      </p:sp>
+      <p:sp>
+        <p:nvSpPr>
+          <p:cNvPr id="14" name="Rectangle 13"/>
           <p:cNvSpPr/>
           <p:nvPr/>
         </p:nvSpPr>
@@ -4181,7 +4356,7 @@
       </p:sp>
       <p:sp>
         <p:nvSpPr>
-          <p:cNvPr id="10" name="TextBox 9"/>
+          <p:cNvPr id="15" name="TextBox 14"/>
           <p:cNvSpPr txBox="1"/>
           <p:nvPr/>
         </p:nvSpPr>
@@ -4216,7 +4391,7 @@
       </p:sp>
       <p:sp>
         <p:nvSpPr>
-          <p:cNvPr id="11" name="TextBox 10"/>
+          <p:cNvPr id="16" name="TextBox 15"/>
           <p:cNvSpPr txBox="1"/>
           <p:nvPr/>
         </p:nvSpPr>
@@ -5092,7 +5267,7 @@
                 </a:solidFill>
                 <a:latin typeface="Arial"/>
               </a:rPr>
-              <a:t>▸  Branchenspezifische Risikotreiber anhand von Finanzkennzahlen und Marktdaten analysieren und gegenüber gesamtwirtschaftlichen Trends einordnen (Bloom 4)</a:t>
+              <a:t>▸  Branchenspezifische Risikotreiber anhand von Finanzkennzahlen und Marktdaten analysieren und gegenüber gesamtwirtschaftlichen Trends einordnen</a:t>
             </a:r>
           </a:p>
           <a:p>
@@ -5111,7 +5286,7 @@
                 </a:solidFill>
                 <a:latin typeface="Arial"/>
               </a:rPr>
-              <a:t>▸  Das Gesamtrisikoprofil eines KMU durch kritische Gegenüberstellung von Branchencharakteristiken mit unternehmensspezifischen Kennzahlen bewerten (Bloom 5)</a:t>
+              <a:t>▸  Das Gesamtrisikoprofil eines KMU durch kritische Gegenüberstellung von Branchencharakteristiken mit unternehmensspezifischen Kennzahlen bewerten</a:t>
             </a:r>
           </a:p>
           <a:p>
@@ -5130,7 +5305,7 @@
                 </a:solidFill>
                 <a:latin typeface="Arial"/>
               </a:rPr>
-              <a:t>▸  Kreditanträge branchenübergreifend vergleichend beurteilen und Chancen wie Risiken transparent kommunizieren (Bloom 5)</a:t>
+              <a:t>▸  Kreditanträge branchenübergreifend vergleichend beurteilen und Chancen wie Risiken transparent kommunizieren</a:t>
             </a:r>
           </a:p>
           <a:p>
@@ -5149,7 +5324,7 @@
                 </a:solidFill>
                 <a:latin typeface="Arial"/>
               </a:rPr>
-              <a:t>▸  Ein individualisiertes Branchenrisiko-Scoring-Modell für die eigene Geschäftsregion entwickeln (Bloom 6)</a:t>
+              <a:t>▸  Ein individualisiertes Branchenrisiko-Scoring-Modell für die eigene Geschäftsregion entwickeln</a:t>
             </a:r>
           </a:p>
         </p:txBody>

--- a/protected-downloads/praesentation/M05.pptx
+++ b/protected-downloads/praesentation/M05.pptx
@@ -15,6 +15,8 @@
     <p:sldId id="263" r:id="rId15"/>
     <p:sldId id="264" r:id="rId16"/>
     <p:sldId id="265" r:id="rId17"/>
+    <p:sldId id="266" r:id="rId18"/>
+    <p:sldId id="267" r:id="rId19"/>
   </p:sldIdLst>
   <p:sldSz cx="12188952" cy="6858000" type="screen4x3"/>
   <p:notesSz cx="6858000" cy="9144000"/>
@@ -817,6 +819,76 @@
 </file>
 
 <file path=ppt/notesSlides/notesSlide6.xml><?xml version="1.0" encoding="utf-8"?>
+<p:notes xmlns:a="http://schemas.openxmlformats.org/drawingml/2006/main" xmlns:p="http://schemas.openxmlformats.org/presentationml/2006/main" xmlns:r="http://schemas.openxmlformats.org/officeDocument/2006/relationships">
+  <p:cSld>
+    <p:spTree>
+      <p:nvGrpSpPr>
+        <p:cNvPr id="1" name=""/>
+        <p:cNvGrpSpPr/>
+        <p:nvPr/>
+      </p:nvGrpSpPr>
+      <p:grpSpPr>
+        <a:xfrm>
+          <a:off x="0" y="0"/>
+          <a:ext cx="0" cy="0"/>
+          <a:chOff x="0" y="0"/>
+          <a:chExt cx="0" cy="0"/>
+        </a:xfrm>
+      </p:grpSpPr>
+      <p:sp>
+        <p:nvSpPr>
+          <p:cNvPr id="2" name="Slide Image Placeholder 1"/>
+          <p:cNvSpPr>
+            <a:spLocks noGrp="1"/>
+          </p:cNvSpPr>
+          <p:nvPr>
+            <p:ph type="sldImg" idx="2"/>
+          </p:nvPr>
+        </p:nvSpPr>
+        <p:spPr/>
+      </p:sp>
+      <p:sp>
+        <p:nvSpPr>
+          <p:cNvPr id="3" name="Notes Placeholder 2"/>
+          <p:cNvSpPr>
+            <a:spLocks noGrp="1"/>
+          </p:cNvSpPr>
+          <p:nvPr>
+            <p:ph type="body" idx="3" sz="quarter"/>
+          </p:nvPr>
+        </p:nvSpPr>
+        <p:spPr/>
+        <p:txBody>
+          <a:bodyPr/>
+          <a:lstStyle/>
+          <a:p>
+            <a:r>
+              <a:t>Siehe Trainerhandbuch (Sektion 3) für Moderationshinweise, Timing und erwartete Teilnehmerreaktionen.</a:t>
+            </a:r>
+          </a:p>
+        </p:txBody>
+      </p:sp>
+      <p:sp>
+        <p:nvSpPr>
+          <p:cNvPr id="4" name="Slide Number Placeholder 3"/>
+          <p:cNvSpPr>
+            <a:spLocks noGrp="1"/>
+          </p:cNvSpPr>
+          <p:nvPr>
+            <p:ph type="sldNum" idx="5" sz="quarter"/>
+          </p:nvPr>
+        </p:nvSpPr>
+        <p:spPr/>
+      </p:sp>
+    </p:spTree>
+  </p:cSld>
+  <p:clrMapOvr>
+    <a:masterClrMapping/>
+  </p:clrMapOvr>
+</p:notes>
+</file>
+
+<file path=ppt/notesSlides/notesSlide7.xml><?xml version="1.0" encoding="utf-8"?>
 <p:notes xmlns:a="http://schemas.openxmlformats.org/drawingml/2006/main" xmlns:p="http://schemas.openxmlformats.org/presentationml/2006/main" xmlns:r="http://schemas.openxmlformats.org/officeDocument/2006/relationships">
   <p:cSld>
     <p:spTree>
@@ -4679,6 +4751,1184 @@
                 </a:solidFill>
                 <a:latin typeface="Source Serif 4"/>
               </a:rPr>
+              <a:t>Theorie-Input: VR-Rating und branchenspezifische Ratingfaktoren</a:t>
+            </a:r>
+          </a:p>
+        </p:txBody>
+      </p:sp>
+      <p:sp>
+        <p:nvSpPr>
+          <p:cNvPr id="8" name="TextBox 7"/>
+          <p:cNvSpPr txBox="1"/>
+          <p:nvPr/>
+        </p:nvSpPr>
+        <p:spPr>
+          <a:xfrm>
+            <a:off x="685800" y="1417320"/>
+            <a:ext cx="10817352" cy="5029200"/>
+          </a:xfrm>
+          <a:prstGeom prst="rect">
+            <a:avLst/>
+          </a:prstGeom>
+          <a:noFill/>
+        </p:spPr>
+        <p:txBody>
+          <a:bodyPr wrap="square">
+            <a:spAutoFit/>
+          </a:bodyPr>
+          <a:lstStyle/>
+          <a:p>
+            <a:pPr>
+              <a:spcBef>
+                <a:spcPts val="1000"/>
+              </a:spcBef>
+              <a:spcAft>
+                <a:spcPts val="200"/>
+              </a:spcAft>
+            </a:pPr>
+            <a:r>
+              <a:rPr sz="800" b="1">
+                <a:solidFill>
+                  <a:srgbClr val="78808C"/>
+                </a:solidFill>
+                <a:latin typeface="JetBrains Mono"/>
+              </a:rPr>
+              <a:t>4.3.1 AUFBAU DES VR-RATINGS</a:t>
+            </a:r>
+          </a:p>
+          <a:p>
+            <a:pPr>
+              <a:spcBef>
+                <a:spcPts val="400"/>
+              </a:spcBef>
+              <a:spcAft>
+                <a:spcPts val="200"/>
+              </a:spcAft>
+            </a:pPr>
+            <a:r>
+              <a:rPr sz="1200">
+                <a:solidFill>
+                  <a:srgbClr val="3D5466"/>
+                </a:solidFill>
+                <a:latin typeface="Arial"/>
+              </a:rPr>
+              <a:t>Das VR-Rating kombiniert quantitative und qualitative Komponenten:</a:t>
+            </a:r>
+          </a:p>
+          <a:p>
+            <a:pPr>
+              <a:spcBef>
+                <a:spcPts val="400"/>
+              </a:spcBef>
+              <a:spcAft>
+                <a:spcPts val="200"/>
+              </a:spcAft>
+            </a:pPr>
+            <a:r>
+              <a:rPr sz="1200">
+                <a:solidFill>
+                  <a:srgbClr val="3D5466"/>
+                </a:solidFill>
+                <a:latin typeface="Arial"/>
+              </a:rPr>
+              <a:t>Quantitativ (ca. 60–70 % Gewicht):</a:t>
+            </a:r>
+          </a:p>
+          <a:p>
+            <a:pPr>
+              <a:spcBef>
+                <a:spcPts val="400"/>
+              </a:spcBef>
+              <a:spcAft>
+                <a:spcPts val="200"/>
+              </a:spcAft>
+            </a:pPr>
+            <a:r>
+              <a:rPr sz="1300">
+                <a:solidFill>
+                  <a:srgbClr val="3D5466"/>
+                </a:solidFill>
+                <a:latin typeface="Arial"/>
+              </a:rPr>
+              <a:t>▸  Rentabilitätskennzahlen (EBIT-Marge, Eigenkapitalrentabilität)</a:t>
+            </a:r>
+          </a:p>
+          <a:p>
+            <a:pPr>
+              <a:spcBef>
+                <a:spcPts val="400"/>
+              </a:spcBef>
+              <a:spcAft>
+                <a:spcPts val="200"/>
+              </a:spcAft>
+            </a:pPr>
+            <a:r>
+              <a:rPr sz="1300">
+                <a:solidFill>
+                  <a:srgbClr val="3D5466"/>
+                </a:solidFill>
+                <a:latin typeface="Arial"/>
+              </a:rPr>
+              <a:t>▸  Liquiditätskennzahlen (Liquiditätsgrade, Cash-Flow-Relationen)</a:t>
+            </a:r>
+          </a:p>
+          <a:p>
+            <a:pPr>
+              <a:spcBef>
+                <a:spcPts val="400"/>
+              </a:spcBef>
+              <a:spcAft>
+                <a:spcPts val="200"/>
+              </a:spcAft>
+            </a:pPr>
+            <a:r>
+              <a:rPr sz="1300">
+                <a:solidFill>
+                  <a:srgbClr val="3D5466"/>
+                </a:solidFill>
+                <a:latin typeface="Arial"/>
+              </a:rPr>
+              <a:t>▸  Verschuldungskennzahlen (Eigenkapitalquote, Verschuldungsgrad, Zinsdeckungsquote)</a:t>
+            </a:r>
+          </a:p>
+          <a:p>
+            <a:pPr>
+              <a:spcBef>
+                <a:spcPts val="400"/>
+              </a:spcBef>
+              <a:spcAft>
+                <a:spcPts val="200"/>
+              </a:spcAft>
+            </a:pPr>
+            <a:r>
+              <a:rPr sz="1300">
+                <a:solidFill>
+                  <a:srgbClr val="3D5466"/>
+                </a:solidFill>
+                <a:latin typeface="Arial"/>
+              </a:rPr>
+              <a:t>▸  Trendindikatoren (Entwicklung über 3 Jahre)</a:t>
+            </a:r>
+          </a:p>
+          <a:p>
+            <a:pPr>
+              <a:spcBef>
+                <a:spcPts val="400"/>
+              </a:spcBef>
+              <a:spcAft>
+                <a:spcPts val="200"/>
+              </a:spcAft>
+            </a:pPr>
+            <a:r>
+              <a:rPr sz="1200">
+                <a:solidFill>
+                  <a:srgbClr val="3D5466"/>
+                </a:solidFill>
+                <a:latin typeface="Arial"/>
+              </a:rPr>
+              <a:t>Qualitativ (ca. 30–40 % Gewicht):</a:t>
+            </a:r>
+          </a:p>
+          <a:p>
+            <a:pPr>
+              <a:spcBef>
+                <a:spcPts val="400"/>
+              </a:spcBef>
+              <a:spcAft>
+                <a:spcPts val="200"/>
+              </a:spcAft>
+            </a:pPr>
+            <a:r>
+              <a:rPr sz="1300">
+                <a:solidFill>
+                  <a:srgbClr val="3D5466"/>
+                </a:solidFill>
+                <a:latin typeface="Arial"/>
+              </a:rPr>
+              <a:t>▸  Unternehmerqualität und Management-Kompetenz</a:t>
+            </a:r>
+          </a:p>
+          <a:p>
+            <a:pPr>
+              <a:spcBef>
+                <a:spcPts val="400"/>
+              </a:spcBef>
+              <a:spcAft>
+                <a:spcPts val="200"/>
+              </a:spcAft>
+            </a:pPr>
+            <a:r>
+              <a:rPr sz="1300">
+                <a:solidFill>
+                  <a:srgbClr val="3D5466"/>
+                </a:solidFill>
+                <a:latin typeface="Arial"/>
+              </a:rPr>
+              <a:t>▸  Branchenrisiko (Kerngegenstand dieses Moduls)</a:t>
+            </a:r>
+          </a:p>
+          <a:p>
+            <a:pPr>
+              <a:spcBef>
+                <a:spcPts val="400"/>
+              </a:spcBef>
+              <a:spcAft>
+                <a:spcPts val="200"/>
+              </a:spcAft>
+            </a:pPr>
+            <a:r>
+              <a:rPr sz="1300">
+                <a:solidFill>
+                  <a:srgbClr val="3D5466"/>
+                </a:solidFill>
+                <a:latin typeface="Arial"/>
+              </a:rPr>
+              <a:t>▸  Marktposition und Wettbewerbsfähigkeit</a:t>
+            </a:r>
+          </a:p>
+          <a:p>
+            <a:pPr>
+              <a:spcBef>
+                <a:spcPts val="400"/>
+              </a:spcBef>
+              <a:spcAft>
+                <a:spcPts val="200"/>
+              </a:spcAft>
+            </a:pPr>
+            <a:r>
+              <a:rPr sz="1300">
+                <a:solidFill>
+                  <a:srgbClr val="3D5466"/>
+                </a:solidFill>
+                <a:latin typeface="Arial"/>
+              </a:rPr>
+              <a:t>▸  Nachfolgeplanung (bei KMU kritisch)</a:t>
+            </a:r>
+          </a:p>
+        </p:txBody>
+      </p:sp>
+      <p:sp>
+        <p:nvSpPr>
+          <p:cNvPr id="9" name="Rectangle 8"/>
+          <p:cNvSpPr/>
+          <p:nvPr/>
+        </p:nvSpPr>
+        <p:spPr>
+          <a:xfrm>
+            <a:off x="0" y="6510528"/>
+            <a:ext cx="12188952" cy="347472"/>
+          </a:xfrm>
+          <a:prstGeom prst="rect">
+            <a:avLst/>
+          </a:prstGeom>
+          <a:solidFill>
+            <a:srgbClr val="0A1937"/>
+          </a:solidFill>
+          <a:ln>
+            <a:noFill/>
+          </a:ln>
+        </p:spPr>
+        <p:style>
+          <a:lnRef idx="1">
+            <a:schemeClr val="accent1"/>
+          </a:lnRef>
+          <a:fillRef idx="3">
+            <a:schemeClr val="accent1"/>
+          </a:fillRef>
+          <a:effectRef idx="2">
+            <a:schemeClr val="accent1"/>
+          </a:effectRef>
+          <a:fontRef idx="minor">
+            <a:schemeClr val="lt1"/>
+          </a:fontRef>
+        </p:style>
+        <p:txBody>
+          <a:bodyPr rtlCol="0" anchor="ctr"/>
+          <a:lstStyle/>
+          <a:p>
+            <a:pPr algn="ctr"/>
+          </a:p>
+        </p:txBody>
+      </p:sp>
+      <p:sp>
+        <p:nvSpPr>
+          <p:cNvPr id="10" name="TextBox 9"/>
+          <p:cNvSpPr txBox="1"/>
+          <p:nvPr/>
+        </p:nvSpPr>
+        <p:spPr>
+          <a:xfrm>
+            <a:off x="685800" y="6583680"/>
+            <a:ext cx="6490411" cy="256032"/>
+          </a:xfrm>
+          <a:prstGeom prst="rect">
+            <a:avLst/>
+          </a:prstGeom>
+          <a:noFill/>
+        </p:spPr>
+        <p:txBody>
+          <a:bodyPr wrap="none">
+            <a:spAutoFit/>
+          </a:bodyPr>
+          <a:lstStyle/>
+          <a:p>
+            <a:pPr algn="l"/>
+            <a:r>
+              <a:rPr sz="700">
+                <a:solidFill>
+                  <a:srgbClr val="A0B4D2"/>
+                </a:solidFill>
+                <a:latin typeface="JetBrains Mono"/>
+              </a:rPr>
+              <a:t>Benedikt Zoller Coaching  ·  FKB Campus  ·  M05</a:t>
+            </a:r>
+          </a:p>
+        </p:txBody>
+      </p:sp>
+    </p:spTree>
+  </p:cSld>
+  <p:clrMapOvr>
+    <a:masterClrMapping/>
+  </p:clrMapOvr>
+</p:sld>
+</file>
+
+<file path=ppt/slides/slide11.xml><?xml version="1.0" encoding="utf-8"?>
+<p:sld xmlns:a="http://schemas.openxmlformats.org/drawingml/2006/main" xmlns:p="http://schemas.openxmlformats.org/presentationml/2006/main" xmlns:r="http://schemas.openxmlformats.org/officeDocument/2006/relationships">
+  <p:cSld>
+    <p:spTree>
+      <p:nvGrpSpPr>
+        <p:cNvPr id="1" name=""/>
+        <p:cNvGrpSpPr/>
+        <p:nvPr/>
+      </p:nvGrpSpPr>
+      <p:grpSpPr/>
+      <p:sp>
+        <p:nvSpPr>
+          <p:cNvPr id="2" name="Rectangle 1"/>
+          <p:cNvSpPr/>
+          <p:nvPr/>
+        </p:nvSpPr>
+        <p:spPr>
+          <a:xfrm>
+            <a:off x="0" y="0"/>
+            <a:ext cx="12188952" cy="6858000"/>
+          </a:xfrm>
+          <a:prstGeom prst="rect">
+            <a:avLst/>
+          </a:prstGeom>
+          <a:solidFill>
+            <a:srgbClr val="EDEDF3"/>
+          </a:solidFill>
+          <a:ln>
+            <a:noFill/>
+          </a:ln>
+        </p:spPr>
+        <p:style>
+          <a:lnRef idx="1">
+            <a:schemeClr val="accent1"/>
+          </a:lnRef>
+          <a:fillRef idx="3">
+            <a:schemeClr val="accent1"/>
+          </a:fillRef>
+          <a:effectRef idx="2">
+            <a:schemeClr val="accent1"/>
+          </a:effectRef>
+          <a:fontRef idx="minor">
+            <a:schemeClr val="lt1"/>
+          </a:fontRef>
+        </p:style>
+        <p:txBody>
+          <a:bodyPr rtlCol="0" anchor="ctr"/>
+          <a:lstStyle/>
+          <a:p>
+            <a:pPr algn="ctr"/>
+          </a:p>
+        </p:txBody>
+      </p:sp>
+      <p:sp>
+        <p:nvSpPr>
+          <p:cNvPr id="3" name="Rectangle 2"/>
+          <p:cNvSpPr/>
+          <p:nvPr/>
+        </p:nvSpPr>
+        <p:spPr>
+          <a:xfrm>
+            <a:off x="0" y="0"/>
+            <a:ext cx="12188952" cy="50292"/>
+          </a:xfrm>
+          <a:prstGeom prst="rect">
+            <a:avLst/>
+          </a:prstGeom>
+          <a:solidFill>
+            <a:srgbClr val="1F2C56"/>
+          </a:solidFill>
+          <a:ln>
+            <a:noFill/>
+          </a:ln>
+        </p:spPr>
+        <p:style>
+          <a:lnRef idx="1">
+            <a:schemeClr val="accent1"/>
+          </a:lnRef>
+          <a:fillRef idx="3">
+            <a:schemeClr val="accent1"/>
+          </a:fillRef>
+          <a:effectRef idx="2">
+            <a:schemeClr val="accent1"/>
+          </a:effectRef>
+          <a:fontRef idx="minor">
+            <a:schemeClr val="lt1"/>
+          </a:fontRef>
+        </p:style>
+        <p:txBody>
+          <a:bodyPr rtlCol="0" anchor="ctr"/>
+          <a:lstStyle/>
+          <a:p>
+            <a:pPr algn="ctr"/>
+          </a:p>
+        </p:txBody>
+      </p:sp>
+      <p:sp>
+        <p:nvSpPr>
+          <p:cNvPr id="4" name="TextBox 3"/>
+          <p:cNvSpPr txBox="1"/>
+          <p:nvPr/>
+        </p:nvSpPr>
+        <p:spPr>
+          <a:xfrm>
+            <a:off x="685800" y="109728"/>
+            <a:ext cx="10817352" cy="228600"/>
+          </a:xfrm>
+          <a:prstGeom prst="rect">
+            <a:avLst/>
+          </a:prstGeom>
+          <a:noFill/>
+        </p:spPr>
+        <p:txBody>
+          <a:bodyPr wrap="none">
+            <a:spAutoFit/>
+          </a:bodyPr>
+          <a:lstStyle/>
+          <a:p>
+            <a:pPr algn="l"/>
+            <a:r>
+              <a:rPr sz="750">
+                <a:solidFill>
+                  <a:srgbClr val="78808C"/>
+                </a:solidFill>
+                <a:latin typeface="JetBrains Mono"/>
+              </a:rPr>
+              <a:t>M05  ·  INHALT</a:t>
+            </a:r>
+          </a:p>
+        </p:txBody>
+      </p:sp>
+      <p:sp>
+        <p:nvSpPr>
+          <p:cNvPr id="5" name="Rectangle 4"/>
+          <p:cNvSpPr/>
+          <p:nvPr/>
+        </p:nvSpPr>
+        <p:spPr>
+          <a:xfrm>
+            <a:off x="0" y="1234440"/>
+            <a:ext cx="12188952" cy="12700"/>
+          </a:xfrm>
+          <a:prstGeom prst="rect">
+            <a:avLst/>
+          </a:prstGeom>
+          <a:solidFill>
+            <a:srgbClr val="D8DFE4"/>
+          </a:solidFill>
+          <a:ln>
+            <a:noFill/>
+          </a:ln>
+        </p:spPr>
+        <p:style>
+          <a:lnRef idx="1">
+            <a:schemeClr val="accent1"/>
+          </a:lnRef>
+          <a:fillRef idx="3">
+            <a:schemeClr val="accent1"/>
+          </a:fillRef>
+          <a:effectRef idx="2">
+            <a:schemeClr val="accent1"/>
+          </a:effectRef>
+          <a:fontRef idx="minor">
+            <a:schemeClr val="lt1"/>
+          </a:fontRef>
+        </p:style>
+        <p:txBody>
+          <a:bodyPr rtlCol="0" anchor="ctr"/>
+          <a:lstStyle/>
+          <a:p>
+            <a:pPr algn="ctr"/>
+          </a:p>
+        </p:txBody>
+      </p:sp>
+      <p:sp>
+        <p:nvSpPr>
+          <p:cNvPr id="6" name="Rectangle 5"/>
+          <p:cNvSpPr/>
+          <p:nvPr/>
+        </p:nvSpPr>
+        <p:spPr>
+          <a:xfrm>
+            <a:off x="685800" y="502920"/>
+            <a:ext cx="36576" cy="658368"/>
+          </a:xfrm>
+          <a:prstGeom prst="rect">
+            <a:avLst/>
+          </a:prstGeom>
+          <a:solidFill>
+            <a:srgbClr val="D9C089"/>
+          </a:solidFill>
+          <a:ln>
+            <a:noFill/>
+          </a:ln>
+        </p:spPr>
+        <p:style>
+          <a:lnRef idx="1">
+            <a:schemeClr val="accent1"/>
+          </a:lnRef>
+          <a:fillRef idx="3">
+            <a:schemeClr val="accent1"/>
+          </a:fillRef>
+          <a:effectRef idx="2">
+            <a:schemeClr val="accent1"/>
+          </a:effectRef>
+          <a:fontRef idx="minor">
+            <a:schemeClr val="lt1"/>
+          </a:fontRef>
+        </p:style>
+        <p:txBody>
+          <a:bodyPr rtlCol="0" anchor="ctr"/>
+          <a:lstStyle/>
+          <a:p>
+            <a:pPr algn="ctr"/>
+          </a:p>
+        </p:txBody>
+      </p:sp>
+      <p:sp>
+        <p:nvSpPr>
+          <p:cNvPr id="7" name="TextBox 6"/>
+          <p:cNvSpPr txBox="1"/>
+          <p:nvPr/>
+        </p:nvSpPr>
+        <p:spPr>
+          <a:xfrm>
+            <a:off x="813816" y="502920"/>
+            <a:ext cx="10634472" cy="685800"/>
+          </a:xfrm>
+          <a:prstGeom prst="rect">
+            <a:avLst/>
+          </a:prstGeom>
+          <a:noFill/>
+        </p:spPr>
+        <p:txBody>
+          <a:bodyPr wrap="square">
+            <a:spAutoFit/>
+          </a:bodyPr>
+          <a:lstStyle/>
+          <a:p>
+            <a:pPr algn="l"/>
+            <a:r>
+              <a:rPr sz="2400" b="1" i="0">
+                <a:solidFill>
+                  <a:srgbClr val="1F2C56"/>
+                </a:solidFill>
+                <a:latin typeface="Source Serif 4"/>
+              </a:rPr>
+              <a:t>Praxiscase: Bäckerei &amp; Konditorei Hofmann GmbH (Stuttgart, fiktiv)</a:t>
+            </a:r>
+          </a:p>
+        </p:txBody>
+      </p:sp>
+      <p:sp>
+        <p:nvSpPr>
+          <p:cNvPr id="8" name="TextBox 7"/>
+          <p:cNvSpPr txBox="1"/>
+          <p:nvPr/>
+        </p:nvSpPr>
+        <p:spPr>
+          <a:xfrm>
+            <a:off x="685800" y="1417320"/>
+            <a:ext cx="10817352" cy="5029200"/>
+          </a:xfrm>
+          <a:prstGeom prst="rect">
+            <a:avLst/>
+          </a:prstGeom>
+          <a:noFill/>
+        </p:spPr>
+        <p:txBody>
+          <a:bodyPr wrap="square">
+            <a:spAutoFit/>
+          </a:bodyPr>
+          <a:lstStyle/>
+          <a:p>
+            <a:pPr>
+              <a:spcBef>
+                <a:spcPts val="1000"/>
+              </a:spcBef>
+              <a:spcAft>
+                <a:spcPts val="200"/>
+              </a:spcAft>
+            </a:pPr>
+            <a:r>
+              <a:rPr sz="800" b="1">
+                <a:solidFill>
+                  <a:srgbClr val="78808C"/>
+                </a:solidFill>
+                <a:latin typeface="JetBrains Mono"/>
+              </a:rPr>
+              <a:t>4.4.1 UNTERNEHMENSPROFIL</a:t>
+            </a:r>
+          </a:p>
+          <a:p>
+            <a:pPr>
+              <a:spcBef>
+                <a:spcPts val="1000"/>
+              </a:spcBef>
+              <a:spcAft>
+                <a:spcPts val="200"/>
+              </a:spcAft>
+            </a:pPr>
+            <a:r>
+              <a:rPr sz="800" b="1">
+                <a:solidFill>
+                  <a:srgbClr val="78808C"/>
+                </a:solidFill>
+                <a:latin typeface="JetBrains Mono"/>
+              </a:rPr>
+              <a:t>4.4.2 FINANZIELLE SITUATION (JAHRESABSCHLUSS 2024, AUSZÜGE)</a:t>
+            </a:r>
+          </a:p>
+          <a:p>
+            <a:pPr>
+              <a:spcBef>
+                <a:spcPts val="400"/>
+              </a:spcBef>
+              <a:spcAft>
+                <a:spcPts val="200"/>
+              </a:spcAft>
+            </a:pPr>
+            <a:r>
+              <a:rPr sz="1200">
+                <a:solidFill>
+                  <a:srgbClr val="3D5466"/>
+                </a:solidFill>
+                <a:latin typeface="Arial"/>
+              </a:rPr>
+              <a:t>Bilanzauszug:</a:t>
+            </a:r>
+          </a:p>
+          <a:p>
+            <a:pPr>
+              <a:spcBef>
+                <a:spcPts val="400"/>
+              </a:spcBef>
+              <a:spcAft>
+                <a:spcPts val="200"/>
+              </a:spcAft>
+            </a:pPr>
+            <a:r>
+              <a:rPr sz="1200">
+                <a:solidFill>
+                  <a:srgbClr val="3D5466"/>
+                </a:solidFill>
+                <a:latin typeface="Arial"/>
+              </a:rPr>
+              <a:t>Gewinn- und Verlustrechnung 2024:</a:t>
+            </a:r>
+          </a:p>
+          <a:p>
+            <a:pPr>
+              <a:spcBef>
+                <a:spcPts val="400"/>
+              </a:spcBef>
+              <a:spcAft>
+                <a:spcPts val="200"/>
+              </a:spcAft>
+            </a:pPr>
+            <a:r>
+              <a:rPr sz="1200">
+                <a:solidFill>
+                  <a:srgbClr val="3D5466"/>
+                </a:solidFill>
+                <a:latin typeface="Arial"/>
+              </a:rPr>
+              <a:t>Kapitalflussrechnung 2024 (vereinfacht):</a:t>
+            </a:r>
+          </a:p>
+          <a:p>
+            <a:pPr>
+              <a:spcBef>
+                <a:spcPts val="1000"/>
+              </a:spcBef>
+              <a:spcAft>
+                <a:spcPts val="200"/>
+              </a:spcAft>
+            </a:pPr>
+            <a:r>
+              <a:rPr sz="800" b="1">
+                <a:solidFill>
+                  <a:srgbClr val="78808C"/>
+                </a:solidFill>
+                <a:latin typeface="JetBrains Mono"/>
+              </a:rPr>
+              <a:t>4.4.3 KREDITANFRAGE</a:t>
+            </a:r>
+          </a:p>
+          <a:p>
+            <a:pPr>
+              <a:spcBef>
+                <a:spcPts val="400"/>
+              </a:spcBef>
+              <a:spcAft>
+                <a:spcPts val="200"/>
+              </a:spcAft>
+            </a:pPr>
+            <a:r>
+              <a:rPr sz="1200">
+                <a:solidFill>
+                  <a:srgbClr val="3D5466"/>
+                </a:solidFill>
+                <a:latin typeface="Arial"/>
+              </a:rPr>
+              <a:t>Anlass: Investition in neue Backstube Kempten-Süd (170.000 €) + Filialmodernisierung Sonthofen (80.000 €)</a:t>
+            </a:r>
+          </a:p>
+          <a:p>
+            <a:pPr>
+              <a:spcBef>
+                <a:spcPts val="400"/>
+              </a:spcBef>
+              <a:spcAft>
+                <a:spcPts val="200"/>
+              </a:spcAft>
+            </a:pPr>
+            <a:r>
+              <a:rPr sz="1200">
+                <a:solidFill>
+                  <a:srgbClr val="3D5466"/>
+                </a:solidFill>
+                <a:latin typeface="Arial"/>
+              </a:rPr>
+              <a:t>Gesamtkreditbedarf: 250.000 € | Eigenanteil: 30.000 € | Kreditwunsch: 250.000 €</a:t>
+            </a:r>
+          </a:p>
+          <a:p>
+            <a:pPr>
+              <a:spcBef>
+                <a:spcPts val="1000"/>
+              </a:spcBef>
+              <a:spcAft>
+                <a:spcPts val="200"/>
+              </a:spcAft>
+            </a:pPr>
+            <a:r>
+              <a:rPr sz="800" b="1">
+                <a:solidFill>
+                  <a:srgbClr val="78808C"/>
+                </a:solidFill>
+                <a:latin typeface="JetBrains Mono"/>
+              </a:rPr>
+              <a:t>4.4.4 GESPRÄCHSVERLAUF: BRANCHENRISIKOANALYSE (BER = BERATER, GF = GESCHÄFTSFÜHRERIN)</a:t>
+            </a:r>
+          </a:p>
+          <a:p>
+            <a:pPr>
+              <a:spcBef>
+                <a:spcPts val="400"/>
+              </a:spcBef>
+              <a:spcAft>
+                <a:spcPts val="200"/>
+              </a:spcAft>
+            </a:pPr>
+            <a:r>
+              <a:rPr sz="1200">
+                <a:solidFill>
+                  <a:srgbClr val="3D5466"/>
+                </a:solidFill>
+                <a:latin typeface="Arial"/>
+              </a:rPr>
+              <a:t>Session 1 – Erstgespräch Branchenrisiko</a:t>
+            </a:r>
+          </a:p>
+          <a:p>
+            <a:pPr>
+              <a:spcBef>
+                <a:spcPts val="400"/>
+              </a:spcBef>
+              <a:spcAft>
+                <a:spcPts val="200"/>
+              </a:spcAft>
+            </a:pPr>
+            <a:r>
+              <a:rPr sz="1200">
+                <a:solidFill>
+                  <a:srgbClr val="3D5466"/>
+                </a:solidFill>
+                <a:latin typeface="Arial"/>
+              </a:rPr>
+              <a:t>GF: „Wir konnten die Preise nur um etwa 8–10 % erhöhen, ohne Kunden zu verlieren. Das hat die Marge deutlich gedrückt."</a:t>
+            </a:r>
+          </a:p>
+          <a:p>
+            <a:pPr>
+              <a:spcBef>
+                <a:spcPts val="400"/>
+              </a:spcBef>
+              <a:spcAft>
+                <a:spcPts val="200"/>
+              </a:spcAft>
+            </a:pPr>
+            <a:r>
+              <a:rPr sz="1200">
+                <a:solidFill>
+                  <a:srgbClr val="3D5466"/>
+                </a:solidFill>
+                <a:latin typeface="Arial"/>
+              </a:rPr>
+              <a:t>GF: „Nein, wir kaufen zu aktuellen Marktpreisen. Die Lieferanten bieten keine Festpreise an."</a:t>
+            </a:r>
+          </a:p>
+        </p:txBody>
+      </p:sp>
+      <p:sp>
+        <p:nvSpPr>
+          <p:cNvPr id="9" name="Rectangle 8"/>
+          <p:cNvSpPr/>
+          <p:nvPr/>
+        </p:nvSpPr>
+        <p:spPr>
+          <a:xfrm>
+            <a:off x="0" y="6510528"/>
+            <a:ext cx="12188952" cy="347472"/>
+          </a:xfrm>
+          <a:prstGeom prst="rect">
+            <a:avLst/>
+          </a:prstGeom>
+          <a:solidFill>
+            <a:srgbClr val="0A1937"/>
+          </a:solidFill>
+          <a:ln>
+            <a:noFill/>
+          </a:ln>
+        </p:spPr>
+        <p:style>
+          <a:lnRef idx="1">
+            <a:schemeClr val="accent1"/>
+          </a:lnRef>
+          <a:fillRef idx="3">
+            <a:schemeClr val="accent1"/>
+          </a:fillRef>
+          <a:effectRef idx="2">
+            <a:schemeClr val="accent1"/>
+          </a:effectRef>
+          <a:fontRef idx="minor">
+            <a:schemeClr val="lt1"/>
+          </a:fontRef>
+        </p:style>
+        <p:txBody>
+          <a:bodyPr rtlCol="0" anchor="ctr"/>
+          <a:lstStyle/>
+          <a:p>
+            <a:pPr algn="ctr"/>
+          </a:p>
+        </p:txBody>
+      </p:sp>
+      <p:sp>
+        <p:nvSpPr>
+          <p:cNvPr id="10" name="TextBox 9"/>
+          <p:cNvSpPr txBox="1"/>
+          <p:nvPr/>
+        </p:nvSpPr>
+        <p:spPr>
+          <a:xfrm>
+            <a:off x="685800" y="6583680"/>
+            <a:ext cx="6490411" cy="256032"/>
+          </a:xfrm>
+          <a:prstGeom prst="rect">
+            <a:avLst/>
+          </a:prstGeom>
+          <a:noFill/>
+        </p:spPr>
+        <p:txBody>
+          <a:bodyPr wrap="none">
+            <a:spAutoFit/>
+          </a:bodyPr>
+          <a:lstStyle/>
+          <a:p>
+            <a:pPr algn="l"/>
+            <a:r>
+              <a:rPr sz="700">
+                <a:solidFill>
+                  <a:srgbClr val="A0B4D2"/>
+                </a:solidFill>
+                <a:latin typeface="JetBrains Mono"/>
+              </a:rPr>
+              <a:t>Benedikt Zoller Coaching  ·  FKB Campus  ·  M05</a:t>
+            </a:r>
+          </a:p>
+        </p:txBody>
+      </p:sp>
+    </p:spTree>
+  </p:cSld>
+  <p:clrMapOvr>
+    <a:masterClrMapping/>
+  </p:clrMapOvr>
+</p:sld>
+</file>
+
+<file path=ppt/slides/slide12.xml><?xml version="1.0" encoding="utf-8"?>
+<p:sld xmlns:a="http://schemas.openxmlformats.org/drawingml/2006/main" xmlns:p="http://schemas.openxmlformats.org/presentationml/2006/main" xmlns:r="http://schemas.openxmlformats.org/officeDocument/2006/relationships">
+  <p:cSld>
+    <p:spTree>
+      <p:nvGrpSpPr>
+        <p:cNvPr id="1" name=""/>
+        <p:cNvGrpSpPr/>
+        <p:nvPr/>
+      </p:nvGrpSpPr>
+      <p:grpSpPr/>
+      <p:sp>
+        <p:nvSpPr>
+          <p:cNvPr id="2" name="Rectangle 1"/>
+          <p:cNvSpPr/>
+          <p:nvPr/>
+        </p:nvSpPr>
+        <p:spPr>
+          <a:xfrm>
+            <a:off x="0" y="0"/>
+            <a:ext cx="12188952" cy="6858000"/>
+          </a:xfrm>
+          <a:prstGeom prst="rect">
+            <a:avLst/>
+          </a:prstGeom>
+          <a:solidFill>
+            <a:srgbClr val="EDEDF3"/>
+          </a:solidFill>
+          <a:ln>
+            <a:noFill/>
+          </a:ln>
+        </p:spPr>
+        <p:style>
+          <a:lnRef idx="1">
+            <a:schemeClr val="accent1"/>
+          </a:lnRef>
+          <a:fillRef idx="3">
+            <a:schemeClr val="accent1"/>
+          </a:fillRef>
+          <a:effectRef idx="2">
+            <a:schemeClr val="accent1"/>
+          </a:effectRef>
+          <a:fontRef idx="minor">
+            <a:schemeClr val="lt1"/>
+          </a:fontRef>
+        </p:style>
+        <p:txBody>
+          <a:bodyPr rtlCol="0" anchor="ctr"/>
+          <a:lstStyle/>
+          <a:p>
+            <a:pPr algn="ctr"/>
+          </a:p>
+        </p:txBody>
+      </p:sp>
+      <p:sp>
+        <p:nvSpPr>
+          <p:cNvPr id="3" name="Rectangle 2"/>
+          <p:cNvSpPr/>
+          <p:nvPr/>
+        </p:nvSpPr>
+        <p:spPr>
+          <a:xfrm>
+            <a:off x="0" y="0"/>
+            <a:ext cx="12188952" cy="50292"/>
+          </a:xfrm>
+          <a:prstGeom prst="rect">
+            <a:avLst/>
+          </a:prstGeom>
+          <a:solidFill>
+            <a:srgbClr val="1F2C56"/>
+          </a:solidFill>
+          <a:ln>
+            <a:noFill/>
+          </a:ln>
+        </p:spPr>
+        <p:style>
+          <a:lnRef idx="1">
+            <a:schemeClr val="accent1"/>
+          </a:lnRef>
+          <a:fillRef idx="3">
+            <a:schemeClr val="accent1"/>
+          </a:fillRef>
+          <a:effectRef idx="2">
+            <a:schemeClr val="accent1"/>
+          </a:effectRef>
+          <a:fontRef idx="minor">
+            <a:schemeClr val="lt1"/>
+          </a:fontRef>
+        </p:style>
+        <p:txBody>
+          <a:bodyPr rtlCol="0" anchor="ctr"/>
+          <a:lstStyle/>
+          <a:p>
+            <a:pPr algn="ctr"/>
+          </a:p>
+        </p:txBody>
+      </p:sp>
+      <p:sp>
+        <p:nvSpPr>
+          <p:cNvPr id="4" name="TextBox 3"/>
+          <p:cNvSpPr txBox="1"/>
+          <p:nvPr/>
+        </p:nvSpPr>
+        <p:spPr>
+          <a:xfrm>
+            <a:off x="685800" y="109728"/>
+            <a:ext cx="10817352" cy="228600"/>
+          </a:xfrm>
+          <a:prstGeom prst="rect">
+            <a:avLst/>
+          </a:prstGeom>
+          <a:noFill/>
+        </p:spPr>
+        <p:txBody>
+          <a:bodyPr wrap="none">
+            <a:spAutoFit/>
+          </a:bodyPr>
+          <a:lstStyle/>
+          <a:p>
+            <a:pPr algn="l"/>
+            <a:r>
+              <a:rPr sz="750">
+                <a:solidFill>
+                  <a:srgbClr val="78808C"/>
+                </a:solidFill>
+                <a:latin typeface="JetBrains Mono"/>
+              </a:rPr>
+              <a:t>M05  ·  INHALT</a:t>
+            </a:r>
+          </a:p>
+        </p:txBody>
+      </p:sp>
+      <p:sp>
+        <p:nvSpPr>
+          <p:cNvPr id="5" name="Rectangle 4"/>
+          <p:cNvSpPr/>
+          <p:nvPr/>
+        </p:nvSpPr>
+        <p:spPr>
+          <a:xfrm>
+            <a:off x="0" y="1234440"/>
+            <a:ext cx="12188952" cy="12700"/>
+          </a:xfrm>
+          <a:prstGeom prst="rect">
+            <a:avLst/>
+          </a:prstGeom>
+          <a:solidFill>
+            <a:srgbClr val="D8DFE4"/>
+          </a:solidFill>
+          <a:ln>
+            <a:noFill/>
+          </a:ln>
+        </p:spPr>
+        <p:style>
+          <a:lnRef idx="1">
+            <a:schemeClr val="accent1"/>
+          </a:lnRef>
+          <a:fillRef idx="3">
+            <a:schemeClr val="accent1"/>
+          </a:fillRef>
+          <a:effectRef idx="2">
+            <a:schemeClr val="accent1"/>
+          </a:effectRef>
+          <a:fontRef idx="minor">
+            <a:schemeClr val="lt1"/>
+          </a:fontRef>
+        </p:style>
+        <p:txBody>
+          <a:bodyPr rtlCol="0" anchor="ctr"/>
+          <a:lstStyle/>
+          <a:p>
+            <a:pPr algn="ctr"/>
+          </a:p>
+        </p:txBody>
+      </p:sp>
+      <p:sp>
+        <p:nvSpPr>
+          <p:cNvPr id="6" name="Rectangle 5"/>
+          <p:cNvSpPr/>
+          <p:nvPr/>
+        </p:nvSpPr>
+        <p:spPr>
+          <a:xfrm>
+            <a:off x="685800" y="502920"/>
+            <a:ext cx="36576" cy="658368"/>
+          </a:xfrm>
+          <a:prstGeom prst="rect">
+            <a:avLst/>
+          </a:prstGeom>
+          <a:solidFill>
+            <a:srgbClr val="D9C089"/>
+          </a:solidFill>
+          <a:ln>
+            <a:noFill/>
+          </a:ln>
+        </p:spPr>
+        <p:style>
+          <a:lnRef idx="1">
+            <a:schemeClr val="accent1"/>
+          </a:lnRef>
+          <a:fillRef idx="3">
+            <a:schemeClr val="accent1"/>
+          </a:fillRef>
+          <a:effectRef idx="2">
+            <a:schemeClr val="accent1"/>
+          </a:effectRef>
+          <a:fontRef idx="minor">
+            <a:schemeClr val="lt1"/>
+          </a:fontRef>
+        </p:style>
+        <p:txBody>
+          <a:bodyPr rtlCol="0" anchor="ctr"/>
+          <a:lstStyle/>
+          <a:p>
+            <a:pPr algn="ctr"/>
+          </a:p>
+        </p:txBody>
+      </p:sp>
+      <p:sp>
+        <p:nvSpPr>
+          <p:cNvPr id="7" name="TextBox 6"/>
+          <p:cNvSpPr txBox="1"/>
+          <p:nvPr/>
+        </p:nvSpPr>
+        <p:spPr>
+          <a:xfrm>
+            <a:off x="813816" y="502920"/>
+            <a:ext cx="10634472" cy="685800"/>
+          </a:xfrm>
+          <a:prstGeom prst="rect">
+            <a:avLst/>
+          </a:prstGeom>
+          <a:noFill/>
+        </p:spPr>
+        <p:txBody>
+          <a:bodyPr wrap="square">
+            <a:spAutoFit/>
+          </a:bodyPr>
+          <a:lstStyle/>
+          <a:p>
+            <a:pPr algn="l"/>
+            <a:r>
+              <a:rPr sz="2400" b="1" i="0">
+                <a:solidFill>
+                  <a:srgbClr val="1F2C56"/>
+                </a:solidFill>
+                <a:latin typeface="Source Serif 4"/>
+              </a:rPr>
               <a:t>Arbeitsblatt: Branchenrisiko-Analyse-Template</a:t>
             </a:r>
           </a:p>
@@ -5699,7 +6949,7 @@
                 </a:solidFill>
                 <a:latin typeface="Arial"/>
               </a:rPr>
-              <a:t>03   Theorie-Input: VR-Rating und branchenspezifische Ratingfaktoren</a:t>
+              <a:t>03   Handlungskarte: Vom Branchensignal zur Kreditmaßnahme</a:t>
             </a:r>
           </a:p>
           <a:p>
@@ -5718,7 +6968,7 @@
                 </a:solidFill>
                 <a:latin typeface="Arial"/>
               </a:rPr>
-              <a:t>04   Praxiscase: Bäckerei &amp; Konditorei Hofmann GmbH (Stuttgart, fiktiv)</a:t>
+              <a:t>04   Theorie-Input: VR-Rating und branchenspezifische Ratingfaktoren</a:t>
             </a:r>
           </a:p>
           <a:p>
@@ -5737,7 +6987,26 @@
                 </a:solidFill>
                 <a:latin typeface="Arial"/>
               </a:rPr>
-              <a:t>05   Arbeitsblatt: Branchenrisiko-Analyse-Template</a:t>
+              <a:t>05   Praxiscase: Bäckerei &amp; Konditorei Hofmann GmbH (Stuttgart, fiktiv)</a:t>
+            </a:r>
+          </a:p>
+          <a:p>
+            <a:pPr>
+              <a:spcBef>
+                <a:spcPts val="800"/>
+              </a:spcBef>
+              <a:spcAft>
+                <a:spcPts val="200"/>
+              </a:spcAft>
+            </a:pPr>
+            <a:r>
+              <a:rPr sz="1500">
+                <a:solidFill>
+                  <a:srgbClr val="3D5466"/>
+                </a:solidFill>
+                <a:latin typeface="Arial"/>
+              </a:rPr>
+              <a:t>06   Arbeitsblatt: Branchenrisiko-Analyse-Template</a:t>
             </a:r>
           </a:p>
         </p:txBody>
@@ -7961,7 +9230,7 @@
                 </a:solidFill>
                 <a:latin typeface="Source Serif 4"/>
               </a:rPr>
-              <a:t>Theorie-Input: VR-Rating und branchenspezifische Ratingfaktoren</a:t>
+              <a:t>Handlungskarte: Vom Branchensignal zur Kreditmaßnahme</a:t>
             </a:r>
           </a:p>
         </p:txBody>
@@ -7987,25 +9256,6 @@
             <a:spAutoFit/>
           </a:bodyPr>
           <a:lstStyle/>
-          <a:p>
-            <a:pPr>
-              <a:spcBef>
-                <a:spcPts val="1000"/>
-              </a:spcBef>
-              <a:spcAft>
-                <a:spcPts val="200"/>
-              </a:spcAft>
-            </a:pPr>
-            <a:r>
-              <a:rPr sz="800" b="1">
-                <a:solidFill>
-                  <a:srgbClr val="78808C"/>
-                </a:solidFill>
-                <a:latin typeface="JetBrains Mono"/>
-              </a:rPr>
-              <a:t>4.3.1 AUFBAU DES VR-RATINGS</a:t>
-            </a:r>
-          </a:p>
           <a:p>
             <a:pPr>
               <a:spcBef>
@@ -8022,197 +9272,7 @@
                 </a:solidFill>
                 <a:latin typeface="Arial"/>
               </a:rPr>
-              <a:t>Das VR-Rating kombiniert quantitative und qualitative Komponenten:</a:t>
-            </a:r>
-          </a:p>
-          <a:p>
-            <a:pPr>
-              <a:spcBef>
-                <a:spcPts val="400"/>
-              </a:spcBef>
-              <a:spcAft>
-                <a:spcPts val="200"/>
-              </a:spcAft>
-            </a:pPr>
-            <a:r>
-              <a:rPr sz="1200">
-                <a:solidFill>
-                  <a:srgbClr val="3D5466"/>
-                </a:solidFill>
-                <a:latin typeface="Arial"/>
-              </a:rPr>
-              <a:t>Quantitativ (ca. 60–70 % Gewicht):</a:t>
-            </a:r>
-          </a:p>
-          <a:p>
-            <a:pPr>
-              <a:spcBef>
-                <a:spcPts val="400"/>
-              </a:spcBef>
-              <a:spcAft>
-                <a:spcPts val="200"/>
-              </a:spcAft>
-            </a:pPr>
-            <a:r>
-              <a:rPr sz="1300">
-                <a:solidFill>
-                  <a:srgbClr val="3D5466"/>
-                </a:solidFill>
-                <a:latin typeface="Arial"/>
-              </a:rPr>
-              <a:t>▸  Rentabilitätskennzahlen (EBIT-Marge, Eigenkapitalrentabilität)</a:t>
-            </a:r>
-          </a:p>
-          <a:p>
-            <a:pPr>
-              <a:spcBef>
-                <a:spcPts val="400"/>
-              </a:spcBef>
-              <a:spcAft>
-                <a:spcPts val="200"/>
-              </a:spcAft>
-            </a:pPr>
-            <a:r>
-              <a:rPr sz="1300">
-                <a:solidFill>
-                  <a:srgbClr val="3D5466"/>
-                </a:solidFill>
-                <a:latin typeface="Arial"/>
-              </a:rPr>
-              <a:t>▸  Liquiditätskennzahlen (Liquiditätsgrade, Cash-Flow-Relationen)</a:t>
-            </a:r>
-          </a:p>
-          <a:p>
-            <a:pPr>
-              <a:spcBef>
-                <a:spcPts val="400"/>
-              </a:spcBef>
-              <a:spcAft>
-                <a:spcPts val="200"/>
-              </a:spcAft>
-            </a:pPr>
-            <a:r>
-              <a:rPr sz="1300">
-                <a:solidFill>
-                  <a:srgbClr val="3D5466"/>
-                </a:solidFill>
-                <a:latin typeface="Arial"/>
-              </a:rPr>
-              <a:t>▸  Verschuldungskennzahlen (Eigenkapitalquote, Verschuldungsgrad, Zinsdeckungsquote)</a:t>
-            </a:r>
-          </a:p>
-          <a:p>
-            <a:pPr>
-              <a:spcBef>
-                <a:spcPts val="400"/>
-              </a:spcBef>
-              <a:spcAft>
-                <a:spcPts val="200"/>
-              </a:spcAft>
-            </a:pPr>
-            <a:r>
-              <a:rPr sz="1300">
-                <a:solidFill>
-                  <a:srgbClr val="3D5466"/>
-                </a:solidFill>
-                <a:latin typeface="Arial"/>
-              </a:rPr>
-              <a:t>▸  Trendindikatoren (Entwicklung über 3 Jahre)</a:t>
-            </a:r>
-          </a:p>
-          <a:p>
-            <a:pPr>
-              <a:spcBef>
-                <a:spcPts val="400"/>
-              </a:spcBef>
-              <a:spcAft>
-                <a:spcPts val="200"/>
-              </a:spcAft>
-            </a:pPr>
-            <a:r>
-              <a:rPr sz="1200">
-                <a:solidFill>
-                  <a:srgbClr val="3D5466"/>
-                </a:solidFill>
-                <a:latin typeface="Arial"/>
-              </a:rPr>
-              <a:t>Qualitativ (ca. 30–40 % Gewicht):</a:t>
-            </a:r>
-          </a:p>
-          <a:p>
-            <a:pPr>
-              <a:spcBef>
-                <a:spcPts val="400"/>
-              </a:spcBef>
-              <a:spcAft>
-                <a:spcPts val="200"/>
-              </a:spcAft>
-            </a:pPr>
-            <a:r>
-              <a:rPr sz="1300">
-                <a:solidFill>
-                  <a:srgbClr val="3D5466"/>
-                </a:solidFill>
-                <a:latin typeface="Arial"/>
-              </a:rPr>
-              <a:t>▸  Unternehmerqualität und Management-Kompetenz</a:t>
-            </a:r>
-          </a:p>
-          <a:p>
-            <a:pPr>
-              <a:spcBef>
-                <a:spcPts val="400"/>
-              </a:spcBef>
-              <a:spcAft>
-                <a:spcPts val="200"/>
-              </a:spcAft>
-            </a:pPr>
-            <a:r>
-              <a:rPr sz="1300">
-                <a:solidFill>
-                  <a:srgbClr val="3D5466"/>
-                </a:solidFill>
-                <a:latin typeface="Arial"/>
-              </a:rPr>
-              <a:t>▸  Branchenrisiko (Kerngegenstand dieses Moduls)</a:t>
-            </a:r>
-          </a:p>
-          <a:p>
-            <a:pPr>
-              <a:spcBef>
-                <a:spcPts val="400"/>
-              </a:spcBef>
-              <a:spcAft>
-                <a:spcPts val="200"/>
-              </a:spcAft>
-            </a:pPr>
-            <a:r>
-              <a:rPr sz="1300">
-                <a:solidFill>
-                  <a:srgbClr val="3D5466"/>
-                </a:solidFill>
-                <a:latin typeface="Arial"/>
-              </a:rPr>
-              <a:t>▸  Marktposition und Wettbewerbsfähigkeit</a:t>
-            </a:r>
-          </a:p>
-          <a:p>
-            <a:pPr>
-              <a:spcBef>
-                <a:spcPts val="400"/>
-              </a:spcBef>
-              <a:spcAft>
-                <a:spcPts val="200"/>
-              </a:spcAft>
-            </a:pPr>
-            <a:r>
-              <a:rPr sz="1300">
-                <a:solidFill>
-                  <a:srgbClr val="3D5466"/>
-                </a:solidFill>
-                <a:latin typeface="Arial"/>
-              </a:rPr>
-              <a:t>▸  Nachfolgeplanung (bei KMU kritisch)</a:t>
+              <a:t>Die folgende Handlungsempfehlung-Karte verdichtet die Branchenrisikoprofile aus diesem Abschnitt zu konkreten Wenn-Dann-Impulsen für Kreditentscheidung und Kundengespräch.</a:t>
             </a:r>
           </a:p>
         </p:txBody>
@@ -8328,7 +9388,7 @@
             <a:avLst/>
           </a:prstGeom>
           <a:solidFill>
-            <a:srgbClr val="EDEDF3"/>
+            <a:srgbClr val="FFFFFF"/>
           </a:solidFill>
           <a:ln>
             <a:noFill/>
@@ -8429,51 +9489,43 @@
                 </a:solidFill>
                 <a:latin typeface="JetBrains Mono"/>
               </a:rPr>
-              <a:t>M05  ·  INHALT</a:t>
-            </a:r>
-          </a:p>
-        </p:txBody>
-      </p:sp>
-      <p:sp>
-        <p:nvSpPr>
-          <p:cNvPr id="5" name="Rectangle 4"/>
-          <p:cNvSpPr/>
-          <p:nvPr/>
-        </p:nvSpPr>
-        <p:spPr>
-          <a:xfrm>
-            <a:off x="0" y="1234440"/>
-            <a:ext cx="12188952" cy="12700"/>
-          </a:xfrm>
-          <a:prstGeom prst="rect">
-            <a:avLst/>
-          </a:prstGeom>
-          <a:solidFill>
-            <a:srgbClr val="D8DFE4"/>
-          </a:solidFill>
-          <a:ln>
-            <a:noFill/>
-          </a:ln>
-        </p:spPr>
-        <p:style>
-          <a:lnRef idx="1">
-            <a:schemeClr val="accent1"/>
-          </a:lnRef>
-          <a:fillRef idx="3">
-            <a:schemeClr val="accent1"/>
-          </a:fillRef>
-          <a:effectRef idx="2">
-            <a:schemeClr val="accent1"/>
-          </a:effectRef>
-          <a:fontRef idx="minor">
-            <a:schemeClr val="lt1"/>
-          </a:fontRef>
-        </p:style>
-        <p:txBody>
-          <a:bodyPr rtlCol="0" anchor="ctr"/>
-          <a:lstStyle/>
-          <a:p>
-            <a:pPr algn="ctr"/>
+              <a:t>M05  ·  SCHAUBILD</a:t>
+            </a:r>
+          </a:p>
+        </p:txBody>
+      </p:sp>
+      <p:sp>
+        <p:nvSpPr>
+          <p:cNvPr id="5" name="TextBox 4"/>
+          <p:cNvSpPr txBox="1"/>
+          <p:nvPr/>
+        </p:nvSpPr>
+        <p:spPr>
+          <a:xfrm>
+            <a:off x="685800" y="502920"/>
+            <a:ext cx="10817352" cy="594360"/>
+          </a:xfrm>
+          <a:prstGeom prst="rect">
+            <a:avLst/>
+          </a:prstGeom>
+          <a:noFill/>
+        </p:spPr>
+        <p:txBody>
+          <a:bodyPr wrap="square">
+            <a:spAutoFit/>
+          </a:bodyPr>
+          <a:lstStyle/>
+          <a:p>
+            <a:pPr algn="l"/>
+            <a:r>
+              <a:rPr sz="2000" b="1" i="0">
+                <a:solidFill>
+                  <a:srgbClr val="1F2C56"/>
+                </a:solidFill>
+                <a:latin typeface="Source Serif 4"/>
+              </a:rPr>
+              <a:t>Handlungsempfehlung</a:t>
+            </a:r>
           </a:p>
         </p:txBody>
       </p:sp>
@@ -8485,8 +9537,8 @@
         </p:nvSpPr>
         <p:spPr>
           <a:xfrm>
-            <a:off x="685800" y="502920"/>
-            <a:ext cx="36576" cy="658368"/>
+            <a:off x="685800" y="1143000"/>
+            <a:ext cx="10817352" cy="25400"/>
           </a:xfrm>
           <a:prstGeom prst="rect">
             <a:avLst/>
@@ -8520,295 +9572,33 @@
           </a:p>
         </p:txBody>
       </p:sp>
-      <p:sp>
-        <p:nvSpPr>
-          <p:cNvPr id="7" name="TextBox 6"/>
-          <p:cNvSpPr txBox="1"/>
-          <p:nvPr/>
-        </p:nvSpPr>
-        <p:spPr>
-          <a:xfrm>
-            <a:off x="813816" y="502920"/>
-            <a:ext cx="10634472" cy="685800"/>
-          </a:xfrm>
-          <a:prstGeom prst="rect">
-            <a:avLst/>
-          </a:prstGeom>
-          <a:noFill/>
-        </p:spPr>
-        <p:txBody>
-          <a:bodyPr wrap="square">
-            <a:spAutoFit/>
-          </a:bodyPr>
-          <a:lstStyle/>
-          <a:p>
-            <a:pPr algn="l"/>
-            <a:r>
-              <a:rPr sz="2400" b="1" i="0">
-                <a:solidFill>
-                  <a:srgbClr val="1F2C56"/>
-                </a:solidFill>
-                <a:latin typeface="Source Serif 4"/>
-              </a:rPr>
-              <a:t>Praxiscase: Bäckerei &amp; Konditorei Hofmann GmbH (Stuttgart, fiktiv)</a:t>
-            </a:r>
-          </a:p>
-        </p:txBody>
-      </p:sp>
-      <p:sp>
-        <p:nvSpPr>
-          <p:cNvPr id="8" name="TextBox 7"/>
-          <p:cNvSpPr txBox="1"/>
-          <p:nvPr/>
-        </p:nvSpPr>
-        <p:spPr>
-          <a:xfrm>
-            <a:off x="685800" y="1417320"/>
-            <a:ext cx="10817352" cy="5029200"/>
-          </a:xfrm>
-          <a:prstGeom prst="rect">
-            <a:avLst/>
-          </a:prstGeom>
-          <a:noFill/>
-        </p:spPr>
-        <p:txBody>
-          <a:bodyPr wrap="square">
-            <a:spAutoFit/>
-          </a:bodyPr>
-          <a:lstStyle/>
-          <a:p>
-            <a:pPr>
-              <a:spcBef>
-                <a:spcPts val="1000"/>
-              </a:spcBef>
-              <a:spcAft>
-                <a:spcPts val="200"/>
-              </a:spcAft>
-            </a:pPr>
-            <a:r>
-              <a:rPr sz="800" b="1">
-                <a:solidFill>
-                  <a:srgbClr val="78808C"/>
-                </a:solidFill>
-                <a:latin typeface="JetBrains Mono"/>
-              </a:rPr>
-              <a:t>4.4.1 UNTERNEHMENSPROFIL</a:t>
-            </a:r>
-          </a:p>
-          <a:p>
-            <a:pPr>
-              <a:spcBef>
-                <a:spcPts val="1000"/>
-              </a:spcBef>
-              <a:spcAft>
-                <a:spcPts val="200"/>
-              </a:spcAft>
-            </a:pPr>
-            <a:r>
-              <a:rPr sz="800" b="1">
-                <a:solidFill>
-                  <a:srgbClr val="78808C"/>
-                </a:solidFill>
-                <a:latin typeface="JetBrains Mono"/>
-              </a:rPr>
-              <a:t>4.4.2 FINANZIELLE SITUATION (JAHRESABSCHLUSS 2024, AUSZÜGE)</a:t>
-            </a:r>
-          </a:p>
-          <a:p>
-            <a:pPr>
-              <a:spcBef>
-                <a:spcPts val="400"/>
-              </a:spcBef>
-              <a:spcAft>
-                <a:spcPts val="200"/>
-              </a:spcAft>
-            </a:pPr>
-            <a:r>
-              <a:rPr sz="1200">
-                <a:solidFill>
-                  <a:srgbClr val="3D5466"/>
-                </a:solidFill>
-                <a:latin typeface="Arial"/>
-              </a:rPr>
-              <a:t>Bilanzauszug:</a:t>
-            </a:r>
-          </a:p>
-          <a:p>
-            <a:pPr>
-              <a:spcBef>
-                <a:spcPts val="400"/>
-              </a:spcBef>
-              <a:spcAft>
-                <a:spcPts val="200"/>
-              </a:spcAft>
-            </a:pPr>
-            <a:r>
-              <a:rPr sz="1200">
-                <a:solidFill>
-                  <a:srgbClr val="3D5466"/>
-                </a:solidFill>
-                <a:latin typeface="Arial"/>
-              </a:rPr>
-              <a:t>Gewinn- und Verlustrechnung 2024:</a:t>
-            </a:r>
-          </a:p>
-          <a:p>
-            <a:pPr>
-              <a:spcBef>
-                <a:spcPts val="400"/>
-              </a:spcBef>
-              <a:spcAft>
-                <a:spcPts val="200"/>
-              </a:spcAft>
-            </a:pPr>
-            <a:r>
-              <a:rPr sz="1200">
-                <a:solidFill>
-                  <a:srgbClr val="3D5466"/>
-                </a:solidFill>
-                <a:latin typeface="Arial"/>
-              </a:rPr>
-              <a:t>Kapitalflussrechnung 2024 (vereinfacht):</a:t>
-            </a:r>
-          </a:p>
-          <a:p>
-            <a:pPr>
-              <a:spcBef>
-                <a:spcPts val="1000"/>
-              </a:spcBef>
-              <a:spcAft>
-                <a:spcPts val="200"/>
-              </a:spcAft>
-            </a:pPr>
-            <a:r>
-              <a:rPr sz="800" b="1">
-                <a:solidFill>
-                  <a:srgbClr val="78808C"/>
-                </a:solidFill>
-                <a:latin typeface="JetBrains Mono"/>
-              </a:rPr>
-              <a:t>4.4.3 KREDITANFRAGE</a:t>
-            </a:r>
-          </a:p>
-          <a:p>
-            <a:pPr>
-              <a:spcBef>
-                <a:spcPts val="400"/>
-              </a:spcBef>
-              <a:spcAft>
-                <a:spcPts val="200"/>
-              </a:spcAft>
-            </a:pPr>
-            <a:r>
-              <a:rPr sz="1200">
-                <a:solidFill>
-                  <a:srgbClr val="3D5466"/>
-                </a:solidFill>
-                <a:latin typeface="Arial"/>
-              </a:rPr>
-              <a:t>Anlass: Investition in neue Backstube Kempten-Süd (170.000 €) + Filialmodernisierung Sonthofen (80.000 €)</a:t>
-            </a:r>
-          </a:p>
-          <a:p>
-            <a:pPr>
-              <a:spcBef>
-                <a:spcPts val="400"/>
-              </a:spcBef>
-              <a:spcAft>
-                <a:spcPts val="200"/>
-              </a:spcAft>
-            </a:pPr>
-            <a:r>
-              <a:rPr sz="1200">
-                <a:solidFill>
-                  <a:srgbClr val="3D5466"/>
-                </a:solidFill>
-                <a:latin typeface="Arial"/>
-              </a:rPr>
-              <a:t>Gesamtkreditbedarf: 250.000 € | Eigenanteil: 30.000 € | Kreditwunsch: 250.000 €</a:t>
-            </a:r>
-          </a:p>
-          <a:p>
-            <a:pPr>
-              <a:spcBef>
-                <a:spcPts val="1000"/>
-              </a:spcBef>
-              <a:spcAft>
-                <a:spcPts val="200"/>
-              </a:spcAft>
-            </a:pPr>
-            <a:r>
-              <a:rPr sz="800" b="1">
-                <a:solidFill>
-                  <a:srgbClr val="78808C"/>
-                </a:solidFill>
-                <a:latin typeface="JetBrains Mono"/>
-              </a:rPr>
-              <a:t>4.4.4 GESPRÄCHSVERLAUF: BRANCHENRISIKOANALYSE (BER = BERATER, GF = GESCHÄFTSFÜHRERIN)</a:t>
-            </a:r>
-          </a:p>
-          <a:p>
-            <a:pPr>
-              <a:spcBef>
-                <a:spcPts val="400"/>
-              </a:spcBef>
-              <a:spcAft>
-                <a:spcPts val="200"/>
-              </a:spcAft>
-            </a:pPr>
-            <a:r>
-              <a:rPr sz="1200">
-                <a:solidFill>
-                  <a:srgbClr val="3D5466"/>
-                </a:solidFill>
-                <a:latin typeface="Arial"/>
-              </a:rPr>
-              <a:t>Session 1 – Erstgespräch Branchenrisiko</a:t>
-            </a:r>
-          </a:p>
-          <a:p>
-            <a:pPr>
-              <a:spcBef>
-                <a:spcPts val="400"/>
-              </a:spcBef>
-              <a:spcAft>
-                <a:spcPts val="200"/>
-              </a:spcAft>
-            </a:pPr>
-            <a:r>
-              <a:rPr sz="1200">
-                <a:solidFill>
-                  <a:srgbClr val="3D5466"/>
-                </a:solidFill>
-                <a:latin typeface="Arial"/>
-              </a:rPr>
-              <a:t>GF: „Wir konnten die Preise nur um etwa 8–10 % erhöhen, ohne Kunden zu verlieren. Das hat die Marge deutlich gedrückt."</a:t>
-            </a:r>
-          </a:p>
-          <a:p>
-            <a:pPr>
-              <a:spcBef>
-                <a:spcPts val="400"/>
-              </a:spcBef>
-              <a:spcAft>
-                <a:spcPts val="200"/>
-              </a:spcAft>
-            </a:pPr>
-            <a:r>
-              <a:rPr sz="1200">
-                <a:solidFill>
-                  <a:srgbClr val="3D5466"/>
-                </a:solidFill>
-                <a:latin typeface="Arial"/>
-              </a:rPr>
-              <a:t>GF: „Nein, wir kaufen zu aktuellen Marktpreisen. Die Lieferanten bieten keine Festpreise an."</a:t>
-            </a:r>
-          </a:p>
-        </p:txBody>
-      </p:sp>
-      <p:sp>
-        <p:nvSpPr>
-          <p:cNvPr id="9" name="Rectangle 8"/>
+      <p:pic>
+        <p:nvPicPr>
+          <p:cNvPr id="7" name="Picture 6" descr="image.png"/>
+          <p:cNvPicPr>
+            <a:picLocks noChangeAspect="1"/>
+          </p:cNvPicPr>
+          <p:nvPr/>
+        </p:nvPicPr>
+        <p:blipFill>
+          <a:blip r:embed="rId2"/>
+          <a:stretch>
+            <a:fillRect/>
+          </a:stretch>
+        </p:blipFill>
+        <p:spPr>
+          <a:xfrm>
+            <a:off x="2303489" y="1325880"/>
+            <a:ext cx="7581973" cy="4937760"/>
+          </a:xfrm>
+          <a:prstGeom prst="rect">
+            <a:avLst/>
+          </a:prstGeom>
+        </p:spPr>
+      </p:pic>
+      <p:sp>
+        <p:nvSpPr>
+          <p:cNvPr id="8" name="Rectangle 7"/>
           <p:cNvSpPr/>
           <p:nvPr/>
         </p:nvSpPr>
@@ -8851,7 +9641,7 @@
       </p:sp>
       <p:sp>
         <p:nvSpPr>
-          <p:cNvPr id="10" name="TextBox 9"/>
+          <p:cNvPr id="9" name="TextBox 8"/>
           <p:cNvSpPr txBox="1"/>
           <p:nvPr/>
         </p:nvSpPr>
@@ -8880,6 +9670,41 @@
                 <a:latin typeface="JetBrains Mono"/>
               </a:rPr>
               <a:t>Benedikt Zoller Coaching  ·  FKB Campus  ·  M05</a:t>
+            </a:r>
+          </a:p>
+        </p:txBody>
+      </p:sp>
+      <p:sp>
+        <p:nvSpPr>
+          <p:cNvPr id="10" name="TextBox 9"/>
+          <p:cNvSpPr txBox="1"/>
+          <p:nvPr/>
+        </p:nvSpPr>
+        <p:spPr>
+          <a:xfrm>
+            <a:off x="7176211" y="6583680"/>
+            <a:ext cx="4326940" cy="256032"/>
+          </a:xfrm>
+          <a:prstGeom prst="rect">
+            <a:avLst/>
+          </a:prstGeom>
+          <a:noFill/>
+        </p:spPr>
+        <p:txBody>
+          <a:bodyPr wrap="none">
+            <a:spAutoFit/>
+          </a:bodyPr>
+          <a:lstStyle/>
+          <a:p>
+            <a:pPr algn="r"/>
+            <a:r>
+              <a:rPr sz="700">
+                <a:solidFill>
+                  <a:srgbClr val="A0B4D2"/>
+                </a:solidFill>
+                <a:latin typeface="JetBrains Mono"/>
+              </a:rPr>
+              <a:t>Schaubild</a:t>
             </a:r>
           </a:p>
         </p:txBody>

--- a/protected-downloads/praesentation/M05.pptx
+++ b/protected-downloads/praesentation/M05.pptx
@@ -8,7 +8,7 @@
     <p:sldId id="256" r:id="rId7"/>
     <p:sldId id="257" r:id="rId8"/>
     <p:sldId id="258" r:id="rId9"/>
-    <p:sldId id="259" r:id="rId11"/>
+    <p:sldId id="259" r:id="rId10"/>
     <p:sldId id="260" r:id="rId12"/>
     <p:sldId id="261" r:id="rId13"/>
     <p:sldId id="262" r:id="rId14"/>
@@ -17,6 +17,7 @@
     <p:sldId id="265" r:id="rId17"/>
     <p:sldId id="266" r:id="rId18"/>
     <p:sldId id="267" r:id="rId19"/>
+    <p:sldId id="268" r:id="rId20"/>
   </p:sldIdLst>
   <p:sldSz cx="12188952" cy="6858000" type="screen4x3"/>
   <p:notesSz cx="6858000" cy="9144000"/>
@@ -4529,7 +4530,7 @@
             <a:avLst/>
           </a:prstGeom>
           <a:solidFill>
-            <a:srgbClr val="EDEDF3"/>
+            <a:srgbClr val="FFFFFF"/>
           </a:solidFill>
           <a:ln>
             <a:noFill/>
@@ -4630,51 +4631,43 @@
                 </a:solidFill>
                 <a:latin typeface="JetBrains Mono"/>
               </a:rPr>
-              <a:t>M05  ·  INHALT</a:t>
-            </a:r>
-          </a:p>
-        </p:txBody>
-      </p:sp>
-      <p:sp>
-        <p:nvSpPr>
-          <p:cNvPr id="5" name="Rectangle 4"/>
-          <p:cNvSpPr/>
-          <p:nvPr/>
-        </p:nvSpPr>
-        <p:spPr>
-          <a:xfrm>
-            <a:off x="0" y="1234440"/>
-            <a:ext cx="12188952" cy="12700"/>
-          </a:xfrm>
-          <a:prstGeom prst="rect">
-            <a:avLst/>
-          </a:prstGeom>
-          <a:solidFill>
-            <a:srgbClr val="D8DFE4"/>
-          </a:solidFill>
-          <a:ln>
-            <a:noFill/>
-          </a:ln>
-        </p:spPr>
-        <p:style>
-          <a:lnRef idx="1">
-            <a:schemeClr val="accent1"/>
-          </a:lnRef>
-          <a:fillRef idx="3">
-            <a:schemeClr val="accent1"/>
-          </a:fillRef>
-          <a:effectRef idx="2">
-            <a:schemeClr val="accent1"/>
-          </a:effectRef>
-          <a:fontRef idx="minor">
-            <a:schemeClr val="lt1"/>
-          </a:fontRef>
-        </p:style>
-        <p:txBody>
-          <a:bodyPr rtlCol="0" anchor="ctr"/>
-          <a:lstStyle/>
-          <a:p>
-            <a:pPr algn="ctr"/>
+              <a:t>M05  ·  SCHAUBILD</a:t>
+            </a:r>
+          </a:p>
+        </p:txBody>
+      </p:sp>
+      <p:sp>
+        <p:nvSpPr>
+          <p:cNvPr id="5" name="TextBox 4"/>
+          <p:cNvSpPr txBox="1"/>
+          <p:nvPr/>
+        </p:nvSpPr>
+        <p:spPr>
+          <a:xfrm>
+            <a:off x="685800" y="502920"/>
+            <a:ext cx="10817352" cy="594360"/>
+          </a:xfrm>
+          <a:prstGeom prst="rect">
+            <a:avLst/>
+          </a:prstGeom>
+          <a:noFill/>
+        </p:spPr>
+        <p:txBody>
+          <a:bodyPr wrap="square">
+            <a:spAutoFit/>
+          </a:bodyPr>
+          <a:lstStyle/>
+          <a:p>
+            <a:pPr algn="l"/>
+            <a:r>
+              <a:rPr sz="2000" b="1" i="0">
+                <a:solidFill>
+                  <a:srgbClr val="1F2C56"/>
+                </a:solidFill>
+                <a:latin typeface="Source Serif 4"/>
+              </a:rPr>
+              <a:t>Handlungsempfehlung</a:t>
+            </a:r>
           </a:p>
         </p:txBody>
       </p:sp>
@@ -4686,8 +4679,8 @@
         </p:nvSpPr>
         <p:spPr>
           <a:xfrm>
-            <a:off x="685800" y="502920"/>
-            <a:ext cx="36576" cy="658368"/>
+            <a:off x="685800" y="1143000"/>
+            <a:ext cx="10817352" cy="25400"/>
           </a:xfrm>
           <a:prstGeom prst="rect">
             <a:avLst/>
@@ -4721,295 +4714,33 @@
           </a:p>
         </p:txBody>
       </p:sp>
-      <p:sp>
-        <p:nvSpPr>
-          <p:cNvPr id="7" name="TextBox 6"/>
-          <p:cNvSpPr txBox="1"/>
-          <p:nvPr/>
-        </p:nvSpPr>
-        <p:spPr>
-          <a:xfrm>
-            <a:off x="813816" y="502920"/>
-            <a:ext cx="10634472" cy="685800"/>
-          </a:xfrm>
-          <a:prstGeom prst="rect">
-            <a:avLst/>
-          </a:prstGeom>
-          <a:noFill/>
-        </p:spPr>
-        <p:txBody>
-          <a:bodyPr wrap="square">
-            <a:spAutoFit/>
-          </a:bodyPr>
-          <a:lstStyle/>
-          <a:p>
-            <a:pPr algn="l"/>
-            <a:r>
-              <a:rPr sz="2400" b="1" i="0">
-                <a:solidFill>
-                  <a:srgbClr val="1F2C56"/>
-                </a:solidFill>
-                <a:latin typeface="Source Serif 4"/>
-              </a:rPr>
-              <a:t>Theorie-Input: VR-Rating und branchenspezifische Ratingfaktoren</a:t>
-            </a:r>
-          </a:p>
-        </p:txBody>
-      </p:sp>
-      <p:sp>
-        <p:nvSpPr>
-          <p:cNvPr id="8" name="TextBox 7"/>
-          <p:cNvSpPr txBox="1"/>
-          <p:nvPr/>
-        </p:nvSpPr>
-        <p:spPr>
-          <a:xfrm>
-            <a:off x="685800" y="1417320"/>
-            <a:ext cx="10817352" cy="5029200"/>
-          </a:xfrm>
-          <a:prstGeom prst="rect">
-            <a:avLst/>
-          </a:prstGeom>
-          <a:noFill/>
-        </p:spPr>
-        <p:txBody>
-          <a:bodyPr wrap="square">
-            <a:spAutoFit/>
-          </a:bodyPr>
-          <a:lstStyle/>
-          <a:p>
-            <a:pPr>
-              <a:spcBef>
-                <a:spcPts val="1000"/>
-              </a:spcBef>
-              <a:spcAft>
-                <a:spcPts val="200"/>
-              </a:spcAft>
-            </a:pPr>
-            <a:r>
-              <a:rPr sz="800" b="1">
-                <a:solidFill>
-                  <a:srgbClr val="78808C"/>
-                </a:solidFill>
-                <a:latin typeface="JetBrains Mono"/>
-              </a:rPr>
-              <a:t>4.3.1 AUFBAU DES VR-RATINGS</a:t>
-            </a:r>
-          </a:p>
-          <a:p>
-            <a:pPr>
-              <a:spcBef>
-                <a:spcPts val="400"/>
-              </a:spcBef>
-              <a:spcAft>
-                <a:spcPts val="200"/>
-              </a:spcAft>
-            </a:pPr>
-            <a:r>
-              <a:rPr sz="1200">
-                <a:solidFill>
-                  <a:srgbClr val="3D5466"/>
-                </a:solidFill>
-                <a:latin typeface="Arial"/>
-              </a:rPr>
-              <a:t>Das VR-Rating kombiniert quantitative und qualitative Komponenten:</a:t>
-            </a:r>
-          </a:p>
-          <a:p>
-            <a:pPr>
-              <a:spcBef>
-                <a:spcPts val="400"/>
-              </a:spcBef>
-              <a:spcAft>
-                <a:spcPts val="200"/>
-              </a:spcAft>
-            </a:pPr>
-            <a:r>
-              <a:rPr sz="1200">
-                <a:solidFill>
-                  <a:srgbClr val="3D5466"/>
-                </a:solidFill>
-                <a:latin typeface="Arial"/>
-              </a:rPr>
-              <a:t>Quantitativ (ca. 60–70 % Gewicht):</a:t>
-            </a:r>
-          </a:p>
-          <a:p>
-            <a:pPr>
-              <a:spcBef>
-                <a:spcPts val="400"/>
-              </a:spcBef>
-              <a:spcAft>
-                <a:spcPts val="200"/>
-              </a:spcAft>
-            </a:pPr>
-            <a:r>
-              <a:rPr sz="1300">
-                <a:solidFill>
-                  <a:srgbClr val="3D5466"/>
-                </a:solidFill>
-                <a:latin typeface="Arial"/>
-              </a:rPr>
-              <a:t>▸  Rentabilitätskennzahlen (EBIT-Marge, Eigenkapitalrentabilität)</a:t>
-            </a:r>
-          </a:p>
-          <a:p>
-            <a:pPr>
-              <a:spcBef>
-                <a:spcPts val="400"/>
-              </a:spcBef>
-              <a:spcAft>
-                <a:spcPts val="200"/>
-              </a:spcAft>
-            </a:pPr>
-            <a:r>
-              <a:rPr sz="1300">
-                <a:solidFill>
-                  <a:srgbClr val="3D5466"/>
-                </a:solidFill>
-                <a:latin typeface="Arial"/>
-              </a:rPr>
-              <a:t>▸  Liquiditätskennzahlen (Liquiditätsgrade, Cash-Flow-Relationen)</a:t>
-            </a:r>
-          </a:p>
-          <a:p>
-            <a:pPr>
-              <a:spcBef>
-                <a:spcPts val="400"/>
-              </a:spcBef>
-              <a:spcAft>
-                <a:spcPts val="200"/>
-              </a:spcAft>
-            </a:pPr>
-            <a:r>
-              <a:rPr sz="1300">
-                <a:solidFill>
-                  <a:srgbClr val="3D5466"/>
-                </a:solidFill>
-                <a:latin typeface="Arial"/>
-              </a:rPr>
-              <a:t>▸  Verschuldungskennzahlen (Eigenkapitalquote, Verschuldungsgrad, Zinsdeckungsquote)</a:t>
-            </a:r>
-          </a:p>
-          <a:p>
-            <a:pPr>
-              <a:spcBef>
-                <a:spcPts val="400"/>
-              </a:spcBef>
-              <a:spcAft>
-                <a:spcPts val="200"/>
-              </a:spcAft>
-            </a:pPr>
-            <a:r>
-              <a:rPr sz="1300">
-                <a:solidFill>
-                  <a:srgbClr val="3D5466"/>
-                </a:solidFill>
-                <a:latin typeface="Arial"/>
-              </a:rPr>
-              <a:t>▸  Trendindikatoren (Entwicklung über 3 Jahre)</a:t>
-            </a:r>
-          </a:p>
-          <a:p>
-            <a:pPr>
-              <a:spcBef>
-                <a:spcPts val="400"/>
-              </a:spcBef>
-              <a:spcAft>
-                <a:spcPts val="200"/>
-              </a:spcAft>
-            </a:pPr>
-            <a:r>
-              <a:rPr sz="1200">
-                <a:solidFill>
-                  <a:srgbClr val="3D5466"/>
-                </a:solidFill>
-                <a:latin typeface="Arial"/>
-              </a:rPr>
-              <a:t>Qualitativ (ca. 30–40 % Gewicht):</a:t>
-            </a:r>
-          </a:p>
-          <a:p>
-            <a:pPr>
-              <a:spcBef>
-                <a:spcPts val="400"/>
-              </a:spcBef>
-              <a:spcAft>
-                <a:spcPts val="200"/>
-              </a:spcAft>
-            </a:pPr>
-            <a:r>
-              <a:rPr sz="1300">
-                <a:solidFill>
-                  <a:srgbClr val="3D5466"/>
-                </a:solidFill>
-                <a:latin typeface="Arial"/>
-              </a:rPr>
-              <a:t>▸  Unternehmerqualität und Management-Kompetenz</a:t>
-            </a:r>
-          </a:p>
-          <a:p>
-            <a:pPr>
-              <a:spcBef>
-                <a:spcPts val="400"/>
-              </a:spcBef>
-              <a:spcAft>
-                <a:spcPts val="200"/>
-              </a:spcAft>
-            </a:pPr>
-            <a:r>
-              <a:rPr sz="1300">
-                <a:solidFill>
-                  <a:srgbClr val="3D5466"/>
-                </a:solidFill>
-                <a:latin typeface="Arial"/>
-              </a:rPr>
-              <a:t>▸  Branchenrisiko (Kerngegenstand dieses Moduls)</a:t>
-            </a:r>
-          </a:p>
-          <a:p>
-            <a:pPr>
-              <a:spcBef>
-                <a:spcPts val="400"/>
-              </a:spcBef>
-              <a:spcAft>
-                <a:spcPts val="200"/>
-              </a:spcAft>
-            </a:pPr>
-            <a:r>
-              <a:rPr sz="1300">
-                <a:solidFill>
-                  <a:srgbClr val="3D5466"/>
-                </a:solidFill>
-                <a:latin typeface="Arial"/>
-              </a:rPr>
-              <a:t>▸  Marktposition und Wettbewerbsfähigkeit</a:t>
-            </a:r>
-          </a:p>
-          <a:p>
-            <a:pPr>
-              <a:spcBef>
-                <a:spcPts val="400"/>
-              </a:spcBef>
-              <a:spcAft>
-                <a:spcPts val="200"/>
-              </a:spcAft>
-            </a:pPr>
-            <a:r>
-              <a:rPr sz="1300">
-                <a:solidFill>
-                  <a:srgbClr val="3D5466"/>
-                </a:solidFill>
-                <a:latin typeface="Arial"/>
-              </a:rPr>
-              <a:t>▸  Nachfolgeplanung (bei KMU kritisch)</a:t>
-            </a:r>
-          </a:p>
-        </p:txBody>
-      </p:sp>
-      <p:sp>
-        <p:nvSpPr>
-          <p:cNvPr id="9" name="Rectangle 8"/>
+      <p:pic>
+        <p:nvPicPr>
+          <p:cNvPr id="7" name="Picture 6" descr="image.png"/>
+          <p:cNvPicPr>
+            <a:picLocks noChangeAspect="1"/>
+          </p:cNvPicPr>
+          <p:nvPr/>
+        </p:nvPicPr>
+        <p:blipFill>
+          <a:blip r:embed="rId2"/>
+          <a:stretch>
+            <a:fillRect/>
+          </a:stretch>
+        </p:blipFill>
+        <p:spPr>
+          <a:xfrm>
+            <a:off x="2303489" y="1325880"/>
+            <a:ext cx="7581973" cy="4937760"/>
+          </a:xfrm>
+          <a:prstGeom prst="rect">
+            <a:avLst/>
+          </a:prstGeom>
+        </p:spPr>
+      </p:pic>
+      <p:sp>
+        <p:nvSpPr>
+          <p:cNvPr id="8" name="Rectangle 7"/>
           <p:cNvSpPr/>
           <p:nvPr/>
         </p:nvSpPr>
@@ -5052,7 +4783,7 @@
       </p:sp>
       <p:sp>
         <p:nvSpPr>
-          <p:cNvPr id="10" name="TextBox 9"/>
+          <p:cNvPr id="9" name="TextBox 8"/>
           <p:cNvSpPr txBox="1"/>
           <p:nvPr/>
         </p:nvSpPr>
@@ -5081,6 +4812,41 @@
                 <a:latin typeface="JetBrains Mono"/>
               </a:rPr>
               <a:t>Benedikt Zoller Coaching  ·  FKB Campus  ·  M05</a:t>
+            </a:r>
+          </a:p>
+        </p:txBody>
+      </p:sp>
+      <p:sp>
+        <p:nvSpPr>
+          <p:cNvPr id="10" name="TextBox 9"/>
+          <p:cNvSpPr txBox="1"/>
+          <p:nvPr/>
+        </p:nvSpPr>
+        <p:spPr>
+          <a:xfrm>
+            <a:off x="7176211" y="6583680"/>
+            <a:ext cx="4326940" cy="256032"/>
+          </a:xfrm>
+          <a:prstGeom prst="rect">
+            <a:avLst/>
+          </a:prstGeom>
+          <a:noFill/>
+        </p:spPr>
+        <p:txBody>
+          <a:bodyPr wrap="none">
+            <a:spAutoFit/>
+          </a:bodyPr>
+          <a:lstStyle/>
+          <a:p>
+            <a:pPr algn="r"/>
+            <a:r>
+              <a:rPr sz="700">
+                <a:solidFill>
+                  <a:srgbClr val="A0B4D2"/>
+                </a:solidFill>
+                <a:latin typeface="JetBrains Mono"/>
+              </a:rPr>
+              <a:t>Schaubild</a:t>
             </a:r>
           </a:p>
         </p:txBody>
@@ -5340,7 +5106,7 @@
                 </a:solidFill>
                 <a:latin typeface="Source Serif 4"/>
               </a:rPr>
-              <a:t>Praxiscase: Bäckerei &amp; Konditorei Hofmann GmbH (Stuttgart, fiktiv)</a:t>
+              <a:t>Theorie-Input: VR-Rating und branchenspezifische Ratingfaktoren</a:t>
             </a:r>
           </a:p>
         </p:txBody>
@@ -5382,26 +5148,7 @@
                 </a:solidFill>
                 <a:latin typeface="JetBrains Mono"/>
               </a:rPr>
-              <a:t>4.4.1 UNTERNEHMENSPROFIL</a:t>
-            </a:r>
-          </a:p>
-          <a:p>
-            <a:pPr>
-              <a:spcBef>
-                <a:spcPts val="1000"/>
-              </a:spcBef>
-              <a:spcAft>
-                <a:spcPts val="200"/>
-              </a:spcAft>
-            </a:pPr>
-            <a:r>
-              <a:rPr sz="800" b="1">
-                <a:solidFill>
-                  <a:srgbClr val="78808C"/>
-                </a:solidFill>
-                <a:latin typeface="JetBrains Mono"/>
-              </a:rPr>
-              <a:t>4.4.2 FINANZIELLE SITUATION (JAHRESABSCHLUSS 2024, AUSZÜGE)</a:t>
+              <a:t>4.3.1 AUFBAU DES VR-RATINGS</a:t>
             </a:r>
           </a:p>
           <a:p>
@@ -5420,7 +5167,7 @@
                 </a:solidFill>
                 <a:latin typeface="Arial"/>
               </a:rPr>
-              <a:t>Bilanzauszug:</a:t>
+              <a:t>Das VR-Rating kombiniert quantitative und qualitative Komponenten:</a:t>
             </a:r>
           </a:p>
           <a:p>
@@ -5439,7 +5186,7 @@
                 </a:solidFill>
                 <a:latin typeface="Arial"/>
               </a:rPr>
-              <a:t>Gewinn- und Verlustrechnung 2024:</a:t>
+              <a:t>Quantitativ (ca. 60–70 % Gewicht):</a:t>
             </a:r>
           </a:p>
           <a:p>
@@ -5452,32 +5199,13 @@
               </a:spcAft>
             </a:pPr>
             <a:r>
-              <a:rPr sz="1200">
+              <a:rPr sz="1300">
                 <a:solidFill>
                   <a:srgbClr val="3D5466"/>
                 </a:solidFill>
                 <a:latin typeface="Arial"/>
               </a:rPr>
-              <a:t>Kapitalflussrechnung 2024 (vereinfacht):</a:t>
-            </a:r>
-          </a:p>
-          <a:p>
-            <a:pPr>
-              <a:spcBef>
-                <a:spcPts val="1000"/>
-              </a:spcBef>
-              <a:spcAft>
-                <a:spcPts val="200"/>
-              </a:spcAft>
-            </a:pPr>
-            <a:r>
-              <a:rPr sz="800" b="1">
-                <a:solidFill>
-                  <a:srgbClr val="78808C"/>
-                </a:solidFill>
-                <a:latin typeface="JetBrains Mono"/>
-              </a:rPr>
-              <a:t>4.4.3 KREDITANFRAGE</a:t>
+              <a:t>▸  Rentabilitätskennzahlen (EBIT-Marge, Eigenkapitalrentabilität)</a:t>
             </a:r>
           </a:p>
           <a:p>
@@ -5490,13 +5218,13 @@
               </a:spcAft>
             </a:pPr>
             <a:r>
-              <a:rPr sz="1200">
+              <a:rPr sz="1300">
                 <a:solidFill>
                   <a:srgbClr val="3D5466"/>
                 </a:solidFill>
                 <a:latin typeface="Arial"/>
               </a:rPr>
-              <a:t>Anlass: Investition in neue Backstube Kempten-Süd (170.000 €) + Filialmodernisierung Sonthofen (80.000 €)</a:t>
+              <a:t>▸  Liquiditätskennzahlen (Liquiditätsgrade, Cash-Flow-Relationen)</a:t>
             </a:r>
           </a:p>
           <a:p>
@@ -5509,32 +5237,13 @@
               </a:spcAft>
             </a:pPr>
             <a:r>
-              <a:rPr sz="1200">
+              <a:rPr sz="1300">
                 <a:solidFill>
                   <a:srgbClr val="3D5466"/>
                 </a:solidFill>
                 <a:latin typeface="Arial"/>
               </a:rPr>
-              <a:t>Gesamtkreditbedarf: 250.000 € | Eigenanteil: 30.000 € | Kreditwunsch: 250.000 €</a:t>
-            </a:r>
-          </a:p>
-          <a:p>
-            <a:pPr>
-              <a:spcBef>
-                <a:spcPts val="1000"/>
-              </a:spcBef>
-              <a:spcAft>
-                <a:spcPts val="200"/>
-              </a:spcAft>
-            </a:pPr>
-            <a:r>
-              <a:rPr sz="800" b="1">
-                <a:solidFill>
-                  <a:srgbClr val="78808C"/>
-                </a:solidFill>
-                <a:latin typeface="JetBrains Mono"/>
-              </a:rPr>
-              <a:t>4.4.4 GESPRÄCHSVERLAUF: BRANCHENRISIKOANALYSE (BER = BERATER, GF = GESCHÄFTSFÜHRERIN)</a:t>
+              <a:t>▸  Verschuldungskennzahlen (Eigenkapitalquote, Verschuldungsgrad, Zinsdeckungsquote)</a:t>
             </a:r>
           </a:p>
           <a:p>
@@ -5547,13 +5256,13 @@
               </a:spcAft>
             </a:pPr>
             <a:r>
-              <a:rPr sz="1200">
+              <a:rPr sz="1300">
                 <a:solidFill>
                   <a:srgbClr val="3D5466"/>
                 </a:solidFill>
                 <a:latin typeface="Arial"/>
               </a:rPr>
-              <a:t>Session 1 – Erstgespräch Branchenrisiko</a:t>
+              <a:t>▸  Trendindikatoren (Entwicklung über 3 Jahre)</a:t>
             </a:r>
           </a:p>
           <a:p>
@@ -5572,7 +5281,7 @@
                 </a:solidFill>
                 <a:latin typeface="Arial"/>
               </a:rPr>
-              <a:t>GF: „Wir konnten die Preise nur um etwa 8–10 % erhöhen, ohne Kunden zu verlieren. Das hat die Marge deutlich gedrückt."</a:t>
+              <a:t>Qualitativ (ca. 30–40 % Gewicht):</a:t>
             </a:r>
           </a:p>
           <a:p>
@@ -5585,13 +5294,70 @@
               </a:spcAft>
             </a:pPr>
             <a:r>
-              <a:rPr sz="1200">
+              <a:rPr sz="1300">
                 <a:solidFill>
                   <a:srgbClr val="3D5466"/>
                 </a:solidFill>
                 <a:latin typeface="Arial"/>
               </a:rPr>
-              <a:t>GF: „Nein, wir kaufen zu aktuellen Marktpreisen. Die Lieferanten bieten keine Festpreise an."</a:t>
+              <a:t>▸  Unternehmerqualität und Management-Kompetenz</a:t>
+            </a:r>
+          </a:p>
+          <a:p>
+            <a:pPr>
+              <a:spcBef>
+                <a:spcPts val="400"/>
+              </a:spcBef>
+              <a:spcAft>
+                <a:spcPts val="200"/>
+              </a:spcAft>
+            </a:pPr>
+            <a:r>
+              <a:rPr sz="1300">
+                <a:solidFill>
+                  <a:srgbClr val="3D5466"/>
+                </a:solidFill>
+                <a:latin typeface="Arial"/>
+              </a:rPr>
+              <a:t>▸  Branchenrisiko (Kerngegenstand dieses Moduls)</a:t>
+            </a:r>
+          </a:p>
+          <a:p>
+            <a:pPr>
+              <a:spcBef>
+                <a:spcPts val="400"/>
+              </a:spcBef>
+              <a:spcAft>
+                <a:spcPts val="200"/>
+              </a:spcAft>
+            </a:pPr>
+            <a:r>
+              <a:rPr sz="1300">
+                <a:solidFill>
+                  <a:srgbClr val="3D5466"/>
+                </a:solidFill>
+                <a:latin typeface="Arial"/>
+              </a:rPr>
+              <a:t>▸  Marktposition und Wettbewerbsfähigkeit</a:t>
+            </a:r>
+          </a:p>
+          <a:p>
+            <a:pPr>
+              <a:spcBef>
+                <a:spcPts val="400"/>
+              </a:spcBef>
+              <a:spcAft>
+                <a:spcPts val="200"/>
+              </a:spcAft>
+            </a:pPr>
+            <a:r>
+              <a:rPr sz="1300">
+                <a:solidFill>
+                  <a:srgbClr val="3D5466"/>
+                </a:solidFill>
+                <a:latin typeface="Arial"/>
+              </a:rPr>
+              <a:t>▸  Nachfolgeplanung (bei KMU kritisch)</a:t>
             </a:r>
           </a:p>
         </p:txBody>
@@ -5929,6 +5695,595 @@
                 </a:solidFill>
                 <a:latin typeface="Source Serif 4"/>
               </a:rPr>
+              <a:t>Praxiscase: Bäckerei &amp; Konditorei Hofmann GmbH (Stuttgart, fiktiv)</a:t>
+            </a:r>
+          </a:p>
+        </p:txBody>
+      </p:sp>
+      <p:sp>
+        <p:nvSpPr>
+          <p:cNvPr id="8" name="TextBox 7"/>
+          <p:cNvSpPr txBox="1"/>
+          <p:nvPr/>
+        </p:nvSpPr>
+        <p:spPr>
+          <a:xfrm>
+            <a:off x="685800" y="1417320"/>
+            <a:ext cx="10817352" cy="5029200"/>
+          </a:xfrm>
+          <a:prstGeom prst="rect">
+            <a:avLst/>
+          </a:prstGeom>
+          <a:noFill/>
+        </p:spPr>
+        <p:txBody>
+          <a:bodyPr wrap="square">
+            <a:spAutoFit/>
+          </a:bodyPr>
+          <a:lstStyle/>
+          <a:p>
+            <a:pPr>
+              <a:spcBef>
+                <a:spcPts val="1000"/>
+              </a:spcBef>
+              <a:spcAft>
+                <a:spcPts val="200"/>
+              </a:spcAft>
+            </a:pPr>
+            <a:r>
+              <a:rPr sz="800" b="1">
+                <a:solidFill>
+                  <a:srgbClr val="78808C"/>
+                </a:solidFill>
+                <a:latin typeface="JetBrains Mono"/>
+              </a:rPr>
+              <a:t>4.4.1 UNTERNEHMENSPROFIL</a:t>
+            </a:r>
+          </a:p>
+          <a:p>
+            <a:pPr>
+              <a:spcBef>
+                <a:spcPts val="1000"/>
+              </a:spcBef>
+              <a:spcAft>
+                <a:spcPts val="200"/>
+              </a:spcAft>
+            </a:pPr>
+            <a:r>
+              <a:rPr sz="800" b="1">
+                <a:solidFill>
+                  <a:srgbClr val="78808C"/>
+                </a:solidFill>
+                <a:latin typeface="JetBrains Mono"/>
+              </a:rPr>
+              <a:t>4.4.2 FINANZIELLE SITUATION (JAHRESABSCHLUSS 2024, AUSZÜGE)</a:t>
+            </a:r>
+          </a:p>
+          <a:p>
+            <a:pPr>
+              <a:spcBef>
+                <a:spcPts val="400"/>
+              </a:spcBef>
+              <a:spcAft>
+                <a:spcPts val="200"/>
+              </a:spcAft>
+            </a:pPr>
+            <a:r>
+              <a:rPr sz="1200">
+                <a:solidFill>
+                  <a:srgbClr val="3D5466"/>
+                </a:solidFill>
+                <a:latin typeface="Arial"/>
+              </a:rPr>
+              <a:t>Bilanzauszug:</a:t>
+            </a:r>
+          </a:p>
+          <a:p>
+            <a:pPr>
+              <a:spcBef>
+                <a:spcPts val="400"/>
+              </a:spcBef>
+              <a:spcAft>
+                <a:spcPts val="200"/>
+              </a:spcAft>
+            </a:pPr>
+            <a:r>
+              <a:rPr sz="1200">
+                <a:solidFill>
+                  <a:srgbClr val="3D5466"/>
+                </a:solidFill>
+                <a:latin typeface="Arial"/>
+              </a:rPr>
+              <a:t>Gewinn- und Verlustrechnung 2024:</a:t>
+            </a:r>
+          </a:p>
+          <a:p>
+            <a:pPr>
+              <a:spcBef>
+                <a:spcPts val="400"/>
+              </a:spcBef>
+              <a:spcAft>
+                <a:spcPts val="200"/>
+              </a:spcAft>
+            </a:pPr>
+            <a:r>
+              <a:rPr sz="1200">
+                <a:solidFill>
+                  <a:srgbClr val="3D5466"/>
+                </a:solidFill>
+                <a:latin typeface="Arial"/>
+              </a:rPr>
+              <a:t>Kapitalflussrechnung 2024 (vereinfacht):</a:t>
+            </a:r>
+          </a:p>
+          <a:p>
+            <a:pPr>
+              <a:spcBef>
+                <a:spcPts val="1000"/>
+              </a:spcBef>
+              <a:spcAft>
+                <a:spcPts val="200"/>
+              </a:spcAft>
+            </a:pPr>
+            <a:r>
+              <a:rPr sz="800" b="1">
+                <a:solidFill>
+                  <a:srgbClr val="78808C"/>
+                </a:solidFill>
+                <a:latin typeface="JetBrains Mono"/>
+              </a:rPr>
+              <a:t>4.4.3 KREDITANFRAGE</a:t>
+            </a:r>
+          </a:p>
+          <a:p>
+            <a:pPr>
+              <a:spcBef>
+                <a:spcPts val="400"/>
+              </a:spcBef>
+              <a:spcAft>
+                <a:spcPts val="200"/>
+              </a:spcAft>
+            </a:pPr>
+            <a:r>
+              <a:rPr sz="1200">
+                <a:solidFill>
+                  <a:srgbClr val="3D5466"/>
+                </a:solidFill>
+                <a:latin typeface="Arial"/>
+              </a:rPr>
+              <a:t>Anlass: Investition in neue Backstube Kempten-Süd (170.000 €) + Filialmodernisierung Sonthofen (80.000 €)</a:t>
+            </a:r>
+          </a:p>
+          <a:p>
+            <a:pPr>
+              <a:spcBef>
+                <a:spcPts val="400"/>
+              </a:spcBef>
+              <a:spcAft>
+                <a:spcPts val="200"/>
+              </a:spcAft>
+            </a:pPr>
+            <a:r>
+              <a:rPr sz="1200">
+                <a:solidFill>
+                  <a:srgbClr val="3D5466"/>
+                </a:solidFill>
+                <a:latin typeface="Arial"/>
+              </a:rPr>
+              <a:t>Gesamtkreditbedarf: 250.000 € | Eigenanteil: 30.000 € | Kreditwunsch: 250.000 €</a:t>
+            </a:r>
+          </a:p>
+          <a:p>
+            <a:pPr>
+              <a:spcBef>
+                <a:spcPts val="1000"/>
+              </a:spcBef>
+              <a:spcAft>
+                <a:spcPts val="200"/>
+              </a:spcAft>
+            </a:pPr>
+            <a:r>
+              <a:rPr sz="800" b="1">
+                <a:solidFill>
+                  <a:srgbClr val="78808C"/>
+                </a:solidFill>
+                <a:latin typeface="JetBrains Mono"/>
+              </a:rPr>
+              <a:t>4.4.4 GESPRÄCHSVERLAUF: BRANCHENRISIKOANALYSE (BER = BERATER, GF = GESCHÄFTSFÜHRERIN)</a:t>
+            </a:r>
+          </a:p>
+          <a:p>
+            <a:pPr>
+              <a:spcBef>
+                <a:spcPts val="400"/>
+              </a:spcBef>
+              <a:spcAft>
+                <a:spcPts val="200"/>
+              </a:spcAft>
+            </a:pPr>
+            <a:r>
+              <a:rPr sz="1200">
+                <a:solidFill>
+                  <a:srgbClr val="3D5466"/>
+                </a:solidFill>
+                <a:latin typeface="Arial"/>
+              </a:rPr>
+              <a:t>Session 1 – Erstgespräch Branchenrisiko</a:t>
+            </a:r>
+          </a:p>
+          <a:p>
+            <a:pPr>
+              <a:spcBef>
+                <a:spcPts val="400"/>
+              </a:spcBef>
+              <a:spcAft>
+                <a:spcPts val="200"/>
+              </a:spcAft>
+            </a:pPr>
+            <a:r>
+              <a:rPr sz="1200">
+                <a:solidFill>
+                  <a:srgbClr val="3D5466"/>
+                </a:solidFill>
+                <a:latin typeface="Arial"/>
+              </a:rPr>
+              <a:t>GF: „Wir konnten die Preise nur um etwa 8–10 % erhöhen, ohne Kunden zu verlieren. Das hat die Marge deutlich gedrückt."</a:t>
+            </a:r>
+          </a:p>
+          <a:p>
+            <a:pPr>
+              <a:spcBef>
+                <a:spcPts val="400"/>
+              </a:spcBef>
+              <a:spcAft>
+                <a:spcPts val="200"/>
+              </a:spcAft>
+            </a:pPr>
+            <a:r>
+              <a:rPr sz="1200">
+                <a:solidFill>
+                  <a:srgbClr val="3D5466"/>
+                </a:solidFill>
+                <a:latin typeface="Arial"/>
+              </a:rPr>
+              <a:t>GF: „Nein, wir kaufen zu aktuellen Marktpreisen. Die Lieferanten bieten keine Festpreise an."</a:t>
+            </a:r>
+          </a:p>
+        </p:txBody>
+      </p:sp>
+      <p:sp>
+        <p:nvSpPr>
+          <p:cNvPr id="9" name="Rectangle 8"/>
+          <p:cNvSpPr/>
+          <p:nvPr/>
+        </p:nvSpPr>
+        <p:spPr>
+          <a:xfrm>
+            <a:off x="0" y="6510528"/>
+            <a:ext cx="12188952" cy="347472"/>
+          </a:xfrm>
+          <a:prstGeom prst="rect">
+            <a:avLst/>
+          </a:prstGeom>
+          <a:solidFill>
+            <a:srgbClr val="0A1937"/>
+          </a:solidFill>
+          <a:ln>
+            <a:noFill/>
+          </a:ln>
+        </p:spPr>
+        <p:style>
+          <a:lnRef idx="1">
+            <a:schemeClr val="accent1"/>
+          </a:lnRef>
+          <a:fillRef idx="3">
+            <a:schemeClr val="accent1"/>
+          </a:fillRef>
+          <a:effectRef idx="2">
+            <a:schemeClr val="accent1"/>
+          </a:effectRef>
+          <a:fontRef idx="minor">
+            <a:schemeClr val="lt1"/>
+          </a:fontRef>
+        </p:style>
+        <p:txBody>
+          <a:bodyPr rtlCol="0" anchor="ctr"/>
+          <a:lstStyle/>
+          <a:p>
+            <a:pPr algn="ctr"/>
+          </a:p>
+        </p:txBody>
+      </p:sp>
+      <p:sp>
+        <p:nvSpPr>
+          <p:cNvPr id="10" name="TextBox 9"/>
+          <p:cNvSpPr txBox="1"/>
+          <p:nvPr/>
+        </p:nvSpPr>
+        <p:spPr>
+          <a:xfrm>
+            <a:off x="685800" y="6583680"/>
+            <a:ext cx="6490411" cy="256032"/>
+          </a:xfrm>
+          <a:prstGeom prst="rect">
+            <a:avLst/>
+          </a:prstGeom>
+          <a:noFill/>
+        </p:spPr>
+        <p:txBody>
+          <a:bodyPr wrap="none">
+            <a:spAutoFit/>
+          </a:bodyPr>
+          <a:lstStyle/>
+          <a:p>
+            <a:pPr algn="l"/>
+            <a:r>
+              <a:rPr sz="700">
+                <a:solidFill>
+                  <a:srgbClr val="A0B4D2"/>
+                </a:solidFill>
+                <a:latin typeface="JetBrains Mono"/>
+              </a:rPr>
+              <a:t>Benedikt Zoller Coaching  ·  FKB Campus  ·  M05</a:t>
+            </a:r>
+          </a:p>
+        </p:txBody>
+      </p:sp>
+    </p:spTree>
+  </p:cSld>
+  <p:clrMapOvr>
+    <a:masterClrMapping/>
+  </p:clrMapOvr>
+</p:sld>
+</file>
+
+<file path=ppt/slides/slide13.xml><?xml version="1.0" encoding="utf-8"?>
+<p:sld xmlns:a="http://schemas.openxmlformats.org/drawingml/2006/main" xmlns:p="http://schemas.openxmlformats.org/presentationml/2006/main" xmlns:r="http://schemas.openxmlformats.org/officeDocument/2006/relationships">
+  <p:cSld>
+    <p:spTree>
+      <p:nvGrpSpPr>
+        <p:cNvPr id="1" name=""/>
+        <p:cNvGrpSpPr/>
+        <p:nvPr/>
+      </p:nvGrpSpPr>
+      <p:grpSpPr/>
+      <p:sp>
+        <p:nvSpPr>
+          <p:cNvPr id="2" name="Rectangle 1"/>
+          <p:cNvSpPr/>
+          <p:nvPr/>
+        </p:nvSpPr>
+        <p:spPr>
+          <a:xfrm>
+            <a:off x="0" y="0"/>
+            <a:ext cx="12188952" cy="6858000"/>
+          </a:xfrm>
+          <a:prstGeom prst="rect">
+            <a:avLst/>
+          </a:prstGeom>
+          <a:solidFill>
+            <a:srgbClr val="EDEDF3"/>
+          </a:solidFill>
+          <a:ln>
+            <a:noFill/>
+          </a:ln>
+        </p:spPr>
+        <p:style>
+          <a:lnRef idx="1">
+            <a:schemeClr val="accent1"/>
+          </a:lnRef>
+          <a:fillRef idx="3">
+            <a:schemeClr val="accent1"/>
+          </a:fillRef>
+          <a:effectRef idx="2">
+            <a:schemeClr val="accent1"/>
+          </a:effectRef>
+          <a:fontRef idx="minor">
+            <a:schemeClr val="lt1"/>
+          </a:fontRef>
+        </p:style>
+        <p:txBody>
+          <a:bodyPr rtlCol="0" anchor="ctr"/>
+          <a:lstStyle/>
+          <a:p>
+            <a:pPr algn="ctr"/>
+          </a:p>
+        </p:txBody>
+      </p:sp>
+      <p:sp>
+        <p:nvSpPr>
+          <p:cNvPr id="3" name="Rectangle 2"/>
+          <p:cNvSpPr/>
+          <p:nvPr/>
+        </p:nvSpPr>
+        <p:spPr>
+          <a:xfrm>
+            <a:off x="0" y="0"/>
+            <a:ext cx="12188952" cy="50292"/>
+          </a:xfrm>
+          <a:prstGeom prst="rect">
+            <a:avLst/>
+          </a:prstGeom>
+          <a:solidFill>
+            <a:srgbClr val="1F2C56"/>
+          </a:solidFill>
+          <a:ln>
+            <a:noFill/>
+          </a:ln>
+        </p:spPr>
+        <p:style>
+          <a:lnRef idx="1">
+            <a:schemeClr val="accent1"/>
+          </a:lnRef>
+          <a:fillRef idx="3">
+            <a:schemeClr val="accent1"/>
+          </a:fillRef>
+          <a:effectRef idx="2">
+            <a:schemeClr val="accent1"/>
+          </a:effectRef>
+          <a:fontRef idx="minor">
+            <a:schemeClr val="lt1"/>
+          </a:fontRef>
+        </p:style>
+        <p:txBody>
+          <a:bodyPr rtlCol="0" anchor="ctr"/>
+          <a:lstStyle/>
+          <a:p>
+            <a:pPr algn="ctr"/>
+          </a:p>
+        </p:txBody>
+      </p:sp>
+      <p:sp>
+        <p:nvSpPr>
+          <p:cNvPr id="4" name="TextBox 3"/>
+          <p:cNvSpPr txBox="1"/>
+          <p:nvPr/>
+        </p:nvSpPr>
+        <p:spPr>
+          <a:xfrm>
+            <a:off x="685800" y="109728"/>
+            <a:ext cx="10817352" cy="228600"/>
+          </a:xfrm>
+          <a:prstGeom prst="rect">
+            <a:avLst/>
+          </a:prstGeom>
+          <a:noFill/>
+        </p:spPr>
+        <p:txBody>
+          <a:bodyPr wrap="none">
+            <a:spAutoFit/>
+          </a:bodyPr>
+          <a:lstStyle/>
+          <a:p>
+            <a:pPr algn="l"/>
+            <a:r>
+              <a:rPr sz="750">
+                <a:solidFill>
+                  <a:srgbClr val="78808C"/>
+                </a:solidFill>
+                <a:latin typeface="JetBrains Mono"/>
+              </a:rPr>
+              <a:t>M05  ·  INHALT</a:t>
+            </a:r>
+          </a:p>
+        </p:txBody>
+      </p:sp>
+      <p:sp>
+        <p:nvSpPr>
+          <p:cNvPr id="5" name="Rectangle 4"/>
+          <p:cNvSpPr/>
+          <p:nvPr/>
+        </p:nvSpPr>
+        <p:spPr>
+          <a:xfrm>
+            <a:off x="0" y="1234440"/>
+            <a:ext cx="12188952" cy="12700"/>
+          </a:xfrm>
+          <a:prstGeom prst="rect">
+            <a:avLst/>
+          </a:prstGeom>
+          <a:solidFill>
+            <a:srgbClr val="D8DFE4"/>
+          </a:solidFill>
+          <a:ln>
+            <a:noFill/>
+          </a:ln>
+        </p:spPr>
+        <p:style>
+          <a:lnRef idx="1">
+            <a:schemeClr val="accent1"/>
+          </a:lnRef>
+          <a:fillRef idx="3">
+            <a:schemeClr val="accent1"/>
+          </a:fillRef>
+          <a:effectRef idx="2">
+            <a:schemeClr val="accent1"/>
+          </a:effectRef>
+          <a:fontRef idx="minor">
+            <a:schemeClr val="lt1"/>
+          </a:fontRef>
+        </p:style>
+        <p:txBody>
+          <a:bodyPr rtlCol="0" anchor="ctr"/>
+          <a:lstStyle/>
+          <a:p>
+            <a:pPr algn="ctr"/>
+          </a:p>
+        </p:txBody>
+      </p:sp>
+      <p:sp>
+        <p:nvSpPr>
+          <p:cNvPr id="6" name="Rectangle 5"/>
+          <p:cNvSpPr/>
+          <p:nvPr/>
+        </p:nvSpPr>
+        <p:spPr>
+          <a:xfrm>
+            <a:off x="685800" y="502920"/>
+            <a:ext cx="36576" cy="658368"/>
+          </a:xfrm>
+          <a:prstGeom prst="rect">
+            <a:avLst/>
+          </a:prstGeom>
+          <a:solidFill>
+            <a:srgbClr val="D9C089"/>
+          </a:solidFill>
+          <a:ln>
+            <a:noFill/>
+          </a:ln>
+        </p:spPr>
+        <p:style>
+          <a:lnRef idx="1">
+            <a:schemeClr val="accent1"/>
+          </a:lnRef>
+          <a:fillRef idx="3">
+            <a:schemeClr val="accent1"/>
+          </a:fillRef>
+          <a:effectRef idx="2">
+            <a:schemeClr val="accent1"/>
+          </a:effectRef>
+          <a:fontRef idx="minor">
+            <a:schemeClr val="lt1"/>
+          </a:fontRef>
+        </p:style>
+        <p:txBody>
+          <a:bodyPr rtlCol="0" anchor="ctr"/>
+          <a:lstStyle/>
+          <a:p>
+            <a:pPr algn="ctr"/>
+          </a:p>
+        </p:txBody>
+      </p:sp>
+      <p:sp>
+        <p:nvSpPr>
+          <p:cNvPr id="7" name="TextBox 6"/>
+          <p:cNvSpPr txBox="1"/>
+          <p:nvPr/>
+        </p:nvSpPr>
+        <p:spPr>
+          <a:xfrm>
+            <a:off x="813816" y="502920"/>
+            <a:ext cx="10634472" cy="685800"/>
+          </a:xfrm>
+          <a:prstGeom prst="rect">
+            <a:avLst/>
+          </a:prstGeom>
+          <a:noFill/>
+        </p:spPr>
+        <p:txBody>
+          <a:bodyPr wrap="square">
+            <a:spAutoFit/>
+          </a:bodyPr>
+          <a:lstStyle/>
+          <a:p>
+            <a:pPr algn="l"/>
+            <a:r>
+              <a:rPr sz="2400" b="1" i="0">
+                <a:solidFill>
+                  <a:srgbClr val="1F2C56"/>
+                </a:solidFill>
+                <a:latin typeface="Source Serif 4"/>
+              </a:rPr>
               <a:t>Arbeitsblatt: Branchenrisiko-Analyse-Template</a:t>
             </a:r>
           </a:p>
@@ -6397,7 +6752,7 @@
                 </a:solidFill>
                 <a:latin typeface="JetBrains Mono"/>
               </a:rPr>
-              <a:t>LERNZIELE  ·  M05</a:t>
+              <a:t>ÜBERBLICK  ·  M05</a:t>
             </a:r>
           </a:p>
         </p:txBody>
@@ -6475,7 +6830,7 @@
                 </a:solidFill>
                 <a:latin typeface="Source Serif 4"/>
               </a:rPr>
-              <a:t>Was Sie heute mitnehmen</a:t>
+              <a:t>Worum geht es heute</a:t>
             </a:r>
           </a:p>
         </p:txBody>
@@ -6488,8 +6843,8 @@
         </p:nvSpPr>
         <p:spPr>
           <a:xfrm>
-            <a:off x="685800" y="1371600"/>
-            <a:ext cx="10817352" cy="5120640"/>
+            <a:off x="685800" y="1737360"/>
+            <a:ext cx="9720072" cy="4206240"/>
           </a:xfrm>
           <a:prstGeom prst="rect">
             <a:avLst/>
@@ -6503,78 +6858,50 @@
           <a:lstStyle/>
           <a:p>
             <a:pPr>
-              <a:spcBef>
-                <a:spcPts val="800"/>
-              </a:spcBef>
               <a:spcAft>
-                <a:spcPts val="200"/>
+                <a:spcPts val="1200"/>
               </a:spcAft>
             </a:pPr>
             <a:r>
-              <a:rPr sz="1400">
+              <a:rPr sz="1700">
                 <a:solidFill>
                   <a:srgbClr val="3D5466"/>
                 </a:solidFill>
                 <a:latin typeface="Arial"/>
               </a:rPr>
-              <a:t>▸  Branchenspezifische Risikotreiber anhand von Finanzkennzahlen und Marktdaten analysieren und gegenüber gesamtwirtschaftlichen Trends einordnen</a:t>
+              <a:t>Eine EK-Quote von 15 % bedeutet im Bauträgergeschäft etwas anderes als in der Arztpraxis – wer Branchen nicht unterscheidet, bewertet Risiken falsch.</a:t>
             </a:r>
           </a:p>
           <a:p>
             <a:pPr>
-              <a:spcBef>
-                <a:spcPts val="800"/>
-              </a:spcBef>
               <a:spcAft>
-                <a:spcPts val="200"/>
+                <a:spcPts val="1200"/>
               </a:spcAft>
             </a:pPr>
             <a:r>
-              <a:rPr sz="1400">
+              <a:rPr sz="1700">
                 <a:solidFill>
                   <a:srgbClr val="3D5466"/>
                 </a:solidFill>
                 <a:latin typeface="Arial"/>
               </a:rPr>
-              <a:t>▸  Das Gesamtrisikoprofil eines KMU durch kritische Gegenüberstellung von Branchencharakteristiken mit unternehmensspezifischen Kennzahlen bewerten</a:t>
+              <a:t>Sie analysieren Branchenstrukturen mit Porters Five Forces und arbeiten die Risikoprofile von sechs Kernbranchen durch.</a:t>
             </a:r>
           </a:p>
           <a:p>
             <a:pPr>
-              <a:spcBef>
-                <a:spcPts val="800"/>
-              </a:spcBef>
               <a:spcAft>
-                <a:spcPts val="200"/>
+                <a:spcPts val="1200"/>
               </a:spcAft>
             </a:pPr>
             <a:r>
-              <a:rPr sz="1400">
+              <a:rPr sz="1700">
                 <a:solidFill>
                   <a:srgbClr val="3D5466"/>
                 </a:solidFill>
                 <a:latin typeface="Arial"/>
               </a:rPr>
-              <a:t>▸  Kreditanträge branchenübergreifend vergleichend beurteilen und Chancen wie Risiken transparent kommunizieren</a:t>
-            </a:r>
-          </a:p>
-          <a:p>
-            <a:pPr>
-              <a:spcBef>
-                <a:spcPts val="800"/>
-              </a:spcBef>
-              <a:spcAft>
-                <a:spcPts val="200"/>
-              </a:spcAft>
-            </a:pPr>
-            <a:r>
-              <a:rPr sz="1400">
-                <a:solidFill>
-                  <a:srgbClr val="3D5466"/>
-                </a:solidFill>
-                <a:latin typeface="Arial"/>
-              </a:rPr>
-              <a:t>▸  Ein individualisiertes Branchenrisiko-Scoring-Modell für die eigene Geschäftsregion entwickeln</a:t>
+              <a:t>Danach entwickeln Sie ein eigenes Branchenrisiko-Scoring für Ihre Geschäftsregion.</a:t>
             </a:r>
           </a:p>
         </p:txBody>
@@ -6791,7 +7118,7 @@
                 </a:solidFill>
                 <a:latin typeface="JetBrains Mono"/>
               </a:rPr>
-              <a:t>AGENDA  ·  M05</a:t>
+              <a:t>LERNZIELE  ·  M05</a:t>
             </a:r>
           </a:p>
         </p:txBody>
@@ -6869,7 +7196,7 @@
                 </a:solidFill>
                 <a:latin typeface="Source Serif 4"/>
               </a:rPr>
-              <a:t>Agenda</a:t>
+              <a:t>Was Sie heute mitnehmen</a:t>
             </a:r>
           </a:p>
         </p:txBody>
@@ -6882,8 +7209,8 @@
         </p:nvSpPr>
         <p:spPr>
           <a:xfrm>
-            <a:off x="685800" y="1463040"/>
-            <a:ext cx="10817352" cy="4937760"/>
+            <a:off x="685800" y="1371600"/>
+            <a:ext cx="10817352" cy="5120640"/>
           </a:xfrm>
           <a:prstGeom prst="rect">
             <a:avLst/>
@@ -6905,13 +7232,13 @@
               </a:spcAft>
             </a:pPr>
             <a:r>
-              <a:rPr sz="1500">
+              <a:rPr sz="1400">
                 <a:solidFill>
                   <a:srgbClr val="3D5466"/>
                 </a:solidFill>
                 <a:latin typeface="Arial"/>
               </a:rPr>
-              <a:t>01   Theorie-Input: Branchenstruktur und Risikoklassifikation</a:t>
+              <a:t>▸  Branchenspezifische Risikotreiber anhand von Finanzkennzahlen und Marktdaten analysieren und gegenüber gesamtwirtschaftlichen Trends einordnen</a:t>
             </a:r>
           </a:p>
           <a:p>
@@ -6924,13 +7251,13 @@
               </a:spcAft>
             </a:pPr>
             <a:r>
-              <a:rPr sz="1500">
+              <a:rPr sz="1400">
                 <a:solidFill>
                   <a:srgbClr val="3D5466"/>
                 </a:solidFill>
                 <a:latin typeface="Arial"/>
               </a:rPr>
-              <a:t>02   Theorie-Input: Branchenspezifische Risikoklassen im KMU-Segment</a:t>
+              <a:t>▸  Das Gesamtrisikoprofil eines KMU durch kritische Gegenüberstellung von Branchencharakteristiken mit unternehmensspezifischen Kennzahlen bewerten</a:t>
             </a:r>
           </a:p>
           <a:p>
@@ -6943,13 +7270,13 @@
               </a:spcAft>
             </a:pPr>
             <a:r>
-              <a:rPr sz="1500">
+              <a:rPr sz="1400">
                 <a:solidFill>
                   <a:srgbClr val="3D5466"/>
                 </a:solidFill>
                 <a:latin typeface="Arial"/>
               </a:rPr>
-              <a:t>03   Handlungskarte: Vom Branchensignal zur Kreditmaßnahme</a:t>
+              <a:t>▸  Kreditanträge branchenübergreifend vergleichend beurteilen und Chancen wie Risiken transparent kommunizieren</a:t>
             </a:r>
           </a:p>
           <a:p>
@@ -6962,51 +7289,13 @@
               </a:spcAft>
             </a:pPr>
             <a:r>
-              <a:rPr sz="1500">
+              <a:rPr sz="1400">
                 <a:solidFill>
                   <a:srgbClr val="3D5466"/>
                 </a:solidFill>
                 <a:latin typeface="Arial"/>
               </a:rPr>
-              <a:t>04   Theorie-Input: VR-Rating und branchenspezifische Ratingfaktoren</a:t>
-            </a:r>
-          </a:p>
-          <a:p>
-            <a:pPr>
-              <a:spcBef>
-                <a:spcPts val="800"/>
-              </a:spcBef>
-              <a:spcAft>
-                <a:spcPts val="200"/>
-              </a:spcAft>
-            </a:pPr>
-            <a:r>
-              <a:rPr sz="1500">
-                <a:solidFill>
-                  <a:srgbClr val="3D5466"/>
-                </a:solidFill>
-                <a:latin typeface="Arial"/>
-              </a:rPr>
-              <a:t>05   Praxiscase: Bäckerei &amp; Konditorei Hofmann GmbH (Stuttgart, fiktiv)</a:t>
-            </a:r>
-          </a:p>
-          <a:p>
-            <a:pPr>
-              <a:spcBef>
-                <a:spcPts val="800"/>
-              </a:spcBef>
-              <a:spcAft>
-                <a:spcPts val="200"/>
-              </a:spcAft>
-            </a:pPr>
-            <a:r>
-              <a:rPr sz="1500">
-                <a:solidFill>
-                  <a:srgbClr val="3D5466"/>
-                </a:solidFill>
-                <a:latin typeface="Arial"/>
-              </a:rPr>
-              <a:t>06   Arbeitsblatt: Branchenrisiko-Analyse-Template</a:t>
+              <a:t>▸  Ein individualisiertes Branchenrisiko-Scoring-Modell für die eigene Geschäftsregion entwickeln</a:t>
             </a:r>
           </a:p>
         </p:txBody>
@@ -7223,7 +7512,7 @@
                 </a:solidFill>
                 <a:latin typeface="JetBrains Mono"/>
               </a:rPr>
-              <a:t>M05  ·  INHALT</a:t>
+              <a:t>AGENDA  ·  M05</a:t>
             </a:r>
           </a:p>
         </p:txBody>
@@ -7273,57 +7562,14 @@
       </p:sp>
       <p:sp>
         <p:nvSpPr>
-          <p:cNvPr id="6" name="Rectangle 5"/>
-          <p:cNvSpPr/>
+          <p:cNvPr id="6" name="TextBox 5"/>
+          <p:cNvSpPr txBox="1"/>
           <p:nvPr/>
         </p:nvSpPr>
         <p:spPr>
           <a:xfrm>
             <a:off x="685800" y="502920"/>
-            <a:ext cx="36576" cy="658368"/>
-          </a:xfrm>
-          <a:prstGeom prst="rect">
-            <a:avLst/>
-          </a:prstGeom>
-          <a:solidFill>
-            <a:srgbClr val="D9C089"/>
-          </a:solidFill>
-          <a:ln>
-            <a:noFill/>
-          </a:ln>
-        </p:spPr>
-        <p:style>
-          <a:lnRef idx="1">
-            <a:schemeClr val="accent1"/>
-          </a:lnRef>
-          <a:fillRef idx="3">
-            <a:schemeClr val="accent1"/>
-          </a:fillRef>
-          <a:effectRef idx="2">
-            <a:schemeClr val="accent1"/>
-          </a:effectRef>
-          <a:fontRef idx="minor">
-            <a:schemeClr val="lt1"/>
-          </a:fontRef>
-        </p:style>
-        <p:txBody>
-          <a:bodyPr rtlCol="0" anchor="ctr"/>
-          <a:lstStyle/>
-          <a:p>
-            <a:pPr algn="ctr"/>
-          </a:p>
-        </p:txBody>
-      </p:sp>
-      <p:sp>
-        <p:nvSpPr>
-          <p:cNvPr id="7" name="TextBox 6"/>
-          <p:cNvSpPr txBox="1"/>
-          <p:nvPr/>
-        </p:nvSpPr>
-        <p:spPr>
-          <a:xfrm>
-            <a:off x="813816" y="502920"/>
-            <a:ext cx="10634472" cy="685800"/>
+            <a:ext cx="10817352" cy="658368"/>
           </a:xfrm>
           <a:prstGeom prst="rect">
             <a:avLst/>
@@ -7338,27 +7584,27 @@
           <a:p>
             <a:pPr algn="l"/>
             <a:r>
-              <a:rPr sz="2400" b="1" i="0">
+              <a:rPr sz="2600" b="1" i="0">
                 <a:solidFill>
                   <a:srgbClr val="1F2C56"/>
                 </a:solidFill>
                 <a:latin typeface="Source Serif 4"/>
               </a:rPr>
-              <a:t>Theorie-Input: Branchenstruktur und Risikoklassifikation</a:t>
-            </a:r>
-          </a:p>
-        </p:txBody>
-      </p:sp>
-      <p:sp>
-        <p:nvSpPr>
-          <p:cNvPr id="8" name="TextBox 7"/>
+              <a:t>Agenda</a:t>
+            </a:r>
+          </a:p>
+        </p:txBody>
+      </p:sp>
+      <p:sp>
+        <p:nvSpPr>
+          <p:cNvPr id="7" name="TextBox 6"/>
           <p:cNvSpPr txBox="1"/>
           <p:nvPr/>
         </p:nvSpPr>
         <p:spPr>
           <a:xfrm>
-            <a:off x="685800" y="1417320"/>
-            <a:ext cx="10817352" cy="5029200"/>
+            <a:off x="685800" y="1463040"/>
+            <a:ext cx="10817352" cy="4937760"/>
           </a:xfrm>
           <a:prstGeom prst="rect">
             <a:avLst/>
@@ -7373,236 +7619,122 @@
           <a:p>
             <a:pPr>
               <a:spcBef>
-                <a:spcPts val="1000"/>
+                <a:spcPts val="800"/>
               </a:spcBef>
               <a:spcAft>
                 <a:spcPts val="200"/>
               </a:spcAft>
             </a:pPr>
             <a:r>
-              <a:rPr sz="800" b="1">
-                <a:solidFill>
-                  <a:srgbClr val="78808C"/>
-                </a:solidFill>
-                <a:latin typeface="JetBrains Mono"/>
-              </a:rPr>
-              <a:t>4.1.1 PORTER'S FIVE FORCES ALS ANALYSEGERÜST</a:t>
+              <a:rPr sz="1500">
+                <a:solidFill>
+                  <a:srgbClr val="3D5466"/>
+                </a:solidFill>
+                <a:latin typeface="Arial"/>
+              </a:rPr>
+              <a:t>01   Theorie-Input: Branchenstruktur und Risikoklassifikation</a:t>
             </a:r>
           </a:p>
           <a:p>
             <a:pPr>
               <a:spcBef>
-                <a:spcPts val="400"/>
+                <a:spcPts val="800"/>
               </a:spcBef>
               <a:spcAft>
                 <a:spcPts val="200"/>
               </a:spcAft>
             </a:pPr>
             <a:r>
-              <a:rPr sz="1200">
+              <a:rPr sz="1500">
                 <a:solidFill>
                   <a:srgbClr val="3D5466"/>
                 </a:solidFill>
                 <a:latin typeface="Arial"/>
               </a:rPr>
-              <a:t>Die fünf Kräfte im Überblick:</a:t>
+              <a:t>02   Theorie-Input: Branchenspezifische Risikoklassen im KMU-Segment</a:t>
             </a:r>
           </a:p>
           <a:p>
             <a:pPr>
               <a:spcBef>
-                <a:spcPts val="400"/>
+                <a:spcPts val="800"/>
               </a:spcBef>
               <a:spcAft>
                 <a:spcPts val="200"/>
               </a:spcAft>
             </a:pPr>
             <a:r>
-              <a:rPr sz="1200">
+              <a:rPr sz="1500">
                 <a:solidFill>
                   <a:srgbClr val="3D5466"/>
                 </a:solidFill>
                 <a:latin typeface="Arial"/>
               </a:rPr>
-              <a:t>1. Bedrohung durch neue Konkurrenten</a:t>
+              <a:t>03   Handlungskarte: Vom Branchensignal zur Kreditmaßnahme</a:t>
             </a:r>
           </a:p>
           <a:p>
             <a:pPr>
               <a:spcBef>
-                <a:spcPts val="400"/>
+                <a:spcPts val="800"/>
               </a:spcBef>
               <a:spcAft>
                 <a:spcPts val="200"/>
               </a:spcAft>
             </a:pPr>
             <a:r>
-              <a:rPr sz="1200">
+              <a:rPr sz="1500">
                 <a:solidFill>
                   <a:srgbClr val="3D5466"/>
                 </a:solidFill>
                 <a:latin typeface="Arial"/>
               </a:rPr>
-              <a:t>Wie hoch sind Markteintrittsbarrieren? (Kapitalintensität, Skalenerfordernisse, Markenzugang)</a:t>
+              <a:t>04   Theorie-Input: VR-Rating und branchenspezifische Ratingfaktoren</a:t>
             </a:r>
           </a:p>
           <a:p>
             <a:pPr>
               <a:spcBef>
-                <a:spcPts val="400"/>
+                <a:spcPts val="800"/>
               </a:spcBef>
               <a:spcAft>
                 <a:spcPts val="200"/>
               </a:spcAft>
             </a:pPr>
             <a:r>
-              <a:rPr sz="1300">
+              <a:rPr sz="1500">
                 <a:solidFill>
                   <a:srgbClr val="3D5466"/>
                 </a:solidFill>
                 <a:latin typeface="Arial"/>
               </a:rPr>
-              <a:t>▸  Kreditrelevanz: Hohe Markteintrittsbarrieren → geringeres Überangebot → stabilere Margen</a:t>
+              <a:t>05   Praxiscase: Bäckerei &amp; Konditorei Hofmann GmbH (Stuttgart, fiktiv)</a:t>
             </a:r>
           </a:p>
           <a:p>
             <a:pPr>
               <a:spcBef>
-                <a:spcPts val="400"/>
+                <a:spcPts val="800"/>
               </a:spcBef>
               <a:spcAft>
                 <a:spcPts val="200"/>
               </a:spcAft>
             </a:pPr>
             <a:r>
-              <a:rPr sz="1200">
+              <a:rPr sz="1500">
                 <a:solidFill>
                   <a:srgbClr val="3D5466"/>
                 </a:solidFill>
                 <a:latin typeface="Arial"/>
               </a:rPr>
-              <a:t>2. Verhandlungsmacht der Lieferanten</a:t>
-            </a:r>
-          </a:p>
-          <a:p>
-            <a:pPr>
-              <a:spcBef>
-                <a:spcPts val="400"/>
-              </a:spcBef>
-              <a:spcAft>
-                <a:spcPts val="200"/>
-              </a:spcAft>
-            </a:pPr>
-            <a:r>
-              <a:rPr sz="1200">
-                <a:solidFill>
-                  <a:srgbClr val="3D5466"/>
-                </a:solidFill>
-                <a:latin typeface="Arial"/>
-              </a:rPr>
-              <a:t>Wie konzentriert ist der Liefermarkt?</a:t>
-            </a:r>
-          </a:p>
-          <a:p>
-            <a:pPr>
-              <a:spcBef>
-                <a:spcPts val="400"/>
-              </a:spcBef>
-              <a:spcAft>
-                <a:spcPts val="200"/>
-              </a:spcAft>
-            </a:pPr>
-            <a:r>
-              <a:rPr sz="1300">
-                <a:solidFill>
-                  <a:srgbClr val="3D5466"/>
-                </a:solidFill>
-                <a:latin typeface="Arial"/>
-              </a:rPr>
-              <a:t>▸  Kreditrelevanz: Konzentrierte Lieferanten → Rohstoffpreisrisiko → Margenvolatilität</a:t>
-            </a:r>
-          </a:p>
-          <a:p>
-            <a:pPr>
-              <a:spcBef>
-                <a:spcPts val="400"/>
-              </a:spcBef>
-              <a:spcAft>
-                <a:spcPts val="200"/>
-              </a:spcAft>
-            </a:pPr>
-            <a:r>
-              <a:rPr sz="1200">
-                <a:solidFill>
-                  <a:srgbClr val="3D5466"/>
-                </a:solidFill>
-                <a:latin typeface="Arial"/>
-              </a:rPr>
-              <a:t>3. Verhandlungsmacht der Abnehmer</a:t>
-            </a:r>
-          </a:p>
-          <a:p>
-            <a:pPr>
-              <a:spcBef>
-                <a:spcPts val="400"/>
-              </a:spcBef>
-              <a:spcAft>
-                <a:spcPts val="200"/>
-              </a:spcAft>
-            </a:pPr>
-            <a:r>
-              <a:rPr sz="1200">
-                <a:solidFill>
-                  <a:srgbClr val="3D5466"/>
-                </a:solidFill>
-                <a:latin typeface="Arial"/>
-              </a:rPr>
-              <a:t>Wie konzentriert ist der Kundenmarkt?</a:t>
-            </a:r>
-          </a:p>
-          <a:p>
-            <a:pPr>
-              <a:spcBef>
-                <a:spcPts val="400"/>
-              </a:spcBef>
-              <a:spcAft>
-                <a:spcPts val="200"/>
-              </a:spcAft>
-            </a:pPr>
-            <a:r>
-              <a:rPr sz="1300">
-                <a:solidFill>
-                  <a:srgbClr val="3D5466"/>
-                </a:solidFill>
-                <a:latin typeface="Arial"/>
-              </a:rPr>
-              <a:t>▸  Kreditrelevanz: Wenige Großkunden → Konzentrationsrisiko → erhöhte Insolvenzwahrscheinlichkeit bei Kundenverlust</a:t>
-            </a:r>
-          </a:p>
-          <a:p>
-            <a:pPr>
-              <a:spcBef>
-                <a:spcPts val="400"/>
-              </a:spcBef>
-              <a:spcAft>
-                <a:spcPts val="200"/>
-              </a:spcAft>
-            </a:pPr>
-            <a:r>
-              <a:rPr sz="1200">
-                <a:solidFill>
-                  <a:srgbClr val="3D5466"/>
-                </a:solidFill>
-                <a:latin typeface="Arial"/>
-              </a:rPr>
-              <a:t>4. Bedrohung durch Substitute</a:t>
-            </a:r>
-          </a:p>
-        </p:txBody>
-      </p:sp>
-      <p:sp>
-        <p:nvSpPr>
-          <p:cNvPr id="9" name="Rectangle 8"/>
+              <a:t>06   Arbeitsblatt: Branchenrisiko-Analyse-Template</a:t>
+            </a:r>
+          </a:p>
+        </p:txBody>
+      </p:sp>
+      <p:sp>
+        <p:nvSpPr>
+          <p:cNvPr id="8" name="Rectangle 7"/>
           <p:cNvSpPr/>
           <p:nvPr/>
         </p:nvSpPr>
@@ -7645,7 +7777,7 @@
       </p:sp>
       <p:sp>
         <p:nvSpPr>
-          <p:cNvPr id="10" name="TextBox 9"/>
+          <p:cNvPr id="9" name="TextBox 8"/>
           <p:cNvSpPr txBox="1"/>
           <p:nvPr/>
         </p:nvSpPr>
@@ -7711,7 +7843,7 @@
             <a:avLst/>
           </a:prstGeom>
           <a:solidFill>
-            <a:srgbClr val="FFFFFF"/>
+            <a:srgbClr val="EDEDF3"/>
           </a:solidFill>
           <a:ln>
             <a:noFill/>
@@ -7812,43 +7944,51 @@
                 </a:solidFill>
                 <a:latin typeface="JetBrains Mono"/>
               </a:rPr>
-              <a:t>M05  ·  SCHAUBILD</a:t>
-            </a:r>
-          </a:p>
-        </p:txBody>
-      </p:sp>
-      <p:sp>
-        <p:nvSpPr>
-          <p:cNvPr id="5" name="TextBox 4"/>
-          <p:cNvSpPr txBox="1"/>
-          <p:nvPr/>
-        </p:nvSpPr>
-        <p:spPr>
-          <a:xfrm>
-            <a:off x="685800" y="502920"/>
-            <a:ext cx="10817352" cy="594360"/>
-          </a:xfrm>
-          <a:prstGeom prst="rect">
-            <a:avLst/>
-          </a:prstGeom>
-          <a:noFill/>
-        </p:spPr>
-        <p:txBody>
-          <a:bodyPr wrap="square">
-            <a:spAutoFit/>
-          </a:bodyPr>
-          <a:lstStyle/>
-          <a:p>
-            <a:pPr algn="l"/>
-            <a:r>
-              <a:rPr sz="2000" b="1" i="0">
-                <a:solidFill>
-                  <a:srgbClr val="1F2C56"/>
-                </a:solidFill>
-                <a:latin typeface="Source Serif 4"/>
-              </a:rPr>
-              <a:t>Five-Forces-Modell nach Porter</a:t>
-            </a:r>
+              <a:t>M05  ·  INHALT</a:t>
+            </a:r>
+          </a:p>
+        </p:txBody>
+      </p:sp>
+      <p:sp>
+        <p:nvSpPr>
+          <p:cNvPr id="5" name="Rectangle 4"/>
+          <p:cNvSpPr/>
+          <p:nvPr/>
+        </p:nvSpPr>
+        <p:spPr>
+          <a:xfrm>
+            <a:off x="0" y="1234440"/>
+            <a:ext cx="12188952" cy="12700"/>
+          </a:xfrm>
+          <a:prstGeom prst="rect">
+            <a:avLst/>
+          </a:prstGeom>
+          <a:solidFill>
+            <a:srgbClr val="D8DFE4"/>
+          </a:solidFill>
+          <a:ln>
+            <a:noFill/>
+          </a:ln>
+        </p:spPr>
+        <p:style>
+          <a:lnRef idx="1">
+            <a:schemeClr val="accent1"/>
+          </a:lnRef>
+          <a:fillRef idx="3">
+            <a:schemeClr val="accent1"/>
+          </a:fillRef>
+          <a:effectRef idx="2">
+            <a:schemeClr val="accent1"/>
+          </a:effectRef>
+          <a:fontRef idx="minor">
+            <a:schemeClr val="lt1"/>
+          </a:fontRef>
+        </p:style>
+        <p:txBody>
+          <a:bodyPr rtlCol="0" anchor="ctr"/>
+          <a:lstStyle/>
+          <a:p>
+            <a:pPr algn="ctr"/>
           </a:p>
         </p:txBody>
       </p:sp>
@@ -7860,8 +8000,8 @@
         </p:nvSpPr>
         <p:spPr>
           <a:xfrm>
-            <a:off x="685800" y="1143000"/>
-            <a:ext cx="10817352" cy="25400"/>
+            <a:off x="685800" y="502920"/>
+            <a:ext cx="36576" cy="658368"/>
           </a:xfrm>
           <a:prstGeom prst="rect">
             <a:avLst/>
@@ -7895,33 +8035,295 @@
           </a:p>
         </p:txBody>
       </p:sp>
-      <p:pic>
-        <p:nvPicPr>
-          <p:cNvPr id="7" name="Picture 6" descr="image.png"/>
-          <p:cNvPicPr>
-            <a:picLocks noChangeAspect="1"/>
-          </p:cNvPicPr>
-          <p:nvPr/>
-        </p:nvPicPr>
-        <p:blipFill>
-          <a:blip r:embed="rId2"/>
-          <a:stretch>
-            <a:fillRect/>
-          </a:stretch>
-        </p:blipFill>
-        <p:spPr>
-          <a:xfrm>
-            <a:off x="2554863" y="1325880"/>
-            <a:ext cx="7079225" cy="4937760"/>
-          </a:xfrm>
-          <a:prstGeom prst="rect">
-            <a:avLst/>
-          </a:prstGeom>
-        </p:spPr>
-      </p:pic>
-      <p:sp>
-        <p:nvSpPr>
-          <p:cNvPr id="8" name="Rectangle 7"/>
+      <p:sp>
+        <p:nvSpPr>
+          <p:cNvPr id="7" name="TextBox 6"/>
+          <p:cNvSpPr txBox="1"/>
+          <p:nvPr/>
+        </p:nvSpPr>
+        <p:spPr>
+          <a:xfrm>
+            <a:off x="813816" y="502920"/>
+            <a:ext cx="10634472" cy="685800"/>
+          </a:xfrm>
+          <a:prstGeom prst="rect">
+            <a:avLst/>
+          </a:prstGeom>
+          <a:noFill/>
+        </p:spPr>
+        <p:txBody>
+          <a:bodyPr wrap="square">
+            <a:spAutoFit/>
+          </a:bodyPr>
+          <a:lstStyle/>
+          <a:p>
+            <a:pPr algn="l"/>
+            <a:r>
+              <a:rPr sz="2400" b="1" i="0">
+                <a:solidFill>
+                  <a:srgbClr val="1F2C56"/>
+                </a:solidFill>
+                <a:latin typeface="Source Serif 4"/>
+              </a:rPr>
+              <a:t>Theorie-Input: Branchenstruktur und Risikoklassifikation</a:t>
+            </a:r>
+          </a:p>
+        </p:txBody>
+      </p:sp>
+      <p:sp>
+        <p:nvSpPr>
+          <p:cNvPr id="8" name="TextBox 7"/>
+          <p:cNvSpPr txBox="1"/>
+          <p:nvPr/>
+        </p:nvSpPr>
+        <p:spPr>
+          <a:xfrm>
+            <a:off x="685800" y="1417320"/>
+            <a:ext cx="10817352" cy="5029200"/>
+          </a:xfrm>
+          <a:prstGeom prst="rect">
+            <a:avLst/>
+          </a:prstGeom>
+          <a:noFill/>
+        </p:spPr>
+        <p:txBody>
+          <a:bodyPr wrap="square">
+            <a:spAutoFit/>
+          </a:bodyPr>
+          <a:lstStyle/>
+          <a:p>
+            <a:pPr>
+              <a:spcBef>
+                <a:spcPts val="1000"/>
+              </a:spcBef>
+              <a:spcAft>
+                <a:spcPts val="200"/>
+              </a:spcAft>
+            </a:pPr>
+            <a:r>
+              <a:rPr sz="800" b="1">
+                <a:solidFill>
+                  <a:srgbClr val="78808C"/>
+                </a:solidFill>
+                <a:latin typeface="JetBrains Mono"/>
+              </a:rPr>
+              <a:t>4.1.1 PORTER'S FIVE FORCES ALS ANALYSEGERÜST</a:t>
+            </a:r>
+          </a:p>
+          <a:p>
+            <a:pPr>
+              <a:spcBef>
+                <a:spcPts val="400"/>
+              </a:spcBef>
+              <a:spcAft>
+                <a:spcPts val="200"/>
+              </a:spcAft>
+            </a:pPr>
+            <a:r>
+              <a:rPr sz="1200">
+                <a:solidFill>
+                  <a:srgbClr val="3D5466"/>
+                </a:solidFill>
+                <a:latin typeface="Arial"/>
+              </a:rPr>
+              <a:t>Die fünf Kräfte im Überblick:</a:t>
+            </a:r>
+          </a:p>
+          <a:p>
+            <a:pPr>
+              <a:spcBef>
+                <a:spcPts val="400"/>
+              </a:spcBef>
+              <a:spcAft>
+                <a:spcPts val="200"/>
+              </a:spcAft>
+            </a:pPr>
+            <a:r>
+              <a:rPr sz="1200">
+                <a:solidFill>
+                  <a:srgbClr val="3D5466"/>
+                </a:solidFill>
+                <a:latin typeface="Arial"/>
+              </a:rPr>
+              <a:t>1. Bedrohung durch neue Konkurrenten</a:t>
+            </a:r>
+          </a:p>
+          <a:p>
+            <a:pPr>
+              <a:spcBef>
+                <a:spcPts val="400"/>
+              </a:spcBef>
+              <a:spcAft>
+                <a:spcPts val="200"/>
+              </a:spcAft>
+            </a:pPr>
+            <a:r>
+              <a:rPr sz="1200">
+                <a:solidFill>
+                  <a:srgbClr val="3D5466"/>
+                </a:solidFill>
+                <a:latin typeface="Arial"/>
+              </a:rPr>
+              <a:t>Wie hoch sind Markteintrittsbarrieren? (Kapitalintensität, Skalenerfordernisse, Markenzugang)</a:t>
+            </a:r>
+          </a:p>
+          <a:p>
+            <a:pPr>
+              <a:spcBef>
+                <a:spcPts val="400"/>
+              </a:spcBef>
+              <a:spcAft>
+                <a:spcPts val="200"/>
+              </a:spcAft>
+            </a:pPr>
+            <a:r>
+              <a:rPr sz="1300">
+                <a:solidFill>
+                  <a:srgbClr val="3D5466"/>
+                </a:solidFill>
+                <a:latin typeface="Arial"/>
+              </a:rPr>
+              <a:t>▸  Kreditrelevanz: Hohe Markteintrittsbarrieren → geringeres Überangebot → stabilere Margen</a:t>
+            </a:r>
+          </a:p>
+          <a:p>
+            <a:pPr>
+              <a:spcBef>
+                <a:spcPts val="400"/>
+              </a:spcBef>
+              <a:spcAft>
+                <a:spcPts val="200"/>
+              </a:spcAft>
+            </a:pPr>
+            <a:r>
+              <a:rPr sz="1200">
+                <a:solidFill>
+                  <a:srgbClr val="3D5466"/>
+                </a:solidFill>
+                <a:latin typeface="Arial"/>
+              </a:rPr>
+              <a:t>2. Verhandlungsmacht der Lieferanten</a:t>
+            </a:r>
+          </a:p>
+          <a:p>
+            <a:pPr>
+              <a:spcBef>
+                <a:spcPts val="400"/>
+              </a:spcBef>
+              <a:spcAft>
+                <a:spcPts val="200"/>
+              </a:spcAft>
+            </a:pPr>
+            <a:r>
+              <a:rPr sz="1200">
+                <a:solidFill>
+                  <a:srgbClr val="3D5466"/>
+                </a:solidFill>
+                <a:latin typeface="Arial"/>
+              </a:rPr>
+              <a:t>Wie konzentriert ist der Liefermarkt?</a:t>
+            </a:r>
+          </a:p>
+          <a:p>
+            <a:pPr>
+              <a:spcBef>
+                <a:spcPts val="400"/>
+              </a:spcBef>
+              <a:spcAft>
+                <a:spcPts val="200"/>
+              </a:spcAft>
+            </a:pPr>
+            <a:r>
+              <a:rPr sz="1300">
+                <a:solidFill>
+                  <a:srgbClr val="3D5466"/>
+                </a:solidFill>
+                <a:latin typeface="Arial"/>
+              </a:rPr>
+              <a:t>▸  Kreditrelevanz: Konzentrierte Lieferanten → Rohstoffpreisrisiko → Margenvolatilität</a:t>
+            </a:r>
+          </a:p>
+          <a:p>
+            <a:pPr>
+              <a:spcBef>
+                <a:spcPts val="400"/>
+              </a:spcBef>
+              <a:spcAft>
+                <a:spcPts val="200"/>
+              </a:spcAft>
+            </a:pPr>
+            <a:r>
+              <a:rPr sz="1200">
+                <a:solidFill>
+                  <a:srgbClr val="3D5466"/>
+                </a:solidFill>
+                <a:latin typeface="Arial"/>
+              </a:rPr>
+              <a:t>3. Verhandlungsmacht der Abnehmer</a:t>
+            </a:r>
+          </a:p>
+          <a:p>
+            <a:pPr>
+              <a:spcBef>
+                <a:spcPts val="400"/>
+              </a:spcBef>
+              <a:spcAft>
+                <a:spcPts val="200"/>
+              </a:spcAft>
+            </a:pPr>
+            <a:r>
+              <a:rPr sz="1200">
+                <a:solidFill>
+                  <a:srgbClr val="3D5466"/>
+                </a:solidFill>
+                <a:latin typeface="Arial"/>
+              </a:rPr>
+              <a:t>Wie konzentriert ist der Kundenmarkt?</a:t>
+            </a:r>
+          </a:p>
+          <a:p>
+            <a:pPr>
+              <a:spcBef>
+                <a:spcPts val="400"/>
+              </a:spcBef>
+              <a:spcAft>
+                <a:spcPts val="200"/>
+              </a:spcAft>
+            </a:pPr>
+            <a:r>
+              <a:rPr sz="1300">
+                <a:solidFill>
+                  <a:srgbClr val="3D5466"/>
+                </a:solidFill>
+                <a:latin typeface="Arial"/>
+              </a:rPr>
+              <a:t>▸  Kreditrelevanz: Wenige Großkunden → Konzentrationsrisiko → erhöhte Insolvenzwahrscheinlichkeit bei Kundenverlust</a:t>
+            </a:r>
+          </a:p>
+          <a:p>
+            <a:pPr>
+              <a:spcBef>
+                <a:spcPts val="400"/>
+              </a:spcBef>
+              <a:spcAft>
+                <a:spcPts val="200"/>
+              </a:spcAft>
+            </a:pPr>
+            <a:r>
+              <a:rPr sz="1200">
+                <a:solidFill>
+                  <a:srgbClr val="3D5466"/>
+                </a:solidFill>
+                <a:latin typeface="Arial"/>
+              </a:rPr>
+              <a:t>4. Bedrohung durch Substitute</a:t>
+            </a:r>
+          </a:p>
+        </p:txBody>
+      </p:sp>
+      <p:sp>
+        <p:nvSpPr>
+          <p:cNvPr id="9" name="Rectangle 8"/>
           <p:cNvSpPr/>
           <p:nvPr/>
         </p:nvSpPr>
@@ -7964,7 +8366,7 @@
       </p:sp>
       <p:sp>
         <p:nvSpPr>
-          <p:cNvPr id="9" name="TextBox 8"/>
+          <p:cNvPr id="10" name="TextBox 9"/>
           <p:cNvSpPr txBox="1"/>
           <p:nvPr/>
         </p:nvSpPr>
@@ -7993,41 +8395,6 @@
                 <a:latin typeface="JetBrains Mono"/>
               </a:rPr>
               <a:t>Benedikt Zoller Coaching  ·  FKB Campus  ·  M05</a:t>
-            </a:r>
-          </a:p>
-        </p:txBody>
-      </p:sp>
-      <p:sp>
-        <p:nvSpPr>
-          <p:cNvPr id="10" name="TextBox 9"/>
-          <p:cNvSpPr txBox="1"/>
-          <p:nvPr/>
-        </p:nvSpPr>
-        <p:spPr>
-          <a:xfrm>
-            <a:off x="7176211" y="6583680"/>
-            <a:ext cx="4326940" cy="256032"/>
-          </a:xfrm>
-          <a:prstGeom prst="rect">
-            <a:avLst/>
-          </a:prstGeom>
-          <a:noFill/>
-        </p:spPr>
-        <p:txBody>
-          <a:bodyPr wrap="none">
-            <a:spAutoFit/>
-          </a:bodyPr>
-          <a:lstStyle/>
-          <a:p>
-            <a:pPr algn="r"/>
-            <a:r>
-              <a:rPr sz="700">
-                <a:solidFill>
-                  <a:srgbClr val="A0B4D2"/>
-                </a:solidFill>
-                <a:latin typeface="JetBrains Mono"/>
-              </a:rPr>
-              <a:t>Schaubild</a:t>
             </a:r>
           </a:p>
         </p:txBody>
@@ -8201,7 +8568,7 @@
                 </a:solidFill>
                 <a:latin typeface="Source Serif 4"/>
               </a:rPr>
-              <a:t>Branchenlebenszyklus</a:t>
+              <a:t>Five-Forces-Modell nach Porter</a:t>
             </a:r>
           </a:p>
         </p:txBody>
@@ -8265,8 +8632,8 @@
         </p:blipFill>
         <p:spPr>
           <a:xfrm>
-            <a:off x="2303489" y="1325880"/>
-            <a:ext cx="7581973" cy="4937760"/>
+            <a:off x="2554863" y="1325880"/>
+            <a:ext cx="7079225" cy="4937760"/>
           </a:xfrm>
           <a:prstGeom prst="rect">
             <a:avLst/>
@@ -8419,7 +8786,7 @@
             <a:avLst/>
           </a:prstGeom>
           <a:solidFill>
-            <a:srgbClr val="EDEDF3"/>
+            <a:srgbClr val="FFFFFF"/>
           </a:solidFill>
           <a:ln>
             <a:noFill/>
@@ -8520,51 +8887,43 @@
                 </a:solidFill>
                 <a:latin typeface="JetBrains Mono"/>
               </a:rPr>
-              <a:t>M05  ·  INHALT</a:t>
-            </a:r>
-          </a:p>
-        </p:txBody>
-      </p:sp>
-      <p:sp>
-        <p:nvSpPr>
-          <p:cNvPr id="5" name="Rectangle 4"/>
-          <p:cNvSpPr/>
-          <p:nvPr/>
-        </p:nvSpPr>
-        <p:spPr>
-          <a:xfrm>
-            <a:off x="0" y="1234440"/>
-            <a:ext cx="12188952" cy="12700"/>
-          </a:xfrm>
-          <a:prstGeom prst="rect">
-            <a:avLst/>
-          </a:prstGeom>
-          <a:solidFill>
-            <a:srgbClr val="D8DFE4"/>
-          </a:solidFill>
-          <a:ln>
-            <a:noFill/>
-          </a:ln>
-        </p:spPr>
-        <p:style>
-          <a:lnRef idx="1">
-            <a:schemeClr val="accent1"/>
-          </a:lnRef>
-          <a:fillRef idx="3">
-            <a:schemeClr val="accent1"/>
-          </a:fillRef>
-          <a:effectRef idx="2">
-            <a:schemeClr val="accent1"/>
-          </a:effectRef>
-          <a:fontRef idx="minor">
-            <a:schemeClr val="lt1"/>
-          </a:fontRef>
-        </p:style>
-        <p:txBody>
-          <a:bodyPr rtlCol="0" anchor="ctr"/>
-          <a:lstStyle/>
-          <a:p>
-            <a:pPr algn="ctr"/>
+              <a:t>M05  ·  SCHAUBILD</a:t>
+            </a:r>
+          </a:p>
+        </p:txBody>
+      </p:sp>
+      <p:sp>
+        <p:nvSpPr>
+          <p:cNvPr id="5" name="TextBox 4"/>
+          <p:cNvSpPr txBox="1"/>
+          <p:nvPr/>
+        </p:nvSpPr>
+        <p:spPr>
+          <a:xfrm>
+            <a:off x="685800" y="502920"/>
+            <a:ext cx="10817352" cy="594360"/>
+          </a:xfrm>
+          <a:prstGeom prst="rect">
+            <a:avLst/>
+          </a:prstGeom>
+          <a:noFill/>
+        </p:spPr>
+        <p:txBody>
+          <a:bodyPr wrap="square">
+            <a:spAutoFit/>
+          </a:bodyPr>
+          <a:lstStyle/>
+          <a:p>
+            <a:pPr algn="l"/>
+            <a:r>
+              <a:rPr sz="2000" b="1" i="0">
+                <a:solidFill>
+                  <a:srgbClr val="1F2C56"/>
+                </a:solidFill>
+                <a:latin typeface="Source Serif 4"/>
+              </a:rPr>
+              <a:t>Branchenlebenszyklus</a:t>
+            </a:r>
           </a:p>
         </p:txBody>
       </p:sp>
@@ -8576,8 +8935,8 @@
         </p:nvSpPr>
         <p:spPr>
           <a:xfrm>
-            <a:off x="685800" y="502920"/>
-            <a:ext cx="36576" cy="658368"/>
+            <a:off x="685800" y="1143000"/>
+            <a:ext cx="10817352" cy="25400"/>
           </a:xfrm>
           <a:prstGeom prst="rect">
             <a:avLst/>
@@ -8611,295 +8970,33 @@
           </a:p>
         </p:txBody>
       </p:sp>
-      <p:sp>
-        <p:nvSpPr>
-          <p:cNvPr id="7" name="TextBox 6"/>
-          <p:cNvSpPr txBox="1"/>
-          <p:nvPr/>
-        </p:nvSpPr>
-        <p:spPr>
-          <a:xfrm>
-            <a:off x="813816" y="502920"/>
-            <a:ext cx="10634472" cy="685800"/>
-          </a:xfrm>
-          <a:prstGeom prst="rect">
-            <a:avLst/>
-          </a:prstGeom>
-          <a:noFill/>
-        </p:spPr>
-        <p:txBody>
-          <a:bodyPr wrap="square">
-            <a:spAutoFit/>
-          </a:bodyPr>
-          <a:lstStyle/>
-          <a:p>
-            <a:pPr algn="l"/>
-            <a:r>
-              <a:rPr sz="2400" b="1" i="0">
-                <a:solidFill>
-                  <a:srgbClr val="1F2C56"/>
-                </a:solidFill>
-                <a:latin typeface="Source Serif 4"/>
-              </a:rPr>
-              <a:t>Theorie-Input: Branchenspezifische Risikoklassen im KMU-Segment</a:t>
-            </a:r>
-          </a:p>
-        </p:txBody>
-      </p:sp>
-      <p:sp>
-        <p:nvSpPr>
-          <p:cNvPr id="8" name="TextBox 7"/>
-          <p:cNvSpPr txBox="1"/>
-          <p:nvPr/>
-        </p:nvSpPr>
-        <p:spPr>
-          <a:xfrm>
-            <a:off x="685800" y="1417320"/>
-            <a:ext cx="10817352" cy="5029200"/>
-          </a:xfrm>
-          <a:prstGeom prst="rect">
-            <a:avLst/>
-          </a:prstGeom>
-          <a:noFill/>
-        </p:spPr>
-        <p:txBody>
-          <a:bodyPr wrap="square">
-            <a:spAutoFit/>
-          </a:bodyPr>
-          <a:lstStyle/>
-          <a:p>
-            <a:pPr>
-              <a:spcBef>
-                <a:spcPts val="1000"/>
-              </a:spcBef>
-              <a:spcAft>
-                <a:spcPts val="200"/>
-              </a:spcAft>
-            </a:pPr>
-            <a:r>
-              <a:rPr sz="800" b="1">
-                <a:solidFill>
-                  <a:srgbClr val="78808C"/>
-                </a:solidFill>
-                <a:latin typeface="JetBrains Mono"/>
-              </a:rPr>
-              <a:t>4.2.1 BAUGEWERBE UND BAUTRÄGER</a:t>
-            </a:r>
-          </a:p>
-          <a:p>
-            <a:pPr>
-              <a:spcBef>
-                <a:spcPts val="400"/>
-              </a:spcBef>
-              <a:spcAft>
-                <a:spcPts val="200"/>
-              </a:spcAft>
-            </a:pPr>
-            <a:r>
-              <a:rPr sz="1200">
-                <a:solidFill>
-                  <a:srgbClr val="3D5466"/>
-                </a:solidFill>
-                <a:latin typeface="Arial"/>
-              </a:rPr>
-              <a:t>Charakteristika:</a:t>
-            </a:r>
-          </a:p>
-          <a:p>
-            <a:pPr>
-              <a:spcBef>
-                <a:spcPts val="400"/>
-              </a:spcBef>
-              <a:spcAft>
-                <a:spcPts val="200"/>
-              </a:spcAft>
-            </a:pPr>
-            <a:r>
-              <a:rPr sz="1300">
-                <a:solidFill>
-                  <a:srgbClr val="3D5466"/>
-                </a:solidFill>
-                <a:latin typeface="Arial"/>
-              </a:rPr>
-              <a:t>▸  Projektgebundenheit: Jedes Objekt ist ein Einzelprojekt mit eigenen Fertigstellungs- und Kostenrisiken</a:t>
-            </a:r>
-          </a:p>
-          <a:p>
-            <a:pPr>
-              <a:spcBef>
-                <a:spcPts val="400"/>
-              </a:spcBef>
-              <a:spcAft>
-                <a:spcPts val="200"/>
-              </a:spcAft>
-            </a:pPr>
-            <a:r>
-              <a:rPr sz="1300">
-                <a:solidFill>
-                  <a:srgbClr val="3D5466"/>
-                </a:solidFill>
-                <a:latin typeface="Arial"/>
-              </a:rPr>
-              <a:t>▸  Bauhandwerk: Umsätze 300.000–3 Mio. €, Eigenkapitalquote 10–20 %; Bauträger: Umsätze 1–20 Mio. €, EK-Quote oft 15–30 % (aber volumenabhängig)</a:t>
-            </a:r>
-          </a:p>
-          <a:p>
-            <a:pPr>
-              <a:spcBef>
-                <a:spcPts val="400"/>
-              </a:spcBef>
-              <a:spcAft>
-                <a:spcPts val="200"/>
-              </a:spcAft>
-            </a:pPr>
-            <a:r>
-              <a:rPr sz="1300">
-                <a:solidFill>
-                  <a:srgbClr val="3D5466"/>
-                </a:solidFill>
-                <a:latin typeface="Arial"/>
-              </a:rPr>
-              <a:t>▸  Saisonalität: Wintermonate schwächer, Frühjahr/Sommer stärker</a:t>
-            </a:r>
-          </a:p>
-          <a:p>
-            <a:pPr>
-              <a:spcBef>
-                <a:spcPts val="400"/>
-              </a:spcBef>
-              <a:spcAft>
-                <a:spcPts val="200"/>
-              </a:spcAft>
-            </a:pPr>
-            <a:r>
-              <a:rPr sz="1200">
-                <a:solidFill>
-                  <a:srgbClr val="3D5466"/>
-                </a:solidFill>
-                <a:latin typeface="Arial"/>
-              </a:rPr>
-              <a:t>Typische Kennzahlen (Benchmark Baugewerbe):</a:t>
-            </a:r>
-          </a:p>
-          <a:p>
-            <a:pPr>
-              <a:spcBef>
-                <a:spcPts val="400"/>
-              </a:spcBef>
-              <a:spcAft>
-                <a:spcPts val="200"/>
-              </a:spcAft>
-            </a:pPr>
-            <a:r>
-              <a:rPr sz="1300">
-                <a:solidFill>
-                  <a:srgbClr val="3D5466"/>
-                </a:solidFill>
-                <a:latin typeface="Arial"/>
-              </a:rPr>
-              <a:t>▸  EBIT-Marge: 3–6 % (branchentypisch niedrig wg. Wettbewerbsintensität)</a:t>
-            </a:r>
-          </a:p>
-          <a:p>
-            <a:pPr>
-              <a:spcBef>
-                <a:spcPts val="400"/>
-              </a:spcBef>
-              <a:spcAft>
-                <a:spcPts val="200"/>
-              </a:spcAft>
-            </a:pPr>
-            <a:r>
-              <a:rPr sz="1300">
-                <a:solidFill>
-                  <a:srgbClr val="3D5466"/>
-                </a:solidFill>
-                <a:latin typeface="Arial"/>
-              </a:rPr>
-              <a:t>▸  Eigenkapitalquote: 12–18 %</a:t>
-            </a:r>
-          </a:p>
-          <a:p>
-            <a:pPr>
-              <a:spcBef>
-                <a:spcPts val="400"/>
-              </a:spcBef>
-              <a:spcAft>
-                <a:spcPts val="200"/>
-              </a:spcAft>
-            </a:pPr>
-            <a:r>
-              <a:rPr sz="1300">
-                <a:solidFill>
-                  <a:srgbClr val="3D5466"/>
-                </a:solidFill>
-                <a:latin typeface="Arial"/>
-              </a:rPr>
-              <a:t>▸  Kapitalumschlag: 0,8–1,2x</a:t>
-            </a:r>
-          </a:p>
-          <a:p>
-            <a:pPr>
-              <a:spcBef>
-                <a:spcPts val="400"/>
-              </a:spcBef>
-              <a:spcAft>
-                <a:spcPts val="200"/>
-              </a:spcAft>
-            </a:pPr>
-            <a:r>
-              <a:rPr sz="1300">
-                <a:solidFill>
-                  <a:srgbClr val="3D5466"/>
-                </a:solidFill>
-                <a:latin typeface="Arial"/>
-              </a:rPr>
-              <a:t>▸  Forderungslaufzeit: 45–60 Tage (Rechnungsstellung an Bauherr verzögert)</a:t>
-            </a:r>
-          </a:p>
-          <a:p>
-            <a:pPr>
-              <a:spcBef>
-                <a:spcPts val="400"/>
-              </a:spcBef>
-              <a:spcAft>
-                <a:spcPts val="200"/>
-              </a:spcAft>
-            </a:pPr>
-            <a:r>
-              <a:rPr sz="1200">
-                <a:solidFill>
-                  <a:srgbClr val="3D5466"/>
-                </a:solidFill>
-                <a:latin typeface="Arial"/>
-              </a:rPr>
-              <a:t>Quellen: Creditreform Branchenberichte ; BVR-Branchenblätter ; Deutsche Bundesbank Unternehmensabschlussstatistik</a:t>
-            </a:r>
-          </a:p>
-          <a:p>
-            <a:pPr>
-              <a:spcBef>
-                <a:spcPts val="400"/>
-              </a:spcBef>
-              <a:spcAft>
-                <a:spcPts val="200"/>
-              </a:spcAft>
-            </a:pPr>
-            <a:r>
-              <a:rPr sz="1200">
-                <a:solidFill>
-                  <a:srgbClr val="3D5466"/>
-                </a:solidFill>
-                <a:latin typeface="Arial"/>
-              </a:rPr>
-              <a:t>Kritische Frühwarnindikatoren:</a:t>
-            </a:r>
-          </a:p>
-        </p:txBody>
-      </p:sp>
-      <p:sp>
-        <p:nvSpPr>
-          <p:cNvPr id="9" name="Rectangle 8"/>
+      <p:pic>
+        <p:nvPicPr>
+          <p:cNvPr id="7" name="Picture 6" descr="image.png"/>
+          <p:cNvPicPr>
+            <a:picLocks noChangeAspect="1"/>
+          </p:cNvPicPr>
+          <p:nvPr/>
+        </p:nvPicPr>
+        <p:blipFill>
+          <a:blip r:embed="rId2"/>
+          <a:stretch>
+            <a:fillRect/>
+          </a:stretch>
+        </p:blipFill>
+        <p:spPr>
+          <a:xfrm>
+            <a:off x="2303489" y="1325880"/>
+            <a:ext cx="7581973" cy="4937760"/>
+          </a:xfrm>
+          <a:prstGeom prst="rect">
+            <a:avLst/>
+          </a:prstGeom>
+        </p:spPr>
+      </p:pic>
+      <p:sp>
+        <p:nvSpPr>
+          <p:cNvPr id="8" name="Rectangle 7"/>
           <p:cNvSpPr/>
           <p:nvPr/>
         </p:nvSpPr>
@@ -8942,7 +9039,7 @@
       </p:sp>
       <p:sp>
         <p:nvSpPr>
-          <p:cNvPr id="10" name="TextBox 9"/>
+          <p:cNvPr id="9" name="TextBox 8"/>
           <p:cNvSpPr txBox="1"/>
           <p:nvPr/>
         </p:nvSpPr>
@@ -8971,6 +9068,41 @@
                 <a:latin typeface="JetBrains Mono"/>
               </a:rPr>
               <a:t>Benedikt Zoller Coaching  ·  FKB Campus  ·  M05</a:t>
+            </a:r>
+          </a:p>
+        </p:txBody>
+      </p:sp>
+      <p:sp>
+        <p:nvSpPr>
+          <p:cNvPr id="10" name="TextBox 9"/>
+          <p:cNvSpPr txBox="1"/>
+          <p:nvPr/>
+        </p:nvSpPr>
+        <p:spPr>
+          <a:xfrm>
+            <a:off x="7176211" y="6583680"/>
+            <a:ext cx="4326940" cy="256032"/>
+          </a:xfrm>
+          <a:prstGeom prst="rect">
+            <a:avLst/>
+          </a:prstGeom>
+          <a:noFill/>
+        </p:spPr>
+        <p:txBody>
+          <a:bodyPr wrap="none">
+            <a:spAutoFit/>
+          </a:bodyPr>
+          <a:lstStyle/>
+          <a:p>
+            <a:pPr algn="r"/>
+            <a:r>
+              <a:rPr sz="700">
+                <a:solidFill>
+                  <a:srgbClr val="A0B4D2"/>
+                </a:solidFill>
+                <a:latin typeface="JetBrains Mono"/>
+              </a:rPr>
+              <a:t>Schaubild</a:t>
             </a:r>
           </a:p>
         </p:txBody>
@@ -9230,7 +9362,7 @@
                 </a:solidFill>
                 <a:latin typeface="Source Serif 4"/>
               </a:rPr>
-              <a:t>Handlungskarte: Vom Branchensignal zur Kreditmaßnahme</a:t>
+              <a:t>Theorie-Input: Branchenspezifische Risikoklassen im KMU-Segment</a:t>
             </a:r>
           </a:p>
         </p:txBody>
@@ -9256,6 +9388,25 @@
             <a:spAutoFit/>
           </a:bodyPr>
           <a:lstStyle/>
+          <a:p>
+            <a:pPr>
+              <a:spcBef>
+                <a:spcPts val="1000"/>
+              </a:spcBef>
+              <a:spcAft>
+                <a:spcPts val="200"/>
+              </a:spcAft>
+            </a:pPr>
+            <a:r>
+              <a:rPr sz="800" b="1">
+                <a:solidFill>
+                  <a:srgbClr val="78808C"/>
+                </a:solidFill>
+                <a:latin typeface="JetBrains Mono"/>
+              </a:rPr>
+              <a:t>4.2.1 BAUGEWERBE UND BAUTRÄGER</a:t>
+            </a:r>
+          </a:p>
           <a:p>
             <a:pPr>
               <a:spcBef>
@@ -9272,7 +9423,197 @@
                 </a:solidFill>
                 <a:latin typeface="Arial"/>
               </a:rPr>
-              <a:t>Die folgende Handlungsempfehlung-Karte verdichtet die Branchenrisikoprofile aus diesem Abschnitt zu konkreten Wenn-Dann-Impulsen für Kreditentscheidung und Kundengespräch.</a:t>
+              <a:t>Charakteristika:</a:t>
+            </a:r>
+          </a:p>
+          <a:p>
+            <a:pPr>
+              <a:spcBef>
+                <a:spcPts val="400"/>
+              </a:spcBef>
+              <a:spcAft>
+                <a:spcPts val="200"/>
+              </a:spcAft>
+            </a:pPr>
+            <a:r>
+              <a:rPr sz="1300">
+                <a:solidFill>
+                  <a:srgbClr val="3D5466"/>
+                </a:solidFill>
+                <a:latin typeface="Arial"/>
+              </a:rPr>
+              <a:t>▸  Projektgebundenheit: Jedes Objekt ist ein Einzelprojekt mit eigenen Fertigstellungs- und Kostenrisiken</a:t>
+            </a:r>
+          </a:p>
+          <a:p>
+            <a:pPr>
+              <a:spcBef>
+                <a:spcPts val="400"/>
+              </a:spcBef>
+              <a:spcAft>
+                <a:spcPts val="200"/>
+              </a:spcAft>
+            </a:pPr>
+            <a:r>
+              <a:rPr sz="1300">
+                <a:solidFill>
+                  <a:srgbClr val="3D5466"/>
+                </a:solidFill>
+                <a:latin typeface="Arial"/>
+              </a:rPr>
+              <a:t>▸  Bauhandwerk: Umsätze 300.000–3 Mio. €, Eigenkapitalquote 10–20 %; Bauträger: Umsätze 1–20 Mio. €, EK-Quote oft 15–30 % (aber volumenabhängig)</a:t>
+            </a:r>
+          </a:p>
+          <a:p>
+            <a:pPr>
+              <a:spcBef>
+                <a:spcPts val="400"/>
+              </a:spcBef>
+              <a:spcAft>
+                <a:spcPts val="200"/>
+              </a:spcAft>
+            </a:pPr>
+            <a:r>
+              <a:rPr sz="1300">
+                <a:solidFill>
+                  <a:srgbClr val="3D5466"/>
+                </a:solidFill>
+                <a:latin typeface="Arial"/>
+              </a:rPr>
+              <a:t>▸  Saisonalität: Wintermonate schwächer, Frühjahr/Sommer stärker</a:t>
+            </a:r>
+          </a:p>
+          <a:p>
+            <a:pPr>
+              <a:spcBef>
+                <a:spcPts val="400"/>
+              </a:spcBef>
+              <a:spcAft>
+                <a:spcPts val="200"/>
+              </a:spcAft>
+            </a:pPr>
+            <a:r>
+              <a:rPr sz="1200">
+                <a:solidFill>
+                  <a:srgbClr val="3D5466"/>
+                </a:solidFill>
+                <a:latin typeface="Arial"/>
+              </a:rPr>
+              <a:t>Typische Kennzahlen (Benchmark Baugewerbe):</a:t>
+            </a:r>
+          </a:p>
+          <a:p>
+            <a:pPr>
+              <a:spcBef>
+                <a:spcPts val="400"/>
+              </a:spcBef>
+              <a:spcAft>
+                <a:spcPts val="200"/>
+              </a:spcAft>
+            </a:pPr>
+            <a:r>
+              <a:rPr sz="1300">
+                <a:solidFill>
+                  <a:srgbClr val="3D5466"/>
+                </a:solidFill>
+                <a:latin typeface="Arial"/>
+              </a:rPr>
+              <a:t>▸  EBIT-Marge: 3–6 % (branchentypisch niedrig wg. Wettbewerbsintensität)</a:t>
+            </a:r>
+          </a:p>
+          <a:p>
+            <a:pPr>
+              <a:spcBef>
+                <a:spcPts val="400"/>
+              </a:spcBef>
+              <a:spcAft>
+                <a:spcPts val="200"/>
+              </a:spcAft>
+            </a:pPr>
+            <a:r>
+              <a:rPr sz="1300">
+                <a:solidFill>
+                  <a:srgbClr val="3D5466"/>
+                </a:solidFill>
+                <a:latin typeface="Arial"/>
+              </a:rPr>
+              <a:t>▸  Eigenkapitalquote: 12–18 %</a:t>
+            </a:r>
+          </a:p>
+          <a:p>
+            <a:pPr>
+              <a:spcBef>
+                <a:spcPts val="400"/>
+              </a:spcBef>
+              <a:spcAft>
+                <a:spcPts val="200"/>
+              </a:spcAft>
+            </a:pPr>
+            <a:r>
+              <a:rPr sz="1300">
+                <a:solidFill>
+                  <a:srgbClr val="3D5466"/>
+                </a:solidFill>
+                <a:latin typeface="Arial"/>
+              </a:rPr>
+              <a:t>▸  Kapitalumschlag: 0,8–1,2x</a:t>
+            </a:r>
+          </a:p>
+          <a:p>
+            <a:pPr>
+              <a:spcBef>
+                <a:spcPts val="400"/>
+              </a:spcBef>
+              <a:spcAft>
+                <a:spcPts val="200"/>
+              </a:spcAft>
+            </a:pPr>
+            <a:r>
+              <a:rPr sz="1300">
+                <a:solidFill>
+                  <a:srgbClr val="3D5466"/>
+                </a:solidFill>
+                <a:latin typeface="Arial"/>
+              </a:rPr>
+              <a:t>▸  Forderungslaufzeit: 45–60 Tage (Rechnungsstellung an Bauherr verzögert)</a:t>
+            </a:r>
+          </a:p>
+          <a:p>
+            <a:pPr>
+              <a:spcBef>
+                <a:spcPts val="400"/>
+              </a:spcBef>
+              <a:spcAft>
+                <a:spcPts val="200"/>
+              </a:spcAft>
+            </a:pPr>
+            <a:r>
+              <a:rPr sz="1200">
+                <a:solidFill>
+                  <a:srgbClr val="3D5466"/>
+                </a:solidFill>
+                <a:latin typeface="Arial"/>
+              </a:rPr>
+              <a:t>Quellen: Creditreform Branchenberichte ; BVR-Branchenblätter ; Deutsche Bundesbank Unternehmensabschlussstatistik</a:t>
+            </a:r>
+          </a:p>
+          <a:p>
+            <a:pPr>
+              <a:spcBef>
+                <a:spcPts val="400"/>
+              </a:spcBef>
+              <a:spcAft>
+                <a:spcPts val="200"/>
+              </a:spcAft>
+            </a:pPr>
+            <a:r>
+              <a:rPr sz="1200">
+                <a:solidFill>
+                  <a:srgbClr val="3D5466"/>
+                </a:solidFill>
+                <a:latin typeface="Arial"/>
+              </a:rPr>
+              <a:t>Kritische Frühwarnindikatoren:</a:t>
             </a:r>
           </a:p>
         </p:txBody>
@@ -9388,7 +9729,7 @@
             <a:avLst/>
           </a:prstGeom>
           <a:solidFill>
-            <a:srgbClr val="FFFFFF"/>
+            <a:srgbClr val="EDEDF3"/>
           </a:solidFill>
           <a:ln>
             <a:noFill/>
@@ -9489,43 +9830,51 @@
                 </a:solidFill>
                 <a:latin typeface="JetBrains Mono"/>
               </a:rPr>
-              <a:t>M05  ·  SCHAUBILD</a:t>
-            </a:r>
-          </a:p>
-        </p:txBody>
-      </p:sp>
-      <p:sp>
-        <p:nvSpPr>
-          <p:cNvPr id="5" name="TextBox 4"/>
-          <p:cNvSpPr txBox="1"/>
-          <p:nvPr/>
-        </p:nvSpPr>
-        <p:spPr>
-          <a:xfrm>
-            <a:off x="685800" y="502920"/>
-            <a:ext cx="10817352" cy="594360"/>
-          </a:xfrm>
-          <a:prstGeom prst="rect">
-            <a:avLst/>
-          </a:prstGeom>
-          <a:noFill/>
-        </p:spPr>
-        <p:txBody>
-          <a:bodyPr wrap="square">
-            <a:spAutoFit/>
-          </a:bodyPr>
-          <a:lstStyle/>
-          <a:p>
-            <a:pPr algn="l"/>
-            <a:r>
-              <a:rPr sz="2000" b="1" i="0">
-                <a:solidFill>
-                  <a:srgbClr val="1F2C56"/>
-                </a:solidFill>
-                <a:latin typeface="Source Serif 4"/>
-              </a:rPr>
-              <a:t>Handlungsempfehlung</a:t>
-            </a:r>
+              <a:t>M05  ·  INHALT</a:t>
+            </a:r>
+          </a:p>
+        </p:txBody>
+      </p:sp>
+      <p:sp>
+        <p:nvSpPr>
+          <p:cNvPr id="5" name="Rectangle 4"/>
+          <p:cNvSpPr/>
+          <p:nvPr/>
+        </p:nvSpPr>
+        <p:spPr>
+          <a:xfrm>
+            <a:off x="0" y="1234440"/>
+            <a:ext cx="12188952" cy="12700"/>
+          </a:xfrm>
+          <a:prstGeom prst="rect">
+            <a:avLst/>
+          </a:prstGeom>
+          <a:solidFill>
+            <a:srgbClr val="D8DFE4"/>
+          </a:solidFill>
+          <a:ln>
+            <a:noFill/>
+          </a:ln>
+        </p:spPr>
+        <p:style>
+          <a:lnRef idx="1">
+            <a:schemeClr val="accent1"/>
+          </a:lnRef>
+          <a:fillRef idx="3">
+            <a:schemeClr val="accent1"/>
+          </a:fillRef>
+          <a:effectRef idx="2">
+            <a:schemeClr val="accent1"/>
+          </a:effectRef>
+          <a:fontRef idx="minor">
+            <a:schemeClr val="lt1"/>
+          </a:fontRef>
+        </p:style>
+        <p:txBody>
+          <a:bodyPr rtlCol="0" anchor="ctr"/>
+          <a:lstStyle/>
+          <a:p>
+            <a:pPr algn="ctr"/>
           </a:p>
         </p:txBody>
       </p:sp>
@@ -9537,8 +9886,8 @@
         </p:nvSpPr>
         <p:spPr>
           <a:xfrm>
-            <a:off x="685800" y="1143000"/>
-            <a:ext cx="10817352" cy="25400"/>
+            <a:off x="685800" y="502920"/>
+            <a:ext cx="36576" cy="658368"/>
           </a:xfrm>
           <a:prstGeom prst="rect">
             <a:avLst/>
@@ -9572,33 +9921,86 @@
           </a:p>
         </p:txBody>
       </p:sp>
-      <p:pic>
-        <p:nvPicPr>
-          <p:cNvPr id="7" name="Picture 6" descr="image.png"/>
-          <p:cNvPicPr>
-            <a:picLocks noChangeAspect="1"/>
-          </p:cNvPicPr>
-          <p:nvPr/>
-        </p:nvPicPr>
-        <p:blipFill>
-          <a:blip r:embed="rId2"/>
-          <a:stretch>
-            <a:fillRect/>
-          </a:stretch>
-        </p:blipFill>
-        <p:spPr>
-          <a:xfrm>
-            <a:off x="2303489" y="1325880"/>
-            <a:ext cx="7581973" cy="4937760"/>
-          </a:xfrm>
-          <a:prstGeom prst="rect">
-            <a:avLst/>
-          </a:prstGeom>
-        </p:spPr>
-      </p:pic>
-      <p:sp>
-        <p:nvSpPr>
-          <p:cNvPr id="8" name="Rectangle 7"/>
+      <p:sp>
+        <p:nvSpPr>
+          <p:cNvPr id="7" name="TextBox 6"/>
+          <p:cNvSpPr txBox="1"/>
+          <p:nvPr/>
+        </p:nvSpPr>
+        <p:spPr>
+          <a:xfrm>
+            <a:off x="813816" y="502920"/>
+            <a:ext cx="10634472" cy="685800"/>
+          </a:xfrm>
+          <a:prstGeom prst="rect">
+            <a:avLst/>
+          </a:prstGeom>
+          <a:noFill/>
+        </p:spPr>
+        <p:txBody>
+          <a:bodyPr wrap="square">
+            <a:spAutoFit/>
+          </a:bodyPr>
+          <a:lstStyle/>
+          <a:p>
+            <a:pPr algn="l"/>
+            <a:r>
+              <a:rPr sz="2400" b="1" i="0">
+                <a:solidFill>
+                  <a:srgbClr val="1F2C56"/>
+                </a:solidFill>
+                <a:latin typeface="Source Serif 4"/>
+              </a:rPr>
+              <a:t>Handlungskarte: Vom Branchensignal zur Kreditmaßnahme</a:t>
+            </a:r>
+          </a:p>
+        </p:txBody>
+      </p:sp>
+      <p:sp>
+        <p:nvSpPr>
+          <p:cNvPr id="8" name="TextBox 7"/>
+          <p:cNvSpPr txBox="1"/>
+          <p:nvPr/>
+        </p:nvSpPr>
+        <p:spPr>
+          <a:xfrm>
+            <a:off x="685800" y="1417320"/>
+            <a:ext cx="10817352" cy="5029200"/>
+          </a:xfrm>
+          <a:prstGeom prst="rect">
+            <a:avLst/>
+          </a:prstGeom>
+          <a:noFill/>
+        </p:spPr>
+        <p:txBody>
+          <a:bodyPr wrap="square">
+            <a:spAutoFit/>
+          </a:bodyPr>
+          <a:lstStyle/>
+          <a:p>
+            <a:pPr>
+              <a:spcBef>
+                <a:spcPts val="400"/>
+              </a:spcBef>
+              <a:spcAft>
+                <a:spcPts val="200"/>
+              </a:spcAft>
+            </a:pPr>
+            <a:r>
+              <a:rPr sz="1200">
+                <a:solidFill>
+                  <a:srgbClr val="3D5466"/>
+                </a:solidFill>
+                <a:latin typeface="Arial"/>
+              </a:rPr>
+              <a:t>Die folgende Handlungsempfehlung-Karte verdichtet die Branchenrisikoprofile aus diesem Abschnitt zu konkreten Wenn-Dann-Impulsen für Kreditentscheidung und Kundengespräch.</a:t>
+            </a:r>
+          </a:p>
+        </p:txBody>
+      </p:sp>
+      <p:sp>
+        <p:nvSpPr>
+          <p:cNvPr id="9" name="Rectangle 8"/>
           <p:cNvSpPr/>
           <p:nvPr/>
         </p:nvSpPr>
@@ -9641,7 +10043,7 @@
       </p:sp>
       <p:sp>
         <p:nvSpPr>
-          <p:cNvPr id="9" name="TextBox 8"/>
+          <p:cNvPr id="10" name="TextBox 9"/>
           <p:cNvSpPr txBox="1"/>
           <p:nvPr/>
         </p:nvSpPr>
@@ -9670,41 +10072,6 @@
                 <a:latin typeface="JetBrains Mono"/>
               </a:rPr>
               <a:t>Benedikt Zoller Coaching  ·  FKB Campus  ·  M05</a:t>
-            </a:r>
-          </a:p>
-        </p:txBody>
-      </p:sp>
-      <p:sp>
-        <p:nvSpPr>
-          <p:cNvPr id="10" name="TextBox 9"/>
-          <p:cNvSpPr txBox="1"/>
-          <p:nvPr/>
-        </p:nvSpPr>
-        <p:spPr>
-          <a:xfrm>
-            <a:off x="7176211" y="6583680"/>
-            <a:ext cx="4326940" cy="256032"/>
-          </a:xfrm>
-          <a:prstGeom prst="rect">
-            <a:avLst/>
-          </a:prstGeom>
-          <a:noFill/>
-        </p:spPr>
-        <p:txBody>
-          <a:bodyPr wrap="none">
-            <a:spAutoFit/>
-          </a:bodyPr>
-          <a:lstStyle/>
-          <a:p>
-            <a:pPr algn="r"/>
-            <a:r>
-              <a:rPr sz="700">
-                <a:solidFill>
-                  <a:srgbClr val="A0B4D2"/>
-                </a:solidFill>
-                <a:latin typeface="JetBrains Mono"/>
-              </a:rPr>
-              <a:t>Schaubild</a:t>
             </a:r>
           </a:p>
         </p:txBody>

--- a/protected-downloads/praesentation/M05.pptx
+++ b/protected-downloads/praesentation/M05.pptx
@@ -18,6 +18,10 @@
     <p:sldId id="266" r:id="rId18"/>
     <p:sldId id="267" r:id="rId19"/>
     <p:sldId id="268" r:id="rId20"/>
+    <p:sldId id="269" r:id="rId21"/>
+    <p:sldId id="270" r:id="rId22"/>
+    <p:sldId id="271" r:id="rId23"/>
+    <p:sldId id="272" r:id="rId24"/>
   </p:sldIdLst>
   <p:sldSz cx="12188952" cy="6858000" type="screen4x3"/>
   <p:notesSz cx="6858000" cy="9144000"/>
@@ -514,7 +518,7 @@
           <a:lstStyle/>
           <a:p>
             <a:r>
-              <a:t>Agenda-Überblick. Timing und Pausen siehe Ablaufplan im Trainerhandbuch (Sektion 3).</a:t>
+              <a:t>Agenda aus dem Ablaufplan (Sektion 3.1). Timing und Pausen siehe Trainerhandbuch.</a:t>
             </a:r>
           </a:p>
         </p:txBody>
@@ -5161,13 +5165,13 @@
               </a:spcAft>
             </a:pPr>
             <a:r>
-              <a:rPr sz="1200">
+              <a:rPr sz="1300">
                 <a:solidFill>
                   <a:srgbClr val="3D5466"/>
                 </a:solidFill>
                 <a:latin typeface="Arial"/>
               </a:rPr>
-              <a:t>Das VR-Rating kombiniert quantitative und qualitative Komponenten:</a:t>
+              <a:t>▸  Das VR-Rating kombiniert quantitative und qualitative Komponenten:</a:t>
             </a:r>
           </a:p>
           <a:p>
@@ -5180,13 +5184,13 @@
               </a:spcAft>
             </a:pPr>
             <a:r>
-              <a:rPr sz="1200">
+              <a:rPr sz="1300">
                 <a:solidFill>
                   <a:srgbClr val="3D5466"/>
                 </a:solidFill>
                 <a:latin typeface="Arial"/>
               </a:rPr>
-              <a:t>Quantitativ (ca. 60–70 % Gewicht):</a:t>
+              <a:t>▸  Quantitativ (ca. 60–70 % Gewicht):</a:t>
             </a:r>
           </a:p>
           <a:p>
@@ -5275,13 +5279,13 @@
               </a:spcAft>
             </a:pPr>
             <a:r>
-              <a:rPr sz="1200">
+              <a:rPr sz="1300">
                 <a:solidFill>
                   <a:srgbClr val="3D5466"/>
                 </a:solidFill>
                 <a:latin typeface="Arial"/>
               </a:rPr>
-              <a:t>Qualitativ (ca. 30–40 % Gewicht):</a:t>
+              <a:t>▸  Qualitativ (ca. 30–40 % Gewicht):</a:t>
             </a:r>
           </a:p>
           <a:p>
@@ -5473,7 +5477,7 @@
             <a:avLst/>
           </a:prstGeom>
           <a:solidFill>
-            <a:srgbClr val="EDEDF3"/>
+            <a:srgbClr val="FFFFFF"/>
           </a:solidFill>
           <a:ln>
             <a:noFill/>
@@ -5574,51 +5578,43 @@
                 </a:solidFill>
                 <a:latin typeface="JetBrains Mono"/>
               </a:rPr>
-              <a:t>M05  ·  INHALT</a:t>
-            </a:r>
-          </a:p>
-        </p:txBody>
-      </p:sp>
-      <p:sp>
-        <p:nvSpPr>
-          <p:cNvPr id="5" name="Rectangle 4"/>
-          <p:cNvSpPr/>
-          <p:nvPr/>
-        </p:nvSpPr>
-        <p:spPr>
-          <a:xfrm>
-            <a:off x="0" y="1234440"/>
-            <a:ext cx="12188952" cy="12700"/>
-          </a:xfrm>
-          <a:prstGeom prst="rect">
-            <a:avLst/>
-          </a:prstGeom>
-          <a:solidFill>
-            <a:srgbClr val="D8DFE4"/>
-          </a:solidFill>
-          <a:ln>
-            <a:noFill/>
-          </a:ln>
-        </p:spPr>
-        <p:style>
-          <a:lnRef idx="1">
-            <a:schemeClr val="accent1"/>
-          </a:lnRef>
-          <a:fillRef idx="3">
-            <a:schemeClr val="accent1"/>
-          </a:fillRef>
-          <a:effectRef idx="2">
-            <a:schemeClr val="accent1"/>
-          </a:effectRef>
-          <a:fontRef idx="minor">
-            <a:schemeClr val="lt1"/>
-          </a:fontRef>
-        </p:style>
-        <p:txBody>
-          <a:bodyPr rtlCol="0" anchor="ctr"/>
-          <a:lstStyle/>
-          <a:p>
-            <a:pPr algn="ctr"/>
+              <a:t>M05  ·  ÜBERSICHT</a:t>
+            </a:r>
+          </a:p>
+        </p:txBody>
+      </p:sp>
+      <p:sp>
+        <p:nvSpPr>
+          <p:cNvPr id="5" name="TextBox 4"/>
+          <p:cNvSpPr txBox="1"/>
+          <p:nvPr/>
+        </p:nvSpPr>
+        <p:spPr>
+          <a:xfrm>
+            <a:off x="685800" y="502920"/>
+            <a:ext cx="10817352" cy="594360"/>
+          </a:xfrm>
+          <a:prstGeom prst="rect">
+            <a:avLst/>
+          </a:prstGeom>
+          <a:noFill/>
+        </p:spPr>
+        <p:txBody>
+          <a:bodyPr wrap="square">
+            <a:spAutoFit/>
+          </a:bodyPr>
+          <a:lstStyle/>
+          <a:p>
+            <a:pPr algn="l"/>
+            <a:r>
+              <a:rPr sz="2000" b="1" i="0">
+                <a:solidFill>
+                  <a:srgbClr val="1F2C56"/>
+                </a:solidFill>
+                <a:latin typeface="Source Serif 4"/>
+              </a:rPr>
+              <a:t>Theorie-Input: VR-Rating und branchenspezifische Ratingfaktoren</a:t>
+            </a:r>
           </a:p>
         </p:txBody>
       </p:sp>
@@ -5630,8 +5626,8 @@
         </p:nvSpPr>
         <p:spPr>
           <a:xfrm>
-            <a:off x="685800" y="502920"/>
-            <a:ext cx="36576" cy="658368"/>
+            <a:off x="685800" y="1143000"/>
+            <a:ext cx="10817352" cy="25400"/>
           </a:xfrm>
           <a:prstGeom prst="rect">
             <a:avLst/>
@@ -5665,295 +5661,328 @@
           </a:p>
         </p:txBody>
       </p:sp>
-      <p:sp>
-        <p:nvSpPr>
-          <p:cNvPr id="7" name="TextBox 6"/>
-          <p:cNvSpPr txBox="1"/>
-          <p:nvPr/>
-        </p:nvSpPr>
-        <p:spPr>
-          <a:xfrm>
-            <a:off x="813816" y="502920"/>
-            <a:ext cx="10634472" cy="685800"/>
-          </a:xfrm>
-          <a:prstGeom prst="rect">
-            <a:avLst/>
-          </a:prstGeom>
-          <a:noFill/>
-        </p:spPr>
-        <p:txBody>
-          <a:bodyPr wrap="square">
-            <a:spAutoFit/>
-          </a:bodyPr>
-          <a:lstStyle/>
-          <a:p>
-            <a:pPr algn="l"/>
-            <a:r>
-              <a:rPr sz="2400" b="1" i="0">
-                <a:solidFill>
-                  <a:srgbClr val="1F2C56"/>
-                </a:solidFill>
-                <a:latin typeface="Source Serif 4"/>
-              </a:rPr>
-              <a:t>Praxiscase: Bäckerei &amp; Konditorei Hofmann GmbH (Stuttgart, fiktiv)</a:t>
-            </a:r>
-          </a:p>
-        </p:txBody>
-      </p:sp>
-      <p:sp>
-        <p:nvSpPr>
-          <p:cNvPr id="8" name="TextBox 7"/>
-          <p:cNvSpPr txBox="1"/>
-          <p:nvPr/>
-        </p:nvSpPr>
-        <p:spPr>
-          <a:xfrm>
-            <a:off x="685800" y="1417320"/>
-            <a:ext cx="10817352" cy="5029200"/>
-          </a:xfrm>
-          <a:prstGeom prst="rect">
-            <a:avLst/>
-          </a:prstGeom>
-          <a:noFill/>
-        </p:spPr>
-        <p:txBody>
-          <a:bodyPr wrap="square">
-            <a:spAutoFit/>
-          </a:bodyPr>
-          <a:lstStyle/>
-          <a:p>
-            <a:pPr>
-              <a:spcBef>
-                <a:spcPts val="1000"/>
-              </a:spcBef>
-              <a:spcAft>
-                <a:spcPts val="200"/>
-              </a:spcAft>
-            </a:pPr>
-            <a:r>
-              <a:rPr sz="800" b="1">
-                <a:solidFill>
-                  <a:srgbClr val="78808C"/>
-                </a:solidFill>
-                <a:latin typeface="JetBrains Mono"/>
-              </a:rPr>
-              <a:t>4.4.1 UNTERNEHMENSPROFIL</a:t>
-            </a:r>
-          </a:p>
-          <a:p>
-            <a:pPr>
-              <a:spcBef>
-                <a:spcPts val="1000"/>
-              </a:spcBef>
-              <a:spcAft>
-                <a:spcPts val="200"/>
-              </a:spcAft>
-            </a:pPr>
-            <a:r>
-              <a:rPr sz="800" b="1">
-                <a:solidFill>
-                  <a:srgbClr val="78808C"/>
-                </a:solidFill>
-                <a:latin typeface="JetBrains Mono"/>
-              </a:rPr>
-              <a:t>4.4.2 FINANZIELLE SITUATION (JAHRESABSCHLUSS 2024, AUSZÜGE)</a:t>
-            </a:r>
-          </a:p>
-          <a:p>
-            <a:pPr>
-              <a:spcBef>
-                <a:spcPts val="400"/>
-              </a:spcBef>
-              <a:spcAft>
-                <a:spcPts val="200"/>
-              </a:spcAft>
-            </a:pPr>
-            <a:r>
-              <a:rPr sz="1200">
-                <a:solidFill>
-                  <a:srgbClr val="3D5466"/>
-                </a:solidFill>
-                <a:latin typeface="Arial"/>
-              </a:rPr>
-              <a:t>Bilanzauszug:</a:t>
-            </a:r>
-          </a:p>
-          <a:p>
-            <a:pPr>
-              <a:spcBef>
-                <a:spcPts val="400"/>
-              </a:spcBef>
-              <a:spcAft>
-                <a:spcPts val="200"/>
-              </a:spcAft>
-            </a:pPr>
-            <a:r>
-              <a:rPr sz="1200">
-                <a:solidFill>
-                  <a:srgbClr val="3D5466"/>
-                </a:solidFill>
-                <a:latin typeface="Arial"/>
-              </a:rPr>
-              <a:t>Gewinn- und Verlustrechnung 2024:</a:t>
-            </a:r>
-          </a:p>
-          <a:p>
-            <a:pPr>
-              <a:spcBef>
-                <a:spcPts val="400"/>
-              </a:spcBef>
-              <a:spcAft>
-                <a:spcPts val="200"/>
-              </a:spcAft>
-            </a:pPr>
-            <a:r>
-              <a:rPr sz="1200">
-                <a:solidFill>
-                  <a:srgbClr val="3D5466"/>
-                </a:solidFill>
-                <a:latin typeface="Arial"/>
-              </a:rPr>
-              <a:t>Kapitalflussrechnung 2024 (vereinfacht):</a:t>
-            </a:r>
-          </a:p>
-          <a:p>
-            <a:pPr>
-              <a:spcBef>
-                <a:spcPts val="1000"/>
-              </a:spcBef>
-              <a:spcAft>
-                <a:spcPts val="200"/>
-              </a:spcAft>
-            </a:pPr>
-            <a:r>
-              <a:rPr sz="800" b="1">
-                <a:solidFill>
-                  <a:srgbClr val="78808C"/>
-                </a:solidFill>
-                <a:latin typeface="JetBrains Mono"/>
-              </a:rPr>
-              <a:t>4.4.3 KREDITANFRAGE</a:t>
-            </a:r>
-          </a:p>
-          <a:p>
-            <a:pPr>
-              <a:spcBef>
-                <a:spcPts val="400"/>
-              </a:spcBef>
-              <a:spcAft>
-                <a:spcPts val="200"/>
-              </a:spcAft>
-            </a:pPr>
-            <a:r>
-              <a:rPr sz="1200">
-                <a:solidFill>
-                  <a:srgbClr val="3D5466"/>
-                </a:solidFill>
-                <a:latin typeface="Arial"/>
-              </a:rPr>
-              <a:t>Anlass: Investition in neue Backstube Kempten-Süd (170.000 €) + Filialmodernisierung Sonthofen (80.000 €)</a:t>
-            </a:r>
-          </a:p>
-          <a:p>
-            <a:pPr>
-              <a:spcBef>
-                <a:spcPts val="400"/>
-              </a:spcBef>
-              <a:spcAft>
-                <a:spcPts val="200"/>
-              </a:spcAft>
-            </a:pPr>
-            <a:r>
-              <a:rPr sz="1200">
-                <a:solidFill>
-                  <a:srgbClr val="3D5466"/>
-                </a:solidFill>
-                <a:latin typeface="Arial"/>
-              </a:rPr>
-              <a:t>Gesamtkreditbedarf: 250.000 € | Eigenanteil: 30.000 € | Kreditwunsch: 250.000 €</a:t>
-            </a:r>
-          </a:p>
-          <a:p>
-            <a:pPr>
-              <a:spcBef>
-                <a:spcPts val="1000"/>
-              </a:spcBef>
-              <a:spcAft>
-                <a:spcPts val="200"/>
-              </a:spcAft>
-            </a:pPr>
-            <a:r>
-              <a:rPr sz="800" b="1">
-                <a:solidFill>
-                  <a:srgbClr val="78808C"/>
-                </a:solidFill>
-                <a:latin typeface="JetBrains Mono"/>
-              </a:rPr>
-              <a:t>4.4.4 GESPRÄCHSVERLAUF: BRANCHENRISIKOANALYSE (BER = BERATER, GF = GESCHÄFTSFÜHRERIN)</a:t>
-            </a:r>
-          </a:p>
-          <a:p>
-            <a:pPr>
-              <a:spcBef>
-                <a:spcPts val="400"/>
-              </a:spcBef>
-              <a:spcAft>
-                <a:spcPts val="200"/>
-              </a:spcAft>
-            </a:pPr>
-            <a:r>
-              <a:rPr sz="1200">
-                <a:solidFill>
-                  <a:srgbClr val="3D5466"/>
-                </a:solidFill>
-                <a:latin typeface="Arial"/>
-              </a:rPr>
-              <a:t>Session 1 – Erstgespräch Branchenrisiko</a:t>
-            </a:r>
-          </a:p>
-          <a:p>
-            <a:pPr>
-              <a:spcBef>
-                <a:spcPts val="400"/>
-              </a:spcBef>
-              <a:spcAft>
-                <a:spcPts val="200"/>
-              </a:spcAft>
-            </a:pPr>
-            <a:r>
-              <a:rPr sz="1200">
-                <a:solidFill>
-                  <a:srgbClr val="3D5466"/>
-                </a:solidFill>
-                <a:latin typeface="Arial"/>
-              </a:rPr>
-              <a:t>GF: „Wir konnten die Preise nur um etwa 8–10 % erhöhen, ohne Kunden zu verlieren. Das hat die Marge deutlich gedrückt."</a:t>
-            </a:r>
-          </a:p>
-          <a:p>
-            <a:pPr>
-              <a:spcBef>
-                <a:spcPts val="400"/>
-              </a:spcBef>
-              <a:spcAft>
-                <a:spcPts val="200"/>
-              </a:spcAft>
-            </a:pPr>
-            <a:r>
-              <a:rPr sz="1200">
-                <a:solidFill>
-                  <a:srgbClr val="3D5466"/>
-                </a:solidFill>
-                <a:latin typeface="Arial"/>
-              </a:rPr>
-              <a:t>GF: „Nein, wir kaufen zu aktuellen Marktpreisen. Die Lieferanten bieten keine Festpreise an."</a:t>
-            </a:r>
-          </a:p>
-        </p:txBody>
-      </p:sp>
-      <p:sp>
-        <p:nvSpPr>
-          <p:cNvPr id="9" name="Rectangle 8"/>
+      <p:graphicFrame>
+        <p:nvGraphicFramePr>
+          <p:cNvPr id="7" name="Table 6"/>
+          <p:cNvGraphicFramePr>
+            <a:graphicFrameLocks noGrp="1"/>
+          </p:cNvGraphicFramePr>
+          <p:nvPr/>
+        </p:nvGraphicFramePr>
+        <p:xfrm>
+          <a:off x="685800" y="1417320"/>
+          <a:ext cx="10817352" cy="1920240"/>
+        </p:xfrm>
+        <a:graphic>
+          <a:graphicData uri="http://schemas.openxmlformats.org/drawingml/2006/table">
+            <a:tbl>
+              <a:tblPr firstRow="1" bandRow="1">
+                <a:tableStyleId>{5C22544A-7EE6-4342-B048-85BDC9FD1C3A}</a:tableStyleId>
+              </a:tblPr>
+              <a:tblGrid>
+                <a:gridCol w="3605784"/>
+                <a:gridCol w="3605784"/>
+                <a:gridCol w="3605784"/>
+              </a:tblGrid>
+              <a:tr h="384048">
+                <a:tc>
+                  <a:txBody>
+                    <a:bodyPr/>
+                    <a:lstStyle/>
+                    <a:p>
+                      <a:r>
+                        <a:rPr sz="1100" b="1">
+                          <a:solidFill>
+                            <a:srgbClr val="FFFFFF"/>
+                          </a:solidFill>
+                          <a:latin typeface="Arial"/>
+                        </a:rPr>
+                        <a:t>Branche</a:t>
+                      </a:r>
+                    </a:p>
+                  </a:txBody>
+                  <a:tcPr>
+                    <a:solidFill>
+                      <a:srgbClr val="1F2C56"/>
+                    </a:solidFill>
+                  </a:tcPr>
+                </a:tc>
+                <a:tc>
+                  <a:txBody>
+                    <a:bodyPr/>
+                    <a:lstStyle/>
+                    <a:p>
+                      <a:r>
+                        <a:rPr sz="1100" b="1">
+                          <a:solidFill>
+                            <a:srgbClr val="FFFFFF"/>
+                          </a:solidFill>
+                          <a:latin typeface="Arial"/>
+                        </a:rPr>
+                        <a:t>Mindest-EK-Quote</a:t>
+                      </a:r>
+                    </a:p>
+                  </a:txBody>
+                  <a:tcPr>
+                    <a:solidFill>
+                      <a:srgbClr val="1F2C56"/>
+                    </a:solidFill>
+                  </a:tcPr>
+                </a:tc>
+                <a:tc>
+                  <a:txBody>
+                    <a:bodyPr/>
+                    <a:lstStyle/>
+                    <a:p>
+                      <a:r>
+                        <a:rPr sz="1100" b="1">
+                          <a:solidFill>
+                            <a:srgbClr val="FFFFFF"/>
+                          </a:solidFill>
+                          <a:latin typeface="Arial"/>
+                        </a:rPr>
+                        <a:t>Begründung</a:t>
+                      </a:r>
+                    </a:p>
+                  </a:txBody>
+                  <a:tcPr>
+                    <a:solidFill>
+                      <a:srgbClr val="1F2C56"/>
+                    </a:solidFill>
+                  </a:tcPr>
+                </a:tc>
+              </a:tr>
+              <a:tr h="384048">
+                <a:tc>
+                  <a:txBody>
+                    <a:bodyPr/>
+                    <a:lstStyle/>
+                    <a:p>
+                      <a:r>
+                        <a:rPr sz="1050">
+                          <a:solidFill>
+                            <a:srgbClr val="3D5466"/>
+                          </a:solidFill>
+                          <a:latin typeface="Arial"/>
+                        </a:rPr>
+                        <a:t>Verarbeitendes Gewerbe</a:t>
+                      </a:r>
+                    </a:p>
+                  </a:txBody>
+                  <a:tcPr/>
+                </a:tc>
+                <a:tc>
+                  <a:txBody>
+                    <a:bodyPr/>
+                    <a:lstStyle/>
+                    <a:p>
+                      <a:r>
+                        <a:rPr sz="1050">
+                          <a:solidFill>
+                            <a:srgbClr val="3D5466"/>
+                          </a:solidFill>
+                          <a:latin typeface="Arial"/>
+                        </a:rPr>
+                        <a:t>≥ 25 %</a:t>
+                      </a:r>
+                    </a:p>
+                  </a:txBody>
+                  <a:tcPr/>
+                </a:tc>
+                <a:tc>
+                  <a:txBody>
+                    <a:bodyPr/>
+                    <a:lstStyle/>
+                    <a:p>
+                      <a:r>
+                        <a:rPr sz="1050">
+                          <a:solidFill>
+                            <a:srgbClr val="3D5466"/>
+                          </a:solidFill>
+                          <a:latin typeface="Arial"/>
+                        </a:rPr>
+                        <a:t>Kapitalintensiv, Ausgleichspuffer nötig</a:t>
+                      </a:r>
+                    </a:p>
+                  </a:txBody>
+                  <a:tcPr/>
+                </a:tc>
+              </a:tr>
+              <a:tr h="384048">
+                <a:tc>
+                  <a:txBody>
+                    <a:bodyPr/>
+                    <a:lstStyle/>
+                    <a:p>
+                      <a:r>
+                        <a:rPr sz="1050">
+                          <a:solidFill>
+                            <a:srgbClr val="3D5466"/>
+                          </a:solidFill>
+                          <a:latin typeface="Arial"/>
+                        </a:rPr>
+                        <a:t>Dienstleistung</a:t>
+                      </a:r>
+                    </a:p>
+                  </a:txBody>
+                  <a:tcPr/>
+                </a:tc>
+                <a:tc>
+                  <a:txBody>
+                    <a:bodyPr/>
+                    <a:lstStyle/>
+                    <a:p>
+                      <a:r>
+                        <a:rPr sz="1050">
+                          <a:solidFill>
+                            <a:srgbClr val="3D5466"/>
+                          </a:solidFill>
+                          <a:latin typeface="Arial"/>
+                        </a:rPr>
+                        <a:t>≥ 15 %</a:t>
+                      </a:r>
+                    </a:p>
+                  </a:txBody>
+                  <a:tcPr/>
+                </a:tc>
+                <a:tc>
+                  <a:txBody>
+                    <a:bodyPr/>
+                    <a:lstStyle/>
+                    <a:p>
+                      <a:r>
+                        <a:rPr sz="1050">
+                          <a:solidFill>
+                            <a:srgbClr val="3D5466"/>
+                          </a:solidFill>
+                          <a:latin typeface="Arial"/>
+                        </a:rPr>
+                        <a:t>Weniger kapitalintensiv</a:t>
+                      </a:r>
+                    </a:p>
+                  </a:txBody>
+                  <a:tcPr/>
+                </a:tc>
+              </a:tr>
+              <a:tr h="384048">
+                <a:tc>
+                  <a:txBody>
+                    <a:bodyPr/>
+                    <a:lstStyle/>
+                    <a:p>
+                      <a:r>
+                        <a:rPr sz="1050">
+                          <a:solidFill>
+                            <a:srgbClr val="3D5466"/>
+                          </a:solidFill>
+                          <a:latin typeface="Arial"/>
+                        </a:rPr>
+                        <a:t>Einzelhandel</a:t>
+                      </a:r>
+                    </a:p>
+                  </a:txBody>
+                  <a:tcPr/>
+                </a:tc>
+                <a:tc>
+                  <a:txBody>
+                    <a:bodyPr/>
+                    <a:lstStyle/>
+                    <a:p>
+                      <a:r>
+                        <a:rPr sz="1050">
+                          <a:solidFill>
+                            <a:srgbClr val="3D5466"/>
+                          </a:solidFill>
+                          <a:latin typeface="Arial"/>
+                        </a:rPr>
+                        <a:t>≥ 15–18 %</a:t>
+                      </a:r>
+                    </a:p>
+                  </a:txBody>
+                  <a:tcPr/>
+                </a:tc>
+                <a:tc>
+                  <a:txBody>
+                    <a:bodyPr/>
+                    <a:lstStyle/>
+                    <a:p>
+                      <a:r>
+                        <a:rPr sz="1050">
+                          <a:solidFill>
+                            <a:srgbClr val="3D5466"/>
+                          </a:solidFill>
+                          <a:latin typeface="Arial"/>
+                        </a:rPr>
+                        <a:t>Niedrige Margen, hohe Diskontobligationen</a:t>
+                      </a:r>
+                    </a:p>
+                  </a:txBody>
+                  <a:tcPr/>
+                </a:tc>
+              </a:tr>
+              <a:tr h="384048">
+                <a:tc>
+                  <a:txBody>
+                    <a:bodyPr/>
+                    <a:lstStyle/>
+                    <a:p>
+                      <a:r>
+                        <a:rPr sz="1050">
+                          <a:solidFill>
+                            <a:srgbClr val="3D5466"/>
+                          </a:solidFill>
+                          <a:latin typeface="Arial"/>
+                        </a:rPr>
+                        <a:t>Gastronomie</a:t>
+                      </a:r>
+                    </a:p>
+                  </a:txBody>
+                  <a:tcPr/>
+                </a:tc>
+                <a:tc>
+                  <a:txBody>
+                    <a:bodyPr/>
+                    <a:lstStyle/>
+                    <a:p>
+                      <a:r>
+                        <a:rPr sz="1050">
+                          <a:solidFill>
+                            <a:srgbClr val="3D5466"/>
+                          </a:solidFill>
+                          <a:latin typeface="Arial"/>
+                        </a:rPr>
+                        <a:t>≥ 12–15 %</a:t>
+                      </a:r>
+                    </a:p>
+                  </a:txBody>
+                  <a:tcPr/>
+                </a:tc>
+                <a:tc>
+                  <a:txBody>
+                    <a:bodyPr/>
+                    <a:lstStyle/>
+                    <a:p>
+                      <a:r>
+                        <a:rPr sz="1050">
+                          <a:solidFill>
+                            <a:srgbClr val="3D5466"/>
+                          </a:solidFill>
+                          <a:latin typeface="Arial"/>
+                        </a:rPr>
+                        <a:t>Hohe Standortrisiken, Volatilität</a:t>
+                      </a:r>
+                    </a:p>
+                  </a:txBody>
+                  <a:tcPr/>
+                </a:tc>
+              </a:tr>
+            </a:tbl>
+          </a:graphicData>
+        </a:graphic>
+      </p:graphicFrame>
+      <p:sp>
+        <p:nvSpPr>
+          <p:cNvPr id="8" name="Rectangle 7"/>
           <p:cNvSpPr/>
           <p:nvPr/>
         </p:nvSpPr>
@@ -5996,7 +6025,7 @@
       </p:sp>
       <p:sp>
         <p:nvSpPr>
-          <p:cNvPr id="10" name="TextBox 9"/>
+          <p:cNvPr id="9" name="TextBox 8"/>
           <p:cNvSpPr txBox="1"/>
           <p:nvPr/>
         </p:nvSpPr>
@@ -6025,6 +6054,41 @@
                 <a:latin typeface="JetBrains Mono"/>
               </a:rPr>
               <a:t>Benedikt Zoller Coaching  ·  FKB Campus  ·  M05</a:t>
+            </a:r>
+          </a:p>
+        </p:txBody>
+      </p:sp>
+      <p:sp>
+        <p:nvSpPr>
+          <p:cNvPr id="10" name="TextBox 9"/>
+          <p:cNvSpPr txBox="1"/>
+          <p:nvPr/>
+        </p:nvSpPr>
+        <p:spPr>
+          <a:xfrm>
+            <a:off x="7176211" y="6583680"/>
+            <a:ext cx="4326940" cy="256032"/>
+          </a:xfrm>
+          <a:prstGeom prst="rect">
+            <a:avLst/>
+          </a:prstGeom>
+          <a:noFill/>
+        </p:spPr>
+        <p:txBody>
+          <a:bodyPr wrap="none">
+            <a:spAutoFit/>
+          </a:bodyPr>
+          <a:lstStyle/>
+          <a:p>
+            <a:pPr algn="r"/>
+            <a:r>
+              <a:rPr sz="700">
+                <a:solidFill>
+                  <a:srgbClr val="A0B4D2"/>
+                </a:solidFill>
+                <a:latin typeface="JetBrains Mono"/>
+              </a:rPr>
+              <a:t>Übersicht</a:t>
             </a:r>
           </a:p>
         </p:txBody>
@@ -6062,7 +6126,7 @@
             <a:avLst/>
           </a:prstGeom>
           <a:solidFill>
-            <a:srgbClr val="EDEDF3"/>
+            <a:srgbClr val="FFFFFF"/>
           </a:solidFill>
           <a:ln>
             <a:noFill/>
@@ -6163,6 +6227,711 @@
                 </a:solidFill>
                 <a:latin typeface="JetBrains Mono"/>
               </a:rPr>
+              <a:t>M05  ·  ÜBERSICHT</a:t>
+            </a:r>
+          </a:p>
+        </p:txBody>
+      </p:sp>
+      <p:sp>
+        <p:nvSpPr>
+          <p:cNvPr id="5" name="TextBox 4"/>
+          <p:cNvSpPr txBox="1"/>
+          <p:nvPr/>
+        </p:nvSpPr>
+        <p:spPr>
+          <a:xfrm>
+            <a:off x="685800" y="502920"/>
+            <a:ext cx="10817352" cy="594360"/>
+          </a:xfrm>
+          <a:prstGeom prst="rect">
+            <a:avLst/>
+          </a:prstGeom>
+          <a:noFill/>
+        </p:spPr>
+        <p:txBody>
+          <a:bodyPr wrap="square">
+            <a:spAutoFit/>
+          </a:bodyPr>
+          <a:lstStyle/>
+          <a:p>
+            <a:pPr algn="l"/>
+            <a:r>
+              <a:rPr sz="2000" b="1" i="0">
+                <a:solidFill>
+                  <a:srgbClr val="1F2C56"/>
+                </a:solidFill>
+                <a:latin typeface="Source Serif 4"/>
+              </a:rPr>
+              <a:t>Theorie-Input: VR-Rating und branchenspezifische Ratingfaktoren</a:t>
+            </a:r>
+          </a:p>
+        </p:txBody>
+      </p:sp>
+      <p:sp>
+        <p:nvSpPr>
+          <p:cNvPr id="6" name="Rectangle 5"/>
+          <p:cNvSpPr/>
+          <p:nvPr/>
+        </p:nvSpPr>
+        <p:spPr>
+          <a:xfrm>
+            <a:off x="685800" y="1143000"/>
+            <a:ext cx="10817352" cy="25400"/>
+          </a:xfrm>
+          <a:prstGeom prst="rect">
+            <a:avLst/>
+          </a:prstGeom>
+          <a:solidFill>
+            <a:srgbClr val="D9C089"/>
+          </a:solidFill>
+          <a:ln>
+            <a:noFill/>
+          </a:ln>
+        </p:spPr>
+        <p:style>
+          <a:lnRef idx="1">
+            <a:schemeClr val="accent1"/>
+          </a:lnRef>
+          <a:fillRef idx="3">
+            <a:schemeClr val="accent1"/>
+          </a:fillRef>
+          <a:effectRef idx="2">
+            <a:schemeClr val="accent1"/>
+          </a:effectRef>
+          <a:fontRef idx="minor">
+            <a:schemeClr val="lt1"/>
+          </a:fontRef>
+        </p:style>
+        <p:txBody>
+          <a:bodyPr rtlCol="0" anchor="ctr"/>
+          <a:lstStyle/>
+          <a:p>
+            <a:pPr algn="ctr"/>
+          </a:p>
+        </p:txBody>
+      </p:sp>
+      <p:graphicFrame>
+        <p:nvGraphicFramePr>
+          <p:cNvPr id="7" name="Table 6"/>
+          <p:cNvGraphicFramePr>
+            <a:graphicFrameLocks noGrp="1"/>
+          </p:cNvGraphicFramePr>
+          <p:nvPr/>
+        </p:nvGraphicFramePr>
+        <p:xfrm>
+          <a:off x="685800" y="1417320"/>
+          <a:ext cx="10817352" cy="2304288"/>
+        </p:xfrm>
+        <a:graphic>
+          <a:graphicData uri="http://schemas.openxmlformats.org/drawingml/2006/table">
+            <a:tbl>
+              <a:tblPr firstRow="1" bandRow="1">
+                <a:tableStyleId>{5C22544A-7EE6-4342-B048-85BDC9FD1C3A}</a:tableStyleId>
+              </a:tblPr>
+              <a:tblGrid>
+                <a:gridCol w="3605784"/>
+                <a:gridCol w="3605784"/>
+                <a:gridCol w="3605784"/>
+              </a:tblGrid>
+              <a:tr h="384048">
+                <a:tc>
+                  <a:txBody>
+                    <a:bodyPr/>
+                    <a:lstStyle/>
+                    <a:p>
+                      <a:r>
+                        <a:rPr sz="1100" b="1">
+                          <a:solidFill>
+                            <a:srgbClr val="FFFFFF"/>
+                          </a:solidFill>
+                          <a:latin typeface="Arial"/>
+                        </a:rPr>
+                        <a:t>Variable</a:t>
+                      </a:r>
+                    </a:p>
+                  </a:txBody>
+                  <a:tcPr>
+                    <a:solidFill>
+                      <a:srgbClr val="1F2C56"/>
+                    </a:solidFill>
+                  </a:tcPr>
+                </a:tc>
+                <a:tc>
+                  <a:txBody>
+                    <a:bodyPr/>
+                    <a:lstStyle/>
+                    <a:p>
+                      <a:r>
+                        <a:rPr sz="1100" b="1">
+                          <a:solidFill>
+                            <a:srgbClr val="FFFFFF"/>
+                          </a:solidFill>
+                          <a:latin typeface="Arial"/>
+                        </a:rPr>
+                        <a:t>Formel</a:t>
+                      </a:r>
+                    </a:p>
+                  </a:txBody>
+                  <a:tcPr>
+                    <a:solidFill>
+                      <a:srgbClr val="1F2C56"/>
+                    </a:solidFill>
+                  </a:tcPr>
+                </a:tc>
+                <a:tc>
+                  <a:txBody>
+                    <a:bodyPr/>
+                    <a:lstStyle/>
+                    <a:p>
+                      <a:r>
+                        <a:rPr sz="1100" b="1">
+                          <a:solidFill>
+                            <a:srgbClr val="FFFFFF"/>
+                          </a:solidFill>
+                          <a:latin typeface="Arial"/>
+                        </a:rPr>
+                        <a:t>Bedeutung</a:t>
+                      </a:r>
+                    </a:p>
+                  </a:txBody>
+                  <a:tcPr>
+                    <a:solidFill>
+                      <a:srgbClr val="1F2C56"/>
+                    </a:solidFill>
+                  </a:tcPr>
+                </a:tc>
+              </a:tr>
+              <a:tr h="384048">
+                <a:tc>
+                  <a:txBody>
+                    <a:bodyPr/>
+                    <a:lstStyle/>
+                    <a:p>
+                      <a:r>
+                        <a:rPr sz="1050">
+                          <a:solidFill>
+                            <a:srgbClr val="3D5466"/>
+                          </a:solidFill>
+                          <a:latin typeface="Arial"/>
+                        </a:rPr>
+                        <a:t>X₁</a:t>
+                      </a:r>
+                    </a:p>
+                  </a:txBody>
+                  <a:tcPr/>
+                </a:tc>
+                <a:tc>
+                  <a:txBody>
+                    <a:bodyPr/>
+                    <a:lstStyle/>
+                    <a:p>
+                      <a:r>
+                        <a:rPr sz="1050">
+                          <a:solidFill>
+                            <a:srgbClr val="3D5466"/>
+                          </a:solidFill>
+                          <a:latin typeface="Arial"/>
+                        </a:rPr>
+                        <a:t>Betriebskapital / Gesamtvermögen</a:t>
+                      </a:r>
+                    </a:p>
+                  </a:txBody>
+                  <a:tcPr/>
+                </a:tc>
+                <a:tc>
+                  <a:txBody>
+                    <a:bodyPr/>
+                    <a:lstStyle/>
+                    <a:p>
+                      <a:r>
+                        <a:rPr sz="1050">
+                          <a:solidFill>
+                            <a:srgbClr val="3D5466"/>
+                          </a:solidFill>
+                          <a:latin typeface="Arial"/>
+                        </a:rPr>
+                        <a:t>Kurzfristige Liquidität</a:t>
+                      </a:r>
+                    </a:p>
+                  </a:txBody>
+                  <a:tcPr/>
+                </a:tc>
+              </a:tr>
+              <a:tr h="384048">
+                <a:tc>
+                  <a:txBody>
+                    <a:bodyPr/>
+                    <a:lstStyle/>
+                    <a:p>
+                      <a:r>
+                        <a:rPr sz="1050">
+                          <a:solidFill>
+                            <a:srgbClr val="3D5466"/>
+                          </a:solidFill>
+                          <a:latin typeface="Arial"/>
+                        </a:rPr>
+                        <a:t>X₂</a:t>
+                      </a:r>
+                    </a:p>
+                  </a:txBody>
+                  <a:tcPr/>
+                </a:tc>
+                <a:tc>
+                  <a:txBody>
+                    <a:bodyPr/>
+                    <a:lstStyle/>
+                    <a:p>
+                      <a:r>
+                        <a:rPr sz="1050">
+                          <a:solidFill>
+                            <a:srgbClr val="3D5466"/>
+                          </a:solidFill>
+                          <a:latin typeface="Arial"/>
+                        </a:rPr>
+                        <a:t>Gewinnrücklagen / Gesamtvermögen</a:t>
+                      </a:r>
+                    </a:p>
+                  </a:txBody>
+                  <a:tcPr/>
+                </a:tc>
+                <a:tc>
+                  <a:txBody>
+                    <a:bodyPr/>
+                    <a:lstStyle/>
+                    <a:p>
+                      <a:r>
+                        <a:rPr sz="1050">
+                          <a:solidFill>
+                            <a:srgbClr val="3D5466"/>
+                          </a:solidFill>
+                          <a:latin typeface="Arial"/>
+                        </a:rPr>
+                        <a:t>Langfristige Rentabilität</a:t>
+                      </a:r>
+                    </a:p>
+                  </a:txBody>
+                  <a:tcPr/>
+                </a:tc>
+              </a:tr>
+              <a:tr h="384048">
+                <a:tc>
+                  <a:txBody>
+                    <a:bodyPr/>
+                    <a:lstStyle/>
+                    <a:p>
+                      <a:r>
+                        <a:rPr sz="1050">
+                          <a:solidFill>
+                            <a:srgbClr val="3D5466"/>
+                          </a:solidFill>
+                          <a:latin typeface="Arial"/>
+                        </a:rPr>
+                        <a:t>X₃</a:t>
+                      </a:r>
+                    </a:p>
+                  </a:txBody>
+                  <a:tcPr/>
+                </a:tc>
+                <a:tc>
+                  <a:txBody>
+                    <a:bodyPr/>
+                    <a:lstStyle/>
+                    <a:p>
+                      <a:r>
+                        <a:rPr sz="1050">
+                          <a:solidFill>
+                            <a:srgbClr val="3D5466"/>
+                          </a:solidFill>
+                          <a:latin typeface="Arial"/>
+                        </a:rPr>
+                        <a:t>EBIT / Gesamtvermögen</a:t>
+                      </a:r>
+                    </a:p>
+                  </a:txBody>
+                  <a:tcPr/>
+                </a:tc>
+                <a:tc>
+                  <a:txBody>
+                    <a:bodyPr/>
+                    <a:lstStyle/>
+                    <a:p>
+                      <a:r>
+                        <a:rPr sz="1050">
+                          <a:solidFill>
+                            <a:srgbClr val="3D5466"/>
+                          </a:solidFill>
+                          <a:latin typeface="Arial"/>
+                        </a:rPr>
+                        <a:t>Operative Rentabilität</a:t>
+                      </a:r>
+                    </a:p>
+                  </a:txBody>
+                  <a:tcPr/>
+                </a:tc>
+              </a:tr>
+              <a:tr h="384048">
+                <a:tc>
+                  <a:txBody>
+                    <a:bodyPr/>
+                    <a:lstStyle/>
+                    <a:p>
+                      <a:r>
+                        <a:rPr sz="1050">
+                          <a:solidFill>
+                            <a:srgbClr val="3D5466"/>
+                          </a:solidFill>
+                          <a:latin typeface="Arial"/>
+                        </a:rPr>
+                        <a:t>X₄</a:t>
+                      </a:r>
+                    </a:p>
+                  </a:txBody>
+                  <a:tcPr/>
+                </a:tc>
+                <a:tc>
+                  <a:txBody>
+                    <a:bodyPr/>
+                    <a:lstStyle/>
+                    <a:p>
+                      <a:r>
+                        <a:rPr sz="1050">
+                          <a:solidFill>
+                            <a:srgbClr val="3D5466"/>
+                          </a:solidFill>
+                          <a:latin typeface="Arial"/>
+                        </a:rPr>
+                        <a:t>Marktwert EK / Gesamtverbindlichkeiten</a:t>
+                      </a:r>
+                    </a:p>
+                  </a:txBody>
+                  <a:tcPr/>
+                </a:tc>
+                <a:tc>
+                  <a:txBody>
+                    <a:bodyPr/>
+                    <a:lstStyle/>
+                    <a:p>
+                      <a:r>
+                        <a:rPr sz="1050">
+                          <a:solidFill>
+                            <a:srgbClr val="3D5466"/>
+                          </a:solidFill>
+                          <a:latin typeface="Arial"/>
+                        </a:rPr>
+                        <a:t>Kapitalstruktur</a:t>
+                      </a:r>
+                    </a:p>
+                  </a:txBody>
+                  <a:tcPr/>
+                </a:tc>
+              </a:tr>
+              <a:tr h="384048">
+                <a:tc>
+                  <a:txBody>
+                    <a:bodyPr/>
+                    <a:lstStyle/>
+                    <a:p>
+                      <a:r>
+                        <a:rPr sz="1050">
+                          <a:solidFill>
+                            <a:srgbClr val="3D5466"/>
+                          </a:solidFill>
+                          <a:latin typeface="Arial"/>
+                        </a:rPr>
+                        <a:t>X₅</a:t>
+                      </a:r>
+                    </a:p>
+                  </a:txBody>
+                  <a:tcPr/>
+                </a:tc>
+                <a:tc>
+                  <a:txBody>
+                    <a:bodyPr/>
+                    <a:lstStyle/>
+                    <a:p>
+                      <a:r>
+                        <a:rPr sz="1050">
+                          <a:solidFill>
+                            <a:srgbClr val="3D5466"/>
+                          </a:solidFill>
+                          <a:latin typeface="Arial"/>
+                        </a:rPr>
+                        <a:t>Umsatz / Gesamtvermögen</a:t>
+                      </a:r>
+                    </a:p>
+                  </a:txBody>
+                  <a:tcPr/>
+                </a:tc>
+                <a:tc>
+                  <a:txBody>
+                    <a:bodyPr/>
+                    <a:lstStyle/>
+                    <a:p>
+                      <a:r>
+                        <a:rPr sz="1050">
+                          <a:solidFill>
+                            <a:srgbClr val="3D5466"/>
+                          </a:solidFill>
+                          <a:latin typeface="Arial"/>
+                        </a:rPr>
+                        <a:t>Kapitaleffizienz</a:t>
+                      </a:r>
+                    </a:p>
+                  </a:txBody>
+                  <a:tcPr/>
+                </a:tc>
+              </a:tr>
+            </a:tbl>
+          </a:graphicData>
+        </a:graphic>
+      </p:graphicFrame>
+      <p:sp>
+        <p:nvSpPr>
+          <p:cNvPr id="8" name="Rectangle 7"/>
+          <p:cNvSpPr/>
+          <p:nvPr/>
+        </p:nvSpPr>
+        <p:spPr>
+          <a:xfrm>
+            <a:off x="0" y="6510528"/>
+            <a:ext cx="12188952" cy="347472"/>
+          </a:xfrm>
+          <a:prstGeom prst="rect">
+            <a:avLst/>
+          </a:prstGeom>
+          <a:solidFill>
+            <a:srgbClr val="0A1937"/>
+          </a:solidFill>
+          <a:ln>
+            <a:noFill/>
+          </a:ln>
+        </p:spPr>
+        <p:style>
+          <a:lnRef idx="1">
+            <a:schemeClr val="accent1"/>
+          </a:lnRef>
+          <a:fillRef idx="3">
+            <a:schemeClr val="accent1"/>
+          </a:fillRef>
+          <a:effectRef idx="2">
+            <a:schemeClr val="accent1"/>
+          </a:effectRef>
+          <a:fontRef idx="minor">
+            <a:schemeClr val="lt1"/>
+          </a:fontRef>
+        </p:style>
+        <p:txBody>
+          <a:bodyPr rtlCol="0" anchor="ctr"/>
+          <a:lstStyle/>
+          <a:p>
+            <a:pPr algn="ctr"/>
+          </a:p>
+        </p:txBody>
+      </p:sp>
+      <p:sp>
+        <p:nvSpPr>
+          <p:cNvPr id="9" name="TextBox 8"/>
+          <p:cNvSpPr txBox="1"/>
+          <p:nvPr/>
+        </p:nvSpPr>
+        <p:spPr>
+          <a:xfrm>
+            <a:off x="685800" y="6583680"/>
+            <a:ext cx="6490411" cy="256032"/>
+          </a:xfrm>
+          <a:prstGeom prst="rect">
+            <a:avLst/>
+          </a:prstGeom>
+          <a:noFill/>
+        </p:spPr>
+        <p:txBody>
+          <a:bodyPr wrap="none">
+            <a:spAutoFit/>
+          </a:bodyPr>
+          <a:lstStyle/>
+          <a:p>
+            <a:pPr algn="l"/>
+            <a:r>
+              <a:rPr sz="700">
+                <a:solidFill>
+                  <a:srgbClr val="A0B4D2"/>
+                </a:solidFill>
+                <a:latin typeface="JetBrains Mono"/>
+              </a:rPr>
+              <a:t>Benedikt Zoller Coaching  ·  FKB Campus  ·  M05</a:t>
+            </a:r>
+          </a:p>
+        </p:txBody>
+      </p:sp>
+      <p:sp>
+        <p:nvSpPr>
+          <p:cNvPr id="10" name="TextBox 9"/>
+          <p:cNvSpPr txBox="1"/>
+          <p:nvPr/>
+        </p:nvSpPr>
+        <p:spPr>
+          <a:xfrm>
+            <a:off x="7176211" y="6583680"/>
+            <a:ext cx="4326940" cy="256032"/>
+          </a:xfrm>
+          <a:prstGeom prst="rect">
+            <a:avLst/>
+          </a:prstGeom>
+          <a:noFill/>
+        </p:spPr>
+        <p:txBody>
+          <a:bodyPr wrap="none">
+            <a:spAutoFit/>
+          </a:bodyPr>
+          <a:lstStyle/>
+          <a:p>
+            <a:pPr algn="r"/>
+            <a:r>
+              <a:rPr sz="700">
+                <a:solidFill>
+                  <a:srgbClr val="A0B4D2"/>
+                </a:solidFill>
+                <a:latin typeface="JetBrains Mono"/>
+              </a:rPr>
+              <a:t>Übersicht</a:t>
+            </a:r>
+          </a:p>
+        </p:txBody>
+      </p:sp>
+    </p:spTree>
+  </p:cSld>
+  <p:clrMapOvr>
+    <a:masterClrMapping/>
+  </p:clrMapOvr>
+</p:sld>
+</file>
+
+<file path=ppt/slides/slide14.xml><?xml version="1.0" encoding="utf-8"?>
+<p:sld xmlns:a="http://schemas.openxmlformats.org/drawingml/2006/main" xmlns:p="http://schemas.openxmlformats.org/presentationml/2006/main" xmlns:r="http://schemas.openxmlformats.org/officeDocument/2006/relationships">
+  <p:cSld>
+    <p:spTree>
+      <p:nvGrpSpPr>
+        <p:cNvPr id="1" name=""/>
+        <p:cNvGrpSpPr/>
+        <p:nvPr/>
+      </p:nvGrpSpPr>
+      <p:grpSpPr/>
+      <p:sp>
+        <p:nvSpPr>
+          <p:cNvPr id="2" name="Rectangle 1"/>
+          <p:cNvSpPr/>
+          <p:nvPr/>
+        </p:nvSpPr>
+        <p:spPr>
+          <a:xfrm>
+            <a:off x="0" y="0"/>
+            <a:ext cx="12188952" cy="6858000"/>
+          </a:xfrm>
+          <a:prstGeom prst="rect">
+            <a:avLst/>
+          </a:prstGeom>
+          <a:solidFill>
+            <a:srgbClr val="EDEDF3"/>
+          </a:solidFill>
+          <a:ln>
+            <a:noFill/>
+          </a:ln>
+        </p:spPr>
+        <p:style>
+          <a:lnRef idx="1">
+            <a:schemeClr val="accent1"/>
+          </a:lnRef>
+          <a:fillRef idx="3">
+            <a:schemeClr val="accent1"/>
+          </a:fillRef>
+          <a:effectRef idx="2">
+            <a:schemeClr val="accent1"/>
+          </a:effectRef>
+          <a:fontRef idx="minor">
+            <a:schemeClr val="lt1"/>
+          </a:fontRef>
+        </p:style>
+        <p:txBody>
+          <a:bodyPr rtlCol="0" anchor="ctr"/>
+          <a:lstStyle/>
+          <a:p>
+            <a:pPr algn="ctr"/>
+          </a:p>
+        </p:txBody>
+      </p:sp>
+      <p:sp>
+        <p:nvSpPr>
+          <p:cNvPr id="3" name="Rectangle 2"/>
+          <p:cNvSpPr/>
+          <p:nvPr/>
+        </p:nvSpPr>
+        <p:spPr>
+          <a:xfrm>
+            <a:off x="0" y="0"/>
+            <a:ext cx="12188952" cy="50292"/>
+          </a:xfrm>
+          <a:prstGeom prst="rect">
+            <a:avLst/>
+          </a:prstGeom>
+          <a:solidFill>
+            <a:srgbClr val="1F2C56"/>
+          </a:solidFill>
+          <a:ln>
+            <a:noFill/>
+          </a:ln>
+        </p:spPr>
+        <p:style>
+          <a:lnRef idx="1">
+            <a:schemeClr val="accent1"/>
+          </a:lnRef>
+          <a:fillRef idx="3">
+            <a:schemeClr val="accent1"/>
+          </a:fillRef>
+          <a:effectRef idx="2">
+            <a:schemeClr val="accent1"/>
+          </a:effectRef>
+          <a:fontRef idx="minor">
+            <a:schemeClr val="lt1"/>
+          </a:fontRef>
+        </p:style>
+        <p:txBody>
+          <a:bodyPr rtlCol="0" anchor="ctr"/>
+          <a:lstStyle/>
+          <a:p>
+            <a:pPr algn="ctr"/>
+          </a:p>
+        </p:txBody>
+      </p:sp>
+      <p:sp>
+        <p:nvSpPr>
+          <p:cNvPr id="4" name="TextBox 3"/>
+          <p:cNvSpPr txBox="1"/>
+          <p:nvPr/>
+        </p:nvSpPr>
+        <p:spPr>
+          <a:xfrm>
+            <a:off x="685800" y="109728"/>
+            <a:ext cx="10817352" cy="228600"/>
+          </a:xfrm>
+          <a:prstGeom prst="rect">
+            <a:avLst/>
+          </a:prstGeom>
+          <a:noFill/>
+        </p:spPr>
+        <p:txBody>
+          <a:bodyPr wrap="none">
+            <a:spAutoFit/>
+          </a:bodyPr>
+          <a:lstStyle/>
+          <a:p>
+            <a:pPr algn="l"/>
+            <a:r>
+              <a:rPr sz="750">
+                <a:solidFill>
+                  <a:srgbClr val="78808C"/>
+                </a:solidFill>
+                <a:latin typeface="JetBrains Mono"/>
+              </a:rPr>
               <a:t>M05  ·  INHALT</a:t>
             </a:r>
           </a:p>
@@ -6284,7 +7053,7 @@
                 </a:solidFill>
                 <a:latin typeface="Source Serif 4"/>
               </a:rPr>
-              <a:t>Arbeitsblatt: Branchenrisiko-Analyse-Template</a:t>
+              <a:t>Praxiscase: Bäckerei &amp; Konditorei Hofmann GmbH (Stuttgart, fiktiv)</a:t>
             </a:r>
           </a:p>
         </p:txBody>
@@ -6310,6 +7079,44 @@
             <a:spAutoFit/>
           </a:bodyPr>
           <a:lstStyle/>
+          <a:p>
+            <a:pPr>
+              <a:spcBef>
+                <a:spcPts val="1000"/>
+              </a:spcBef>
+              <a:spcAft>
+                <a:spcPts val="200"/>
+              </a:spcAft>
+            </a:pPr>
+            <a:r>
+              <a:rPr sz="800" b="1">
+                <a:solidFill>
+                  <a:srgbClr val="78808C"/>
+                </a:solidFill>
+                <a:latin typeface="JetBrains Mono"/>
+              </a:rPr>
+              <a:t>4.4.1 UNTERNEHMENSPROFIL</a:t>
+            </a:r>
+          </a:p>
+          <a:p>
+            <a:pPr>
+              <a:spcBef>
+                <a:spcPts val="1000"/>
+              </a:spcBef>
+              <a:spcAft>
+                <a:spcPts val="200"/>
+              </a:spcAft>
+            </a:pPr>
+            <a:r>
+              <a:rPr sz="800" b="1">
+                <a:solidFill>
+                  <a:srgbClr val="78808C"/>
+                </a:solidFill>
+                <a:latin typeface="JetBrains Mono"/>
+              </a:rPr>
+              <a:t>4.4.2 FINANZIELLE SITUATION (JAHRESABSCHLUSS 2024, AUSZÜGE)</a:t>
+            </a:r>
+          </a:p>
           <a:p>
             <a:pPr>
               <a:spcBef>
@@ -6320,13 +7127,13 @@
               </a:spcAft>
             </a:pPr>
             <a:r>
-              <a:rPr sz="1200">
+              <a:rPr sz="1300">
                 <a:solidFill>
                   <a:srgbClr val="3D5466"/>
                 </a:solidFill>
                 <a:latin typeface="Arial"/>
               </a:rPr>
-              <a:t>ARBEITSBLATT: BRANCHENRISIKO-ANALYSE</a:t>
+              <a:t>▸  Bilanzauszug:</a:t>
             </a:r>
           </a:p>
           <a:p>
@@ -6339,13 +7146,13 @@
               </a:spcAft>
             </a:pPr>
             <a:r>
-              <a:rPr sz="1200">
+              <a:rPr sz="1300">
                 <a:solidFill>
                   <a:srgbClr val="3D5466"/>
                 </a:solidFill>
                 <a:latin typeface="Arial"/>
               </a:rPr>
-              <a:t>TEIL A – BRANCHENIDENTIFIKATION</a:t>
+              <a:t>▸  Gewinn- und Verlustrechnung 2024:</a:t>
             </a:r>
           </a:p>
           <a:p>
@@ -6358,13 +7165,32 @@
               </a:spcAft>
             </a:pPr>
             <a:r>
-              <a:rPr sz="1200">
+              <a:rPr sz="1300">
                 <a:solidFill>
                   <a:srgbClr val="3D5466"/>
                 </a:solidFill>
                 <a:latin typeface="Arial"/>
               </a:rPr>
-              <a:t>TEIL B – PORTER'S FIVE FORCES (1 = sehr gering, 5 = sehr hoch)</a:t>
+              <a:t>▸  Kapitalflussrechnung 2024 (vereinfacht):</a:t>
+            </a:r>
+          </a:p>
+          <a:p>
+            <a:pPr>
+              <a:spcBef>
+                <a:spcPts val="1000"/>
+              </a:spcBef>
+              <a:spcAft>
+                <a:spcPts val="200"/>
+              </a:spcAft>
+            </a:pPr>
+            <a:r>
+              <a:rPr sz="800" b="1">
+                <a:solidFill>
+                  <a:srgbClr val="78808C"/>
+                </a:solidFill>
+                <a:latin typeface="JetBrains Mono"/>
+              </a:rPr>
+              <a:t>4.4.3 KREDITANFRAGE</a:t>
             </a:r>
           </a:p>
           <a:p>
@@ -6377,13 +7203,13 @@
               </a:spcAft>
             </a:pPr>
             <a:r>
-              <a:rPr sz="1200">
+              <a:rPr sz="1300">
                 <a:solidFill>
                   <a:srgbClr val="3D5466"/>
                 </a:solidFill>
                 <a:latin typeface="Arial"/>
               </a:rPr>
-              <a:t>TEIL C – KENNZAHLEN IM BRANCHENVERGLEICH</a:t>
+              <a:t>▸  Anlass: Investition in neue Backstube Kempten-Süd (170.000 €) + Filialmodernisierung Sonthofen (80.000 €)</a:t>
             </a:r>
           </a:p>
           <a:p>
@@ -6396,13 +7222,32 @@
               </a:spcAft>
             </a:pPr>
             <a:r>
-              <a:rPr sz="1200">
+              <a:rPr sz="1300">
                 <a:solidFill>
                   <a:srgbClr val="3D5466"/>
                 </a:solidFill>
                 <a:latin typeface="Arial"/>
               </a:rPr>
-              <a:t>Gesamteinschätzung: ☐ Deutlich besser als Branche ☐ Vergleichbar ☐ Schwächer als Branche</a:t>
+              <a:t>▸  Gesamtkreditbedarf: 250.000 € | Eigenanteil: 30.000 € | Kreditwunsch: 250.000 €</a:t>
+            </a:r>
+          </a:p>
+          <a:p>
+            <a:pPr>
+              <a:spcBef>
+                <a:spcPts val="1000"/>
+              </a:spcBef>
+              <a:spcAft>
+                <a:spcPts val="200"/>
+              </a:spcAft>
+            </a:pPr>
+            <a:r>
+              <a:rPr sz="800" b="1">
+                <a:solidFill>
+                  <a:srgbClr val="78808C"/>
+                </a:solidFill>
+                <a:latin typeface="JetBrains Mono"/>
+              </a:rPr>
+              <a:t>4.4.4 GESPRÄCHSVERLAUF: BRANCHENRISIKOANALYSE (BER = BERATER, GF = GESCHÄFTSFÜHRERIN)</a:t>
             </a:r>
           </a:p>
           <a:p>
@@ -6415,13 +7260,13 @@
               </a:spcAft>
             </a:pPr>
             <a:r>
-              <a:rPr sz="1200">
+              <a:rPr sz="1300">
                 <a:solidFill>
                   <a:srgbClr val="3D5466"/>
                 </a:solidFill>
                 <a:latin typeface="Arial"/>
               </a:rPr>
-              <a:t>TEIL D – FRÜHWARNINDIKATOREN (☐ nicht relevant | ⚠ Warnung | ✗ kritisch)</a:t>
+              <a:t>▸  Session 1 – Erstgespräch Branchenrisiko</a:t>
             </a:r>
           </a:p>
           <a:p>
@@ -6434,13 +7279,13 @@
               </a:spcAft>
             </a:pPr>
             <a:r>
-              <a:rPr sz="1200">
+              <a:rPr sz="1300">
                 <a:solidFill>
                   <a:srgbClr val="3D5466"/>
                 </a:solidFill>
                 <a:latin typeface="Arial"/>
               </a:rPr>
-              <a:t>Branchenumfeld:</a:t>
+              <a:t>▸  GF: „Wir konnten die Preise nur um etwa 8–10 % erhöhen, ohne Kunden zu verlieren. Das hat die Marge deutlich gedrückt."</a:t>
             </a:r>
           </a:p>
           <a:p>
@@ -6459,9 +7304,1000 @@
                 </a:solidFill>
                 <a:latin typeface="Arial"/>
               </a:rPr>
-              <a:t>▸  ☐ ⚠ ✗ Brancheninsolvenzquote gestiegen &gt;5 % ggü. Vorjahr</a:t>
-            </a:r>
-          </a:p>
+              <a:t>▸  GF: „Nein, wir kaufen zu aktuellen Marktpreisen. Die Lieferanten bieten keine Festpreise an."</a:t>
+            </a:r>
+          </a:p>
+        </p:txBody>
+      </p:sp>
+      <p:sp>
+        <p:nvSpPr>
+          <p:cNvPr id="9" name="Rectangle 8"/>
+          <p:cNvSpPr/>
+          <p:nvPr/>
+        </p:nvSpPr>
+        <p:spPr>
+          <a:xfrm>
+            <a:off x="0" y="6510528"/>
+            <a:ext cx="12188952" cy="347472"/>
+          </a:xfrm>
+          <a:prstGeom prst="rect">
+            <a:avLst/>
+          </a:prstGeom>
+          <a:solidFill>
+            <a:srgbClr val="0A1937"/>
+          </a:solidFill>
+          <a:ln>
+            <a:noFill/>
+          </a:ln>
+        </p:spPr>
+        <p:style>
+          <a:lnRef idx="1">
+            <a:schemeClr val="accent1"/>
+          </a:lnRef>
+          <a:fillRef idx="3">
+            <a:schemeClr val="accent1"/>
+          </a:fillRef>
+          <a:effectRef idx="2">
+            <a:schemeClr val="accent1"/>
+          </a:effectRef>
+          <a:fontRef idx="minor">
+            <a:schemeClr val="lt1"/>
+          </a:fontRef>
+        </p:style>
+        <p:txBody>
+          <a:bodyPr rtlCol="0" anchor="ctr"/>
+          <a:lstStyle/>
+          <a:p>
+            <a:pPr algn="ctr"/>
+          </a:p>
+        </p:txBody>
+      </p:sp>
+      <p:sp>
+        <p:nvSpPr>
+          <p:cNvPr id="10" name="TextBox 9"/>
+          <p:cNvSpPr txBox="1"/>
+          <p:nvPr/>
+        </p:nvSpPr>
+        <p:spPr>
+          <a:xfrm>
+            <a:off x="685800" y="6583680"/>
+            <a:ext cx="6490411" cy="256032"/>
+          </a:xfrm>
+          <a:prstGeom prst="rect">
+            <a:avLst/>
+          </a:prstGeom>
+          <a:noFill/>
+        </p:spPr>
+        <p:txBody>
+          <a:bodyPr wrap="none">
+            <a:spAutoFit/>
+          </a:bodyPr>
+          <a:lstStyle/>
+          <a:p>
+            <a:pPr algn="l"/>
+            <a:r>
+              <a:rPr sz="700">
+                <a:solidFill>
+                  <a:srgbClr val="A0B4D2"/>
+                </a:solidFill>
+                <a:latin typeface="JetBrains Mono"/>
+              </a:rPr>
+              <a:t>Benedikt Zoller Coaching  ·  FKB Campus  ·  M05</a:t>
+            </a:r>
+          </a:p>
+        </p:txBody>
+      </p:sp>
+    </p:spTree>
+  </p:cSld>
+  <p:clrMapOvr>
+    <a:masterClrMapping/>
+  </p:clrMapOvr>
+</p:sld>
+</file>
+
+<file path=ppt/slides/slide15.xml><?xml version="1.0" encoding="utf-8"?>
+<p:sld xmlns:a="http://schemas.openxmlformats.org/drawingml/2006/main" xmlns:p="http://schemas.openxmlformats.org/presentationml/2006/main" xmlns:r="http://schemas.openxmlformats.org/officeDocument/2006/relationships">
+  <p:cSld>
+    <p:spTree>
+      <p:nvGrpSpPr>
+        <p:cNvPr id="1" name=""/>
+        <p:cNvGrpSpPr/>
+        <p:nvPr/>
+      </p:nvGrpSpPr>
+      <p:grpSpPr/>
+      <p:sp>
+        <p:nvSpPr>
+          <p:cNvPr id="2" name="Rectangle 1"/>
+          <p:cNvSpPr/>
+          <p:nvPr/>
+        </p:nvSpPr>
+        <p:spPr>
+          <a:xfrm>
+            <a:off x="0" y="0"/>
+            <a:ext cx="12188952" cy="6858000"/>
+          </a:xfrm>
+          <a:prstGeom prst="rect">
+            <a:avLst/>
+          </a:prstGeom>
+          <a:solidFill>
+            <a:srgbClr val="FFFFFF"/>
+          </a:solidFill>
+          <a:ln>
+            <a:noFill/>
+          </a:ln>
+        </p:spPr>
+        <p:style>
+          <a:lnRef idx="1">
+            <a:schemeClr val="accent1"/>
+          </a:lnRef>
+          <a:fillRef idx="3">
+            <a:schemeClr val="accent1"/>
+          </a:fillRef>
+          <a:effectRef idx="2">
+            <a:schemeClr val="accent1"/>
+          </a:effectRef>
+          <a:fontRef idx="minor">
+            <a:schemeClr val="lt1"/>
+          </a:fontRef>
+        </p:style>
+        <p:txBody>
+          <a:bodyPr rtlCol="0" anchor="ctr"/>
+          <a:lstStyle/>
+          <a:p>
+            <a:pPr algn="ctr"/>
+          </a:p>
+        </p:txBody>
+      </p:sp>
+      <p:sp>
+        <p:nvSpPr>
+          <p:cNvPr id="3" name="Rectangle 2"/>
+          <p:cNvSpPr/>
+          <p:nvPr/>
+        </p:nvSpPr>
+        <p:spPr>
+          <a:xfrm>
+            <a:off x="0" y="0"/>
+            <a:ext cx="12188952" cy="50292"/>
+          </a:xfrm>
+          <a:prstGeom prst="rect">
+            <a:avLst/>
+          </a:prstGeom>
+          <a:solidFill>
+            <a:srgbClr val="1F2C56"/>
+          </a:solidFill>
+          <a:ln>
+            <a:noFill/>
+          </a:ln>
+        </p:spPr>
+        <p:style>
+          <a:lnRef idx="1">
+            <a:schemeClr val="accent1"/>
+          </a:lnRef>
+          <a:fillRef idx="3">
+            <a:schemeClr val="accent1"/>
+          </a:fillRef>
+          <a:effectRef idx="2">
+            <a:schemeClr val="accent1"/>
+          </a:effectRef>
+          <a:fontRef idx="minor">
+            <a:schemeClr val="lt1"/>
+          </a:fontRef>
+        </p:style>
+        <p:txBody>
+          <a:bodyPr rtlCol="0" anchor="ctr"/>
+          <a:lstStyle/>
+          <a:p>
+            <a:pPr algn="ctr"/>
+          </a:p>
+        </p:txBody>
+      </p:sp>
+      <p:sp>
+        <p:nvSpPr>
+          <p:cNvPr id="4" name="TextBox 3"/>
+          <p:cNvSpPr txBox="1"/>
+          <p:nvPr/>
+        </p:nvSpPr>
+        <p:spPr>
+          <a:xfrm>
+            <a:off x="685800" y="109728"/>
+            <a:ext cx="10817352" cy="228600"/>
+          </a:xfrm>
+          <a:prstGeom prst="rect">
+            <a:avLst/>
+          </a:prstGeom>
+          <a:noFill/>
+        </p:spPr>
+        <p:txBody>
+          <a:bodyPr wrap="none">
+            <a:spAutoFit/>
+          </a:bodyPr>
+          <a:lstStyle/>
+          <a:p>
+            <a:pPr algn="l"/>
+            <a:r>
+              <a:rPr sz="750">
+                <a:solidFill>
+                  <a:srgbClr val="78808C"/>
+                </a:solidFill>
+                <a:latin typeface="JetBrains Mono"/>
+              </a:rPr>
+              <a:t>M05  ·  ÜBERSICHT</a:t>
+            </a:r>
+          </a:p>
+        </p:txBody>
+      </p:sp>
+      <p:sp>
+        <p:nvSpPr>
+          <p:cNvPr id="5" name="TextBox 4"/>
+          <p:cNvSpPr txBox="1"/>
+          <p:nvPr/>
+        </p:nvSpPr>
+        <p:spPr>
+          <a:xfrm>
+            <a:off x="685800" y="502920"/>
+            <a:ext cx="10817352" cy="594360"/>
+          </a:xfrm>
+          <a:prstGeom prst="rect">
+            <a:avLst/>
+          </a:prstGeom>
+          <a:noFill/>
+        </p:spPr>
+        <p:txBody>
+          <a:bodyPr wrap="square">
+            <a:spAutoFit/>
+          </a:bodyPr>
+          <a:lstStyle/>
+          <a:p>
+            <a:pPr algn="l"/>
+            <a:r>
+              <a:rPr sz="2000" b="1" i="0">
+                <a:solidFill>
+                  <a:srgbClr val="1F2C56"/>
+                </a:solidFill>
+                <a:latin typeface="Source Serif 4"/>
+              </a:rPr>
+              <a:t>Praxiscase: Bäckerei &amp; Konditorei Hofmann GmbH (Stuttgart, fiktiv)</a:t>
+            </a:r>
+          </a:p>
+        </p:txBody>
+      </p:sp>
+      <p:sp>
+        <p:nvSpPr>
+          <p:cNvPr id="6" name="Rectangle 5"/>
+          <p:cNvSpPr/>
+          <p:nvPr/>
+        </p:nvSpPr>
+        <p:spPr>
+          <a:xfrm>
+            <a:off x="685800" y="1143000"/>
+            <a:ext cx="10817352" cy="25400"/>
+          </a:xfrm>
+          <a:prstGeom prst="rect">
+            <a:avLst/>
+          </a:prstGeom>
+          <a:solidFill>
+            <a:srgbClr val="D9C089"/>
+          </a:solidFill>
+          <a:ln>
+            <a:noFill/>
+          </a:ln>
+        </p:spPr>
+        <p:style>
+          <a:lnRef idx="1">
+            <a:schemeClr val="accent1"/>
+          </a:lnRef>
+          <a:fillRef idx="3">
+            <a:schemeClr val="accent1"/>
+          </a:fillRef>
+          <a:effectRef idx="2">
+            <a:schemeClr val="accent1"/>
+          </a:effectRef>
+          <a:fontRef idx="minor">
+            <a:schemeClr val="lt1"/>
+          </a:fontRef>
+        </p:style>
+        <p:txBody>
+          <a:bodyPr rtlCol="0" anchor="ctr"/>
+          <a:lstStyle/>
+          <a:p>
+            <a:pPr algn="ctr"/>
+          </a:p>
+        </p:txBody>
+      </p:sp>
+      <p:graphicFrame>
+        <p:nvGraphicFramePr>
+          <p:cNvPr id="7" name="Table 6"/>
+          <p:cNvGraphicFramePr>
+            <a:graphicFrameLocks noGrp="1"/>
+          </p:cNvGraphicFramePr>
+          <p:nvPr/>
+        </p:nvGraphicFramePr>
+        <p:xfrm>
+          <a:off x="685800" y="1417320"/>
+          <a:ext cx="10817352" cy="2688336"/>
+        </p:xfrm>
+        <a:graphic>
+          <a:graphicData uri="http://schemas.openxmlformats.org/drawingml/2006/table">
+            <a:tbl>
+              <a:tblPr firstRow="1" bandRow="1">
+                <a:tableStyleId>{5C22544A-7EE6-4342-B048-85BDC9FD1C3A}</a:tableStyleId>
+              </a:tblPr>
+              <a:tblGrid>
+                <a:gridCol w="5408676"/>
+                <a:gridCol w="5408676"/>
+              </a:tblGrid>
+              <a:tr h="384048">
+                <a:tc>
+                  <a:txBody>
+                    <a:bodyPr/>
+                    <a:lstStyle/>
+                    <a:p>
+                      <a:r>
+                        <a:rPr sz="1100" b="1">
+                          <a:solidFill>
+                            <a:srgbClr val="FFFFFF"/>
+                          </a:solidFill>
+                          <a:latin typeface="Arial"/>
+                        </a:rPr>
+                        <a:t>Position</a:t>
+                      </a:r>
+                    </a:p>
+                  </a:txBody>
+                  <a:tcPr>
+                    <a:solidFill>
+                      <a:srgbClr val="1F2C56"/>
+                    </a:solidFill>
+                  </a:tcPr>
+                </a:tc>
+                <a:tc>
+                  <a:txBody>
+                    <a:bodyPr/>
+                    <a:lstStyle/>
+                    <a:p>
+                      <a:r>
+                        <a:rPr sz="1100" b="1">
+                          <a:solidFill>
+                            <a:srgbClr val="FFFFFF"/>
+                          </a:solidFill>
+                          <a:latin typeface="Arial"/>
+                        </a:rPr>
+                        <a:t>Betrag (€)</a:t>
+                      </a:r>
+                    </a:p>
+                  </a:txBody>
+                  <a:tcPr>
+                    <a:solidFill>
+                      <a:srgbClr val="1F2C56"/>
+                    </a:solidFill>
+                  </a:tcPr>
+                </a:tc>
+              </a:tr>
+              <a:tr h="384048">
+                <a:tc>
+                  <a:txBody>
+                    <a:bodyPr/>
+                    <a:lstStyle/>
+                    <a:p>
+                      <a:r>
+                        <a:rPr sz="1050">
+                          <a:solidFill>
+                            <a:srgbClr val="3D5466"/>
+                          </a:solidFill>
+                          <a:latin typeface="Arial"/>
+                        </a:rPr>
+                        <a:t>Operativer Cashflow</a:t>
+                      </a:r>
+                    </a:p>
+                  </a:txBody>
+                  <a:tcPr/>
+                </a:tc>
+                <a:tc>
+                  <a:txBody>
+                    <a:bodyPr/>
+                    <a:lstStyle/>
+                    <a:p>
+                      <a:r>
+                        <a:rPr sz="1050">
+                          <a:solidFill>
+                            <a:srgbClr val="3D5466"/>
+                          </a:solidFill>
+                          <a:latin typeface="Arial"/>
+                        </a:rPr>
+                        <a:t>+55.000</a:t>
+                      </a:r>
+                    </a:p>
+                  </a:txBody>
+                  <a:tcPr/>
+                </a:tc>
+              </a:tr>
+              <a:tr h="384048">
+                <a:tc>
+                  <a:txBody>
+                    <a:bodyPr/>
+                    <a:lstStyle/>
+                    <a:p>
+                      <a:r>
+                        <a:rPr sz="1050">
+                          <a:solidFill>
+                            <a:srgbClr val="3D5466"/>
+                          </a:solidFill>
+                          <a:latin typeface="Arial"/>
+                        </a:rPr>
+                        <a:t>Investitionsausgaben</a:t>
+                      </a:r>
+                    </a:p>
+                  </a:txBody>
+                  <a:tcPr/>
+                </a:tc>
+                <a:tc>
+                  <a:txBody>
+                    <a:bodyPr/>
+                    <a:lstStyle/>
+                    <a:p>
+                      <a:r>
+                        <a:rPr sz="1050">
+                          <a:solidFill>
+                            <a:srgbClr val="3D5466"/>
+                          </a:solidFill>
+                          <a:latin typeface="Arial"/>
+                        </a:rPr>
+                        <a:t>−20.000</a:t>
+                      </a:r>
+                    </a:p>
+                  </a:txBody>
+                  <a:tcPr/>
+                </a:tc>
+              </a:tr>
+              <a:tr h="384048">
+                <a:tc>
+                  <a:txBody>
+                    <a:bodyPr/>
+                    <a:lstStyle/>
+                    <a:p>
+                      <a:r>
+                        <a:rPr sz="1050">
+                          <a:solidFill>
+                            <a:srgbClr val="3D5466"/>
+                          </a:solidFill>
+                          <a:latin typeface="Arial"/>
+                        </a:rPr>
+                        <a:t>Freier Cashflow</a:t>
+                      </a:r>
+                    </a:p>
+                  </a:txBody>
+                  <a:tcPr/>
+                </a:tc>
+                <a:tc>
+                  <a:txBody>
+                    <a:bodyPr/>
+                    <a:lstStyle/>
+                    <a:p>
+                      <a:r>
+                        <a:rPr sz="1050">
+                          <a:solidFill>
+                            <a:srgbClr val="3D5466"/>
+                          </a:solidFill>
+                          <a:latin typeface="Arial"/>
+                        </a:rPr>
+                        <a:t>+35.000</a:t>
+                      </a:r>
+                    </a:p>
+                  </a:txBody>
+                  <a:tcPr/>
+                </a:tc>
+              </a:tr>
+              <a:tr h="384048">
+                <a:tc>
+                  <a:txBody>
+                    <a:bodyPr/>
+                    <a:lstStyle/>
+                    <a:p>
+                      <a:r>
+                        <a:rPr sz="1050">
+                          <a:solidFill>
+                            <a:srgbClr val="3D5466"/>
+                          </a:solidFill>
+                          <a:latin typeface="Arial"/>
+                        </a:rPr>
+                        <a:t>Schuldentilgung</a:t>
+                      </a:r>
+                    </a:p>
+                  </a:txBody>
+                  <a:tcPr/>
+                </a:tc>
+                <a:tc>
+                  <a:txBody>
+                    <a:bodyPr/>
+                    <a:lstStyle/>
+                    <a:p>
+                      <a:r>
+                        <a:rPr sz="1050">
+                          <a:solidFill>
+                            <a:srgbClr val="3D5466"/>
+                          </a:solidFill>
+                          <a:latin typeface="Arial"/>
+                        </a:rPr>
+                        <a:t>−23.000</a:t>
+                      </a:r>
+                    </a:p>
+                  </a:txBody>
+                  <a:tcPr/>
+                </a:tc>
+              </a:tr>
+              <a:tr h="384048">
+                <a:tc>
+                  <a:txBody>
+                    <a:bodyPr/>
+                    <a:lstStyle/>
+                    <a:p>
+                      <a:r>
+                        <a:rPr sz="1050">
+                          <a:solidFill>
+                            <a:srgbClr val="3D5466"/>
+                          </a:solidFill>
+                          <a:latin typeface="Arial"/>
+                        </a:rPr>
+                        <a:t>Privatentnahmen</a:t>
+                      </a:r>
+                    </a:p>
+                  </a:txBody>
+                  <a:tcPr/>
+                </a:tc>
+                <a:tc>
+                  <a:txBody>
+                    <a:bodyPr/>
+                    <a:lstStyle/>
+                    <a:p>
+                      <a:r>
+                        <a:rPr sz="1050">
+                          <a:solidFill>
+                            <a:srgbClr val="3D5466"/>
+                          </a:solidFill>
+                          <a:latin typeface="Arial"/>
+                        </a:rPr>
+                        <a:t>−12.000</a:t>
+                      </a:r>
+                    </a:p>
+                  </a:txBody>
+                  <a:tcPr/>
+                </a:tc>
+              </a:tr>
+              <a:tr h="384048">
+                <a:tc>
+                  <a:txBody>
+                    <a:bodyPr/>
+                    <a:lstStyle/>
+                    <a:p>
+                      <a:r>
+                        <a:rPr sz="1050">
+                          <a:solidFill>
+                            <a:srgbClr val="3D5466"/>
+                          </a:solidFill>
+                          <a:latin typeface="Arial"/>
+                        </a:rPr>
+                        <a:t>Kassenveränderung</a:t>
+                      </a:r>
+                    </a:p>
+                  </a:txBody>
+                  <a:tcPr/>
+                </a:tc>
+                <a:tc>
+                  <a:txBody>
+                    <a:bodyPr/>
+                    <a:lstStyle/>
+                    <a:p>
+                      <a:r>
+                        <a:rPr sz="1050">
+                          <a:solidFill>
+                            <a:srgbClr val="3D5466"/>
+                          </a:solidFill>
+                          <a:latin typeface="Arial"/>
+                        </a:rPr>
+                        <a:t>0</a:t>
+                      </a:r>
+                    </a:p>
+                  </a:txBody>
+                  <a:tcPr/>
+                </a:tc>
+              </a:tr>
+            </a:tbl>
+          </a:graphicData>
+        </a:graphic>
+      </p:graphicFrame>
+      <p:sp>
+        <p:nvSpPr>
+          <p:cNvPr id="8" name="Rectangle 7"/>
+          <p:cNvSpPr/>
+          <p:nvPr/>
+        </p:nvSpPr>
+        <p:spPr>
+          <a:xfrm>
+            <a:off x="0" y="6510528"/>
+            <a:ext cx="12188952" cy="347472"/>
+          </a:xfrm>
+          <a:prstGeom prst="rect">
+            <a:avLst/>
+          </a:prstGeom>
+          <a:solidFill>
+            <a:srgbClr val="0A1937"/>
+          </a:solidFill>
+          <a:ln>
+            <a:noFill/>
+          </a:ln>
+        </p:spPr>
+        <p:style>
+          <a:lnRef idx="1">
+            <a:schemeClr val="accent1"/>
+          </a:lnRef>
+          <a:fillRef idx="3">
+            <a:schemeClr val="accent1"/>
+          </a:fillRef>
+          <a:effectRef idx="2">
+            <a:schemeClr val="accent1"/>
+          </a:effectRef>
+          <a:fontRef idx="minor">
+            <a:schemeClr val="lt1"/>
+          </a:fontRef>
+        </p:style>
+        <p:txBody>
+          <a:bodyPr rtlCol="0" anchor="ctr"/>
+          <a:lstStyle/>
+          <a:p>
+            <a:pPr algn="ctr"/>
+          </a:p>
+        </p:txBody>
+      </p:sp>
+      <p:sp>
+        <p:nvSpPr>
+          <p:cNvPr id="9" name="TextBox 8"/>
+          <p:cNvSpPr txBox="1"/>
+          <p:nvPr/>
+        </p:nvSpPr>
+        <p:spPr>
+          <a:xfrm>
+            <a:off x="685800" y="6583680"/>
+            <a:ext cx="6490411" cy="256032"/>
+          </a:xfrm>
+          <a:prstGeom prst="rect">
+            <a:avLst/>
+          </a:prstGeom>
+          <a:noFill/>
+        </p:spPr>
+        <p:txBody>
+          <a:bodyPr wrap="none">
+            <a:spAutoFit/>
+          </a:bodyPr>
+          <a:lstStyle/>
+          <a:p>
+            <a:pPr algn="l"/>
+            <a:r>
+              <a:rPr sz="700">
+                <a:solidFill>
+                  <a:srgbClr val="A0B4D2"/>
+                </a:solidFill>
+                <a:latin typeface="JetBrains Mono"/>
+              </a:rPr>
+              <a:t>Benedikt Zoller Coaching  ·  FKB Campus  ·  M05</a:t>
+            </a:r>
+          </a:p>
+        </p:txBody>
+      </p:sp>
+      <p:sp>
+        <p:nvSpPr>
+          <p:cNvPr id="10" name="TextBox 9"/>
+          <p:cNvSpPr txBox="1"/>
+          <p:nvPr/>
+        </p:nvSpPr>
+        <p:spPr>
+          <a:xfrm>
+            <a:off x="7176211" y="6583680"/>
+            <a:ext cx="4326940" cy="256032"/>
+          </a:xfrm>
+          <a:prstGeom prst="rect">
+            <a:avLst/>
+          </a:prstGeom>
+          <a:noFill/>
+        </p:spPr>
+        <p:txBody>
+          <a:bodyPr wrap="none">
+            <a:spAutoFit/>
+          </a:bodyPr>
+          <a:lstStyle/>
+          <a:p>
+            <a:pPr algn="r"/>
+            <a:r>
+              <a:rPr sz="700">
+                <a:solidFill>
+                  <a:srgbClr val="A0B4D2"/>
+                </a:solidFill>
+                <a:latin typeface="JetBrains Mono"/>
+              </a:rPr>
+              <a:t>Übersicht</a:t>
+            </a:r>
+          </a:p>
+        </p:txBody>
+      </p:sp>
+    </p:spTree>
+  </p:cSld>
+  <p:clrMapOvr>
+    <a:masterClrMapping/>
+  </p:clrMapOvr>
+</p:sld>
+</file>
+
+<file path=ppt/slides/slide16.xml><?xml version="1.0" encoding="utf-8"?>
+<p:sld xmlns:a="http://schemas.openxmlformats.org/drawingml/2006/main" xmlns:p="http://schemas.openxmlformats.org/presentationml/2006/main" xmlns:r="http://schemas.openxmlformats.org/officeDocument/2006/relationships">
+  <p:cSld>
+    <p:spTree>
+      <p:nvGrpSpPr>
+        <p:cNvPr id="1" name=""/>
+        <p:cNvGrpSpPr/>
+        <p:nvPr/>
+      </p:nvGrpSpPr>
+      <p:grpSpPr/>
+      <p:sp>
+        <p:nvSpPr>
+          <p:cNvPr id="2" name="Rectangle 1"/>
+          <p:cNvSpPr/>
+          <p:nvPr/>
+        </p:nvSpPr>
+        <p:spPr>
+          <a:xfrm>
+            <a:off x="0" y="0"/>
+            <a:ext cx="12188952" cy="6858000"/>
+          </a:xfrm>
+          <a:prstGeom prst="rect">
+            <a:avLst/>
+          </a:prstGeom>
+          <a:solidFill>
+            <a:srgbClr val="EDEDF3"/>
+          </a:solidFill>
+          <a:ln>
+            <a:noFill/>
+          </a:ln>
+        </p:spPr>
+        <p:style>
+          <a:lnRef idx="1">
+            <a:schemeClr val="accent1"/>
+          </a:lnRef>
+          <a:fillRef idx="3">
+            <a:schemeClr val="accent1"/>
+          </a:fillRef>
+          <a:effectRef idx="2">
+            <a:schemeClr val="accent1"/>
+          </a:effectRef>
+          <a:fontRef idx="minor">
+            <a:schemeClr val="lt1"/>
+          </a:fontRef>
+        </p:style>
+        <p:txBody>
+          <a:bodyPr rtlCol="0" anchor="ctr"/>
+          <a:lstStyle/>
+          <a:p>
+            <a:pPr algn="ctr"/>
+          </a:p>
+        </p:txBody>
+      </p:sp>
+      <p:sp>
+        <p:nvSpPr>
+          <p:cNvPr id="3" name="Rectangle 2"/>
+          <p:cNvSpPr/>
+          <p:nvPr/>
+        </p:nvSpPr>
+        <p:spPr>
+          <a:xfrm>
+            <a:off x="0" y="0"/>
+            <a:ext cx="12188952" cy="50292"/>
+          </a:xfrm>
+          <a:prstGeom prst="rect">
+            <a:avLst/>
+          </a:prstGeom>
+          <a:solidFill>
+            <a:srgbClr val="1F2C56"/>
+          </a:solidFill>
+          <a:ln>
+            <a:noFill/>
+          </a:ln>
+        </p:spPr>
+        <p:style>
+          <a:lnRef idx="1">
+            <a:schemeClr val="accent1"/>
+          </a:lnRef>
+          <a:fillRef idx="3">
+            <a:schemeClr val="accent1"/>
+          </a:fillRef>
+          <a:effectRef idx="2">
+            <a:schemeClr val="accent1"/>
+          </a:effectRef>
+          <a:fontRef idx="minor">
+            <a:schemeClr val="lt1"/>
+          </a:fontRef>
+        </p:style>
+        <p:txBody>
+          <a:bodyPr rtlCol="0" anchor="ctr"/>
+          <a:lstStyle/>
+          <a:p>
+            <a:pPr algn="ctr"/>
+          </a:p>
+        </p:txBody>
+      </p:sp>
+      <p:sp>
+        <p:nvSpPr>
+          <p:cNvPr id="4" name="TextBox 3"/>
+          <p:cNvSpPr txBox="1"/>
+          <p:nvPr/>
+        </p:nvSpPr>
+        <p:spPr>
+          <a:xfrm>
+            <a:off x="685800" y="109728"/>
+            <a:ext cx="10817352" cy="228600"/>
+          </a:xfrm>
+          <a:prstGeom prst="rect">
+            <a:avLst/>
+          </a:prstGeom>
+          <a:noFill/>
+        </p:spPr>
+        <p:txBody>
+          <a:bodyPr wrap="none">
+            <a:spAutoFit/>
+          </a:bodyPr>
+          <a:lstStyle/>
+          <a:p>
+            <a:pPr algn="l"/>
+            <a:r>
+              <a:rPr sz="750">
+                <a:solidFill>
+                  <a:srgbClr val="78808C"/>
+                </a:solidFill>
+                <a:latin typeface="JetBrains Mono"/>
+              </a:rPr>
+              <a:t>M05  ·  INHALT</a:t>
+            </a:r>
+          </a:p>
+        </p:txBody>
+      </p:sp>
+      <p:sp>
+        <p:nvSpPr>
+          <p:cNvPr id="5" name="Rectangle 4"/>
+          <p:cNvSpPr/>
+          <p:nvPr/>
+        </p:nvSpPr>
+        <p:spPr>
+          <a:xfrm>
+            <a:off x="0" y="1234440"/>
+            <a:ext cx="12188952" cy="12700"/>
+          </a:xfrm>
+          <a:prstGeom prst="rect">
+            <a:avLst/>
+          </a:prstGeom>
+          <a:solidFill>
+            <a:srgbClr val="D8DFE4"/>
+          </a:solidFill>
+          <a:ln>
+            <a:noFill/>
+          </a:ln>
+        </p:spPr>
+        <p:style>
+          <a:lnRef idx="1">
+            <a:schemeClr val="accent1"/>
+          </a:lnRef>
+          <a:fillRef idx="3">
+            <a:schemeClr val="accent1"/>
+          </a:fillRef>
+          <a:effectRef idx="2">
+            <a:schemeClr val="accent1"/>
+          </a:effectRef>
+          <a:fontRef idx="minor">
+            <a:schemeClr val="lt1"/>
+          </a:fontRef>
+        </p:style>
+        <p:txBody>
+          <a:bodyPr rtlCol="0" anchor="ctr"/>
+          <a:lstStyle/>
+          <a:p>
+            <a:pPr algn="ctr"/>
+          </a:p>
+        </p:txBody>
+      </p:sp>
+      <p:sp>
+        <p:nvSpPr>
+          <p:cNvPr id="6" name="Rectangle 5"/>
+          <p:cNvSpPr/>
+          <p:nvPr/>
+        </p:nvSpPr>
+        <p:spPr>
+          <a:xfrm>
+            <a:off x="685800" y="502920"/>
+            <a:ext cx="36576" cy="658368"/>
+          </a:xfrm>
+          <a:prstGeom prst="rect">
+            <a:avLst/>
+          </a:prstGeom>
+          <a:solidFill>
+            <a:srgbClr val="D9C089"/>
+          </a:solidFill>
+          <a:ln>
+            <a:noFill/>
+          </a:ln>
+        </p:spPr>
+        <p:style>
+          <a:lnRef idx="1">
+            <a:schemeClr val="accent1"/>
+          </a:lnRef>
+          <a:fillRef idx="3">
+            <a:schemeClr val="accent1"/>
+          </a:fillRef>
+          <a:effectRef idx="2">
+            <a:schemeClr val="accent1"/>
+          </a:effectRef>
+          <a:fontRef idx="minor">
+            <a:schemeClr val="lt1"/>
+          </a:fontRef>
+        </p:style>
+        <p:txBody>
+          <a:bodyPr rtlCol="0" anchor="ctr"/>
+          <a:lstStyle/>
+          <a:p>
+            <a:pPr algn="ctr"/>
+          </a:p>
+        </p:txBody>
+      </p:sp>
+      <p:sp>
+        <p:nvSpPr>
+          <p:cNvPr id="7" name="TextBox 6"/>
+          <p:cNvSpPr txBox="1"/>
+          <p:nvPr/>
+        </p:nvSpPr>
+        <p:spPr>
+          <a:xfrm>
+            <a:off x="813816" y="502920"/>
+            <a:ext cx="10634472" cy="685800"/>
+          </a:xfrm>
+          <a:prstGeom prst="rect">
+            <a:avLst/>
+          </a:prstGeom>
+          <a:noFill/>
+        </p:spPr>
+        <p:txBody>
+          <a:bodyPr wrap="square">
+            <a:spAutoFit/>
+          </a:bodyPr>
+          <a:lstStyle/>
+          <a:p>
+            <a:pPr algn="l"/>
+            <a:r>
+              <a:rPr sz="2400" b="1" i="0">
+                <a:solidFill>
+                  <a:srgbClr val="1F2C56"/>
+                </a:solidFill>
+                <a:latin typeface="Source Serif 4"/>
+              </a:rPr>
+              <a:t>Arbeitsblatt: Branchenrisiko-Analyse-Template</a:t>
+            </a:r>
+          </a:p>
+        </p:txBody>
+      </p:sp>
+      <p:sp>
+        <p:nvSpPr>
+          <p:cNvPr id="8" name="TextBox 7"/>
+          <p:cNvSpPr txBox="1"/>
+          <p:nvPr/>
+        </p:nvSpPr>
+        <p:spPr>
+          <a:xfrm>
+            <a:off x="685800" y="1417320"/>
+            <a:ext cx="10817352" cy="5029200"/>
+          </a:xfrm>
+          <a:prstGeom prst="rect">
+            <a:avLst/>
+          </a:prstGeom>
+          <a:noFill/>
+        </p:spPr>
+        <p:txBody>
+          <a:bodyPr wrap="square">
+            <a:spAutoFit/>
+          </a:bodyPr>
+          <a:lstStyle/>
           <a:p>
             <a:pPr>
               <a:spcBef>
@@ -6478,7 +8314,7 @@
                 </a:solidFill>
                 <a:latin typeface="Arial"/>
               </a:rPr>
-              <a:t>▸  ☐ ⚠ ✗ Branchenumsatz rückläufig &gt;3 % ggü. Vorjahr</a:t>
+              <a:t>▸  ARBEITSBLATT: BRANCHENRISIKO-ANALYSE</a:t>
             </a:r>
           </a:p>
           <a:p>
@@ -6497,7 +8333,7 @@
                 </a:solidFill>
                 <a:latin typeface="Arial"/>
               </a:rPr>
-              <a:t>▸  ☐ ⚠ ✗ ifo Geschäftsklimaindex Branche &lt;90 Punkte</a:t>
+              <a:t>▸  TEIL A – BRANCHENIDENTIFIKATION</a:t>
             </a:r>
           </a:p>
           <a:p>
@@ -6516,7 +8352,7 @@
                 </a:solidFill>
                 <a:latin typeface="Arial"/>
               </a:rPr>
-              <a:t>▸  ☐ ⚠ ✗ Regulatorische Änderungen angekündigt</a:t>
+              <a:t>▸  TEIL B – PORTER'S FIVE FORCES (1 = sehr gering, 5 = sehr hoch)</a:t>
             </a:r>
           </a:p>
           <a:p>
@@ -6529,13 +8365,165 @@
               </a:spcAft>
             </a:pPr>
             <a:r>
-              <a:rPr sz="1200">
+              <a:rPr sz="1300">
                 <a:solidFill>
                   <a:srgbClr val="3D5466"/>
                 </a:solidFill>
                 <a:latin typeface="Arial"/>
               </a:rPr>
-              <a:t>Rohstoffe &amp; Lieferkette:</a:t>
+              <a:t>▸  TEIL C – KENNZAHLEN IM BRANCHENVERGLEICH</a:t>
+            </a:r>
+          </a:p>
+          <a:p>
+            <a:pPr>
+              <a:spcBef>
+                <a:spcPts val="400"/>
+              </a:spcBef>
+              <a:spcAft>
+                <a:spcPts val="200"/>
+              </a:spcAft>
+            </a:pPr>
+            <a:r>
+              <a:rPr sz="1300">
+                <a:solidFill>
+                  <a:srgbClr val="3D5466"/>
+                </a:solidFill>
+                <a:latin typeface="Arial"/>
+              </a:rPr>
+              <a:t>▸  Gesamteinschätzung: ☐ Deutlich besser als Branche ☐ Vergleichbar ☐ Schwächer als Branche</a:t>
+            </a:r>
+          </a:p>
+          <a:p>
+            <a:pPr>
+              <a:spcBef>
+                <a:spcPts val="400"/>
+              </a:spcBef>
+              <a:spcAft>
+                <a:spcPts val="200"/>
+              </a:spcAft>
+            </a:pPr>
+            <a:r>
+              <a:rPr sz="1300">
+                <a:solidFill>
+                  <a:srgbClr val="3D5466"/>
+                </a:solidFill>
+                <a:latin typeface="Arial"/>
+              </a:rPr>
+              <a:t>▸  TEIL D – FRÜHWARNINDIKATOREN (☐ nicht relevant | ⚠ Warnung | ✗ kritisch)</a:t>
+            </a:r>
+          </a:p>
+          <a:p>
+            <a:pPr>
+              <a:spcBef>
+                <a:spcPts val="400"/>
+              </a:spcBef>
+              <a:spcAft>
+                <a:spcPts val="200"/>
+              </a:spcAft>
+            </a:pPr>
+            <a:r>
+              <a:rPr sz="1300">
+                <a:solidFill>
+                  <a:srgbClr val="3D5466"/>
+                </a:solidFill>
+                <a:latin typeface="Arial"/>
+              </a:rPr>
+              <a:t>▸  Branchenumfeld:</a:t>
+            </a:r>
+          </a:p>
+          <a:p>
+            <a:pPr>
+              <a:spcBef>
+                <a:spcPts val="400"/>
+              </a:spcBef>
+              <a:spcAft>
+                <a:spcPts val="200"/>
+              </a:spcAft>
+            </a:pPr>
+            <a:r>
+              <a:rPr sz="1300">
+                <a:solidFill>
+                  <a:srgbClr val="3D5466"/>
+                </a:solidFill>
+                <a:latin typeface="Arial"/>
+              </a:rPr>
+              <a:t>▸  ☐ ⚠ ✗ Brancheninsolvenzquote gestiegen &gt;5 % ggü. Vorjahr</a:t>
+            </a:r>
+          </a:p>
+          <a:p>
+            <a:pPr>
+              <a:spcBef>
+                <a:spcPts val="400"/>
+              </a:spcBef>
+              <a:spcAft>
+                <a:spcPts val="200"/>
+              </a:spcAft>
+            </a:pPr>
+            <a:r>
+              <a:rPr sz="1300">
+                <a:solidFill>
+                  <a:srgbClr val="3D5466"/>
+                </a:solidFill>
+                <a:latin typeface="Arial"/>
+              </a:rPr>
+              <a:t>▸  ☐ ⚠ ✗ Branchenumsatz rückläufig &gt;3 % ggü. Vorjahr</a:t>
+            </a:r>
+          </a:p>
+          <a:p>
+            <a:pPr>
+              <a:spcBef>
+                <a:spcPts val="400"/>
+              </a:spcBef>
+              <a:spcAft>
+                <a:spcPts val="200"/>
+              </a:spcAft>
+            </a:pPr>
+            <a:r>
+              <a:rPr sz="1300">
+                <a:solidFill>
+                  <a:srgbClr val="3D5466"/>
+                </a:solidFill>
+                <a:latin typeface="Arial"/>
+              </a:rPr>
+              <a:t>▸  ☐ ⚠ ✗ ifo Geschäftsklimaindex Branche &lt;90 Punkte</a:t>
+            </a:r>
+          </a:p>
+          <a:p>
+            <a:pPr>
+              <a:spcBef>
+                <a:spcPts val="400"/>
+              </a:spcBef>
+              <a:spcAft>
+                <a:spcPts val="200"/>
+              </a:spcAft>
+            </a:pPr>
+            <a:r>
+              <a:rPr sz="1300">
+                <a:solidFill>
+                  <a:srgbClr val="3D5466"/>
+                </a:solidFill>
+                <a:latin typeface="Arial"/>
+              </a:rPr>
+              <a:t>▸  ☐ ⚠ ✗ Regulatorische Änderungen angekündigt</a:t>
+            </a:r>
+          </a:p>
+          <a:p>
+            <a:pPr>
+              <a:spcBef>
+                <a:spcPts val="400"/>
+              </a:spcBef>
+              <a:spcAft>
+                <a:spcPts val="200"/>
+              </a:spcAft>
+            </a:pPr>
+            <a:r>
+              <a:rPr sz="1300">
+                <a:solidFill>
+                  <a:srgbClr val="3D5466"/>
+                </a:solidFill>
+                <a:latin typeface="Arial"/>
+              </a:rPr>
+              <a:t>▸  Rohstoffe &amp; Lieferkette:</a:t>
             </a:r>
           </a:p>
         </p:txBody>
@@ -6614,6 +8602,898 @@
                 <a:latin typeface="JetBrains Mono"/>
               </a:rPr>
               <a:t>Benedikt Zoller Coaching  ·  FKB Campus  ·  M05</a:t>
+            </a:r>
+          </a:p>
+        </p:txBody>
+      </p:sp>
+    </p:spTree>
+  </p:cSld>
+  <p:clrMapOvr>
+    <a:masterClrMapping/>
+  </p:clrMapOvr>
+</p:sld>
+</file>
+
+<file path=ppt/slides/slide17.xml><?xml version="1.0" encoding="utf-8"?>
+<p:sld xmlns:a="http://schemas.openxmlformats.org/drawingml/2006/main" xmlns:p="http://schemas.openxmlformats.org/presentationml/2006/main" xmlns:r="http://schemas.openxmlformats.org/officeDocument/2006/relationships">
+  <p:cSld>
+    <p:spTree>
+      <p:nvGrpSpPr>
+        <p:cNvPr id="1" name=""/>
+        <p:cNvGrpSpPr/>
+        <p:nvPr/>
+      </p:nvGrpSpPr>
+      <p:grpSpPr/>
+      <p:sp>
+        <p:nvSpPr>
+          <p:cNvPr id="2" name="Rectangle 1"/>
+          <p:cNvSpPr/>
+          <p:nvPr/>
+        </p:nvSpPr>
+        <p:spPr>
+          <a:xfrm>
+            <a:off x="0" y="0"/>
+            <a:ext cx="12188952" cy="6858000"/>
+          </a:xfrm>
+          <a:prstGeom prst="rect">
+            <a:avLst/>
+          </a:prstGeom>
+          <a:solidFill>
+            <a:srgbClr val="FFFFFF"/>
+          </a:solidFill>
+          <a:ln>
+            <a:noFill/>
+          </a:ln>
+        </p:spPr>
+        <p:style>
+          <a:lnRef idx="1">
+            <a:schemeClr val="accent1"/>
+          </a:lnRef>
+          <a:fillRef idx="3">
+            <a:schemeClr val="accent1"/>
+          </a:fillRef>
+          <a:effectRef idx="2">
+            <a:schemeClr val="accent1"/>
+          </a:effectRef>
+          <a:fontRef idx="minor">
+            <a:schemeClr val="lt1"/>
+          </a:fontRef>
+        </p:style>
+        <p:txBody>
+          <a:bodyPr rtlCol="0" anchor="ctr"/>
+          <a:lstStyle/>
+          <a:p>
+            <a:pPr algn="ctr"/>
+          </a:p>
+        </p:txBody>
+      </p:sp>
+      <p:sp>
+        <p:nvSpPr>
+          <p:cNvPr id="3" name="Rectangle 2"/>
+          <p:cNvSpPr/>
+          <p:nvPr/>
+        </p:nvSpPr>
+        <p:spPr>
+          <a:xfrm>
+            <a:off x="0" y="0"/>
+            <a:ext cx="12188952" cy="50292"/>
+          </a:xfrm>
+          <a:prstGeom prst="rect">
+            <a:avLst/>
+          </a:prstGeom>
+          <a:solidFill>
+            <a:srgbClr val="1F2C56"/>
+          </a:solidFill>
+          <a:ln>
+            <a:noFill/>
+          </a:ln>
+        </p:spPr>
+        <p:style>
+          <a:lnRef idx="1">
+            <a:schemeClr val="accent1"/>
+          </a:lnRef>
+          <a:fillRef idx="3">
+            <a:schemeClr val="accent1"/>
+          </a:fillRef>
+          <a:effectRef idx="2">
+            <a:schemeClr val="accent1"/>
+          </a:effectRef>
+          <a:fontRef idx="minor">
+            <a:schemeClr val="lt1"/>
+          </a:fontRef>
+        </p:style>
+        <p:txBody>
+          <a:bodyPr rtlCol="0" anchor="ctr"/>
+          <a:lstStyle/>
+          <a:p>
+            <a:pPr algn="ctr"/>
+          </a:p>
+        </p:txBody>
+      </p:sp>
+      <p:sp>
+        <p:nvSpPr>
+          <p:cNvPr id="4" name="TextBox 3"/>
+          <p:cNvSpPr txBox="1"/>
+          <p:nvPr/>
+        </p:nvSpPr>
+        <p:spPr>
+          <a:xfrm>
+            <a:off x="685800" y="109728"/>
+            <a:ext cx="10817352" cy="228600"/>
+          </a:xfrm>
+          <a:prstGeom prst="rect">
+            <a:avLst/>
+          </a:prstGeom>
+          <a:noFill/>
+        </p:spPr>
+        <p:txBody>
+          <a:bodyPr wrap="none">
+            <a:spAutoFit/>
+          </a:bodyPr>
+          <a:lstStyle/>
+          <a:p>
+            <a:pPr algn="l"/>
+            <a:r>
+              <a:rPr sz="750">
+                <a:solidFill>
+                  <a:srgbClr val="78808C"/>
+                </a:solidFill>
+                <a:latin typeface="JetBrains Mono"/>
+              </a:rPr>
+              <a:t>M05  ·  ÜBERSICHT</a:t>
+            </a:r>
+          </a:p>
+        </p:txBody>
+      </p:sp>
+      <p:sp>
+        <p:nvSpPr>
+          <p:cNvPr id="5" name="TextBox 4"/>
+          <p:cNvSpPr txBox="1"/>
+          <p:nvPr/>
+        </p:nvSpPr>
+        <p:spPr>
+          <a:xfrm>
+            <a:off x="685800" y="502920"/>
+            <a:ext cx="10817352" cy="594360"/>
+          </a:xfrm>
+          <a:prstGeom prst="rect">
+            <a:avLst/>
+          </a:prstGeom>
+          <a:noFill/>
+        </p:spPr>
+        <p:txBody>
+          <a:bodyPr wrap="square">
+            <a:spAutoFit/>
+          </a:bodyPr>
+          <a:lstStyle/>
+          <a:p>
+            <a:pPr algn="l"/>
+            <a:r>
+              <a:rPr sz="2000" b="1" i="0">
+                <a:solidFill>
+                  <a:srgbClr val="1F2C56"/>
+                </a:solidFill>
+                <a:latin typeface="Source Serif 4"/>
+              </a:rPr>
+              <a:t>Arbeitsblatt: Branchenrisiko-Analyse-Template</a:t>
+            </a:r>
+          </a:p>
+        </p:txBody>
+      </p:sp>
+      <p:sp>
+        <p:nvSpPr>
+          <p:cNvPr id="6" name="Rectangle 5"/>
+          <p:cNvSpPr/>
+          <p:nvPr/>
+        </p:nvSpPr>
+        <p:spPr>
+          <a:xfrm>
+            <a:off x="685800" y="1143000"/>
+            <a:ext cx="10817352" cy="25400"/>
+          </a:xfrm>
+          <a:prstGeom prst="rect">
+            <a:avLst/>
+          </a:prstGeom>
+          <a:solidFill>
+            <a:srgbClr val="D9C089"/>
+          </a:solidFill>
+          <a:ln>
+            <a:noFill/>
+          </a:ln>
+        </p:spPr>
+        <p:style>
+          <a:lnRef idx="1">
+            <a:schemeClr val="accent1"/>
+          </a:lnRef>
+          <a:fillRef idx="3">
+            <a:schemeClr val="accent1"/>
+          </a:fillRef>
+          <a:effectRef idx="2">
+            <a:schemeClr val="accent1"/>
+          </a:effectRef>
+          <a:fontRef idx="minor">
+            <a:schemeClr val="lt1"/>
+          </a:fontRef>
+        </p:style>
+        <p:txBody>
+          <a:bodyPr rtlCol="0" anchor="ctr"/>
+          <a:lstStyle/>
+          <a:p>
+            <a:pPr algn="ctr"/>
+          </a:p>
+        </p:txBody>
+      </p:sp>
+      <p:graphicFrame>
+        <p:nvGraphicFramePr>
+          <p:cNvPr id="7" name="Table 6"/>
+          <p:cNvGraphicFramePr>
+            <a:graphicFrameLocks noGrp="1"/>
+          </p:cNvGraphicFramePr>
+          <p:nvPr/>
+        </p:nvGraphicFramePr>
+        <p:xfrm>
+          <a:off x="685800" y="1417320"/>
+          <a:ext cx="10817352" cy="2688336"/>
+        </p:xfrm>
+        <a:graphic>
+          <a:graphicData uri="http://schemas.openxmlformats.org/drawingml/2006/table">
+            <a:tbl>
+              <a:tblPr firstRow="1" bandRow="1">
+                <a:tableStyleId>{5C22544A-7EE6-4342-B048-85BDC9FD1C3A}</a:tableStyleId>
+              </a:tblPr>
+              <a:tblGrid>
+                <a:gridCol w="2704338"/>
+                <a:gridCol w="2704338"/>
+                <a:gridCol w="2704338"/>
+                <a:gridCol w="2704338"/>
+              </a:tblGrid>
+              <a:tr h="384048">
+                <a:tc>
+                  <a:txBody>
+                    <a:bodyPr/>
+                    <a:lstStyle/>
+                    <a:p>
+                      <a:r>
+                        <a:rPr sz="1100" b="1">
+                          <a:solidFill>
+                            <a:srgbClr val="FFFFFF"/>
+                          </a:solidFill>
+                          <a:latin typeface="Arial"/>
+                        </a:rPr>
+                        <a:t>Kennzahl</a:t>
+                      </a:r>
+                    </a:p>
+                  </a:txBody>
+                  <a:tcPr>
+                    <a:solidFill>
+                      <a:srgbClr val="1F2C56"/>
+                    </a:solidFill>
+                  </a:tcPr>
+                </a:tc>
+                <a:tc>
+                  <a:txBody>
+                    <a:bodyPr/>
+                    <a:lstStyle/>
+                    <a:p>
+                      <a:r>
+                        <a:rPr sz="1100" b="1">
+                          <a:solidFill>
+                            <a:srgbClr val="FFFFFF"/>
+                          </a:solidFill>
+                          <a:latin typeface="Arial"/>
+                        </a:rPr>
+                        <a:t>KMU-Wert</a:t>
+                      </a:r>
+                    </a:p>
+                  </a:txBody>
+                  <a:tcPr>
+                    <a:solidFill>
+                      <a:srgbClr val="1F2C56"/>
+                    </a:solidFill>
+                  </a:tcPr>
+                </a:tc>
+                <a:tc>
+                  <a:txBody>
+                    <a:bodyPr/>
+                    <a:lstStyle/>
+                    <a:p>
+                      <a:r>
+                        <a:rPr sz="1100" b="1">
+                          <a:solidFill>
+                            <a:srgbClr val="FFFFFF"/>
+                          </a:solidFill>
+                          <a:latin typeface="Arial"/>
+                        </a:rPr>
+                        <a:t>Branchenbenchmark</a:t>
+                      </a:r>
+                    </a:p>
+                  </a:txBody>
+                  <a:tcPr>
+                    <a:solidFill>
+                      <a:srgbClr val="1F2C56"/>
+                    </a:solidFill>
+                  </a:tcPr>
+                </a:tc>
+                <a:tc>
+                  <a:txBody>
+                    <a:bodyPr/>
+                    <a:lstStyle/>
+                    <a:p>
+                      <a:r>
+                        <a:rPr sz="1100" b="1">
+                          <a:solidFill>
+                            <a:srgbClr val="FFFFFF"/>
+                          </a:solidFill>
+                          <a:latin typeface="Arial"/>
+                        </a:rPr>
+                        <a:t>Bewertung</a:t>
+                      </a:r>
+                    </a:p>
+                  </a:txBody>
+                  <a:tcPr>
+                    <a:solidFill>
+                      <a:srgbClr val="1F2C56"/>
+                    </a:solidFill>
+                  </a:tcPr>
+                </a:tc>
+              </a:tr>
+              <a:tr h="384048">
+                <a:tc>
+                  <a:txBody>
+                    <a:bodyPr/>
+                    <a:lstStyle/>
+                    <a:p>
+                      <a:r>
+                        <a:rPr sz="1050">
+                          <a:solidFill>
+                            <a:srgbClr val="3D5466"/>
+                          </a:solidFill>
+                          <a:latin typeface="Arial"/>
+                        </a:rPr>
+                        <a:t>Eigenkapitalquote</a:t>
+                      </a:r>
+                    </a:p>
+                  </a:txBody>
+                  <a:tcPr/>
+                </a:tc>
+                <a:tc>
+                  <a:txBody>
+                    <a:bodyPr/>
+                    <a:lstStyle/>
+                    <a:p>
+                      <a:r>
+                        <a:rPr sz="1050">
+                          <a:solidFill>
+                            <a:srgbClr val="3D5466"/>
+                          </a:solidFill>
+                          <a:latin typeface="Arial"/>
+                        </a:rPr>
+                        <a:t>___%</a:t>
+                      </a:r>
+                    </a:p>
+                  </a:txBody>
+                  <a:tcPr/>
+                </a:tc>
+                <a:tc>
+                  <a:txBody>
+                    <a:bodyPr/>
+                    <a:lstStyle/>
+                    <a:p>
+                      <a:r>
+                        <a:rPr sz="1050">
+                          <a:solidFill>
+                            <a:srgbClr val="3D5466"/>
+                          </a:solidFill>
+                          <a:latin typeface="Arial"/>
+                        </a:rPr>
+                        <a:t>___%</a:t>
+                      </a:r>
+                    </a:p>
+                  </a:txBody>
+                  <a:tcPr/>
+                </a:tc>
+                <a:tc>
+                  <a:txBody>
+                    <a:bodyPr/>
+                    <a:lstStyle/>
+                    <a:p>
+                      <a:r>
+                        <a:rPr sz="1050">
+                          <a:solidFill>
+                            <a:srgbClr val="3D5466"/>
+                          </a:solidFill>
+                          <a:latin typeface="Arial"/>
+                        </a:rPr>
+                        <a:t>☐ Besser ☐ Gleich ☐ Schlechter</a:t>
+                      </a:r>
+                    </a:p>
+                  </a:txBody>
+                  <a:tcPr/>
+                </a:tc>
+              </a:tr>
+              <a:tr h="384048">
+                <a:tc>
+                  <a:txBody>
+                    <a:bodyPr/>
+                    <a:lstStyle/>
+                    <a:p>
+                      <a:r>
+                        <a:rPr sz="1050">
+                          <a:solidFill>
+                            <a:srgbClr val="3D5466"/>
+                          </a:solidFill>
+                          <a:latin typeface="Arial"/>
+                        </a:rPr>
+                        <a:t>EBIT-Marge</a:t>
+                      </a:r>
+                    </a:p>
+                  </a:txBody>
+                  <a:tcPr/>
+                </a:tc>
+                <a:tc>
+                  <a:txBody>
+                    <a:bodyPr/>
+                    <a:lstStyle/>
+                    <a:p>
+                      <a:r>
+                        <a:rPr sz="1050">
+                          <a:solidFill>
+                            <a:srgbClr val="3D5466"/>
+                          </a:solidFill>
+                          <a:latin typeface="Arial"/>
+                        </a:rPr>
+                        <a:t>___%</a:t>
+                      </a:r>
+                    </a:p>
+                  </a:txBody>
+                  <a:tcPr/>
+                </a:tc>
+                <a:tc>
+                  <a:txBody>
+                    <a:bodyPr/>
+                    <a:lstStyle/>
+                    <a:p>
+                      <a:r>
+                        <a:rPr sz="1050">
+                          <a:solidFill>
+                            <a:srgbClr val="3D5466"/>
+                          </a:solidFill>
+                          <a:latin typeface="Arial"/>
+                        </a:rPr>
+                        <a:t>___%</a:t>
+                      </a:r>
+                    </a:p>
+                  </a:txBody>
+                  <a:tcPr/>
+                </a:tc>
+                <a:tc>
+                  <a:txBody>
+                    <a:bodyPr/>
+                    <a:lstStyle/>
+                    <a:p>
+                      <a:r>
+                        <a:rPr sz="1050">
+                          <a:solidFill>
+                            <a:srgbClr val="3D5466"/>
+                          </a:solidFill>
+                          <a:latin typeface="Arial"/>
+                        </a:rPr>
+                        <a:t>☐ Besser ☐ Gleich ☐ Schlechter</a:t>
+                      </a:r>
+                    </a:p>
+                  </a:txBody>
+                  <a:tcPr/>
+                </a:tc>
+              </a:tr>
+              <a:tr h="384048">
+                <a:tc>
+                  <a:txBody>
+                    <a:bodyPr/>
+                    <a:lstStyle/>
+                    <a:p>
+                      <a:r>
+                        <a:rPr sz="1050">
+                          <a:solidFill>
+                            <a:srgbClr val="3D5466"/>
+                          </a:solidFill>
+                          <a:latin typeface="Arial"/>
+                        </a:rPr>
+                        <a:t>Kapitalumschlag</a:t>
+                      </a:r>
+                    </a:p>
+                  </a:txBody>
+                  <a:tcPr/>
+                </a:tc>
+                <a:tc>
+                  <a:txBody>
+                    <a:bodyPr/>
+                    <a:lstStyle/>
+                    <a:p>
+                      <a:r>
+                        <a:rPr sz="1050">
+                          <a:solidFill>
+                            <a:srgbClr val="3D5466"/>
+                          </a:solidFill>
+                          <a:latin typeface="Arial"/>
+                        </a:rPr>
+                        <a:t>___x</a:t>
+                      </a:r>
+                    </a:p>
+                  </a:txBody>
+                  <a:tcPr/>
+                </a:tc>
+                <a:tc>
+                  <a:txBody>
+                    <a:bodyPr/>
+                    <a:lstStyle/>
+                    <a:p>
+                      <a:r>
+                        <a:rPr sz="1050">
+                          <a:solidFill>
+                            <a:srgbClr val="3D5466"/>
+                          </a:solidFill>
+                          <a:latin typeface="Arial"/>
+                        </a:rPr>
+                        <a:t>___x</a:t>
+                      </a:r>
+                    </a:p>
+                  </a:txBody>
+                  <a:tcPr/>
+                </a:tc>
+                <a:tc>
+                  <a:txBody>
+                    <a:bodyPr/>
+                    <a:lstStyle/>
+                    <a:p>
+                      <a:r>
+                        <a:rPr sz="1050">
+                          <a:solidFill>
+                            <a:srgbClr val="3D5466"/>
+                          </a:solidFill>
+                          <a:latin typeface="Arial"/>
+                        </a:rPr>
+                        <a:t>☐ Besser ☐ Gleich ☐ Schlechter</a:t>
+                      </a:r>
+                    </a:p>
+                  </a:txBody>
+                  <a:tcPr/>
+                </a:tc>
+              </a:tr>
+              <a:tr h="384048">
+                <a:tc>
+                  <a:txBody>
+                    <a:bodyPr/>
+                    <a:lstStyle/>
+                    <a:p>
+                      <a:r>
+                        <a:rPr sz="1050">
+                          <a:solidFill>
+                            <a:srgbClr val="3D5466"/>
+                          </a:solidFill>
+                          <a:latin typeface="Arial"/>
+                        </a:rPr>
+                        <a:t>Personalkosten/Umsatz</a:t>
+                      </a:r>
+                    </a:p>
+                  </a:txBody>
+                  <a:tcPr/>
+                </a:tc>
+                <a:tc>
+                  <a:txBody>
+                    <a:bodyPr/>
+                    <a:lstStyle/>
+                    <a:p>
+                      <a:r>
+                        <a:rPr sz="1050">
+                          <a:solidFill>
+                            <a:srgbClr val="3D5466"/>
+                          </a:solidFill>
+                          <a:latin typeface="Arial"/>
+                        </a:rPr>
+                        <a:t>___%</a:t>
+                      </a:r>
+                    </a:p>
+                  </a:txBody>
+                  <a:tcPr/>
+                </a:tc>
+                <a:tc>
+                  <a:txBody>
+                    <a:bodyPr/>
+                    <a:lstStyle/>
+                    <a:p>
+                      <a:r>
+                        <a:rPr sz="1050">
+                          <a:solidFill>
+                            <a:srgbClr val="3D5466"/>
+                          </a:solidFill>
+                          <a:latin typeface="Arial"/>
+                        </a:rPr>
+                        <a:t>___%</a:t>
+                      </a:r>
+                    </a:p>
+                  </a:txBody>
+                  <a:tcPr/>
+                </a:tc>
+                <a:tc>
+                  <a:txBody>
+                    <a:bodyPr/>
+                    <a:lstStyle/>
+                    <a:p>
+                      <a:r>
+                        <a:rPr sz="1050">
+                          <a:solidFill>
+                            <a:srgbClr val="3D5466"/>
+                          </a:solidFill>
+                          <a:latin typeface="Arial"/>
+                        </a:rPr>
+                        <a:t>☐ Besser ☐ Gleich ☐ Schlechter</a:t>
+                      </a:r>
+                    </a:p>
+                  </a:txBody>
+                  <a:tcPr/>
+                </a:tc>
+              </a:tr>
+              <a:tr h="384048">
+                <a:tc>
+                  <a:txBody>
+                    <a:bodyPr/>
+                    <a:lstStyle/>
+                    <a:p>
+                      <a:r>
+                        <a:rPr sz="1050">
+                          <a:solidFill>
+                            <a:srgbClr val="3D5466"/>
+                          </a:solidFill>
+                          <a:latin typeface="Arial"/>
+                        </a:rPr>
+                        <a:t>Zinsdeckungsquote</a:t>
+                      </a:r>
+                    </a:p>
+                  </a:txBody>
+                  <a:tcPr/>
+                </a:tc>
+                <a:tc>
+                  <a:txBody>
+                    <a:bodyPr/>
+                    <a:lstStyle/>
+                    <a:p>
+                      <a:r>
+                        <a:rPr sz="1050">
+                          <a:solidFill>
+                            <a:srgbClr val="3D5466"/>
+                          </a:solidFill>
+                          <a:latin typeface="Arial"/>
+                        </a:rPr>
+                        <a:t>___x</a:t>
+                      </a:r>
+                    </a:p>
+                  </a:txBody>
+                  <a:tcPr/>
+                </a:tc>
+                <a:tc>
+                  <a:txBody>
+                    <a:bodyPr/>
+                    <a:lstStyle/>
+                    <a:p>
+                      <a:r>
+                        <a:rPr sz="1050">
+                          <a:solidFill>
+                            <a:srgbClr val="3D5466"/>
+                          </a:solidFill>
+                          <a:latin typeface="Arial"/>
+                        </a:rPr>
+                        <a:t>___x</a:t>
+                      </a:r>
+                    </a:p>
+                  </a:txBody>
+                  <a:tcPr/>
+                </a:tc>
+                <a:tc>
+                  <a:txBody>
+                    <a:bodyPr/>
+                    <a:lstStyle/>
+                    <a:p>
+                      <a:r>
+                        <a:rPr sz="1050">
+                          <a:solidFill>
+                            <a:srgbClr val="3D5466"/>
+                          </a:solidFill>
+                          <a:latin typeface="Arial"/>
+                        </a:rPr>
+                        <a:t>☐ Besser ☐ Gleich ☐ Schlechter</a:t>
+                      </a:r>
+                    </a:p>
+                  </a:txBody>
+                  <a:tcPr/>
+                </a:tc>
+              </a:tr>
+              <a:tr h="384048">
+                <a:tc>
+                  <a:txBody>
+                    <a:bodyPr/>
+                    <a:lstStyle/>
+                    <a:p>
+                      <a:r>
+                        <a:rPr sz="1050">
+                          <a:solidFill>
+                            <a:srgbClr val="3D5466"/>
+                          </a:solidFill>
+                          <a:latin typeface="Arial"/>
+                        </a:rPr>
+                        <a:t>Rohstoffkosten/Umsatz</a:t>
+                      </a:r>
+                    </a:p>
+                  </a:txBody>
+                  <a:tcPr/>
+                </a:tc>
+                <a:tc>
+                  <a:txBody>
+                    <a:bodyPr/>
+                    <a:lstStyle/>
+                    <a:p>
+                      <a:r>
+                        <a:rPr sz="1050">
+                          <a:solidFill>
+                            <a:srgbClr val="3D5466"/>
+                          </a:solidFill>
+                          <a:latin typeface="Arial"/>
+                        </a:rPr>
+                        <a:t>___%</a:t>
+                      </a:r>
+                    </a:p>
+                  </a:txBody>
+                  <a:tcPr/>
+                </a:tc>
+                <a:tc>
+                  <a:txBody>
+                    <a:bodyPr/>
+                    <a:lstStyle/>
+                    <a:p>
+                      <a:r>
+                        <a:rPr sz="1050">
+                          <a:solidFill>
+                            <a:srgbClr val="3D5466"/>
+                          </a:solidFill>
+                          <a:latin typeface="Arial"/>
+                        </a:rPr>
+                        <a:t>___%</a:t>
+                      </a:r>
+                    </a:p>
+                  </a:txBody>
+                  <a:tcPr/>
+                </a:tc>
+                <a:tc>
+                  <a:txBody>
+                    <a:bodyPr/>
+                    <a:lstStyle/>
+                    <a:p>
+                      <a:r>
+                        <a:rPr sz="1050">
+                          <a:solidFill>
+                            <a:srgbClr val="3D5466"/>
+                          </a:solidFill>
+                          <a:latin typeface="Arial"/>
+                        </a:rPr>
+                        <a:t>☐ Besser ☐ Gleich ☐ Schlechter</a:t>
+                      </a:r>
+                    </a:p>
+                  </a:txBody>
+                  <a:tcPr/>
+                </a:tc>
+              </a:tr>
+            </a:tbl>
+          </a:graphicData>
+        </a:graphic>
+      </p:graphicFrame>
+      <p:sp>
+        <p:nvSpPr>
+          <p:cNvPr id="8" name="Rectangle 7"/>
+          <p:cNvSpPr/>
+          <p:nvPr/>
+        </p:nvSpPr>
+        <p:spPr>
+          <a:xfrm>
+            <a:off x="0" y="6510528"/>
+            <a:ext cx="12188952" cy="347472"/>
+          </a:xfrm>
+          <a:prstGeom prst="rect">
+            <a:avLst/>
+          </a:prstGeom>
+          <a:solidFill>
+            <a:srgbClr val="0A1937"/>
+          </a:solidFill>
+          <a:ln>
+            <a:noFill/>
+          </a:ln>
+        </p:spPr>
+        <p:style>
+          <a:lnRef idx="1">
+            <a:schemeClr val="accent1"/>
+          </a:lnRef>
+          <a:fillRef idx="3">
+            <a:schemeClr val="accent1"/>
+          </a:fillRef>
+          <a:effectRef idx="2">
+            <a:schemeClr val="accent1"/>
+          </a:effectRef>
+          <a:fontRef idx="minor">
+            <a:schemeClr val="lt1"/>
+          </a:fontRef>
+        </p:style>
+        <p:txBody>
+          <a:bodyPr rtlCol="0" anchor="ctr"/>
+          <a:lstStyle/>
+          <a:p>
+            <a:pPr algn="ctr"/>
+          </a:p>
+        </p:txBody>
+      </p:sp>
+      <p:sp>
+        <p:nvSpPr>
+          <p:cNvPr id="9" name="TextBox 8"/>
+          <p:cNvSpPr txBox="1"/>
+          <p:nvPr/>
+        </p:nvSpPr>
+        <p:spPr>
+          <a:xfrm>
+            <a:off x="685800" y="6583680"/>
+            <a:ext cx="6490411" cy="256032"/>
+          </a:xfrm>
+          <a:prstGeom prst="rect">
+            <a:avLst/>
+          </a:prstGeom>
+          <a:noFill/>
+        </p:spPr>
+        <p:txBody>
+          <a:bodyPr wrap="none">
+            <a:spAutoFit/>
+          </a:bodyPr>
+          <a:lstStyle/>
+          <a:p>
+            <a:pPr algn="l"/>
+            <a:r>
+              <a:rPr sz="700">
+                <a:solidFill>
+                  <a:srgbClr val="A0B4D2"/>
+                </a:solidFill>
+                <a:latin typeface="JetBrains Mono"/>
+              </a:rPr>
+              <a:t>Benedikt Zoller Coaching  ·  FKB Campus  ·  M05</a:t>
+            </a:r>
+          </a:p>
+        </p:txBody>
+      </p:sp>
+      <p:sp>
+        <p:nvSpPr>
+          <p:cNvPr id="10" name="TextBox 9"/>
+          <p:cNvSpPr txBox="1"/>
+          <p:nvPr/>
+        </p:nvSpPr>
+        <p:spPr>
+          <a:xfrm>
+            <a:off x="7176211" y="6583680"/>
+            <a:ext cx="4326940" cy="256032"/>
+          </a:xfrm>
+          <a:prstGeom prst="rect">
+            <a:avLst/>
+          </a:prstGeom>
+          <a:noFill/>
+        </p:spPr>
+        <p:txBody>
+          <a:bodyPr wrap="none">
+            <a:spAutoFit/>
+          </a:bodyPr>
+          <a:lstStyle/>
+          <a:p>
+            <a:pPr algn="r"/>
+            <a:r>
+              <a:rPr sz="700">
+                <a:solidFill>
+                  <a:srgbClr val="A0B4D2"/>
+                </a:solidFill>
+                <a:latin typeface="JetBrains Mono"/>
+              </a:rPr>
+              <a:t>Übersicht</a:t>
             </a:r>
           </a:p>
         </p:txBody>
@@ -7590,7 +10470,7 @@
                 </a:solidFill>
                 <a:latin typeface="Source Serif 4"/>
               </a:rPr>
-              <a:t>Agenda</a:t>
+              <a:t>So läuft das Modul</a:t>
             </a:r>
           </a:p>
         </p:txBody>
@@ -7619,115 +10499,112 @@
           <a:p>
             <a:pPr>
               <a:spcBef>
-                <a:spcPts val="800"/>
+                <a:spcPts val="700"/>
               </a:spcBef>
               <a:spcAft>
-                <a:spcPts val="200"/>
+                <a:spcPts val="100"/>
               </a:spcAft>
             </a:pPr>
             <a:r>
-              <a:rPr sz="1500">
+              <a:rPr sz="1200">
+                <a:solidFill>
+                  <a:srgbClr val="78808C"/>
+                </a:solidFill>
+                <a:latin typeface="Consolas"/>
+              </a:rPr>
+              <a:t>08:30–08:40 </a:t>
+            </a:r>
+            <a:r>
+              <a:rPr sz="1500" b="1">
                 <a:solidFill>
                   <a:srgbClr val="3D5466"/>
                 </a:solidFill>
                 <a:latin typeface="Arial"/>
               </a:rPr>
-              <a:t>01   Theorie-Input: Branchenstruktur und Risikoklassifikation</a:t>
+              <a:t>  </a:t>
+            </a:r>
+            <a:r>
+              <a:rPr sz="1200">
+                <a:solidFill>
+                  <a:srgbClr val="78808C"/>
+                </a:solidFill>
+                <a:latin typeface="Arial"/>
+              </a:rPr>
+              <a:t>  ·  Trainerinput</a:t>
             </a:r>
           </a:p>
           <a:p>
             <a:pPr>
               <a:spcBef>
-                <a:spcPts val="800"/>
+                <a:spcPts val="700"/>
               </a:spcBef>
               <a:spcAft>
-                <a:spcPts val="200"/>
+                <a:spcPts val="100"/>
               </a:spcAft>
             </a:pPr>
             <a:r>
-              <a:rPr sz="1500">
+              <a:rPr sz="1200">
+                <a:solidFill>
+                  <a:srgbClr val="78808C"/>
+                </a:solidFill>
+                <a:latin typeface="Consolas"/>
+              </a:rPr>
+              <a:t>08:40–09:00 </a:t>
+            </a:r>
+            <a:r>
+              <a:rPr sz="1500" b="1">
                 <a:solidFill>
                   <a:srgbClr val="3D5466"/>
                 </a:solidFill>
                 <a:latin typeface="Arial"/>
               </a:rPr>
-              <a:t>02   Theorie-Input: Branchenspezifische Risikoklassen im KMU-Segment</a:t>
+              <a:t>  </a:t>
+            </a:r>
+            <a:r>
+              <a:rPr sz="1200">
+                <a:solidFill>
+                  <a:srgbClr val="78808C"/>
+                </a:solidFill>
+                <a:latin typeface="Arial"/>
+              </a:rPr>
+              <a:t>  ·  Blitzlicht-Runde</a:t>
             </a:r>
           </a:p>
           <a:p>
             <a:pPr>
               <a:spcBef>
-                <a:spcPts val="800"/>
+                <a:spcPts val="700"/>
               </a:spcBef>
               <a:spcAft>
-                <a:spcPts val="200"/>
+                <a:spcPts val="100"/>
               </a:spcAft>
             </a:pPr>
             <a:r>
-              <a:rPr sz="1500">
+              <a:rPr sz="1200">
+                <a:solidFill>
+                  <a:srgbClr val="78808C"/>
+                </a:solidFill>
+                <a:latin typeface="Consolas"/>
+              </a:rPr>
+              <a:t>09:00–09:30 </a:t>
+            </a:r>
+            <a:r>
+              <a:rPr sz="1500" b="1">
                 <a:solidFill>
                   <a:srgbClr val="3D5466"/>
                 </a:solidFill>
                 <a:latin typeface="Arial"/>
               </a:rPr>
-              <a:t>03   Handlungskarte: Vom Branchensignal zur Kreditmaßnahme</a:t>
-            </a:r>
-          </a:p>
-          <a:p>
-            <a:pPr>
-              <a:spcBef>
-                <a:spcPts val="800"/>
-              </a:spcBef>
-              <a:spcAft>
-                <a:spcPts val="200"/>
-              </a:spcAft>
-            </a:pPr>
-            <a:r>
-              <a:rPr sz="1500">
-                <a:solidFill>
-                  <a:srgbClr val="3D5466"/>
+              <a:t>  </a:t>
+            </a:r>
+            <a:r>
+              <a:rPr sz="1200">
+                <a:solidFill>
+                  <a:srgbClr val="78808C"/>
                 </a:solidFill>
                 <a:latin typeface="Arial"/>
               </a:rPr>
-              <a:t>04   Theorie-Input: VR-Rating und branchenspezifische Ratingfaktoren</a:t>
-            </a:r>
-          </a:p>
-          <a:p>
-            <a:pPr>
-              <a:spcBef>
-                <a:spcPts val="800"/>
-              </a:spcBef>
-              <a:spcAft>
-                <a:spcPts val="200"/>
-              </a:spcAft>
-            </a:pPr>
-            <a:r>
-              <a:rPr sz="1500">
-                <a:solidFill>
-                  <a:srgbClr val="3D5466"/>
-                </a:solidFill>
-                <a:latin typeface="Arial"/>
-              </a:rPr>
-              <a:t>05   Praxiscase: Bäckerei &amp; Konditorei Hofmann GmbH (Stuttgart, fiktiv)</a:t>
-            </a:r>
-          </a:p>
-          <a:p>
-            <a:pPr>
-              <a:spcBef>
-                <a:spcPts val="800"/>
-              </a:spcBef>
-              <a:spcAft>
-                <a:spcPts val="200"/>
-              </a:spcAft>
-            </a:pPr>
-            <a:r>
-              <a:rPr sz="1500">
-                <a:solidFill>
-                  <a:srgbClr val="3D5466"/>
-                </a:solidFill>
-                <a:latin typeface="Arial"/>
-              </a:rPr>
-              <a:t>06   Arbeitsblatt: Branchenrisiko-Analyse-Template</a:t>
+              <a:t>  ·  Gruppenarbeit + Plenumsvorstellung</a:t>
             </a:r>
           </a:p>
         </p:txBody>
@@ -8120,13 +10997,13 @@
               </a:spcAft>
             </a:pPr>
             <a:r>
-              <a:rPr sz="1200">
+              <a:rPr sz="1300">
                 <a:solidFill>
                   <a:srgbClr val="3D5466"/>
                 </a:solidFill>
                 <a:latin typeface="Arial"/>
               </a:rPr>
-              <a:t>Die fünf Kräfte im Überblick:</a:t>
+              <a:t>▸  Die fünf Kräfte im Überblick:</a:t>
             </a:r>
           </a:p>
           <a:p>
@@ -8139,13 +11016,13 @@
               </a:spcAft>
             </a:pPr>
             <a:r>
-              <a:rPr sz="1200">
+              <a:rPr sz="1300">
                 <a:solidFill>
                   <a:srgbClr val="3D5466"/>
                 </a:solidFill>
                 <a:latin typeface="Arial"/>
               </a:rPr>
-              <a:t>1. Bedrohung durch neue Konkurrenten</a:t>
+              <a:t>▸  1. Bedrohung durch neue Konkurrenten</a:t>
             </a:r>
           </a:p>
           <a:p>
@@ -8158,13 +11035,13 @@
               </a:spcAft>
             </a:pPr>
             <a:r>
-              <a:rPr sz="1200">
+              <a:rPr sz="1300">
                 <a:solidFill>
                   <a:srgbClr val="3D5466"/>
                 </a:solidFill>
                 <a:latin typeface="Arial"/>
               </a:rPr>
-              <a:t>Wie hoch sind Markteintrittsbarrieren? (Kapitalintensität, Skalenerfordernisse, Markenzugang)</a:t>
+              <a:t>▸  Wie hoch sind Markteintrittsbarrieren? (Kapitalintensität, Skalenerfordernisse, Markenzugang)</a:t>
             </a:r>
           </a:p>
           <a:p>
@@ -8196,13 +11073,13 @@
               </a:spcAft>
             </a:pPr>
             <a:r>
-              <a:rPr sz="1200">
+              <a:rPr sz="1300">
                 <a:solidFill>
                   <a:srgbClr val="3D5466"/>
                 </a:solidFill>
                 <a:latin typeface="Arial"/>
               </a:rPr>
-              <a:t>2. Verhandlungsmacht der Lieferanten</a:t>
+              <a:t>▸  2. Verhandlungsmacht der Lieferanten</a:t>
             </a:r>
           </a:p>
           <a:p>
@@ -8215,13 +11092,13 @@
               </a:spcAft>
             </a:pPr>
             <a:r>
-              <a:rPr sz="1200">
+              <a:rPr sz="1300">
                 <a:solidFill>
                   <a:srgbClr val="3D5466"/>
                 </a:solidFill>
                 <a:latin typeface="Arial"/>
               </a:rPr>
-              <a:t>Wie konzentriert ist der Liefermarkt?</a:t>
+              <a:t>▸  Wie konzentriert ist der Liefermarkt?</a:t>
             </a:r>
           </a:p>
           <a:p>
@@ -8253,13 +11130,13 @@
               </a:spcAft>
             </a:pPr>
             <a:r>
-              <a:rPr sz="1200">
+              <a:rPr sz="1300">
                 <a:solidFill>
                   <a:srgbClr val="3D5466"/>
                 </a:solidFill>
                 <a:latin typeface="Arial"/>
               </a:rPr>
-              <a:t>3. Verhandlungsmacht der Abnehmer</a:t>
+              <a:t>▸  3. Verhandlungsmacht der Abnehmer</a:t>
             </a:r>
           </a:p>
           <a:p>
@@ -8272,13 +11149,13 @@
               </a:spcAft>
             </a:pPr>
             <a:r>
-              <a:rPr sz="1200">
+              <a:rPr sz="1300">
                 <a:solidFill>
                   <a:srgbClr val="3D5466"/>
                 </a:solidFill>
                 <a:latin typeface="Arial"/>
               </a:rPr>
-              <a:t>Wie konzentriert ist der Kundenmarkt?</a:t>
+              <a:t>▸  Wie konzentriert ist der Kundenmarkt?</a:t>
             </a:r>
           </a:p>
           <a:p>
@@ -8310,13 +11187,13 @@
               </a:spcAft>
             </a:pPr>
             <a:r>
-              <a:rPr sz="1200">
+              <a:rPr sz="1300">
                 <a:solidFill>
                   <a:srgbClr val="3D5466"/>
                 </a:solidFill>
                 <a:latin typeface="Arial"/>
               </a:rPr>
-              <a:t>4. Bedrohung durch Substitute</a:t>
+              <a:t>▸  4. Bedrohung durch Substitute</a:t>
             </a:r>
           </a:p>
         </p:txBody>
@@ -9417,13 +12294,13 @@
               </a:spcAft>
             </a:pPr>
             <a:r>
-              <a:rPr sz="1200">
+              <a:rPr sz="1300">
                 <a:solidFill>
                   <a:srgbClr val="3D5466"/>
                 </a:solidFill>
                 <a:latin typeface="Arial"/>
               </a:rPr>
-              <a:t>Charakteristika:</a:t>
+              <a:t>▸  Charakteristika:</a:t>
             </a:r>
           </a:p>
           <a:p>
@@ -9493,13 +12370,13 @@
               </a:spcAft>
             </a:pPr>
             <a:r>
-              <a:rPr sz="1200">
+              <a:rPr sz="1300">
                 <a:solidFill>
                   <a:srgbClr val="3D5466"/>
                 </a:solidFill>
                 <a:latin typeface="Arial"/>
               </a:rPr>
-              <a:t>Typische Kennzahlen (Benchmark Baugewerbe):</a:t>
+              <a:t>▸  Typische Kennzahlen (Benchmark Baugewerbe):</a:t>
             </a:r>
           </a:p>
           <a:p>
@@ -9588,13 +12465,13 @@
               </a:spcAft>
             </a:pPr>
             <a:r>
-              <a:rPr sz="1200">
+              <a:rPr sz="1300">
                 <a:solidFill>
                   <a:srgbClr val="3D5466"/>
                 </a:solidFill>
                 <a:latin typeface="Arial"/>
               </a:rPr>
-              <a:t>Quellen: Creditreform Branchenberichte ; BVR-Branchenblätter ; Deutsche Bundesbank Unternehmensabschlussstatistik</a:t>
+              <a:t>▸  Quellen: Creditreform Branchenberichte ; BVR-Branchenblätter ; Deutsche Bundesbank Unternehmensabschlussstatistik</a:t>
             </a:r>
           </a:p>
           <a:p>
@@ -9607,13 +12484,13 @@
               </a:spcAft>
             </a:pPr>
             <a:r>
-              <a:rPr sz="1200">
+              <a:rPr sz="1300">
                 <a:solidFill>
                   <a:srgbClr val="3D5466"/>
                 </a:solidFill>
                 <a:latin typeface="Arial"/>
               </a:rPr>
-              <a:t>Kritische Frühwarnindikatoren:</a:t>
+              <a:t>▸  Kritische Frühwarnindikatoren:</a:t>
             </a:r>
           </a:p>
         </p:txBody>
@@ -9987,13 +12864,13 @@
               </a:spcAft>
             </a:pPr>
             <a:r>
-              <a:rPr sz="1200">
+              <a:rPr sz="1300">
                 <a:solidFill>
                   <a:srgbClr val="3D5466"/>
                 </a:solidFill>
                 <a:latin typeface="Arial"/>
               </a:rPr>
-              <a:t>Die folgende Handlungsempfehlung-Karte verdichtet die Branchenrisikoprofile aus diesem Abschnitt zu konkreten Wenn-Dann-Impulsen für Kreditentscheidung und Kundengespräch.</a:t>
+              <a:t>▸  Die folgende Handlungsempfehlung-Karte verdichtet die Branchenrisikoprofile aus diesem Abschnitt zu konkreten Wenn-Dann-Impulsen für Kreditentscheidung und Kundengespräch.</a:t>
             </a:r>
           </a:p>
         </p:txBody>

--- a/protected-downloads/praesentation/M05.pptx
+++ b/protected-downloads/praesentation/M05.pptx
@@ -4461,7 +4461,7 @@
                 </a:solidFill>
                 <a:latin typeface="JetBrains Mono"/>
               </a:rPr>
-              <a:t>Benedikt Zoller Coaching  ·  FKB Campus  ·  2026</a:t>
+              <a:t>FKB Campus  ·  2026</a:t>
             </a:r>
           </a:p>
         </p:txBody>
@@ -4815,7 +4815,7 @@
                 </a:solidFill>
                 <a:latin typeface="JetBrains Mono"/>
               </a:rPr>
-              <a:t>Benedikt Zoller Coaching  ·  FKB Campus  ·  M05</a:t>
+              <a:t>FKB Campus  ·  M05</a:t>
             </a:r>
           </a:p>
         </p:txBody>
@@ -5439,7 +5439,7 @@
                 </a:solidFill>
                 <a:latin typeface="JetBrains Mono"/>
               </a:rPr>
-              <a:t>Benedikt Zoller Coaching  ·  FKB Campus  ·  M05</a:t>
+              <a:t>FKB Campus  ·  M05</a:t>
             </a:r>
           </a:p>
         </p:txBody>
@@ -6053,7 +6053,7 @@
                 </a:solidFill>
                 <a:latin typeface="JetBrains Mono"/>
               </a:rPr>
-              <a:t>Benedikt Zoller Coaching  ·  FKB Campus  ·  M05</a:t>
+              <a:t>FKB Campus  ·  M05</a:t>
             </a:r>
           </a:p>
         </p:txBody>
@@ -6758,7 +6758,7 @@
                 </a:solidFill>
                 <a:latin typeface="JetBrains Mono"/>
               </a:rPr>
-              <a:t>Benedikt Zoller Coaching  ·  FKB Campus  ·  M05</a:t>
+              <a:t>FKB Campus  ·  M05</a:t>
             </a:r>
           </a:p>
         </p:txBody>
@@ -7382,7 +7382,7 @@
                 </a:solidFill>
                 <a:latin typeface="JetBrains Mono"/>
               </a:rPr>
-              <a:t>Benedikt Zoller Coaching  ·  FKB Campus  ·  M05</a:t>
+              <a:t>FKB Campus  ·  M05</a:t>
             </a:r>
           </a:p>
         </p:txBody>
@@ -7977,7 +7977,7 @@
                 </a:solidFill>
                 <a:latin typeface="JetBrains Mono"/>
               </a:rPr>
-              <a:t>Benedikt Zoller Coaching  ·  FKB Campus  ·  M05</a:t>
+              <a:t>FKB Campus  ·  M05</a:t>
             </a:r>
           </a:p>
         </p:txBody>
@@ -8601,7 +8601,7 @@
                 </a:solidFill>
                 <a:latin typeface="JetBrains Mono"/>
               </a:rPr>
-              <a:t>Benedikt Zoller Coaching  ·  FKB Campus  ·  M05</a:t>
+              <a:t>FKB Campus  ·  M05</a:t>
             </a:r>
           </a:p>
         </p:txBody>
@@ -9458,7 +9458,7 @@
                 </a:solidFill>
                 <a:latin typeface="JetBrains Mono"/>
               </a:rPr>
-              <a:t>Benedikt Zoller Coaching  ·  FKB Campus  ·  M05</a:t>
+              <a:t>FKB Campus  ·  M05</a:t>
             </a:r>
           </a:p>
         </p:txBody>
@@ -9859,7 +9859,7 @@
                 </a:solidFill>
                 <a:latin typeface="JetBrains Mono"/>
               </a:rPr>
-              <a:t>Benedikt Zoller Coaching  ·  FKB Campus  ·  M05</a:t>
+              <a:t>FKB Campus  ·  M05</a:t>
             </a:r>
           </a:p>
         </p:txBody>
@@ -10253,7 +10253,7 @@
                 </a:solidFill>
                 <a:latin typeface="JetBrains Mono"/>
               </a:rPr>
-              <a:t>Benedikt Zoller Coaching  ·  FKB Campus  ·  M05</a:t>
+              <a:t>FKB Campus  ·  M05</a:t>
             </a:r>
           </a:p>
         </p:txBody>
@@ -10682,7 +10682,7 @@
                 </a:solidFill>
                 <a:latin typeface="JetBrains Mono"/>
               </a:rPr>
-              <a:t>Benedikt Zoller Coaching  ·  FKB Campus  ·  M05</a:t>
+              <a:t>FKB Campus  ·  M05</a:t>
             </a:r>
           </a:p>
         </p:txBody>
@@ -11271,7 +11271,7 @@
                 </a:solidFill>
                 <a:latin typeface="JetBrains Mono"/>
               </a:rPr>
-              <a:t>Benedikt Zoller Coaching  ·  FKB Campus  ·  M05</a:t>
+              <a:t>FKB Campus  ·  M05</a:t>
             </a:r>
           </a:p>
         </p:txBody>
@@ -11590,7 +11590,7 @@
                 </a:solidFill>
                 <a:latin typeface="JetBrains Mono"/>
               </a:rPr>
-              <a:t>Benedikt Zoller Coaching  ·  FKB Campus  ·  M05</a:t>
+              <a:t>FKB Campus  ·  M05</a:t>
             </a:r>
           </a:p>
         </p:txBody>
@@ -11944,7 +11944,7 @@
                 </a:solidFill>
                 <a:latin typeface="JetBrains Mono"/>
               </a:rPr>
-              <a:t>Benedikt Zoller Coaching  ·  FKB Campus  ·  M05</a:t>
+              <a:t>FKB Campus  ·  M05</a:t>
             </a:r>
           </a:p>
         </p:txBody>
@@ -12568,7 +12568,7 @@
                 </a:solidFill>
                 <a:latin typeface="JetBrains Mono"/>
               </a:rPr>
-              <a:t>Benedikt Zoller Coaching  ·  FKB Campus  ·  M05</a:t>
+              <a:t>FKB Campus  ·  M05</a:t>
             </a:r>
           </a:p>
         </p:txBody>
@@ -12948,7 +12948,7 @@
                 </a:solidFill>
                 <a:latin typeface="JetBrains Mono"/>
               </a:rPr>
-              <a:t>Benedikt Zoller Coaching  ·  FKB Campus  ·  M05</a:t>
+              <a:t>FKB Campus  ·  M05</a:t>
             </a:r>
           </a:p>
         </p:txBody>

--- a/protected-downloads/praesentation/M05.pptx
+++ b/protected-downloads/praesentation/M05.pptx
@@ -4383,7 +4383,7 @@
                 </a:solidFill>
                 <a:latin typeface="Arial"/>
               </a:rPr>
-              <a:t>v0.3</a:t>
+              <a:t>v1.0</a:t>
             </a:r>
           </a:p>
         </p:txBody>

--- a/protected-downloads/praesentation/M05.pptx
+++ b/protected-downloads/praesentation/M05.pptx
@@ -8272,7 +8272,7 @@
                 </a:solidFill>
                 <a:latin typeface="Source Serif 4"/>
               </a:rPr>
-              <a:t>Arbeitsblatt: Branchenrisiko-Analyse-Template</a:t>
+              <a:t>AB-1: Branchenrisiko-Analyse-Template</a:t>
             </a:r>
           </a:p>
         </p:txBody>
@@ -8775,7 +8775,7 @@
                 </a:solidFill>
                 <a:latin typeface="Source Serif 4"/>
               </a:rPr>
-              <a:t>Arbeitsblatt: Branchenrisiko-Analyse-Template</a:t>
+              <a:t>AB-1: Branchenrisiko-Analyse-Template</a:t>
             </a:r>
           </a:p>
         </p:txBody>

--- a/protected-downloads/praesentation/M05.pptx
+++ b/protected-downloads/praesentation/M05.pptx
@@ -4058,7 +4058,7 @@
                 <a:solidFill>
                   <a:srgbClr val="C8D2E6"/>
                 </a:solidFill>
-                <a:latin typeface="JetBrains Mono"/>
+                <a:latin typeface="Consolas"/>
               </a:rPr>
               <a:t>FKB CAMPUS  ·  FIRMENKUNDENAKADEMIE  ·  M05</a:t>
             </a:r>
@@ -4093,7 +4093,7 @@
                 <a:solidFill>
                   <a:srgbClr val="FFFFFF"/>
                 </a:solidFill>
-                <a:latin typeface="Source Serif 4"/>
+                <a:latin typeface="Arial"/>
               </a:rPr>
               <a:t>Branchenspezifische Risikosysteme</a:t>
             </a:r>
@@ -4128,7 +4128,7 @@
                 <a:solidFill>
                   <a:srgbClr val="BECDE6"/>
                 </a:solidFill>
-                <a:latin typeface="Source Serif 4"/>
+                <a:latin typeface="Arial"/>
               </a:rPr>
               <a:t>Systematische Branchenrisikoanalyse als Basis für differenzierte Kreditentscheidungen</a:t>
             </a:r>
@@ -4206,7 +4206,7 @@
                 <a:solidFill>
                   <a:srgbClr val="A0B4D2"/>
                 </a:solidFill>
-                <a:latin typeface="JetBrains Mono"/>
+                <a:latin typeface="Consolas"/>
               </a:rPr>
               <a:t>KOMPETENZFELD</a:t>
             </a:r>
@@ -4276,7 +4276,7 @@
                 <a:solidFill>
                   <a:srgbClr val="A0B4D2"/>
                 </a:solidFill>
-                <a:latin typeface="JetBrains Mono"/>
+                <a:latin typeface="Consolas"/>
               </a:rPr>
               <a:t>KOMPETENZSTUFE</a:t>
             </a:r>
@@ -4346,7 +4346,7 @@
                 <a:solidFill>
                   <a:srgbClr val="A0B4D2"/>
                 </a:solidFill>
-                <a:latin typeface="JetBrains Mono"/>
+                <a:latin typeface="Consolas"/>
               </a:rPr>
               <a:t>VERSION</a:t>
             </a:r>
@@ -4459,7 +4459,7 @@
                 <a:solidFill>
                   <a:srgbClr val="96A5BE"/>
                 </a:solidFill>
-                <a:latin typeface="JetBrains Mono"/>
+                <a:latin typeface="Consolas"/>
               </a:rPr>
               <a:t>FKB Campus  ·  2026</a:t>
             </a:r>
@@ -4494,7 +4494,7 @@
                 <a:solidFill>
                   <a:srgbClr val="96A5BE"/>
                 </a:solidFill>
-                <a:latin typeface="JetBrains Mono"/>
+                <a:latin typeface="Consolas"/>
               </a:rPr>
               <a:t>Trainer-Präsentation</a:t>
             </a:r>
@@ -4633,7 +4633,7 @@
                 <a:solidFill>
                   <a:srgbClr val="78808C"/>
                 </a:solidFill>
-                <a:latin typeface="JetBrains Mono"/>
+                <a:latin typeface="Consolas"/>
               </a:rPr>
               <a:t>M05  ·  SCHAUBILD</a:t>
             </a:r>
@@ -4668,7 +4668,7 @@
                 <a:solidFill>
                   <a:srgbClr val="1F2C56"/>
                 </a:solidFill>
-                <a:latin typeface="Source Serif 4"/>
+                <a:latin typeface="Arial"/>
               </a:rPr>
               <a:t>Handlungsempfehlung</a:t>
             </a:r>
@@ -4813,7 +4813,7 @@
                 <a:solidFill>
                   <a:srgbClr val="A0B4D2"/>
                 </a:solidFill>
-                <a:latin typeface="JetBrains Mono"/>
+                <a:latin typeface="Consolas"/>
               </a:rPr>
               <a:t>FKB Campus  ·  M05</a:t>
             </a:r>
@@ -4848,7 +4848,7 @@
                 <a:solidFill>
                   <a:srgbClr val="A0B4D2"/>
                 </a:solidFill>
-                <a:latin typeface="JetBrains Mono"/>
+                <a:latin typeface="Consolas"/>
               </a:rPr>
               <a:t>Schaubild</a:t>
             </a:r>
@@ -4987,7 +4987,7 @@
                 <a:solidFill>
                   <a:srgbClr val="78808C"/>
                 </a:solidFill>
-                <a:latin typeface="JetBrains Mono"/>
+                <a:latin typeface="Consolas"/>
               </a:rPr>
               <a:t>M05  ·  INHALT</a:t>
             </a:r>
@@ -5108,7 +5108,7 @@
                 <a:solidFill>
                   <a:srgbClr val="1F2C56"/>
                 </a:solidFill>
-                <a:latin typeface="Source Serif 4"/>
+                <a:latin typeface="Arial"/>
               </a:rPr>
               <a:t>Theorie-Input: VR-Rating und branchenspezifische Ratingfaktoren</a:t>
             </a:r>
@@ -5124,7 +5124,7 @@
         <p:spPr>
           <a:xfrm>
             <a:off x="685800" y="1417320"/>
-            <a:ext cx="10817352" cy="5029200"/>
+            <a:ext cx="10817352" cy="4892040"/>
           </a:xfrm>
           <a:prstGeom prst="rect">
             <a:avLst/>
@@ -5150,13 +5150,13 @@
                 <a:solidFill>
                   <a:srgbClr val="78808C"/>
                 </a:solidFill>
-                <a:latin typeface="JetBrains Mono"/>
+                <a:latin typeface="Consolas"/>
               </a:rPr>
               <a:t>4.3.1 AUFBAU DES VR-RATINGS</a:t>
             </a:r>
           </a:p>
           <a:p>
-            <a:pPr>
+            <a:pPr marL="190500" indent="-190500">
               <a:spcBef>
                 <a:spcPts val="400"/>
               </a:spcBef>
@@ -5175,7 +5175,7 @@
             </a:r>
           </a:p>
           <a:p>
-            <a:pPr>
+            <a:pPr marL="190500" indent="-190500">
               <a:spcBef>
                 <a:spcPts val="400"/>
               </a:spcBef>
@@ -5194,7 +5194,7 @@
             </a:r>
           </a:p>
           <a:p>
-            <a:pPr>
+            <a:pPr marL="190500" indent="-190500">
               <a:spcBef>
                 <a:spcPts val="400"/>
               </a:spcBef>
@@ -5213,7 +5213,7 @@
             </a:r>
           </a:p>
           <a:p>
-            <a:pPr>
+            <a:pPr marL="190500" indent="-190500">
               <a:spcBef>
                 <a:spcPts val="400"/>
               </a:spcBef>
@@ -5232,7 +5232,7 @@
             </a:r>
           </a:p>
           <a:p>
-            <a:pPr>
+            <a:pPr marL="190500" indent="-190500">
               <a:spcBef>
                 <a:spcPts val="400"/>
               </a:spcBef>
@@ -5251,7 +5251,7 @@
             </a:r>
           </a:p>
           <a:p>
-            <a:pPr>
+            <a:pPr marL="190500" indent="-190500">
               <a:spcBef>
                 <a:spcPts val="400"/>
               </a:spcBef>
@@ -5270,7 +5270,7 @@
             </a:r>
           </a:p>
           <a:p>
-            <a:pPr>
+            <a:pPr marL="190500" indent="-190500">
               <a:spcBef>
                 <a:spcPts val="400"/>
               </a:spcBef>
@@ -5289,7 +5289,7 @@
             </a:r>
           </a:p>
           <a:p>
-            <a:pPr>
+            <a:pPr marL="190500" indent="-190500">
               <a:spcBef>
                 <a:spcPts val="400"/>
               </a:spcBef>
@@ -5308,7 +5308,7 @@
             </a:r>
           </a:p>
           <a:p>
-            <a:pPr>
+            <a:pPr marL="190500" indent="-190500">
               <a:spcBef>
                 <a:spcPts val="400"/>
               </a:spcBef>
@@ -5327,7 +5327,7 @@
             </a:r>
           </a:p>
           <a:p>
-            <a:pPr>
+            <a:pPr marL="190500" indent="-190500">
               <a:spcBef>
                 <a:spcPts val="400"/>
               </a:spcBef>
@@ -5346,7 +5346,7 @@
             </a:r>
           </a:p>
           <a:p>
-            <a:pPr>
+            <a:pPr marL="190500" indent="-190500">
               <a:spcBef>
                 <a:spcPts val="400"/>
               </a:spcBef>
@@ -5437,7 +5437,7 @@
                 <a:solidFill>
                   <a:srgbClr val="A0B4D2"/>
                 </a:solidFill>
-                <a:latin typeface="JetBrains Mono"/>
+                <a:latin typeface="Consolas"/>
               </a:rPr>
               <a:t>FKB Campus  ·  M05</a:t>
             </a:r>
@@ -5576,7 +5576,7 @@
                 <a:solidFill>
                   <a:srgbClr val="78808C"/>
                 </a:solidFill>
-                <a:latin typeface="JetBrains Mono"/>
+                <a:latin typeface="Consolas"/>
               </a:rPr>
               <a:t>M05  ·  ÜBERSICHT</a:t>
             </a:r>
@@ -5611,7 +5611,7 @@
                 <a:solidFill>
                   <a:srgbClr val="1F2C56"/>
                 </a:solidFill>
-                <a:latin typeface="Source Serif 4"/>
+                <a:latin typeface="Arial"/>
               </a:rPr>
               <a:t>Theorie-Input: VR-Rating und branchenspezifische Ratingfaktoren</a:t>
             </a:r>
@@ -6051,7 +6051,7 @@
                 <a:solidFill>
                   <a:srgbClr val="A0B4D2"/>
                 </a:solidFill>
-                <a:latin typeface="JetBrains Mono"/>
+                <a:latin typeface="Consolas"/>
               </a:rPr>
               <a:t>FKB Campus  ·  M05</a:t>
             </a:r>
@@ -6086,7 +6086,7 @@
                 <a:solidFill>
                   <a:srgbClr val="A0B4D2"/>
                 </a:solidFill>
-                <a:latin typeface="JetBrains Mono"/>
+                <a:latin typeface="Consolas"/>
               </a:rPr>
               <a:t>Übersicht</a:t>
             </a:r>
@@ -6225,7 +6225,7 @@
                 <a:solidFill>
                   <a:srgbClr val="78808C"/>
                 </a:solidFill>
-                <a:latin typeface="JetBrains Mono"/>
+                <a:latin typeface="Consolas"/>
               </a:rPr>
               <a:t>M05  ·  ÜBERSICHT</a:t>
             </a:r>
@@ -6260,7 +6260,7 @@
                 <a:solidFill>
                   <a:srgbClr val="1F2C56"/>
                 </a:solidFill>
-                <a:latin typeface="Source Serif 4"/>
+                <a:latin typeface="Arial"/>
               </a:rPr>
               <a:t>Theorie-Input: VR-Rating und branchenspezifische Ratingfaktoren</a:t>
             </a:r>
@@ -6756,7 +6756,7 @@
                 <a:solidFill>
                   <a:srgbClr val="A0B4D2"/>
                 </a:solidFill>
-                <a:latin typeface="JetBrains Mono"/>
+                <a:latin typeface="Consolas"/>
               </a:rPr>
               <a:t>FKB Campus  ·  M05</a:t>
             </a:r>
@@ -6791,7 +6791,7 @@
                 <a:solidFill>
                   <a:srgbClr val="A0B4D2"/>
                 </a:solidFill>
-                <a:latin typeface="JetBrains Mono"/>
+                <a:latin typeface="Consolas"/>
               </a:rPr>
               <a:t>Übersicht</a:t>
             </a:r>
@@ -6930,7 +6930,7 @@
                 <a:solidFill>
                   <a:srgbClr val="78808C"/>
                 </a:solidFill>
-                <a:latin typeface="JetBrains Mono"/>
+                <a:latin typeface="Consolas"/>
               </a:rPr>
               <a:t>M05  ·  INHALT</a:t>
             </a:r>
@@ -7051,7 +7051,7 @@
                 <a:solidFill>
                   <a:srgbClr val="1F2C56"/>
                 </a:solidFill>
-                <a:latin typeface="Source Serif 4"/>
+                <a:latin typeface="Arial"/>
               </a:rPr>
               <a:t>Praxiscase: Bäckerei &amp; Konditorei Hofmann GmbH (Stuttgart, fiktiv)</a:t>
             </a:r>
@@ -7067,7 +7067,7 @@
         <p:spPr>
           <a:xfrm>
             <a:off x="685800" y="1417320"/>
-            <a:ext cx="10817352" cy="5029200"/>
+            <a:ext cx="10817352" cy="4892040"/>
           </a:xfrm>
           <a:prstGeom prst="rect">
             <a:avLst/>
@@ -7093,9 +7093,66 @@
                 <a:solidFill>
                   <a:srgbClr val="78808C"/>
                 </a:solidFill>
-                <a:latin typeface="JetBrains Mono"/>
-              </a:rPr>
-              <a:t>4.4.1 UNTERNEHMENSPROFIL</a:t>
+                <a:latin typeface="Consolas"/>
+              </a:rPr>
+              <a:t>4.4.2 FINANZIELLE SITUATION (JAHRESABSCHLUSS 2024, AUSZÜGE)</a:t>
+            </a:r>
+          </a:p>
+          <a:p>
+            <a:pPr marL="190500" indent="-190500">
+              <a:spcBef>
+                <a:spcPts val="400"/>
+              </a:spcBef>
+              <a:spcAft>
+                <a:spcPts val="200"/>
+              </a:spcAft>
+            </a:pPr>
+            <a:r>
+              <a:rPr sz="1300">
+                <a:solidFill>
+                  <a:srgbClr val="3D5466"/>
+                </a:solidFill>
+                <a:latin typeface="Arial"/>
+              </a:rPr>
+              <a:t>▸  Bilanzauszug:</a:t>
+            </a:r>
+          </a:p>
+          <a:p>
+            <a:pPr marL="190500" indent="-190500">
+              <a:spcBef>
+                <a:spcPts val="400"/>
+              </a:spcBef>
+              <a:spcAft>
+                <a:spcPts val="200"/>
+              </a:spcAft>
+            </a:pPr>
+            <a:r>
+              <a:rPr sz="1300">
+                <a:solidFill>
+                  <a:srgbClr val="3D5466"/>
+                </a:solidFill>
+                <a:latin typeface="Arial"/>
+              </a:rPr>
+              <a:t>▸  Gewinn- und Verlustrechnung 2024:</a:t>
+            </a:r>
+          </a:p>
+          <a:p>
+            <a:pPr marL="190500" indent="-190500">
+              <a:spcBef>
+                <a:spcPts val="400"/>
+              </a:spcBef>
+              <a:spcAft>
+                <a:spcPts val="200"/>
+              </a:spcAft>
+            </a:pPr>
+            <a:r>
+              <a:rPr sz="1300">
+                <a:solidFill>
+                  <a:srgbClr val="3D5466"/>
+                </a:solidFill>
+                <a:latin typeface="Arial"/>
+              </a:rPr>
+              <a:t>▸  Kapitalflussrechnung 2024 (vereinfacht):</a:t>
             </a:r>
           </a:p>
           <a:p>
@@ -7112,13 +7169,13 @@
                 <a:solidFill>
                   <a:srgbClr val="78808C"/>
                 </a:solidFill>
-                <a:latin typeface="JetBrains Mono"/>
-              </a:rPr>
-              <a:t>4.4.2 FINANZIELLE SITUATION (JAHRESABSCHLUSS 2024, AUSZÜGE)</a:t>
-            </a:r>
-          </a:p>
-          <a:p>
-            <a:pPr>
+                <a:latin typeface="Consolas"/>
+              </a:rPr>
+              <a:t>4.4.3 KREDITANFRAGE</a:t>
+            </a:r>
+          </a:p>
+          <a:p>
+            <a:pPr marL="190500" indent="-190500">
               <a:spcBef>
                 <a:spcPts val="400"/>
               </a:spcBef>
@@ -7133,11 +7190,11 @@
                 </a:solidFill>
                 <a:latin typeface="Arial"/>
               </a:rPr>
-              <a:t>▸  Bilanzauszug:</a:t>
-            </a:r>
-          </a:p>
-          <a:p>
-            <a:pPr>
+              <a:t>▸  Anlass: Investition in neue Backstube Kempten-Süd (170.000 €) + Filialmodernisierung Sonthofen (80.000 €)</a:t>
+            </a:r>
+          </a:p>
+          <a:p>
+            <a:pPr marL="190500" indent="-190500">
               <a:spcBef>
                 <a:spcPts val="400"/>
               </a:spcBef>
@@ -7152,26 +7209,7 @@
                 </a:solidFill>
                 <a:latin typeface="Arial"/>
               </a:rPr>
-              <a:t>▸  Gewinn- und Verlustrechnung 2024:</a:t>
-            </a:r>
-          </a:p>
-          <a:p>
-            <a:pPr>
-              <a:spcBef>
-                <a:spcPts val="400"/>
-              </a:spcBef>
-              <a:spcAft>
-                <a:spcPts val="200"/>
-              </a:spcAft>
-            </a:pPr>
-            <a:r>
-              <a:rPr sz="1300">
-                <a:solidFill>
-                  <a:srgbClr val="3D5466"/>
-                </a:solidFill>
-                <a:latin typeface="Arial"/>
-              </a:rPr>
-              <a:t>▸  Kapitalflussrechnung 2024 (vereinfacht):</a:t>
+              <a:t>▸  Gesamtkreditbedarf: 250.000 € | Eigenanteil: 30.000 € | Kreditwunsch: 250.000 €</a:t>
             </a:r>
           </a:p>
           <a:p>
@@ -7188,13 +7226,13 @@
                 <a:solidFill>
                   <a:srgbClr val="78808C"/>
                 </a:solidFill>
-                <a:latin typeface="JetBrains Mono"/>
-              </a:rPr>
-              <a:t>4.4.3 KREDITANFRAGE</a:t>
-            </a:r>
-          </a:p>
-          <a:p>
-            <a:pPr>
+                <a:latin typeface="Consolas"/>
+              </a:rPr>
+              <a:t>4.4.4 GESPRÄCHSVERLAUF: BRANCHENRISIKOANALYSE (BER = BERATER, GF = GESCHÄFTSFÜHRERIN)</a:t>
+            </a:r>
+          </a:p>
+          <a:p>
+            <a:pPr marL="190500" indent="-190500">
               <a:spcBef>
                 <a:spcPts val="400"/>
               </a:spcBef>
@@ -7209,11 +7247,11 @@
                 </a:solidFill>
                 <a:latin typeface="Arial"/>
               </a:rPr>
-              <a:t>▸  Anlass: Investition in neue Backstube Kempten-Süd (170.000 €) + Filialmodernisierung Sonthofen (80.000 €)</a:t>
-            </a:r>
-          </a:p>
-          <a:p>
-            <a:pPr>
+              <a:t>▸  Session 1 – Erstgespräch Branchenrisiko</a:t>
+            </a:r>
+          </a:p>
+          <a:p>
+            <a:pPr marL="190500" indent="-190500">
               <a:spcBef>
                 <a:spcPts val="400"/>
               </a:spcBef>
@@ -7228,30 +7266,11 @@
                 </a:solidFill>
                 <a:latin typeface="Arial"/>
               </a:rPr>
-              <a:t>▸  Gesamtkreditbedarf: 250.000 € | Eigenanteil: 30.000 € | Kreditwunsch: 250.000 €</a:t>
-            </a:r>
-          </a:p>
-          <a:p>
-            <a:pPr>
-              <a:spcBef>
-                <a:spcPts val="1000"/>
-              </a:spcBef>
-              <a:spcAft>
-                <a:spcPts val="200"/>
-              </a:spcAft>
-            </a:pPr>
-            <a:r>
-              <a:rPr sz="800" b="1">
-                <a:solidFill>
-                  <a:srgbClr val="78808C"/>
-                </a:solidFill>
-                <a:latin typeface="JetBrains Mono"/>
-              </a:rPr>
-              <a:t>4.4.4 GESPRÄCHSVERLAUF: BRANCHENRISIKOANALYSE (BER = BERATER, GF = GESCHÄFTSFÜHRERIN)</a:t>
-            </a:r>
-          </a:p>
-          <a:p>
-            <a:pPr>
+              <a:t>▸  GF: „Wir konnten die Preise nur um etwa 8–10 % erhöhen, ohne Kunden zu verlieren. Das hat die Marge deutlich gedrückt."</a:t>
+            </a:r>
+          </a:p>
+          <a:p>
+            <a:pPr marL="190500" indent="-190500">
               <a:spcBef>
                 <a:spcPts val="400"/>
               </a:spcBef>
@@ -7266,44 +7285,6 @@
                 </a:solidFill>
                 <a:latin typeface="Arial"/>
               </a:rPr>
-              <a:t>▸  Session 1 – Erstgespräch Branchenrisiko</a:t>
-            </a:r>
-          </a:p>
-          <a:p>
-            <a:pPr>
-              <a:spcBef>
-                <a:spcPts val="400"/>
-              </a:spcBef>
-              <a:spcAft>
-                <a:spcPts val="200"/>
-              </a:spcAft>
-            </a:pPr>
-            <a:r>
-              <a:rPr sz="1300">
-                <a:solidFill>
-                  <a:srgbClr val="3D5466"/>
-                </a:solidFill>
-                <a:latin typeface="Arial"/>
-              </a:rPr>
-              <a:t>▸  GF: „Wir konnten die Preise nur um etwa 8–10 % erhöhen, ohne Kunden zu verlieren. Das hat die Marge deutlich gedrückt."</a:t>
-            </a:r>
-          </a:p>
-          <a:p>
-            <a:pPr>
-              <a:spcBef>
-                <a:spcPts val="400"/>
-              </a:spcBef>
-              <a:spcAft>
-                <a:spcPts val="200"/>
-              </a:spcAft>
-            </a:pPr>
-            <a:r>
-              <a:rPr sz="1300">
-                <a:solidFill>
-                  <a:srgbClr val="3D5466"/>
-                </a:solidFill>
-                <a:latin typeface="Arial"/>
-              </a:rPr>
               <a:t>▸  GF: „Nein, wir kaufen zu aktuellen Marktpreisen. Die Lieferanten bieten keine Festpreise an."</a:t>
             </a:r>
           </a:p>
@@ -7380,7 +7361,7 @@
                 <a:solidFill>
                   <a:srgbClr val="A0B4D2"/>
                 </a:solidFill>
-                <a:latin typeface="JetBrains Mono"/>
+                <a:latin typeface="Consolas"/>
               </a:rPr>
               <a:t>FKB Campus  ·  M05</a:t>
             </a:r>
@@ -7519,7 +7500,7 @@
                 <a:solidFill>
                   <a:srgbClr val="78808C"/>
                 </a:solidFill>
-                <a:latin typeface="JetBrains Mono"/>
+                <a:latin typeface="Consolas"/>
               </a:rPr>
               <a:t>M05  ·  ÜBERSICHT</a:t>
             </a:r>
@@ -7554,7 +7535,7 @@
                 <a:solidFill>
                   <a:srgbClr val="1F2C56"/>
                 </a:solidFill>
-                <a:latin typeface="Source Serif 4"/>
+                <a:latin typeface="Arial"/>
               </a:rPr>
               <a:t>Praxiscase: Bäckerei &amp; Konditorei Hofmann GmbH (Stuttgart, fiktiv)</a:t>
             </a:r>
@@ -7975,7 +7956,7 @@
                 <a:solidFill>
                   <a:srgbClr val="A0B4D2"/>
                 </a:solidFill>
-                <a:latin typeface="JetBrains Mono"/>
+                <a:latin typeface="Consolas"/>
               </a:rPr>
               <a:t>FKB Campus  ·  M05</a:t>
             </a:r>
@@ -8010,7 +7991,7 @@
                 <a:solidFill>
                   <a:srgbClr val="A0B4D2"/>
                 </a:solidFill>
-                <a:latin typeface="JetBrains Mono"/>
+                <a:latin typeface="Consolas"/>
               </a:rPr>
               <a:t>Übersicht</a:t>
             </a:r>
@@ -8149,7 +8130,7 @@
                 <a:solidFill>
                   <a:srgbClr val="78808C"/>
                 </a:solidFill>
-                <a:latin typeface="JetBrains Mono"/>
+                <a:latin typeface="Consolas"/>
               </a:rPr>
               <a:t>M05  ·  INHALT</a:t>
             </a:r>
@@ -8270,7 +8251,7 @@
                 <a:solidFill>
                   <a:srgbClr val="1F2C56"/>
                 </a:solidFill>
-                <a:latin typeface="Source Serif 4"/>
+                <a:latin typeface="Arial"/>
               </a:rPr>
               <a:t>AB-1: Branchenrisiko-Analyse-Template</a:t>
             </a:r>
@@ -8286,7 +8267,7 @@
         <p:spPr>
           <a:xfrm>
             <a:off x="685800" y="1417320"/>
-            <a:ext cx="10817352" cy="5029200"/>
+            <a:ext cx="10817352" cy="4892040"/>
           </a:xfrm>
           <a:prstGeom prst="rect">
             <a:avLst/>
@@ -8299,7 +8280,7 @@
           </a:bodyPr>
           <a:lstStyle/>
           <a:p>
-            <a:pPr>
+            <a:pPr marL="190500" indent="-190500">
               <a:spcBef>
                 <a:spcPts val="400"/>
               </a:spcBef>
@@ -8318,7 +8299,7 @@
             </a:r>
           </a:p>
           <a:p>
-            <a:pPr>
+            <a:pPr marL="190500" indent="-190500">
               <a:spcBef>
                 <a:spcPts val="400"/>
               </a:spcBef>
@@ -8337,7 +8318,7 @@
             </a:r>
           </a:p>
           <a:p>
-            <a:pPr>
+            <a:pPr marL="190500" indent="-190500">
               <a:spcBef>
                 <a:spcPts val="400"/>
               </a:spcBef>
@@ -8356,7 +8337,7 @@
             </a:r>
           </a:p>
           <a:p>
-            <a:pPr>
+            <a:pPr marL="190500" indent="-190500">
               <a:spcBef>
                 <a:spcPts val="400"/>
               </a:spcBef>
@@ -8375,7 +8356,7 @@
             </a:r>
           </a:p>
           <a:p>
-            <a:pPr>
+            <a:pPr marL="190500" indent="-190500">
               <a:spcBef>
                 <a:spcPts val="400"/>
               </a:spcBef>
@@ -8394,7 +8375,7 @@
             </a:r>
           </a:p>
           <a:p>
-            <a:pPr>
+            <a:pPr marL="190500" indent="-190500">
               <a:spcBef>
                 <a:spcPts val="400"/>
               </a:spcBef>
@@ -8413,7 +8394,7 @@
             </a:r>
           </a:p>
           <a:p>
-            <a:pPr>
+            <a:pPr marL="190500" indent="-190500">
               <a:spcBef>
                 <a:spcPts val="400"/>
               </a:spcBef>
@@ -8432,7 +8413,7 @@
             </a:r>
           </a:p>
           <a:p>
-            <a:pPr>
+            <a:pPr marL="190500" indent="-190500">
               <a:spcBef>
                 <a:spcPts val="400"/>
               </a:spcBef>
@@ -8451,7 +8432,7 @@
             </a:r>
           </a:p>
           <a:p>
-            <a:pPr>
+            <a:pPr marL="190500" indent="-190500">
               <a:spcBef>
                 <a:spcPts val="400"/>
               </a:spcBef>
@@ -8470,7 +8451,7 @@
             </a:r>
           </a:p>
           <a:p>
-            <a:pPr>
+            <a:pPr marL="190500" indent="-190500">
               <a:spcBef>
                 <a:spcPts val="400"/>
               </a:spcBef>
@@ -8489,7 +8470,7 @@
             </a:r>
           </a:p>
           <a:p>
-            <a:pPr>
+            <a:pPr marL="190500" indent="-190500">
               <a:spcBef>
                 <a:spcPts val="400"/>
               </a:spcBef>
@@ -8508,7 +8489,7 @@
             </a:r>
           </a:p>
           <a:p>
-            <a:pPr>
+            <a:pPr marL="190500" indent="-190500">
               <a:spcBef>
                 <a:spcPts val="400"/>
               </a:spcBef>
@@ -8599,7 +8580,7 @@
                 <a:solidFill>
                   <a:srgbClr val="A0B4D2"/>
                 </a:solidFill>
-                <a:latin typeface="JetBrains Mono"/>
+                <a:latin typeface="Consolas"/>
               </a:rPr>
               <a:t>FKB Campus  ·  M05</a:t>
             </a:r>
@@ -8738,7 +8719,7 @@
                 <a:solidFill>
                   <a:srgbClr val="78808C"/>
                 </a:solidFill>
-                <a:latin typeface="JetBrains Mono"/>
+                <a:latin typeface="Consolas"/>
               </a:rPr>
               <a:t>M05  ·  ÜBERSICHT</a:t>
             </a:r>
@@ -8773,7 +8754,7 @@
                 <a:solidFill>
                   <a:srgbClr val="1F2C56"/>
                 </a:solidFill>
-                <a:latin typeface="Source Serif 4"/>
+                <a:latin typeface="Arial"/>
               </a:rPr>
               <a:t>AB-1: Branchenrisiko-Analyse-Template</a:t>
             </a:r>
@@ -9456,7 +9437,7 @@
                 <a:solidFill>
                   <a:srgbClr val="A0B4D2"/>
                 </a:solidFill>
-                <a:latin typeface="JetBrains Mono"/>
+                <a:latin typeface="Consolas"/>
               </a:rPr>
               <a:t>FKB Campus  ·  M05</a:t>
             </a:r>
@@ -9491,7 +9472,7 @@
                 <a:solidFill>
                   <a:srgbClr val="A0B4D2"/>
                 </a:solidFill>
-                <a:latin typeface="JetBrains Mono"/>
+                <a:latin typeface="Consolas"/>
               </a:rPr>
               <a:t>Übersicht</a:t>
             </a:r>
@@ -9630,7 +9611,7 @@
                 <a:solidFill>
                   <a:srgbClr val="78808C"/>
                 </a:solidFill>
-                <a:latin typeface="JetBrains Mono"/>
+                <a:latin typeface="Consolas"/>
               </a:rPr>
               <a:t>ÜBERBLICK  ·  M05</a:t>
             </a:r>
@@ -9708,7 +9689,7 @@
                 <a:solidFill>
                   <a:srgbClr val="1F2C56"/>
                 </a:solidFill>
-                <a:latin typeface="Source Serif 4"/>
+                <a:latin typeface="Arial"/>
               </a:rPr>
               <a:t>Worum geht es heute</a:t>
             </a:r>
@@ -9857,7 +9838,7 @@
                 <a:solidFill>
                   <a:srgbClr val="A0B4D2"/>
                 </a:solidFill>
-                <a:latin typeface="JetBrains Mono"/>
+                <a:latin typeface="Consolas"/>
               </a:rPr>
               <a:t>FKB Campus  ·  M05</a:t>
             </a:r>
@@ -9996,7 +9977,7 @@
                 <a:solidFill>
                   <a:srgbClr val="78808C"/>
                 </a:solidFill>
-                <a:latin typeface="JetBrains Mono"/>
+                <a:latin typeface="Consolas"/>
               </a:rPr>
               <a:t>LERNZIELE  ·  M05</a:t>
             </a:r>
@@ -10074,7 +10055,7 @@
                 <a:solidFill>
                   <a:srgbClr val="1F2C56"/>
                 </a:solidFill>
-                <a:latin typeface="Source Serif 4"/>
+                <a:latin typeface="Arial"/>
               </a:rPr>
               <a:t>Was Sie heute mitnehmen</a:t>
             </a:r>
@@ -10251,7 +10232,7 @@
                 <a:solidFill>
                   <a:srgbClr val="A0B4D2"/>
                 </a:solidFill>
-                <a:latin typeface="JetBrains Mono"/>
+                <a:latin typeface="Consolas"/>
               </a:rPr>
               <a:t>FKB Campus  ·  M05</a:t>
             </a:r>
@@ -10390,7 +10371,7 @@
                 <a:solidFill>
                   <a:srgbClr val="78808C"/>
                 </a:solidFill>
-                <a:latin typeface="JetBrains Mono"/>
+                <a:latin typeface="Consolas"/>
               </a:rPr>
               <a:t>AGENDA  ·  M05</a:t>
             </a:r>
@@ -10468,7 +10449,7 @@
                 <a:solidFill>
                   <a:srgbClr val="1F2C56"/>
                 </a:solidFill>
-                <a:latin typeface="Source Serif 4"/>
+                <a:latin typeface="Arial"/>
               </a:rPr>
               <a:t>So läuft das Modul</a:t>
             </a:r>
@@ -10680,7 +10661,7 @@
                 <a:solidFill>
                   <a:srgbClr val="A0B4D2"/>
                 </a:solidFill>
-                <a:latin typeface="JetBrains Mono"/>
+                <a:latin typeface="Consolas"/>
               </a:rPr>
               <a:t>FKB Campus  ·  M05</a:t>
             </a:r>
@@ -10819,7 +10800,7 @@
                 <a:solidFill>
                   <a:srgbClr val="78808C"/>
                 </a:solidFill>
-                <a:latin typeface="JetBrains Mono"/>
+                <a:latin typeface="Consolas"/>
               </a:rPr>
               <a:t>M05  ·  INHALT</a:t>
             </a:r>
@@ -10940,7 +10921,7 @@
                 <a:solidFill>
                   <a:srgbClr val="1F2C56"/>
                 </a:solidFill>
-                <a:latin typeface="Source Serif 4"/>
+                <a:latin typeface="Arial"/>
               </a:rPr>
               <a:t>Theorie-Input: Branchenstruktur und Risikoklassifikation</a:t>
             </a:r>
@@ -10956,7 +10937,7 @@
         <p:spPr>
           <a:xfrm>
             <a:off x="685800" y="1417320"/>
-            <a:ext cx="10817352" cy="5029200"/>
+            <a:ext cx="10817352" cy="4892040"/>
           </a:xfrm>
           <a:prstGeom prst="rect">
             <a:avLst/>
@@ -10982,13 +10963,13 @@
                 <a:solidFill>
                   <a:srgbClr val="78808C"/>
                 </a:solidFill>
-                <a:latin typeface="JetBrains Mono"/>
+                <a:latin typeface="Consolas"/>
               </a:rPr>
               <a:t>4.1.1 PORTER'S FIVE FORCES ALS ANALYSEGERÜST</a:t>
             </a:r>
           </a:p>
           <a:p>
-            <a:pPr>
+            <a:pPr marL="190500" indent="-190500">
               <a:spcBef>
                 <a:spcPts val="400"/>
               </a:spcBef>
@@ -11007,7 +10988,7 @@
             </a:r>
           </a:p>
           <a:p>
-            <a:pPr>
+            <a:pPr marL="190500" indent="-190500">
               <a:spcBef>
                 <a:spcPts val="400"/>
               </a:spcBef>
@@ -11026,7 +11007,7 @@
             </a:r>
           </a:p>
           <a:p>
-            <a:pPr>
+            <a:pPr marL="190500" indent="-190500">
               <a:spcBef>
                 <a:spcPts val="400"/>
               </a:spcBef>
@@ -11045,7 +11026,7 @@
             </a:r>
           </a:p>
           <a:p>
-            <a:pPr>
+            <a:pPr marL="190500" indent="-190500">
               <a:spcBef>
                 <a:spcPts val="400"/>
               </a:spcBef>
@@ -11064,7 +11045,7 @@
             </a:r>
           </a:p>
           <a:p>
-            <a:pPr>
+            <a:pPr marL="190500" indent="-190500">
               <a:spcBef>
                 <a:spcPts val="400"/>
               </a:spcBef>
@@ -11083,7 +11064,7 @@
             </a:r>
           </a:p>
           <a:p>
-            <a:pPr>
+            <a:pPr marL="190500" indent="-190500">
               <a:spcBef>
                 <a:spcPts val="400"/>
               </a:spcBef>
@@ -11102,7 +11083,7 @@
             </a:r>
           </a:p>
           <a:p>
-            <a:pPr>
+            <a:pPr marL="190500" indent="-190500">
               <a:spcBef>
                 <a:spcPts val="400"/>
               </a:spcBef>
@@ -11121,7 +11102,7 @@
             </a:r>
           </a:p>
           <a:p>
-            <a:pPr>
+            <a:pPr marL="190500" indent="-190500">
               <a:spcBef>
                 <a:spcPts val="400"/>
               </a:spcBef>
@@ -11140,7 +11121,7 @@
             </a:r>
           </a:p>
           <a:p>
-            <a:pPr>
+            <a:pPr marL="190500" indent="-190500">
               <a:spcBef>
                 <a:spcPts val="400"/>
               </a:spcBef>
@@ -11159,7 +11140,7 @@
             </a:r>
           </a:p>
           <a:p>
-            <a:pPr>
+            <a:pPr marL="190500" indent="-190500">
               <a:spcBef>
                 <a:spcPts val="400"/>
               </a:spcBef>
@@ -11178,7 +11159,7 @@
             </a:r>
           </a:p>
           <a:p>
-            <a:pPr>
+            <a:pPr marL="190500" indent="-190500">
               <a:spcBef>
                 <a:spcPts val="400"/>
               </a:spcBef>
@@ -11269,7 +11250,7 @@
                 <a:solidFill>
                   <a:srgbClr val="A0B4D2"/>
                 </a:solidFill>
-                <a:latin typeface="JetBrains Mono"/>
+                <a:latin typeface="Consolas"/>
               </a:rPr>
               <a:t>FKB Campus  ·  M05</a:t>
             </a:r>
@@ -11408,7 +11389,7 @@
                 <a:solidFill>
                   <a:srgbClr val="78808C"/>
                 </a:solidFill>
-                <a:latin typeface="JetBrains Mono"/>
+                <a:latin typeface="Consolas"/>
               </a:rPr>
               <a:t>M05  ·  SCHAUBILD</a:t>
             </a:r>
@@ -11443,7 +11424,7 @@
                 <a:solidFill>
                   <a:srgbClr val="1F2C56"/>
                 </a:solidFill>
-                <a:latin typeface="Source Serif 4"/>
+                <a:latin typeface="Arial"/>
               </a:rPr>
               <a:t>Five-Forces-Modell nach Porter</a:t>
             </a:r>
@@ -11588,7 +11569,7 @@
                 <a:solidFill>
                   <a:srgbClr val="A0B4D2"/>
                 </a:solidFill>
-                <a:latin typeface="JetBrains Mono"/>
+                <a:latin typeface="Consolas"/>
               </a:rPr>
               <a:t>FKB Campus  ·  M05</a:t>
             </a:r>
@@ -11623,7 +11604,7 @@
                 <a:solidFill>
                   <a:srgbClr val="A0B4D2"/>
                 </a:solidFill>
-                <a:latin typeface="JetBrains Mono"/>
+                <a:latin typeface="Consolas"/>
               </a:rPr>
               <a:t>Schaubild</a:t>
             </a:r>
@@ -11762,7 +11743,7 @@
                 <a:solidFill>
                   <a:srgbClr val="78808C"/>
                 </a:solidFill>
-                <a:latin typeface="JetBrains Mono"/>
+                <a:latin typeface="Consolas"/>
               </a:rPr>
               <a:t>M05  ·  SCHAUBILD</a:t>
             </a:r>
@@ -11797,7 +11778,7 @@
                 <a:solidFill>
                   <a:srgbClr val="1F2C56"/>
                 </a:solidFill>
-                <a:latin typeface="Source Serif 4"/>
+                <a:latin typeface="Arial"/>
               </a:rPr>
               <a:t>Branchenlebenszyklus</a:t>
             </a:r>
@@ -11942,7 +11923,7 @@
                 <a:solidFill>
                   <a:srgbClr val="A0B4D2"/>
                 </a:solidFill>
-                <a:latin typeface="JetBrains Mono"/>
+                <a:latin typeface="Consolas"/>
               </a:rPr>
               <a:t>FKB Campus  ·  M05</a:t>
             </a:r>
@@ -11977,7 +11958,7 @@
                 <a:solidFill>
                   <a:srgbClr val="A0B4D2"/>
                 </a:solidFill>
-                <a:latin typeface="JetBrains Mono"/>
+                <a:latin typeface="Consolas"/>
               </a:rPr>
               <a:t>Schaubild</a:t>
             </a:r>
@@ -12116,7 +12097,7 @@
                 <a:solidFill>
                   <a:srgbClr val="78808C"/>
                 </a:solidFill>
-                <a:latin typeface="JetBrains Mono"/>
+                <a:latin typeface="Consolas"/>
               </a:rPr>
               <a:t>M05  ·  INHALT</a:t>
             </a:r>
@@ -12237,7 +12218,7 @@
                 <a:solidFill>
                   <a:srgbClr val="1F2C56"/>
                 </a:solidFill>
-                <a:latin typeface="Source Serif 4"/>
+                <a:latin typeface="Arial"/>
               </a:rPr>
               <a:t>Theorie-Input: Branchenspezifische Risikoklassen im KMU-Segment</a:t>
             </a:r>
@@ -12253,7 +12234,7 @@
         <p:spPr>
           <a:xfrm>
             <a:off x="685800" y="1417320"/>
-            <a:ext cx="10817352" cy="5029200"/>
+            <a:ext cx="10817352" cy="4892040"/>
           </a:xfrm>
           <a:prstGeom prst="rect">
             <a:avLst/>
@@ -12279,13 +12260,13 @@
                 <a:solidFill>
                   <a:srgbClr val="78808C"/>
                 </a:solidFill>
-                <a:latin typeface="JetBrains Mono"/>
+                <a:latin typeface="Consolas"/>
               </a:rPr>
               <a:t>4.2.1 BAUGEWERBE UND BAUTRÄGER</a:t>
             </a:r>
           </a:p>
           <a:p>
-            <a:pPr>
+            <a:pPr marL="190500" indent="-190500">
               <a:spcBef>
                 <a:spcPts val="400"/>
               </a:spcBef>
@@ -12304,7 +12285,7 @@
             </a:r>
           </a:p>
           <a:p>
-            <a:pPr>
+            <a:pPr marL="190500" indent="-190500">
               <a:spcBef>
                 <a:spcPts val="400"/>
               </a:spcBef>
@@ -12323,7 +12304,7 @@
             </a:r>
           </a:p>
           <a:p>
-            <a:pPr>
+            <a:pPr marL="190500" indent="-190500">
               <a:spcBef>
                 <a:spcPts val="400"/>
               </a:spcBef>
@@ -12342,7 +12323,7 @@
             </a:r>
           </a:p>
           <a:p>
-            <a:pPr>
+            <a:pPr marL="190500" indent="-190500">
               <a:spcBef>
                 <a:spcPts val="400"/>
               </a:spcBef>
@@ -12361,7 +12342,7 @@
             </a:r>
           </a:p>
           <a:p>
-            <a:pPr>
+            <a:pPr marL="190500" indent="-190500">
               <a:spcBef>
                 <a:spcPts val="400"/>
               </a:spcBef>
@@ -12380,7 +12361,7 @@
             </a:r>
           </a:p>
           <a:p>
-            <a:pPr>
+            <a:pPr marL="190500" indent="-190500">
               <a:spcBef>
                 <a:spcPts val="400"/>
               </a:spcBef>
@@ -12399,7 +12380,7 @@
             </a:r>
           </a:p>
           <a:p>
-            <a:pPr>
+            <a:pPr marL="190500" indent="-190500">
               <a:spcBef>
                 <a:spcPts val="400"/>
               </a:spcBef>
@@ -12418,7 +12399,7 @@
             </a:r>
           </a:p>
           <a:p>
-            <a:pPr>
+            <a:pPr marL="190500" indent="-190500">
               <a:spcBef>
                 <a:spcPts val="400"/>
               </a:spcBef>
@@ -12437,7 +12418,7 @@
             </a:r>
           </a:p>
           <a:p>
-            <a:pPr>
+            <a:pPr marL="190500" indent="-190500">
               <a:spcBef>
                 <a:spcPts val="400"/>
               </a:spcBef>
@@ -12456,7 +12437,7 @@
             </a:r>
           </a:p>
           <a:p>
-            <a:pPr>
+            <a:pPr marL="190500" indent="-190500">
               <a:spcBef>
                 <a:spcPts val="400"/>
               </a:spcBef>
@@ -12475,7 +12456,7 @@
             </a:r>
           </a:p>
           <a:p>
-            <a:pPr>
+            <a:pPr marL="190500" indent="-190500">
               <a:spcBef>
                 <a:spcPts val="400"/>
               </a:spcBef>
@@ -12566,7 +12547,7 @@
                 <a:solidFill>
                   <a:srgbClr val="A0B4D2"/>
                 </a:solidFill>
-                <a:latin typeface="JetBrains Mono"/>
+                <a:latin typeface="Consolas"/>
               </a:rPr>
               <a:t>FKB Campus  ·  M05</a:t>
             </a:r>
@@ -12705,7 +12686,7 @@
                 <a:solidFill>
                   <a:srgbClr val="78808C"/>
                 </a:solidFill>
-                <a:latin typeface="JetBrains Mono"/>
+                <a:latin typeface="Consolas"/>
               </a:rPr>
               <a:t>M05  ·  INHALT</a:t>
             </a:r>
@@ -12826,7 +12807,7 @@
                 <a:solidFill>
                   <a:srgbClr val="1F2C56"/>
                 </a:solidFill>
-                <a:latin typeface="Source Serif 4"/>
+                <a:latin typeface="Arial"/>
               </a:rPr>
               <a:t>Handlungskarte: Vom Branchensignal zur Kreditmaßnahme</a:t>
             </a:r>
@@ -12842,7 +12823,7 @@
         <p:spPr>
           <a:xfrm>
             <a:off x="685800" y="1417320"/>
-            <a:ext cx="10817352" cy="5029200"/>
+            <a:ext cx="10817352" cy="4892040"/>
           </a:xfrm>
           <a:prstGeom prst="rect">
             <a:avLst/>
@@ -12850,12 +12831,12 @@
           <a:noFill/>
         </p:spPr>
         <p:txBody>
-          <a:bodyPr wrap="square">
+          <a:bodyPr wrap="square" anchor="ctr">
             <a:spAutoFit/>
           </a:bodyPr>
           <a:lstStyle/>
           <a:p>
-            <a:pPr>
+            <a:pPr marL="190500" indent="-190500">
               <a:spcBef>
                 <a:spcPts val="400"/>
               </a:spcBef>
@@ -12946,7 +12927,7 @@
                 <a:solidFill>
                   <a:srgbClr val="A0B4D2"/>
                 </a:solidFill>
-                <a:latin typeface="JetBrains Mono"/>
+                <a:latin typeface="Consolas"/>
               </a:rPr>
               <a:t>FKB Campus  ·  M05</a:t>
             </a:r>
